--- a/docs/ShapeMix/ShapeMix_High_School_Research_Deck.pptx
+++ b/docs/ShapeMix/ShapeMix_High_School_Research_Deck.pptx
@@ -4,24 +4,27 @@
   <p:sldMasterIdLst>
     <p:sldMasterId id="2147483648" r:id="rId1"/>
   </p:sldMasterIdLst>
+  <p:notesMasterIdLst>
+    <p:notesMasterId r:id="rId17"/>
+  </p:notesMasterIdLst>
   <p:sldIdLst>
-    <p:sldId id="256" r:id="rId7"/>
-    <p:sldId id="257" r:id="rId9"/>
-    <p:sldId id="258" r:id="rId10"/>
-    <p:sldId id="259" r:id="rId11"/>
-    <p:sldId id="260" r:id="rId12"/>
-    <p:sldId id="261" r:id="rId13"/>
-    <p:sldId id="262" r:id="rId14"/>
-    <p:sldId id="263" r:id="rId15"/>
-    <p:sldId id="264" r:id="rId16"/>
-    <p:sldId id="265" r:id="rId17"/>
-    <p:sldId id="266" r:id="rId18"/>
-    <p:sldId id="267" r:id="rId19"/>
-    <p:sldId id="268" r:id="rId20"/>
-    <p:sldId id="269" r:id="rId21"/>
-    <p:sldId id="270" r:id="rId22"/>
+    <p:sldId id="256" r:id="rId2"/>
+    <p:sldId id="257" r:id="rId3"/>
+    <p:sldId id="258" r:id="rId4"/>
+    <p:sldId id="259" r:id="rId5"/>
+    <p:sldId id="260" r:id="rId6"/>
+    <p:sldId id="261" r:id="rId7"/>
+    <p:sldId id="262" r:id="rId8"/>
+    <p:sldId id="263" r:id="rId9"/>
+    <p:sldId id="264" r:id="rId10"/>
+    <p:sldId id="265" r:id="rId11"/>
+    <p:sldId id="266" r:id="rId12"/>
+    <p:sldId id="267" r:id="rId13"/>
+    <p:sldId id="268" r:id="rId14"/>
+    <p:sldId id="269" r:id="rId15"/>
+    <p:sldId id="270" r:id="rId16"/>
   </p:sldIdLst>
-  <p:sldSz cx="12191695" cy="6858000" type="screen4x3"/>
+  <p:sldSz cx="12192000" cy="6858000"/>
   <p:notesSz cx="6858000" cy="9144000"/>
   <p:defaultTextStyle>
     <a:defPPr>
@@ -118,11 +121,27 @@
       </a:defRPr>
     </a:lvl9pPr>
   </p:defaultTextStyle>
+  <p:extLst>
+    <p:ext uri="{EFAFB233-063F-42B5-8137-9DF3F51BA10A}">
+      <p15:sldGuideLst xmlns:p15="http://schemas.microsoft.com/office/powerpoint/2012/main">
+        <p15:guide id="1" orient="horz" pos="2160">
+          <p15:clr>
+            <a:srgbClr val="A4A3A4"/>
+          </p15:clr>
+        </p15:guide>
+        <p15:guide id="2" pos="2880">
+          <p15:clr>
+            <a:srgbClr val="A4A3A4"/>
+          </p15:clr>
+        </p15:guide>
+      </p15:sldGuideLst>
+    </p:ext>
+  </p:extLst>
 </p:presentation>
 </file>
 
 <file path=ppt/notesMasters/notesMaster1.xml><?xml version="1.0" encoding="utf-8"?>
-<p:notesMaster xmlns:a="http://schemas.openxmlformats.org/drawingml/2006/main" xmlns:p="http://schemas.openxmlformats.org/presentationml/2006/main" xmlns:r="http://schemas.openxmlformats.org/officeDocument/2006/relationships">
+<p:notesMaster xmlns:a="http://schemas.openxmlformats.org/drawingml/2006/main" xmlns:r="http://schemas.openxmlformats.org/officeDocument/2006/relationships" xmlns:p="http://schemas.openxmlformats.org/presentationml/2006/main">
   <p:cSld>
     <p:bg>
       <p:bgRef idx="1001">
@@ -143,241 +162,16 @@
           <a:chExt cx="0" cy="0"/>
         </a:xfrm>
       </p:grpSpPr>
-      <p:sp>
-        <p:nvSpPr>
-          <p:cNvPr id="2" name="Header Placeholder 1"/>
-          <p:cNvSpPr>
-            <a:spLocks noGrp="1"/>
-          </p:cNvSpPr>
-          <p:nvPr>
-            <p:ph type="hdr" sz="quarter"/>
-          </p:nvPr>
-        </p:nvSpPr>
-        <p:spPr>
-          <a:xfrm>
-            <a:off x="0" y="0"/>
-            <a:ext cx="2971800" cy="457200"/>
-          </a:xfrm>
-          <a:prstGeom prst="rect">
-            <a:avLst/>
-          </a:prstGeom>
-        </p:spPr>
-        <p:txBody>
-          <a:bodyPr vert="horz" lIns="91440" tIns="45720" rIns="91440" bIns="45720" rtlCol="0"/>
-          <a:lstStyle>
-            <a:lvl1pPr algn="l">
-              <a:defRPr sz="1200"/>
-            </a:lvl1pPr>
-          </a:lstStyle>
-          <a:p>
-            <a:endParaRPr lang="en-US"/>
-          </a:p>
-        </p:txBody>
-      </p:sp>
-      <p:sp>
-        <p:nvSpPr>
-          <p:cNvPr id="3" name="Date Placeholder 2"/>
-          <p:cNvSpPr>
-            <a:spLocks noGrp="1"/>
-          </p:cNvSpPr>
-          <p:nvPr>
-            <p:ph type="dt" idx="1"/>
-          </p:nvPr>
-        </p:nvSpPr>
-        <p:spPr>
-          <a:xfrm>
-            <a:off x="3884613" y="0"/>
-            <a:ext cx="2971800" cy="457200"/>
-          </a:xfrm>
-          <a:prstGeom prst="rect">
-            <a:avLst/>
-          </a:prstGeom>
-        </p:spPr>
-        <p:txBody>
-          <a:bodyPr vert="horz" lIns="91440" tIns="45720" rIns="91440" bIns="45720" rtlCol="0"/>
-          <a:lstStyle>
-            <a:lvl1pPr algn="r">
-              <a:defRPr sz="1200"/>
-            </a:lvl1pPr>
-          </a:lstStyle>
-          <a:p>
-            <a:fld id="{0F89C1C7-3DCD-1040-A9CF-14679D8B5DDD}" type="datetimeFigureOut">
-              <a:rPr lang="en-US" smtClean="0"/>
-              <a:t>10/17/16</a:t>
-            </a:fld>
-            <a:endParaRPr lang="en-US"/>
-          </a:p>
-        </p:txBody>
-      </p:sp>
-      <p:sp>
-        <p:nvSpPr>
-          <p:cNvPr id="4" name="Slide Image Placeholder 3"/>
-          <p:cNvSpPr>
-            <a:spLocks noGrp="1" noRot="1" noChangeAspect="1"/>
-          </p:cNvSpPr>
-          <p:nvPr>
-            <p:ph type="sldImg" idx="2"/>
-          </p:nvPr>
-        </p:nvSpPr>
-        <p:spPr>
-          <a:xfrm>
-            <a:off x="1143000" y="685800"/>
-            <a:ext cx="4572000" cy="3429000"/>
-          </a:xfrm>
-          <a:prstGeom prst="rect">
-            <a:avLst/>
-          </a:prstGeom>
-          <a:noFill/>
-          <a:ln w="12700">
-            <a:solidFill>
-              <a:prstClr val="black"/>
-            </a:solidFill>
-          </a:ln>
-        </p:spPr>
-        <p:txBody>
-          <a:bodyPr vert="horz" lIns="91440" tIns="45720" rIns="91440" bIns="45720" rtlCol="0" anchor="ctr"/>
-          <a:lstStyle/>
-          <a:p>
-            <a:endParaRPr lang="en-US"/>
-          </a:p>
-        </p:txBody>
-      </p:sp>
-      <p:sp>
-        <p:nvSpPr>
-          <p:cNvPr id="5" name="Notes Placeholder 4"/>
-          <p:cNvSpPr>
-            <a:spLocks noGrp="1"/>
-          </p:cNvSpPr>
-          <p:nvPr>
-            <p:ph type="body" sz="quarter" idx="3"/>
-          </p:nvPr>
-        </p:nvSpPr>
-        <p:spPr>
-          <a:xfrm>
-            <a:off x="685800" y="4343400"/>
-            <a:ext cx="5486400" cy="4114800"/>
-          </a:xfrm>
-          <a:prstGeom prst="rect">
-            <a:avLst/>
-          </a:prstGeom>
-        </p:spPr>
-        <p:txBody>
-          <a:bodyPr vert="horz" lIns="91440" tIns="45720" rIns="91440" bIns="45720" rtlCol="0"/>
-          <a:lstStyle/>
-          <a:p>
-            <a:pPr lvl="0"/>
-            <a:r>
-              <a:rPr lang="en-US" smtClean="0"/>
-              <a:t>Click to edit Master text styles</a:t>
-            </a:r>
-          </a:p>
-          <a:p>
-            <a:pPr lvl="1"/>
-            <a:r>
-              <a:rPr lang="en-US" smtClean="0"/>
-              <a:t>Second level</a:t>
-            </a:r>
-          </a:p>
-          <a:p>
-            <a:pPr lvl="2"/>
-            <a:r>
-              <a:rPr lang="en-US" smtClean="0"/>
-              <a:t>Third level</a:t>
-            </a:r>
-          </a:p>
-          <a:p>
-            <a:pPr lvl="3"/>
-            <a:r>
-              <a:rPr lang="en-US" smtClean="0"/>
-              <a:t>Fourth level</a:t>
-            </a:r>
-          </a:p>
-          <a:p>
-            <a:pPr lvl="4"/>
-            <a:r>
-              <a:rPr lang="en-US" smtClean="0"/>
-              <a:t>Fifth level</a:t>
-            </a:r>
-            <a:endParaRPr lang="en-US"/>
-          </a:p>
-        </p:txBody>
-      </p:sp>
-      <p:sp>
-        <p:nvSpPr>
-          <p:cNvPr id="6" name="Footer Placeholder 5"/>
-          <p:cNvSpPr>
-            <a:spLocks noGrp="1"/>
-          </p:cNvSpPr>
-          <p:nvPr>
-            <p:ph type="ftr" sz="quarter" idx="4"/>
-          </p:nvPr>
-        </p:nvSpPr>
-        <p:spPr>
-          <a:xfrm>
-            <a:off x="0" y="8685213"/>
-            <a:ext cx="2971800" cy="457200"/>
-          </a:xfrm>
-          <a:prstGeom prst="rect">
-            <a:avLst/>
-          </a:prstGeom>
-        </p:spPr>
-        <p:txBody>
-          <a:bodyPr vert="horz" lIns="91440" tIns="45720" rIns="91440" bIns="45720" rtlCol="0" anchor="b"/>
-          <a:lstStyle>
-            <a:lvl1pPr algn="l">
-              <a:defRPr sz="1200"/>
-            </a:lvl1pPr>
-          </a:lstStyle>
-          <a:p>
-            <a:endParaRPr lang="en-US"/>
-          </a:p>
-        </p:txBody>
-      </p:sp>
-      <p:sp>
-        <p:nvSpPr>
-          <p:cNvPr id="7" name="Slide Number Placeholder 6"/>
-          <p:cNvSpPr>
-            <a:spLocks noGrp="1"/>
-          </p:cNvSpPr>
-          <p:nvPr>
-            <p:ph type="sldNum" sz="quarter" idx="5"/>
-          </p:nvPr>
-        </p:nvSpPr>
-        <p:spPr>
-          <a:xfrm>
-            <a:off x="3884613" y="8685213"/>
-            <a:ext cx="2971800" cy="457200"/>
-          </a:xfrm>
-          <a:prstGeom prst="rect">
-            <a:avLst/>
-          </a:prstGeom>
-        </p:spPr>
-        <p:txBody>
-          <a:bodyPr vert="horz" lIns="91440" tIns="45720" rIns="91440" bIns="45720" rtlCol="0" anchor="b"/>
-          <a:lstStyle>
-            <a:lvl1pPr algn="r">
-              <a:defRPr sz="1200"/>
-            </a:lvl1pPr>
-          </a:lstStyle>
-          <a:p>
-            <a:fld id="{BB5E49A5-4136-284D-997B-48E1D791AD67}" type="slidenum">
-              <a:rPr lang="en-US" smtClean="0"/>
-              <a:t>‹#›</a:t>
-            </a:fld>
-            <a:endParaRPr lang="en-US"/>
-          </a:p>
-        </p:txBody>
-      </p:sp>
     </p:spTree>
     <p:extLst>
       <p:ext uri="{BB962C8B-B14F-4D97-AF65-F5344CB8AC3E}">
-        <p14:creationId xmlns:p14="http://schemas.microsoft.com/office/powerpoint/2010/main" val="2623252185"/>
+        <p14:creationId xmlns:p14="http://schemas.microsoft.com/office/powerpoint/2010/main" val="3809112684"/>
       </p:ext>
     </p:extLst>
   </p:cSld>
   <p:clrMap bg1="lt1" tx1="dk1" bg2="lt2" tx2="dk2" accent1="accent1" accent2="accent2" accent3="accent3" accent4="accent4" accent5="accent5" accent6="accent6" hlink="hlink" folHlink="folHlink"/>
   <p:notesStyle>
-    <a:lvl1pPr marL="0" algn="l" defTabSz="457200" rtl="0" eaLnBrk="1" latinLnBrk="0" hangingPunct="1">
+    <a:lvl1pPr marL="0" algn="l" defTabSz="914400" rtl="0" eaLnBrk="1" latinLnBrk="0" hangingPunct="1">
       <a:defRPr sz="1200" kern="1200">
         <a:solidFill>
           <a:schemeClr val="tx1"/>
@@ -387,7 +181,7 @@
         <a:cs typeface="+mn-cs"/>
       </a:defRPr>
     </a:lvl1pPr>
-    <a:lvl2pPr marL="457200" algn="l" defTabSz="457200" rtl="0" eaLnBrk="1" latinLnBrk="0" hangingPunct="1">
+    <a:lvl2pPr marL="457200" algn="l" defTabSz="914400" rtl="0" eaLnBrk="1" latinLnBrk="0" hangingPunct="1">
       <a:defRPr sz="1200" kern="1200">
         <a:solidFill>
           <a:schemeClr val="tx1"/>
@@ -397,7 +191,7 @@
         <a:cs typeface="+mn-cs"/>
       </a:defRPr>
     </a:lvl2pPr>
-    <a:lvl3pPr marL="914400" algn="l" defTabSz="457200" rtl="0" eaLnBrk="1" latinLnBrk="0" hangingPunct="1">
+    <a:lvl3pPr marL="914400" algn="l" defTabSz="914400" rtl="0" eaLnBrk="1" latinLnBrk="0" hangingPunct="1">
       <a:defRPr sz="1200" kern="1200">
         <a:solidFill>
           <a:schemeClr val="tx1"/>
@@ -407,7 +201,7 @@
         <a:cs typeface="+mn-cs"/>
       </a:defRPr>
     </a:lvl3pPr>
-    <a:lvl4pPr marL="1371600" algn="l" defTabSz="457200" rtl="0" eaLnBrk="1" latinLnBrk="0" hangingPunct="1">
+    <a:lvl4pPr marL="1371600" algn="l" defTabSz="914400" rtl="0" eaLnBrk="1" latinLnBrk="0" hangingPunct="1">
       <a:defRPr sz="1200" kern="1200">
         <a:solidFill>
           <a:schemeClr val="tx1"/>
@@ -417,7 +211,7 @@
         <a:cs typeface="+mn-cs"/>
       </a:defRPr>
     </a:lvl4pPr>
-    <a:lvl5pPr marL="1828800" algn="l" defTabSz="457200" rtl="0" eaLnBrk="1" latinLnBrk="0" hangingPunct="1">
+    <a:lvl5pPr marL="1828800" algn="l" defTabSz="914400" rtl="0" eaLnBrk="1" latinLnBrk="0" hangingPunct="1">
       <a:defRPr sz="1200" kern="1200">
         <a:solidFill>
           <a:schemeClr val="tx1"/>
@@ -427,7 +221,7 @@
         <a:cs typeface="+mn-cs"/>
       </a:defRPr>
     </a:lvl5pPr>
-    <a:lvl6pPr marL="2286000" algn="l" defTabSz="457200" rtl="0" eaLnBrk="1" latinLnBrk="0" hangingPunct="1">
+    <a:lvl6pPr marL="2286000" algn="l" defTabSz="914400" rtl="0" eaLnBrk="1" latinLnBrk="0" hangingPunct="1">
       <a:defRPr sz="1200" kern="1200">
         <a:solidFill>
           <a:schemeClr val="tx1"/>
@@ -437,7 +231,7 @@
         <a:cs typeface="+mn-cs"/>
       </a:defRPr>
     </a:lvl6pPr>
-    <a:lvl7pPr marL="2743200" algn="l" defTabSz="457200" rtl="0" eaLnBrk="1" latinLnBrk="0" hangingPunct="1">
+    <a:lvl7pPr marL="2743200" algn="l" defTabSz="914400" rtl="0" eaLnBrk="1" latinLnBrk="0" hangingPunct="1">
       <a:defRPr sz="1200" kern="1200">
         <a:solidFill>
           <a:schemeClr val="tx1"/>
@@ -447,7 +241,7 @@
         <a:cs typeface="+mn-cs"/>
       </a:defRPr>
     </a:lvl7pPr>
-    <a:lvl8pPr marL="3200400" algn="l" defTabSz="457200" rtl="0" eaLnBrk="1" latinLnBrk="0" hangingPunct="1">
+    <a:lvl8pPr marL="3200400" algn="l" defTabSz="914400" rtl="0" eaLnBrk="1" latinLnBrk="0" hangingPunct="1">
       <a:defRPr sz="1200" kern="1200">
         <a:solidFill>
           <a:schemeClr val="tx1"/>
@@ -457,7 +251,7 @@
         <a:cs typeface="+mn-cs"/>
       </a:defRPr>
     </a:lvl8pPr>
-    <a:lvl9pPr marL="3657600" algn="l" defTabSz="457200" rtl="0" eaLnBrk="1" latinLnBrk="0" hangingPunct="1">
+    <a:lvl9pPr marL="3657600" algn="l" defTabSz="914400" rtl="0" eaLnBrk="1" latinLnBrk="0" hangingPunct="1">
       <a:defRPr sz="1200" kern="1200">
         <a:solidFill>
           <a:schemeClr val="tx1"/>
@@ -472,7 +266,7 @@
 </file>
 
 <file path=ppt/notesSlides/notesSlide1.xml><?xml version="1.0" encoding="utf-8"?>
-<p:notes xmlns:a="http://schemas.openxmlformats.org/drawingml/2006/main" xmlns:p="http://schemas.openxmlformats.org/presentationml/2006/main" xmlns:r="http://schemas.openxmlformats.org/officeDocument/2006/relationships">
+<p:notes xmlns:a="http://schemas.openxmlformats.org/drawingml/2006/main" xmlns:r="http://schemas.openxmlformats.org/officeDocument/2006/relationships" xmlns:p="http://schemas.openxmlformats.org/presentationml/2006/main">
   <p:cSld>
     <p:spTree>
       <p:nvGrpSpPr>
@@ -492,7 +286,7 @@
         <p:nvSpPr>
           <p:cNvPr id="2" name="Slide Image Placeholder 1"/>
           <p:cNvSpPr>
-            <a:spLocks noGrp="1"/>
+            <a:spLocks noGrp="1" noRot="1" noChangeAspect="1"/>
           </p:cNvSpPr>
           <p:nvPr>
             <p:ph type="sldImg" idx="2"/>
@@ -507,7 +301,7 @@
             <a:spLocks noGrp="1"/>
           </p:cNvSpPr>
           <p:nvPr>
-            <p:ph type="body" idx="3" sz="quarter"/>
+            <p:ph type="body" sz="quarter" idx="3"/>
           </p:nvPr>
         </p:nvSpPr>
         <p:spPr/>
@@ -528,7 +322,7 @@
             <a:spLocks noGrp="1"/>
           </p:cNvSpPr>
           <p:nvPr>
-            <p:ph type="sldNum" idx="5" sz="quarter"/>
+            <p:ph type="sldNum" sz="quarter" idx="5"/>
           </p:nvPr>
         </p:nvSpPr>
         <p:spPr/>
@@ -542,7 +336,7 @@
 </file>
 
 <file path=ppt/notesSlides/notesSlide10.xml><?xml version="1.0" encoding="utf-8"?>
-<p:notes xmlns:a="http://schemas.openxmlformats.org/drawingml/2006/main" xmlns:p="http://schemas.openxmlformats.org/presentationml/2006/main" xmlns:r="http://schemas.openxmlformats.org/officeDocument/2006/relationships">
+<p:notes xmlns:a="http://schemas.openxmlformats.org/drawingml/2006/main" xmlns:r="http://schemas.openxmlformats.org/officeDocument/2006/relationships" xmlns:p="http://schemas.openxmlformats.org/presentationml/2006/main">
   <p:cSld>
     <p:spTree>
       <p:nvGrpSpPr>
@@ -562,7 +356,7 @@
         <p:nvSpPr>
           <p:cNvPr id="2" name="Slide Image Placeholder 1"/>
           <p:cNvSpPr>
-            <a:spLocks noGrp="1"/>
+            <a:spLocks noGrp="1" noRot="1" noChangeAspect="1"/>
           </p:cNvSpPr>
           <p:nvPr>
             <p:ph type="sldImg" idx="2"/>
@@ -577,7 +371,7 @@
             <a:spLocks noGrp="1"/>
           </p:cNvSpPr>
           <p:nvPr>
-            <p:ph type="body" idx="3" sz="quarter"/>
+            <p:ph type="body" sz="quarter" idx="3"/>
           </p:nvPr>
         </p:nvSpPr>
         <p:spPr/>
@@ -598,7 +392,7 @@
             <a:spLocks noGrp="1"/>
           </p:cNvSpPr>
           <p:nvPr>
-            <p:ph type="sldNum" idx="5" sz="quarter"/>
+            <p:ph type="sldNum" sz="quarter" idx="5"/>
           </p:nvPr>
         </p:nvSpPr>
         <p:spPr/>
@@ -612,7 +406,7 @@
 </file>
 
 <file path=ppt/notesSlides/notesSlide11.xml><?xml version="1.0" encoding="utf-8"?>
-<p:notes xmlns:a="http://schemas.openxmlformats.org/drawingml/2006/main" xmlns:p="http://schemas.openxmlformats.org/presentationml/2006/main" xmlns:r="http://schemas.openxmlformats.org/officeDocument/2006/relationships">
+<p:notes xmlns:a="http://schemas.openxmlformats.org/drawingml/2006/main" xmlns:r="http://schemas.openxmlformats.org/officeDocument/2006/relationships" xmlns:p="http://schemas.openxmlformats.org/presentationml/2006/main">
   <p:cSld>
     <p:spTree>
       <p:nvGrpSpPr>
@@ -632,7 +426,7 @@
         <p:nvSpPr>
           <p:cNvPr id="2" name="Slide Image Placeholder 1"/>
           <p:cNvSpPr>
-            <a:spLocks noGrp="1"/>
+            <a:spLocks noGrp="1" noRot="1" noChangeAspect="1"/>
           </p:cNvSpPr>
           <p:nvPr>
             <p:ph type="sldImg" idx="2"/>
@@ -647,7 +441,7 @@
             <a:spLocks noGrp="1"/>
           </p:cNvSpPr>
           <p:nvPr>
-            <p:ph type="body" idx="3" sz="quarter"/>
+            <p:ph type="body" sz="quarter" idx="3"/>
           </p:nvPr>
         </p:nvSpPr>
         <p:spPr/>
@@ -668,7 +462,7 @@
             <a:spLocks noGrp="1"/>
           </p:cNvSpPr>
           <p:nvPr>
-            <p:ph type="sldNum" idx="5" sz="quarter"/>
+            <p:ph type="sldNum" sz="quarter" idx="5"/>
           </p:nvPr>
         </p:nvSpPr>
         <p:spPr/>
@@ -682,7 +476,7 @@
 </file>
 
 <file path=ppt/notesSlides/notesSlide12.xml><?xml version="1.0" encoding="utf-8"?>
-<p:notes xmlns:a="http://schemas.openxmlformats.org/drawingml/2006/main" xmlns:p="http://schemas.openxmlformats.org/presentationml/2006/main" xmlns:r="http://schemas.openxmlformats.org/officeDocument/2006/relationships">
+<p:notes xmlns:a="http://schemas.openxmlformats.org/drawingml/2006/main" xmlns:r="http://schemas.openxmlformats.org/officeDocument/2006/relationships" xmlns:p="http://schemas.openxmlformats.org/presentationml/2006/main">
   <p:cSld>
     <p:spTree>
       <p:nvGrpSpPr>
@@ -702,7 +496,7 @@
         <p:nvSpPr>
           <p:cNvPr id="2" name="Slide Image Placeholder 1"/>
           <p:cNvSpPr>
-            <a:spLocks noGrp="1"/>
+            <a:spLocks noGrp="1" noRot="1" noChangeAspect="1"/>
           </p:cNvSpPr>
           <p:nvPr>
             <p:ph type="sldImg" idx="2"/>
@@ -717,7 +511,7 @@
             <a:spLocks noGrp="1"/>
           </p:cNvSpPr>
           <p:nvPr>
-            <p:ph type="body" idx="3" sz="quarter"/>
+            <p:ph type="body" sz="quarter" idx="3"/>
           </p:nvPr>
         </p:nvSpPr>
         <p:spPr/>
@@ -738,7 +532,7 @@
             <a:spLocks noGrp="1"/>
           </p:cNvSpPr>
           <p:nvPr>
-            <p:ph type="sldNum" idx="5" sz="quarter"/>
+            <p:ph type="sldNum" sz="quarter" idx="5"/>
           </p:nvPr>
         </p:nvSpPr>
         <p:spPr/>
@@ -752,7 +546,7 @@
 </file>
 
 <file path=ppt/notesSlides/notesSlide13.xml><?xml version="1.0" encoding="utf-8"?>
-<p:notes xmlns:a="http://schemas.openxmlformats.org/drawingml/2006/main" xmlns:p="http://schemas.openxmlformats.org/presentationml/2006/main" xmlns:r="http://schemas.openxmlformats.org/officeDocument/2006/relationships">
+<p:notes xmlns:a="http://schemas.openxmlformats.org/drawingml/2006/main" xmlns:r="http://schemas.openxmlformats.org/officeDocument/2006/relationships" xmlns:p="http://schemas.openxmlformats.org/presentationml/2006/main">
   <p:cSld>
     <p:spTree>
       <p:nvGrpSpPr>
@@ -772,7 +566,7 @@
         <p:nvSpPr>
           <p:cNvPr id="2" name="Slide Image Placeholder 1"/>
           <p:cNvSpPr>
-            <a:spLocks noGrp="1"/>
+            <a:spLocks noGrp="1" noRot="1" noChangeAspect="1"/>
           </p:cNvSpPr>
           <p:nvPr>
             <p:ph type="sldImg" idx="2"/>
@@ -787,7 +581,7 @@
             <a:spLocks noGrp="1"/>
           </p:cNvSpPr>
           <p:nvPr>
-            <p:ph type="body" idx="3" sz="quarter"/>
+            <p:ph type="body" sz="quarter" idx="3"/>
           </p:nvPr>
         </p:nvSpPr>
         <p:spPr/>
@@ -808,7 +602,7 @@
             <a:spLocks noGrp="1"/>
           </p:cNvSpPr>
           <p:nvPr>
-            <p:ph type="sldNum" idx="5" sz="quarter"/>
+            <p:ph type="sldNum" sz="quarter" idx="5"/>
           </p:nvPr>
         </p:nvSpPr>
         <p:spPr/>
@@ -822,7 +616,7 @@
 </file>
 
 <file path=ppt/notesSlides/notesSlide14.xml><?xml version="1.0" encoding="utf-8"?>
-<p:notes xmlns:a="http://schemas.openxmlformats.org/drawingml/2006/main" xmlns:p="http://schemas.openxmlformats.org/presentationml/2006/main" xmlns:r="http://schemas.openxmlformats.org/officeDocument/2006/relationships">
+<p:notes xmlns:a="http://schemas.openxmlformats.org/drawingml/2006/main" xmlns:r="http://schemas.openxmlformats.org/officeDocument/2006/relationships" xmlns:p="http://schemas.openxmlformats.org/presentationml/2006/main">
   <p:cSld>
     <p:spTree>
       <p:nvGrpSpPr>
@@ -842,7 +636,7 @@
         <p:nvSpPr>
           <p:cNvPr id="2" name="Slide Image Placeholder 1"/>
           <p:cNvSpPr>
-            <a:spLocks noGrp="1"/>
+            <a:spLocks noGrp="1" noRot="1" noChangeAspect="1"/>
           </p:cNvSpPr>
           <p:nvPr>
             <p:ph type="sldImg" idx="2"/>
@@ -857,7 +651,7 @@
             <a:spLocks noGrp="1"/>
           </p:cNvSpPr>
           <p:nvPr>
-            <p:ph type="body" idx="3" sz="quarter"/>
+            <p:ph type="body" sz="quarter" idx="3"/>
           </p:nvPr>
         </p:nvSpPr>
         <p:spPr/>
@@ -878,7 +672,7 @@
             <a:spLocks noGrp="1"/>
           </p:cNvSpPr>
           <p:nvPr>
-            <p:ph type="sldNum" idx="5" sz="quarter"/>
+            <p:ph type="sldNum" sz="quarter" idx="5"/>
           </p:nvPr>
         </p:nvSpPr>
         <p:spPr/>
@@ -892,7 +686,7 @@
 </file>
 
 <file path=ppt/notesSlides/notesSlide15.xml><?xml version="1.0" encoding="utf-8"?>
-<p:notes xmlns:a="http://schemas.openxmlformats.org/drawingml/2006/main" xmlns:p="http://schemas.openxmlformats.org/presentationml/2006/main" xmlns:r="http://schemas.openxmlformats.org/officeDocument/2006/relationships">
+<p:notes xmlns:a="http://schemas.openxmlformats.org/drawingml/2006/main" xmlns:r="http://schemas.openxmlformats.org/officeDocument/2006/relationships" xmlns:p="http://schemas.openxmlformats.org/presentationml/2006/main">
   <p:cSld>
     <p:spTree>
       <p:nvGrpSpPr>
@@ -912,7 +706,7 @@
         <p:nvSpPr>
           <p:cNvPr id="2" name="Slide Image Placeholder 1"/>
           <p:cNvSpPr>
-            <a:spLocks noGrp="1"/>
+            <a:spLocks noGrp="1" noRot="1" noChangeAspect="1"/>
           </p:cNvSpPr>
           <p:nvPr>
             <p:ph type="sldImg" idx="2"/>
@@ -927,7 +721,7 @@
             <a:spLocks noGrp="1"/>
           </p:cNvSpPr>
           <p:nvPr>
-            <p:ph type="body" idx="3" sz="quarter"/>
+            <p:ph type="body" sz="quarter" idx="3"/>
           </p:nvPr>
         </p:nvSpPr>
         <p:spPr/>
@@ -948,7 +742,7 @@
             <a:spLocks noGrp="1"/>
           </p:cNvSpPr>
           <p:nvPr>
-            <p:ph type="sldNum" idx="5" sz="quarter"/>
+            <p:ph type="sldNum" sz="quarter" idx="5"/>
           </p:nvPr>
         </p:nvSpPr>
         <p:spPr/>
@@ -962,7 +756,7 @@
 </file>
 
 <file path=ppt/notesSlides/notesSlide2.xml><?xml version="1.0" encoding="utf-8"?>
-<p:notes xmlns:a="http://schemas.openxmlformats.org/drawingml/2006/main" xmlns:p="http://schemas.openxmlformats.org/presentationml/2006/main" xmlns:r="http://schemas.openxmlformats.org/officeDocument/2006/relationships">
+<p:notes xmlns:a="http://schemas.openxmlformats.org/drawingml/2006/main" xmlns:r="http://schemas.openxmlformats.org/officeDocument/2006/relationships" xmlns:p="http://schemas.openxmlformats.org/presentationml/2006/main">
   <p:cSld>
     <p:spTree>
       <p:nvGrpSpPr>
@@ -982,7 +776,7 @@
         <p:nvSpPr>
           <p:cNvPr id="2" name="Slide Image Placeholder 1"/>
           <p:cNvSpPr>
-            <a:spLocks noGrp="1"/>
+            <a:spLocks noGrp="1" noRot="1" noChangeAspect="1"/>
           </p:cNvSpPr>
           <p:nvPr>
             <p:ph type="sldImg" idx="2"/>
@@ -997,7 +791,7 @@
             <a:spLocks noGrp="1"/>
           </p:cNvSpPr>
           <p:nvPr>
-            <p:ph type="body" idx="3" sz="quarter"/>
+            <p:ph type="body" sz="quarter" idx="3"/>
           </p:nvPr>
         </p:nvSpPr>
         <p:spPr/>
@@ -1018,7 +812,7 @@
             <a:spLocks noGrp="1"/>
           </p:cNvSpPr>
           <p:nvPr>
-            <p:ph type="sldNum" idx="5" sz="quarter"/>
+            <p:ph type="sldNum" sz="quarter" idx="5"/>
           </p:nvPr>
         </p:nvSpPr>
         <p:spPr/>
@@ -1032,7 +826,7 @@
 </file>
 
 <file path=ppt/notesSlides/notesSlide3.xml><?xml version="1.0" encoding="utf-8"?>
-<p:notes xmlns:a="http://schemas.openxmlformats.org/drawingml/2006/main" xmlns:p="http://schemas.openxmlformats.org/presentationml/2006/main" xmlns:r="http://schemas.openxmlformats.org/officeDocument/2006/relationships">
+<p:notes xmlns:a="http://schemas.openxmlformats.org/drawingml/2006/main" xmlns:r="http://schemas.openxmlformats.org/officeDocument/2006/relationships" xmlns:p="http://schemas.openxmlformats.org/presentationml/2006/main">
   <p:cSld>
     <p:spTree>
       <p:nvGrpSpPr>
@@ -1052,7 +846,7 @@
         <p:nvSpPr>
           <p:cNvPr id="2" name="Slide Image Placeholder 1"/>
           <p:cNvSpPr>
-            <a:spLocks noGrp="1"/>
+            <a:spLocks noGrp="1" noRot="1" noChangeAspect="1"/>
           </p:cNvSpPr>
           <p:nvPr>
             <p:ph type="sldImg" idx="2"/>
@@ -1067,7 +861,7 @@
             <a:spLocks noGrp="1"/>
           </p:cNvSpPr>
           <p:nvPr>
-            <p:ph type="body" idx="3" sz="quarter"/>
+            <p:ph type="body" sz="quarter" idx="3"/>
           </p:nvPr>
         </p:nvSpPr>
         <p:spPr/>
@@ -1088,7 +882,7 @@
             <a:spLocks noGrp="1"/>
           </p:cNvSpPr>
           <p:nvPr>
-            <p:ph type="sldNum" idx="5" sz="quarter"/>
+            <p:ph type="sldNum" sz="quarter" idx="5"/>
           </p:nvPr>
         </p:nvSpPr>
         <p:spPr/>
@@ -1102,7 +896,7 @@
 </file>
 
 <file path=ppt/notesSlides/notesSlide4.xml><?xml version="1.0" encoding="utf-8"?>
-<p:notes xmlns:a="http://schemas.openxmlformats.org/drawingml/2006/main" xmlns:p="http://schemas.openxmlformats.org/presentationml/2006/main" xmlns:r="http://schemas.openxmlformats.org/officeDocument/2006/relationships">
+<p:notes xmlns:a="http://schemas.openxmlformats.org/drawingml/2006/main" xmlns:r="http://schemas.openxmlformats.org/officeDocument/2006/relationships" xmlns:p="http://schemas.openxmlformats.org/presentationml/2006/main">
   <p:cSld>
     <p:spTree>
       <p:nvGrpSpPr>
@@ -1122,7 +916,7 @@
         <p:nvSpPr>
           <p:cNvPr id="2" name="Slide Image Placeholder 1"/>
           <p:cNvSpPr>
-            <a:spLocks noGrp="1"/>
+            <a:spLocks noGrp="1" noRot="1" noChangeAspect="1"/>
           </p:cNvSpPr>
           <p:nvPr>
             <p:ph type="sldImg" idx="2"/>
@@ -1137,7 +931,7 @@
             <a:spLocks noGrp="1"/>
           </p:cNvSpPr>
           <p:nvPr>
-            <p:ph type="body" idx="3" sz="quarter"/>
+            <p:ph type="body" sz="quarter" idx="3"/>
           </p:nvPr>
         </p:nvSpPr>
         <p:spPr/>
@@ -1158,7 +952,7 @@
             <a:spLocks noGrp="1"/>
           </p:cNvSpPr>
           <p:nvPr>
-            <p:ph type="sldNum" idx="5" sz="quarter"/>
+            <p:ph type="sldNum" sz="quarter" idx="5"/>
           </p:nvPr>
         </p:nvSpPr>
         <p:spPr/>
@@ -1172,7 +966,7 @@
 </file>
 
 <file path=ppt/notesSlides/notesSlide5.xml><?xml version="1.0" encoding="utf-8"?>
-<p:notes xmlns:a="http://schemas.openxmlformats.org/drawingml/2006/main" xmlns:p="http://schemas.openxmlformats.org/presentationml/2006/main" xmlns:r="http://schemas.openxmlformats.org/officeDocument/2006/relationships">
+<p:notes xmlns:a="http://schemas.openxmlformats.org/drawingml/2006/main" xmlns:r="http://schemas.openxmlformats.org/officeDocument/2006/relationships" xmlns:p="http://schemas.openxmlformats.org/presentationml/2006/main">
   <p:cSld>
     <p:spTree>
       <p:nvGrpSpPr>
@@ -1192,7 +986,7 @@
         <p:nvSpPr>
           <p:cNvPr id="2" name="Slide Image Placeholder 1"/>
           <p:cNvSpPr>
-            <a:spLocks noGrp="1"/>
+            <a:spLocks noGrp="1" noRot="1" noChangeAspect="1"/>
           </p:cNvSpPr>
           <p:nvPr>
             <p:ph type="sldImg" idx="2"/>
@@ -1207,7 +1001,7 @@
             <a:spLocks noGrp="1"/>
           </p:cNvSpPr>
           <p:nvPr>
-            <p:ph type="body" idx="3" sz="quarter"/>
+            <p:ph type="body" sz="quarter" idx="3"/>
           </p:nvPr>
         </p:nvSpPr>
         <p:spPr/>
@@ -1216,7 +1010,7 @@
           <a:lstStyle/>
           <a:p>
             <a:r>
-              <a:t>This is the project’s central idea. Ordinary deconvolution collapses all fragments in a peak into one count. ShapeMix keeps the same count and also records whether the fragments are short, middle-length, or long. The biological labels for bins are useful approximations, not perfect one-to-one assignments.</a:t>
+              <a:t>This is the project’s central idea. Each panel shows 12 fragments, and this conceptual example assigns both Tn5 cut sites from every fragment to the same peak, for 24 cut sites total. Cell type A allocates those cuts 14 short, 6 middle, and 4 long; cell type B allocates them 4 short, 8 middle, and 12 long. Ordinary deconvolution keeps only the total. ShapeMix also records the parent-fragment length pattern. The biological labels for bins are useful approximations, not perfect one-to-one assignments.</a:t>
             </a:r>
           </a:p>
         </p:txBody>
@@ -1228,7 +1022,7 @@
             <a:spLocks noGrp="1"/>
           </p:cNvSpPr>
           <p:nvPr>
-            <p:ph type="sldNum" idx="5" sz="quarter"/>
+            <p:ph type="sldNum" sz="quarter" idx="5"/>
           </p:nvPr>
         </p:nvSpPr>
         <p:spPr/>
@@ -1242,7 +1036,7 @@
 </file>
 
 <file path=ppt/notesSlides/notesSlide6.xml><?xml version="1.0" encoding="utf-8"?>
-<p:notes xmlns:a="http://schemas.openxmlformats.org/drawingml/2006/main" xmlns:p="http://schemas.openxmlformats.org/presentationml/2006/main" xmlns:r="http://schemas.openxmlformats.org/officeDocument/2006/relationships">
+<p:notes xmlns:a="http://schemas.openxmlformats.org/drawingml/2006/main" xmlns:r="http://schemas.openxmlformats.org/officeDocument/2006/relationships" xmlns:p="http://schemas.openxmlformats.org/presentationml/2006/main">
   <p:cSld>
     <p:spTree>
       <p:nvGrpSpPr>
@@ -1262,7 +1056,7 @@
         <p:nvSpPr>
           <p:cNvPr id="2" name="Slide Image Placeholder 1"/>
           <p:cNvSpPr>
-            <a:spLocks noGrp="1"/>
+            <a:spLocks noGrp="1" noRot="1" noChangeAspect="1"/>
           </p:cNvSpPr>
           <p:nvPr>
             <p:ph type="sldImg" idx="2"/>
@@ -1277,7 +1071,7 @@
             <a:spLocks noGrp="1"/>
           </p:cNvSpPr>
           <p:nvPr>
-            <p:ph type="body" idx="3" sz="quarter"/>
+            <p:ph type="body" sz="quarter" idx="3"/>
           </p:nvPr>
         </p:nvSpPr>
         <p:spPr/>
@@ -1298,7 +1092,7 @@
             <a:spLocks noGrp="1"/>
           </p:cNvSpPr>
           <p:nvPr>
-            <p:ph type="sldNum" idx="5" sz="quarter"/>
+            <p:ph type="sldNum" sz="quarter" idx="5"/>
           </p:nvPr>
         </p:nvSpPr>
         <p:spPr/>
@@ -1312,7 +1106,7 @@
 </file>
 
 <file path=ppt/notesSlides/notesSlide7.xml><?xml version="1.0" encoding="utf-8"?>
-<p:notes xmlns:a="http://schemas.openxmlformats.org/drawingml/2006/main" xmlns:p="http://schemas.openxmlformats.org/presentationml/2006/main" xmlns:r="http://schemas.openxmlformats.org/officeDocument/2006/relationships">
+<p:notes xmlns:a="http://schemas.openxmlformats.org/drawingml/2006/main" xmlns:r="http://schemas.openxmlformats.org/officeDocument/2006/relationships" xmlns:p="http://schemas.openxmlformats.org/presentationml/2006/main">
   <p:cSld>
     <p:spTree>
       <p:nvGrpSpPr>
@@ -1332,7 +1126,7 @@
         <p:nvSpPr>
           <p:cNvPr id="2" name="Slide Image Placeholder 1"/>
           <p:cNvSpPr>
-            <a:spLocks noGrp="1"/>
+            <a:spLocks noGrp="1" noRot="1" noChangeAspect="1"/>
           </p:cNvSpPr>
           <p:nvPr>
             <p:ph type="sldImg" idx="2"/>
@@ -1347,7 +1141,7 @@
             <a:spLocks noGrp="1"/>
           </p:cNvSpPr>
           <p:nvPr>
-            <p:ph type="body" idx="3" sz="quarter"/>
+            <p:ph type="body" sz="quarter" idx="3"/>
           </p:nvPr>
         </p:nvSpPr>
         <p:spPr/>
@@ -1368,7 +1162,7 @@
             <a:spLocks noGrp="1"/>
           </p:cNvSpPr>
           <p:nvPr>
-            <p:ph type="sldNum" idx="5" sz="quarter"/>
+            <p:ph type="sldNum" sz="quarter" idx="5"/>
           </p:nvPr>
         </p:nvSpPr>
         <p:spPr/>
@@ -1382,7 +1176,7 @@
 </file>
 
 <file path=ppt/notesSlides/notesSlide8.xml><?xml version="1.0" encoding="utf-8"?>
-<p:notes xmlns:a="http://schemas.openxmlformats.org/drawingml/2006/main" xmlns:p="http://schemas.openxmlformats.org/presentationml/2006/main" xmlns:r="http://schemas.openxmlformats.org/officeDocument/2006/relationships">
+<p:notes xmlns:a="http://schemas.openxmlformats.org/drawingml/2006/main" xmlns:r="http://schemas.openxmlformats.org/officeDocument/2006/relationships" xmlns:p="http://schemas.openxmlformats.org/presentationml/2006/main">
   <p:cSld>
     <p:spTree>
       <p:nvGrpSpPr>
@@ -1402,7 +1196,7 @@
         <p:nvSpPr>
           <p:cNvPr id="2" name="Slide Image Placeholder 1"/>
           <p:cNvSpPr>
-            <a:spLocks noGrp="1"/>
+            <a:spLocks noGrp="1" noRot="1" noChangeAspect="1"/>
           </p:cNvSpPr>
           <p:nvPr>
             <p:ph type="sldImg" idx="2"/>
@@ -1417,7 +1211,7 @@
             <a:spLocks noGrp="1"/>
           </p:cNvSpPr>
           <p:nvPr>
-            <p:ph type="body" idx="3" sz="quarter"/>
+            <p:ph type="body" sz="quarter" idx="3"/>
           </p:nvPr>
         </p:nvSpPr>
         <p:spPr/>
@@ -1438,7 +1232,7 @@
             <a:spLocks noGrp="1"/>
           </p:cNvSpPr>
           <p:nvPr>
-            <p:ph type="sldNum" idx="5" sz="quarter"/>
+            <p:ph type="sldNum" sz="quarter" idx="5"/>
           </p:nvPr>
         </p:nvSpPr>
         <p:spPr/>
@@ -1452,7 +1246,7 @@
 </file>
 
 <file path=ppt/notesSlides/notesSlide9.xml><?xml version="1.0" encoding="utf-8"?>
-<p:notes xmlns:a="http://schemas.openxmlformats.org/drawingml/2006/main" xmlns:p="http://schemas.openxmlformats.org/presentationml/2006/main" xmlns:r="http://schemas.openxmlformats.org/officeDocument/2006/relationships">
+<p:notes xmlns:a="http://schemas.openxmlformats.org/drawingml/2006/main" xmlns:r="http://schemas.openxmlformats.org/officeDocument/2006/relationships" xmlns:p="http://schemas.openxmlformats.org/presentationml/2006/main">
   <p:cSld>
     <p:spTree>
       <p:nvGrpSpPr>
@@ -1472,7 +1266,7 @@
         <p:nvSpPr>
           <p:cNvPr id="2" name="Slide Image Placeholder 1"/>
           <p:cNvSpPr>
-            <a:spLocks noGrp="1"/>
+            <a:spLocks noGrp="1" noRot="1" noChangeAspect="1"/>
           </p:cNvSpPr>
           <p:nvPr>
             <p:ph type="sldImg" idx="2"/>
@@ -1487,7 +1281,7 @@
             <a:spLocks noGrp="1"/>
           </p:cNvSpPr>
           <p:nvPr>
-            <p:ph type="body" idx="3" sz="quarter"/>
+            <p:ph type="body" sz="quarter" idx="3"/>
           </p:nvPr>
         </p:nvSpPr>
         <p:spPr/>
@@ -1508,7 +1302,7 @@
             <a:spLocks noGrp="1"/>
           </p:cNvSpPr>
           <p:nvPr>
-            <p:ph type="sldNum" idx="5" sz="quarter"/>
+            <p:ph type="sldNum" sz="quarter" idx="5"/>
           </p:nvPr>
         </p:nvSpPr>
         <p:spPr/>
@@ -1559,10 +1353,9 @@
           <a:lstStyle/>
           <a:p>
             <a:r>
-              <a:rPr lang="en-US" smtClean="0"/>
+              <a:rPr lang="en-US"/>
               <a:t>Click to edit Master title style</a:t>
             </a:r>
-            <a:endParaRPr lang="en-US"/>
           </a:p>
         </p:txBody>
       </p:sp>
@@ -1678,10 +1471,9 @@
           </a:lstStyle>
           <a:p>
             <a:r>
-              <a:rPr lang="en-US" smtClean="0"/>
+              <a:rPr lang="en-US"/>
               <a:t>Click to edit Master subtitle style</a:t>
             </a:r>
-            <a:endParaRPr lang="en-US"/>
           </a:p>
         </p:txBody>
       </p:sp>
@@ -1702,7 +1494,7 @@
           <a:p>
             <a:fld id="{5BCAD085-E8A6-8845-BD4E-CB4CCA059FC4}" type="datetimeFigureOut">
               <a:rPr lang="en-US" smtClean="0"/>
-              <a:t>1/27/13</a:t>
+              <a:t>8/24/26</a:t>
             </a:fld>
             <a:endParaRPr lang="en-US"/>
           </a:p>
@@ -1796,10 +1588,9 @@
           <a:lstStyle/>
           <a:p>
             <a:r>
-              <a:rPr lang="en-US" smtClean="0"/>
+              <a:rPr lang="en-US"/>
               <a:t>Click to edit Master title style</a:t>
             </a:r>
-            <a:endParaRPr lang="en-US"/>
           </a:p>
         </p:txBody>
       </p:sp>
@@ -1820,38 +1611,37 @@
           <a:p>
             <a:pPr lvl="0"/>
             <a:r>
-              <a:rPr lang="en-US" smtClean="0"/>
+              <a:rPr lang="en-US"/>
               <a:t>Click to edit Master text styles</a:t>
             </a:r>
           </a:p>
           <a:p>
             <a:pPr lvl="1"/>
             <a:r>
-              <a:rPr lang="en-US" smtClean="0"/>
+              <a:rPr lang="en-US"/>
               <a:t>Second level</a:t>
             </a:r>
           </a:p>
           <a:p>
             <a:pPr lvl="2"/>
             <a:r>
-              <a:rPr lang="en-US" smtClean="0"/>
+              <a:rPr lang="en-US"/>
               <a:t>Third level</a:t>
             </a:r>
           </a:p>
           <a:p>
             <a:pPr lvl="3"/>
             <a:r>
-              <a:rPr lang="en-US" smtClean="0"/>
+              <a:rPr lang="en-US"/>
               <a:t>Fourth level</a:t>
             </a:r>
           </a:p>
           <a:p>
             <a:pPr lvl="4"/>
             <a:r>
-              <a:rPr lang="en-US" smtClean="0"/>
+              <a:rPr lang="en-US"/>
               <a:t>Fifth level</a:t>
             </a:r>
-            <a:endParaRPr lang="en-US"/>
           </a:p>
         </p:txBody>
       </p:sp>
@@ -1872,7 +1662,7 @@
           <a:p>
             <a:fld id="{5BCAD085-E8A6-8845-BD4E-CB4CCA059FC4}" type="datetimeFigureOut">
               <a:rPr lang="en-US" smtClean="0"/>
-              <a:t>1/27/13</a:t>
+              <a:t>8/24/26</a:t>
             </a:fld>
             <a:endParaRPr lang="en-US"/>
           </a:p>
@@ -1971,10 +1761,9 @@
           <a:lstStyle/>
           <a:p>
             <a:r>
-              <a:rPr lang="en-US" smtClean="0"/>
+              <a:rPr lang="en-US"/>
               <a:t>Click to edit Master title style</a:t>
             </a:r>
-            <a:endParaRPr lang="en-US"/>
           </a:p>
         </p:txBody>
       </p:sp>
@@ -2000,38 +1789,37 @@
           <a:p>
             <a:pPr lvl="0"/>
             <a:r>
-              <a:rPr lang="en-US" smtClean="0"/>
+              <a:rPr lang="en-US"/>
               <a:t>Click to edit Master text styles</a:t>
             </a:r>
           </a:p>
           <a:p>
             <a:pPr lvl="1"/>
             <a:r>
-              <a:rPr lang="en-US" smtClean="0"/>
+              <a:rPr lang="en-US"/>
               <a:t>Second level</a:t>
             </a:r>
           </a:p>
           <a:p>
             <a:pPr lvl="2"/>
             <a:r>
-              <a:rPr lang="en-US" smtClean="0"/>
+              <a:rPr lang="en-US"/>
               <a:t>Third level</a:t>
             </a:r>
           </a:p>
           <a:p>
             <a:pPr lvl="3"/>
             <a:r>
-              <a:rPr lang="en-US" smtClean="0"/>
+              <a:rPr lang="en-US"/>
               <a:t>Fourth level</a:t>
             </a:r>
           </a:p>
           <a:p>
             <a:pPr lvl="4"/>
             <a:r>
-              <a:rPr lang="en-US" smtClean="0"/>
+              <a:rPr lang="en-US"/>
               <a:t>Fifth level</a:t>
             </a:r>
-            <a:endParaRPr lang="en-US"/>
           </a:p>
         </p:txBody>
       </p:sp>
@@ -2052,7 +1840,7 @@
           <a:p>
             <a:fld id="{5BCAD085-E8A6-8845-BD4E-CB4CCA059FC4}" type="datetimeFigureOut">
               <a:rPr lang="en-US" smtClean="0"/>
-              <a:t>1/27/13</a:t>
+              <a:t>8/24/26</a:t>
             </a:fld>
             <a:endParaRPr lang="en-US"/>
           </a:p>
@@ -2146,10 +1934,9 @@
           <a:lstStyle/>
           <a:p>
             <a:r>
-              <a:rPr lang="en-US" smtClean="0"/>
+              <a:rPr lang="en-US"/>
               <a:t>Click to edit Master title style</a:t>
             </a:r>
-            <a:endParaRPr lang="en-US"/>
           </a:p>
         </p:txBody>
       </p:sp>
@@ -2170,38 +1957,37 @@
           <a:p>
             <a:pPr lvl="0"/>
             <a:r>
-              <a:rPr lang="en-US" smtClean="0"/>
+              <a:rPr lang="en-US"/>
               <a:t>Click to edit Master text styles</a:t>
             </a:r>
           </a:p>
           <a:p>
             <a:pPr lvl="1"/>
             <a:r>
-              <a:rPr lang="en-US" smtClean="0"/>
+              <a:rPr lang="en-US"/>
               <a:t>Second level</a:t>
             </a:r>
           </a:p>
           <a:p>
             <a:pPr lvl="2"/>
             <a:r>
-              <a:rPr lang="en-US" smtClean="0"/>
+              <a:rPr lang="en-US"/>
               <a:t>Third level</a:t>
             </a:r>
           </a:p>
           <a:p>
             <a:pPr lvl="3"/>
             <a:r>
-              <a:rPr lang="en-US" smtClean="0"/>
+              <a:rPr lang="en-US"/>
               <a:t>Fourth level</a:t>
             </a:r>
           </a:p>
           <a:p>
             <a:pPr lvl="4"/>
             <a:r>
-              <a:rPr lang="en-US" smtClean="0"/>
+              <a:rPr lang="en-US"/>
               <a:t>Fifth level</a:t>
             </a:r>
-            <a:endParaRPr lang="en-US"/>
           </a:p>
         </p:txBody>
       </p:sp>
@@ -2222,7 +2008,7 @@
           <a:p>
             <a:fld id="{5BCAD085-E8A6-8845-BD4E-CB4CCA059FC4}" type="datetimeFigureOut">
               <a:rPr lang="en-US" smtClean="0"/>
-              <a:t>1/27/13</a:t>
+              <a:t>8/24/26</a:t>
             </a:fld>
             <a:endParaRPr lang="en-US"/>
           </a:p>
@@ -2325,10 +2111,9 @@
           </a:lstStyle>
           <a:p>
             <a:r>
-              <a:rPr lang="en-US" smtClean="0"/>
+              <a:rPr lang="en-US"/>
               <a:t>Click to edit Master title style</a:t>
             </a:r>
-            <a:endParaRPr lang="en-US"/>
           </a:p>
         </p:txBody>
       </p:sp>
@@ -2445,7 +2230,7 @@
           <a:p>
             <a:pPr lvl="0"/>
             <a:r>
-              <a:rPr lang="en-US" smtClean="0"/>
+              <a:rPr lang="en-US"/>
               <a:t>Click to edit Master text styles</a:t>
             </a:r>
           </a:p>
@@ -2468,7 +2253,7 @@
           <a:p>
             <a:fld id="{5BCAD085-E8A6-8845-BD4E-CB4CCA059FC4}" type="datetimeFigureOut">
               <a:rPr lang="en-US" smtClean="0"/>
-              <a:t>1/27/13</a:t>
+              <a:t>8/24/26</a:t>
             </a:fld>
             <a:endParaRPr lang="en-US"/>
           </a:p>
@@ -2562,10 +2347,9 @@
           <a:lstStyle/>
           <a:p>
             <a:r>
-              <a:rPr lang="en-US" smtClean="0"/>
+              <a:rPr lang="en-US"/>
               <a:t>Click to edit Master title style</a:t>
             </a:r>
-            <a:endParaRPr lang="en-US"/>
           </a:p>
         </p:txBody>
       </p:sp>
@@ -2619,38 +2403,37 @@
           <a:p>
             <a:pPr lvl="0"/>
             <a:r>
-              <a:rPr lang="en-US" smtClean="0"/>
+              <a:rPr lang="en-US"/>
               <a:t>Click to edit Master text styles</a:t>
             </a:r>
           </a:p>
           <a:p>
             <a:pPr lvl="1"/>
             <a:r>
-              <a:rPr lang="en-US" smtClean="0"/>
+              <a:rPr lang="en-US"/>
               <a:t>Second level</a:t>
             </a:r>
           </a:p>
           <a:p>
             <a:pPr lvl="2"/>
             <a:r>
-              <a:rPr lang="en-US" smtClean="0"/>
+              <a:rPr lang="en-US"/>
               <a:t>Third level</a:t>
             </a:r>
           </a:p>
           <a:p>
             <a:pPr lvl="3"/>
             <a:r>
-              <a:rPr lang="en-US" smtClean="0"/>
+              <a:rPr lang="en-US"/>
               <a:t>Fourth level</a:t>
             </a:r>
           </a:p>
           <a:p>
             <a:pPr lvl="4"/>
             <a:r>
-              <a:rPr lang="en-US" smtClean="0"/>
+              <a:rPr lang="en-US"/>
               <a:t>Fifth level</a:t>
             </a:r>
-            <a:endParaRPr lang="en-US"/>
           </a:p>
         </p:txBody>
       </p:sp>
@@ -2704,38 +2487,37 @@
           <a:p>
             <a:pPr lvl="0"/>
             <a:r>
-              <a:rPr lang="en-US" smtClean="0"/>
+              <a:rPr lang="en-US"/>
               <a:t>Click to edit Master text styles</a:t>
             </a:r>
           </a:p>
           <a:p>
             <a:pPr lvl="1"/>
             <a:r>
-              <a:rPr lang="en-US" smtClean="0"/>
+              <a:rPr lang="en-US"/>
               <a:t>Second level</a:t>
             </a:r>
           </a:p>
           <a:p>
             <a:pPr lvl="2"/>
             <a:r>
-              <a:rPr lang="en-US" smtClean="0"/>
+              <a:rPr lang="en-US"/>
               <a:t>Third level</a:t>
             </a:r>
           </a:p>
           <a:p>
             <a:pPr lvl="3"/>
             <a:r>
-              <a:rPr lang="en-US" smtClean="0"/>
+              <a:rPr lang="en-US"/>
               <a:t>Fourth level</a:t>
             </a:r>
           </a:p>
           <a:p>
             <a:pPr lvl="4"/>
             <a:r>
-              <a:rPr lang="en-US" smtClean="0"/>
+              <a:rPr lang="en-US"/>
               <a:t>Fifth level</a:t>
             </a:r>
-            <a:endParaRPr lang="en-US"/>
           </a:p>
         </p:txBody>
       </p:sp>
@@ -2756,7 +2538,7 @@
           <a:p>
             <a:fld id="{5BCAD085-E8A6-8845-BD4E-CB4CCA059FC4}" type="datetimeFigureOut">
               <a:rPr lang="en-US" smtClean="0"/>
-              <a:t>1/27/13</a:t>
+              <a:t>8/24/26</a:t>
             </a:fld>
             <a:endParaRPr lang="en-US"/>
           </a:p>
@@ -2854,10 +2636,9 @@
           </a:lstStyle>
           <a:p>
             <a:r>
-              <a:rPr lang="en-US" smtClean="0"/>
+              <a:rPr lang="en-US"/>
               <a:t>Click to edit Master title style</a:t>
             </a:r>
-            <a:endParaRPr lang="en-US"/>
           </a:p>
         </p:txBody>
       </p:sp>
@@ -2920,7 +2701,7 @@
           <a:p>
             <a:pPr lvl="0"/>
             <a:r>
-              <a:rPr lang="en-US" smtClean="0"/>
+              <a:rPr lang="en-US"/>
               <a:t>Click to edit Master text styles</a:t>
             </a:r>
           </a:p>
@@ -2976,38 +2757,37 @@
           <a:p>
             <a:pPr lvl="0"/>
             <a:r>
-              <a:rPr lang="en-US" smtClean="0"/>
+              <a:rPr lang="en-US"/>
               <a:t>Click to edit Master text styles</a:t>
             </a:r>
           </a:p>
           <a:p>
             <a:pPr lvl="1"/>
             <a:r>
-              <a:rPr lang="en-US" smtClean="0"/>
+              <a:rPr lang="en-US"/>
               <a:t>Second level</a:t>
             </a:r>
           </a:p>
           <a:p>
             <a:pPr lvl="2"/>
             <a:r>
-              <a:rPr lang="en-US" smtClean="0"/>
+              <a:rPr lang="en-US"/>
               <a:t>Third level</a:t>
             </a:r>
           </a:p>
           <a:p>
             <a:pPr lvl="3"/>
             <a:r>
-              <a:rPr lang="en-US" smtClean="0"/>
+              <a:rPr lang="en-US"/>
               <a:t>Fourth level</a:t>
             </a:r>
           </a:p>
           <a:p>
             <a:pPr lvl="4"/>
             <a:r>
-              <a:rPr lang="en-US" smtClean="0"/>
+              <a:rPr lang="en-US"/>
               <a:t>Fifth level</a:t>
             </a:r>
-            <a:endParaRPr lang="en-US"/>
           </a:p>
         </p:txBody>
       </p:sp>
@@ -3070,7 +2850,7 @@
           <a:p>
             <a:pPr lvl="0"/>
             <a:r>
-              <a:rPr lang="en-US" smtClean="0"/>
+              <a:rPr lang="en-US"/>
               <a:t>Click to edit Master text styles</a:t>
             </a:r>
           </a:p>
@@ -3126,38 +2906,37 @@
           <a:p>
             <a:pPr lvl="0"/>
             <a:r>
-              <a:rPr lang="en-US" smtClean="0"/>
+              <a:rPr lang="en-US"/>
               <a:t>Click to edit Master text styles</a:t>
             </a:r>
           </a:p>
           <a:p>
             <a:pPr lvl="1"/>
             <a:r>
-              <a:rPr lang="en-US" smtClean="0"/>
+              <a:rPr lang="en-US"/>
               <a:t>Second level</a:t>
             </a:r>
           </a:p>
           <a:p>
             <a:pPr lvl="2"/>
             <a:r>
-              <a:rPr lang="en-US" smtClean="0"/>
+              <a:rPr lang="en-US"/>
               <a:t>Third level</a:t>
             </a:r>
           </a:p>
           <a:p>
             <a:pPr lvl="3"/>
             <a:r>
-              <a:rPr lang="en-US" smtClean="0"/>
+              <a:rPr lang="en-US"/>
               <a:t>Fourth level</a:t>
             </a:r>
           </a:p>
           <a:p>
             <a:pPr lvl="4"/>
             <a:r>
-              <a:rPr lang="en-US" smtClean="0"/>
+              <a:rPr lang="en-US"/>
               <a:t>Fifth level</a:t>
             </a:r>
-            <a:endParaRPr lang="en-US"/>
           </a:p>
         </p:txBody>
       </p:sp>
@@ -3178,7 +2957,7 @@
           <a:p>
             <a:fld id="{5BCAD085-E8A6-8845-BD4E-CB4CCA059FC4}" type="datetimeFigureOut">
               <a:rPr lang="en-US" smtClean="0"/>
-              <a:t>1/27/13</a:t>
+              <a:t>8/24/26</a:t>
             </a:fld>
             <a:endParaRPr lang="en-US"/>
           </a:p>
@@ -3272,10 +3051,9 @@
           <a:lstStyle/>
           <a:p>
             <a:r>
-              <a:rPr lang="en-US" smtClean="0"/>
+              <a:rPr lang="en-US"/>
               <a:t>Click to edit Master title style</a:t>
             </a:r>
-            <a:endParaRPr lang="en-US"/>
           </a:p>
         </p:txBody>
       </p:sp>
@@ -3296,7 +3074,7 @@
           <a:p>
             <a:fld id="{5BCAD085-E8A6-8845-BD4E-CB4CCA059FC4}" type="datetimeFigureOut">
               <a:rPr lang="en-US" smtClean="0"/>
-              <a:t>1/27/13</a:t>
+              <a:t>8/24/26</a:t>
             </a:fld>
             <a:endParaRPr lang="en-US"/>
           </a:p>
@@ -3391,7 +3169,7 @@
           <a:p>
             <a:fld id="{5BCAD085-E8A6-8845-BD4E-CB4CCA059FC4}" type="datetimeFigureOut">
               <a:rPr lang="en-US" smtClean="0"/>
-              <a:t>1/27/13</a:t>
+              <a:t>8/24/26</a:t>
             </a:fld>
             <a:endParaRPr lang="en-US"/>
           </a:p>
@@ -3494,10 +3272,9 @@
           </a:lstStyle>
           <a:p>
             <a:r>
-              <a:rPr lang="en-US" smtClean="0"/>
+              <a:rPr lang="en-US"/>
               <a:t>Click to edit Master title style</a:t>
             </a:r>
-            <a:endParaRPr lang="en-US"/>
           </a:p>
         </p:txBody>
       </p:sp>
@@ -3551,38 +3328,37 @@
           <a:p>
             <a:pPr lvl="0"/>
             <a:r>
-              <a:rPr lang="en-US" smtClean="0"/>
+              <a:rPr lang="en-US"/>
               <a:t>Click to edit Master text styles</a:t>
             </a:r>
           </a:p>
           <a:p>
             <a:pPr lvl="1"/>
             <a:r>
-              <a:rPr lang="en-US" smtClean="0"/>
+              <a:rPr lang="en-US"/>
               <a:t>Second level</a:t>
             </a:r>
           </a:p>
           <a:p>
             <a:pPr lvl="2"/>
             <a:r>
-              <a:rPr lang="en-US" smtClean="0"/>
+              <a:rPr lang="en-US"/>
               <a:t>Third level</a:t>
             </a:r>
           </a:p>
           <a:p>
             <a:pPr lvl="3"/>
             <a:r>
-              <a:rPr lang="en-US" smtClean="0"/>
+              <a:rPr lang="en-US"/>
               <a:t>Fourth level</a:t>
             </a:r>
           </a:p>
           <a:p>
             <a:pPr lvl="4"/>
             <a:r>
-              <a:rPr lang="en-US" smtClean="0"/>
+              <a:rPr lang="en-US"/>
               <a:t>Fifth level</a:t>
             </a:r>
-            <a:endParaRPr lang="en-US"/>
           </a:p>
         </p:txBody>
       </p:sp>
@@ -3645,7 +3421,7 @@
           <a:p>
             <a:pPr lvl="0"/>
             <a:r>
-              <a:rPr lang="en-US" smtClean="0"/>
+              <a:rPr lang="en-US"/>
               <a:t>Click to edit Master text styles</a:t>
             </a:r>
           </a:p>
@@ -3668,7 +3444,7 @@
           <a:p>
             <a:fld id="{5BCAD085-E8A6-8845-BD4E-CB4CCA059FC4}" type="datetimeFigureOut">
               <a:rPr lang="en-US" smtClean="0"/>
-              <a:t>1/27/13</a:t>
+              <a:t>8/24/26</a:t>
             </a:fld>
             <a:endParaRPr lang="en-US"/>
           </a:p>
@@ -3771,10 +3547,9 @@
           </a:lstStyle>
           <a:p>
             <a:r>
-              <a:rPr lang="en-US" smtClean="0"/>
+              <a:rPr lang="en-US"/>
               <a:t>Click to edit Master title style</a:t>
             </a:r>
-            <a:endParaRPr lang="en-US"/>
           </a:p>
         </p:txBody>
       </p:sp>
@@ -3898,7 +3673,7 @@
           <a:p>
             <a:pPr lvl="0"/>
             <a:r>
-              <a:rPr lang="en-US" smtClean="0"/>
+              <a:rPr lang="en-US"/>
               <a:t>Click to edit Master text styles</a:t>
             </a:r>
           </a:p>
@@ -3921,7 +3696,7 @@
           <a:p>
             <a:fld id="{5BCAD085-E8A6-8845-BD4E-CB4CCA059FC4}" type="datetimeFigureOut">
               <a:rPr lang="en-US" smtClean="0"/>
-              <a:t>1/27/13</a:t>
+              <a:t>8/24/26</a:t>
             </a:fld>
             <a:endParaRPr lang="en-US"/>
           </a:p>
@@ -4030,10 +3805,9 @@
           <a:lstStyle/>
           <a:p>
             <a:r>
-              <a:rPr lang="en-US" smtClean="0"/>
+              <a:rPr lang="en-US"/>
               <a:t>Click to edit Master title style</a:t>
             </a:r>
-            <a:endParaRPr lang="en-US"/>
           </a:p>
         </p:txBody>
       </p:sp>
@@ -4064,38 +3838,37 @@
           <a:p>
             <a:pPr lvl="0"/>
             <a:r>
-              <a:rPr lang="en-US" smtClean="0"/>
+              <a:rPr lang="en-US"/>
               <a:t>Click to edit Master text styles</a:t>
             </a:r>
           </a:p>
           <a:p>
             <a:pPr lvl="1"/>
             <a:r>
-              <a:rPr lang="en-US" smtClean="0"/>
+              <a:rPr lang="en-US"/>
               <a:t>Second level</a:t>
             </a:r>
           </a:p>
           <a:p>
             <a:pPr lvl="2"/>
             <a:r>
-              <a:rPr lang="en-US" smtClean="0"/>
+              <a:rPr lang="en-US"/>
               <a:t>Third level</a:t>
             </a:r>
           </a:p>
           <a:p>
             <a:pPr lvl="3"/>
             <a:r>
-              <a:rPr lang="en-US" smtClean="0"/>
+              <a:rPr lang="en-US"/>
               <a:t>Fourth level</a:t>
             </a:r>
           </a:p>
           <a:p>
             <a:pPr lvl="4"/>
             <a:r>
-              <a:rPr lang="en-US" smtClean="0"/>
+              <a:rPr lang="en-US"/>
               <a:t>Fifth level</a:t>
             </a:r>
-            <a:endParaRPr lang="en-US"/>
           </a:p>
         </p:txBody>
       </p:sp>
@@ -4134,7 +3907,7 @@
           <a:p>
             <a:fld id="{5BCAD085-E8A6-8845-BD4E-CB4CCA059FC4}" type="datetimeFigureOut">
               <a:rPr lang="en-US" smtClean="0"/>
-              <a:t>1/27/13</a:t>
+              <a:t>8/24/26</a:t>
             </a:fld>
             <a:endParaRPr lang="en-US"/>
           </a:p>
@@ -4493,7 +4266,7 @@
 </file>
 
 <file path=ppt/slides/slide1.xml><?xml version="1.0" encoding="utf-8"?>
-<p:sld xmlns:a="http://schemas.openxmlformats.org/drawingml/2006/main" xmlns:p="http://schemas.openxmlformats.org/presentationml/2006/main" xmlns:r="http://schemas.openxmlformats.org/officeDocument/2006/relationships">
+<p:sld xmlns:a="http://schemas.openxmlformats.org/drawingml/2006/main" xmlns:r="http://schemas.openxmlformats.org/officeDocument/2006/relationships" xmlns:p="http://schemas.openxmlformats.org/presentationml/2006/main">
   <p:cSld>
     <p:bg>
       <p:bgPr>
@@ -4509,7 +4282,14 @@
         <p:cNvGrpSpPr/>
         <p:nvPr/>
       </p:nvGrpSpPr>
-      <p:grpSpPr/>
+      <p:grpSpPr>
+        <a:xfrm>
+          <a:off x="0" y="0"/>
+          <a:ext cx="0" cy="0"/>
+          <a:chOff x="0" y="0"/>
+          <a:chExt cx="0" cy="0"/>
+        </a:xfrm>
+      </p:grpSpPr>
       <p:sp>
         <p:nvSpPr>
           <p:cNvPr id="2" name="Rounded Rectangle 1"/>
@@ -4548,7 +4328,7 @@
           </a:fontRef>
         </p:style>
         <p:txBody>
-          <a:bodyPr rtlCol="0" anchor="ctr" lIns="54864" rIns="54864" tIns="9144" bIns="9144"/>
+          <a:bodyPr lIns="54864" tIns="9144" rIns="54864" bIns="9144" rtlCol="0" anchor="ctr"/>
           <a:lstStyle/>
           <a:p>
             <a:pPr algn="ctr"/>
@@ -4581,7 +4361,7 @@
           <a:noFill/>
         </p:spPr>
         <p:txBody>
-          <a:bodyPr wrap="square" lIns="36576" rIns="36576" tIns="36576" bIns="36576" anchor="t">
+          <a:bodyPr wrap="square" lIns="36576" tIns="36576" rIns="36576" bIns="36576" anchor="t">
             <a:spAutoFit/>
           </a:bodyPr>
           <a:lstStyle/>
@@ -4623,7 +4403,7 @@
           <a:noFill/>
         </p:spPr>
         <p:txBody>
-          <a:bodyPr wrap="square" lIns="36576" rIns="36576" tIns="36576" bIns="36576" anchor="t">
+          <a:bodyPr wrap="square" lIns="36576" tIns="36576" rIns="36576" bIns="36576" anchor="t">
             <a:spAutoFit/>
           </a:bodyPr>
           <a:lstStyle/>
@@ -4665,7 +4445,7 @@
           <a:noFill/>
         </p:spPr>
         <p:txBody>
-          <a:bodyPr wrap="square" lIns="36576" rIns="36576" tIns="36576" bIns="36576" anchor="t">
+          <a:bodyPr wrap="square" lIns="36576" tIns="36576" rIns="36576" bIns="36576" anchor="t">
             <a:spAutoFit/>
           </a:bodyPr>
           <a:lstStyle/>
@@ -4732,6 +4512,7 @@
           <a:lstStyle/>
           <a:p>
             <a:pPr algn="ctr"/>
+            <a:endParaRPr/>
           </a:p>
         </p:txBody>
       </p:sp>
@@ -4777,6 +4558,7 @@
           <a:lstStyle/>
           <a:p>
             <a:pPr algn="ctr"/>
+            <a:endParaRPr/>
           </a:p>
         </p:txBody>
       </p:sp>
@@ -4822,6 +4604,7 @@
           <a:lstStyle/>
           <a:p>
             <a:pPr algn="ctr"/>
+            <a:endParaRPr/>
           </a:p>
         </p:txBody>
       </p:sp>
@@ -4867,6 +4650,7 @@
           <a:lstStyle/>
           <a:p>
             <a:pPr algn="ctr"/>
+            <a:endParaRPr/>
           </a:p>
         </p:txBody>
       </p:sp>
@@ -4912,6 +4696,7 @@
           <a:lstStyle/>
           <a:p>
             <a:pPr algn="ctr"/>
+            <a:endParaRPr/>
           </a:p>
         </p:txBody>
       </p:sp>
@@ -4957,6 +4742,7 @@
           <a:lstStyle/>
           <a:p>
             <a:pPr algn="ctr"/>
+            <a:endParaRPr/>
           </a:p>
         </p:txBody>
       </p:sp>
@@ -5002,6 +4788,7 @@
           <a:lstStyle/>
           <a:p>
             <a:pPr algn="ctr"/>
+            <a:endParaRPr/>
           </a:p>
         </p:txBody>
       </p:sp>
@@ -5047,6 +4834,7 @@
           <a:lstStyle/>
           <a:p>
             <a:pPr algn="ctr"/>
+            <a:endParaRPr/>
           </a:p>
         </p:txBody>
       </p:sp>
@@ -5092,6 +4880,7 @@
           <a:lstStyle/>
           <a:p>
             <a:pPr algn="ctr"/>
+            <a:endParaRPr/>
           </a:p>
         </p:txBody>
       </p:sp>
@@ -5137,6 +4926,7 @@
           <a:lstStyle/>
           <a:p>
             <a:pPr algn="ctr"/>
+            <a:endParaRPr/>
           </a:p>
         </p:txBody>
       </p:sp>
@@ -5182,6 +4972,7 @@
           <a:lstStyle/>
           <a:p>
             <a:pPr algn="ctr"/>
+            <a:endParaRPr/>
           </a:p>
         </p:txBody>
       </p:sp>
@@ -5227,6 +5018,7 @@
           <a:lstStyle/>
           <a:p>
             <a:pPr algn="ctr"/>
+            <a:endParaRPr/>
           </a:p>
         </p:txBody>
       </p:sp>
@@ -5272,6 +5064,7 @@
           <a:lstStyle/>
           <a:p>
             <a:pPr algn="ctr"/>
+            <a:endParaRPr/>
           </a:p>
         </p:txBody>
       </p:sp>
@@ -5317,6 +5110,7 @@
           <a:lstStyle/>
           <a:p>
             <a:pPr algn="ctr"/>
+            <a:endParaRPr/>
           </a:p>
         </p:txBody>
       </p:sp>
@@ -5362,6 +5156,7 @@
           <a:lstStyle/>
           <a:p>
             <a:pPr algn="ctr"/>
+            <a:endParaRPr/>
           </a:p>
         </p:txBody>
       </p:sp>
@@ -5382,7 +5177,7 @@
           <a:noFill/>
         </p:spPr>
         <p:txBody>
-          <a:bodyPr wrap="square" lIns="36576" rIns="36576" tIns="36576" bIns="36576" anchor="t">
+          <a:bodyPr wrap="square" lIns="36576" tIns="36576" rIns="36576" bIns="36576" anchor="t">
             <a:spAutoFit/>
           </a:bodyPr>
           <a:lstStyle/>
@@ -5941,7 +5736,7 @@
 </file>
 
 <file path=ppt/slides/slide10.xml><?xml version="1.0" encoding="utf-8"?>
-<p:sld xmlns:a="http://schemas.openxmlformats.org/drawingml/2006/main" xmlns:p="http://schemas.openxmlformats.org/presentationml/2006/main" xmlns:r="http://schemas.openxmlformats.org/officeDocument/2006/relationships">
+<p:sld xmlns:a="http://schemas.openxmlformats.org/drawingml/2006/main" xmlns:r="http://schemas.openxmlformats.org/officeDocument/2006/relationships" xmlns:p="http://schemas.openxmlformats.org/presentationml/2006/main">
   <p:cSld>
     <p:bg>
       <p:bgPr>
@@ -5957,7 +5752,14 @@
         <p:cNvGrpSpPr/>
         <p:nvPr/>
       </p:nvGrpSpPr>
-      <p:grpSpPr/>
+      <p:grpSpPr>
+        <a:xfrm>
+          <a:off x="0" y="0"/>
+          <a:ext cx="0" cy="0"/>
+          <a:chOff x="0" y="0"/>
+          <a:chExt cx="0" cy="0"/>
+        </a:xfrm>
+      </p:grpSpPr>
       <p:sp>
         <p:nvSpPr>
           <p:cNvPr id="2" name="TextBox 1"/>
@@ -5975,7 +5777,7 @@
           <a:noFill/>
         </p:spPr>
         <p:txBody>
-          <a:bodyPr wrap="square" lIns="36576" rIns="36576" tIns="36576" bIns="36576" anchor="t">
+          <a:bodyPr wrap="square" lIns="36576" tIns="36576" rIns="36576" bIns="36576" anchor="t">
             <a:spAutoFit/>
           </a:bodyPr>
           <a:lstStyle/>
@@ -6017,7 +5819,7 @@
           <a:noFill/>
         </p:spPr>
         <p:txBody>
-          <a:bodyPr wrap="square" lIns="36576" rIns="36576" tIns="36576" bIns="36576" anchor="t">
+          <a:bodyPr wrap="square" lIns="36576" tIns="36576" rIns="36576" bIns="36576" anchor="t">
             <a:spAutoFit/>
           </a:bodyPr>
           <a:lstStyle/>
@@ -6059,7 +5861,7 @@
           <a:noFill/>
         </p:spPr>
         <p:txBody>
-          <a:bodyPr wrap="square" lIns="36576" rIns="36576" tIns="36576" bIns="36576" anchor="t">
+          <a:bodyPr wrap="square" lIns="36576" tIns="36576" rIns="36576" bIns="36576" anchor="t">
             <a:spAutoFit/>
           </a:bodyPr>
           <a:lstStyle/>
@@ -6122,7 +5924,7 @@
           </a:fontRef>
         </p:style>
         <p:txBody>
-          <a:bodyPr rtlCol="0" anchor="ctr" lIns="54864" rIns="54864" tIns="9144" bIns="9144"/>
+          <a:bodyPr lIns="54864" tIns="9144" rIns="54864" bIns="9144" rtlCol="0" anchor="ctr"/>
           <a:lstStyle/>
           <a:p>
             <a:pPr algn="ctr"/>
@@ -6180,6 +5982,7 @@
           <a:lstStyle/>
           <a:p>
             <a:pPr algn="ctr"/>
+            <a:endParaRPr/>
           </a:p>
         </p:txBody>
       </p:sp>
@@ -6200,7 +6003,7 @@
           <a:noFill/>
         </p:spPr>
         <p:txBody>
-          <a:bodyPr wrap="square" lIns="36576" rIns="36576" tIns="36576" bIns="36576" anchor="t">
+          <a:bodyPr wrap="square" lIns="36576" tIns="36576" rIns="36576" bIns="36576" anchor="t">
             <a:spAutoFit/>
           </a:bodyPr>
           <a:lstStyle/>
@@ -6242,7 +6045,7 @@
           <a:noFill/>
         </p:spPr>
         <p:txBody>
-          <a:bodyPr wrap="square" lIns="36576" rIns="36576" tIns="36576" bIns="36576" anchor="t">
+          <a:bodyPr wrap="square" lIns="36576" tIns="36576" rIns="36576" bIns="36576" anchor="t">
             <a:spAutoFit/>
           </a:bodyPr>
           <a:lstStyle/>
@@ -6309,6 +6112,7 @@
           <a:lstStyle/>
           <a:p>
             <a:pPr algn="ctr"/>
+            <a:endParaRPr/>
           </a:p>
         </p:txBody>
       </p:sp>
@@ -6329,7 +6133,7 @@
           <a:noFill/>
         </p:spPr>
         <p:txBody>
-          <a:bodyPr wrap="square" lIns="36576" rIns="36576" tIns="36576" bIns="36576" anchor="ctr">
+          <a:bodyPr wrap="square" lIns="36576" tIns="36576" rIns="36576" bIns="36576" anchor="ctr">
             <a:spAutoFit/>
           </a:bodyPr>
           <a:lstStyle/>
@@ -6396,6 +6200,7 @@
           <a:lstStyle/>
           <a:p>
             <a:pPr algn="ctr"/>
+            <a:endParaRPr/>
           </a:p>
         </p:txBody>
       </p:sp>
@@ -6416,7 +6221,7 @@
           <a:noFill/>
         </p:spPr>
         <p:txBody>
-          <a:bodyPr wrap="square" lIns="36576" rIns="36576" tIns="36576" bIns="36576" anchor="ctr">
+          <a:bodyPr wrap="square" lIns="36576" tIns="36576" rIns="36576" bIns="36576" anchor="ctr">
             <a:spAutoFit/>
           </a:bodyPr>
           <a:lstStyle/>
@@ -6483,6 +6288,7 @@
           <a:lstStyle/>
           <a:p>
             <a:pPr algn="ctr"/>
+            <a:endParaRPr/>
           </a:p>
         </p:txBody>
       </p:sp>
@@ -6503,7 +6309,7 @@
           <a:noFill/>
         </p:spPr>
         <p:txBody>
-          <a:bodyPr wrap="square" lIns="36576" rIns="36576" tIns="36576" bIns="36576" anchor="ctr">
+          <a:bodyPr wrap="square" lIns="36576" tIns="36576" rIns="36576" bIns="36576" anchor="ctr">
             <a:spAutoFit/>
           </a:bodyPr>
           <a:lstStyle/>
@@ -6568,6 +6374,7 @@
           <a:lstStyle/>
           <a:p>
             <a:pPr algn="ctr"/>
+            <a:endParaRPr/>
           </a:p>
         </p:txBody>
       </p:sp>
@@ -6588,7 +6395,7 @@
           <a:noFill/>
         </p:spPr>
         <p:txBody>
-          <a:bodyPr wrap="square" lIns="36576" rIns="36576" tIns="36576" bIns="36576" anchor="t">
+          <a:bodyPr wrap="square" lIns="36576" tIns="36576" rIns="36576" bIns="36576" anchor="t">
             <a:spAutoFit/>
           </a:bodyPr>
           <a:lstStyle/>
@@ -6655,6 +6462,7 @@
           <a:lstStyle/>
           <a:p>
             <a:pPr algn="ctr"/>
+            <a:endParaRPr/>
           </a:p>
         </p:txBody>
       </p:sp>
@@ -6675,7 +6483,7 @@
           <a:noFill/>
         </p:spPr>
         <p:txBody>
-          <a:bodyPr wrap="square" lIns="36576" rIns="36576" tIns="36576" bIns="36576" anchor="ctr">
+          <a:bodyPr wrap="square" lIns="36576" tIns="36576" rIns="36576" bIns="36576" anchor="ctr">
             <a:spAutoFit/>
           </a:bodyPr>
           <a:lstStyle/>
@@ -6742,6 +6550,7 @@
           <a:lstStyle/>
           <a:p>
             <a:pPr algn="ctr"/>
+            <a:endParaRPr/>
           </a:p>
         </p:txBody>
       </p:sp>
@@ -6762,7 +6571,7 @@
           <a:noFill/>
         </p:spPr>
         <p:txBody>
-          <a:bodyPr wrap="square" lIns="36576" rIns="36576" tIns="36576" bIns="36576" anchor="ctr">
+          <a:bodyPr wrap="square" lIns="36576" tIns="36576" rIns="36576" bIns="36576" anchor="ctr">
             <a:spAutoFit/>
           </a:bodyPr>
           <a:lstStyle/>
@@ -6829,6 +6638,7 @@
           <a:lstStyle/>
           <a:p>
             <a:pPr algn="ctr"/>
+            <a:endParaRPr/>
           </a:p>
         </p:txBody>
       </p:sp>
@@ -6849,7 +6659,7 @@
           <a:noFill/>
         </p:spPr>
         <p:txBody>
-          <a:bodyPr wrap="square" lIns="36576" rIns="36576" tIns="36576" bIns="36576" anchor="ctr">
+          <a:bodyPr wrap="square" lIns="36576" tIns="36576" rIns="36576" bIns="36576" anchor="ctr">
             <a:spAutoFit/>
           </a:bodyPr>
           <a:lstStyle/>
@@ -6914,6 +6724,7 @@
           <a:lstStyle/>
           <a:p>
             <a:pPr algn="ctr"/>
+            <a:endParaRPr/>
           </a:p>
         </p:txBody>
       </p:sp>
@@ -6955,7 +6766,7 @@
           </a:fontRef>
         </p:style>
         <p:txBody>
-          <a:bodyPr rtlCol="0" anchor="ctr" lIns="54864" rIns="54864" tIns="9144" bIns="9144"/>
+          <a:bodyPr lIns="54864" tIns="9144" rIns="54864" bIns="9144" rtlCol="0" anchor="ctr"/>
           <a:lstStyle/>
           <a:p>
             <a:pPr algn="ctr"/>
@@ -6988,7 +6799,7 @@
           <a:noFill/>
         </p:spPr>
         <p:txBody>
-          <a:bodyPr wrap="square" lIns="36576" rIns="36576" tIns="36576" bIns="36576" anchor="t">
+          <a:bodyPr wrap="square" lIns="36576" tIns="36576" rIns="36576" bIns="36576" anchor="t">
             <a:spAutoFit/>
           </a:bodyPr>
           <a:lstStyle/>
@@ -7055,6 +6866,7 @@
           <a:lstStyle/>
           <a:p>
             <a:pPr algn="ctr"/>
+            <a:endParaRPr/>
           </a:p>
         </p:txBody>
       </p:sp>
@@ -7075,7 +6887,7 @@
           <a:noFill/>
         </p:spPr>
         <p:txBody>
-          <a:bodyPr wrap="square" lIns="36576" rIns="36576" tIns="36576" bIns="36576" anchor="ctr">
+          <a:bodyPr wrap="square" lIns="36576" tIns="36576" rIns="36576" bIns="36576" anchor="ctr">
             <a:spAutoFit/>
           </a:bodyPr>
           <a:lstStyle/>
@@ -7142,6 +6954,7 @@
           <a:lstStyle/>
           <a:p>
             <a:pPr algn="ctr"/>
+            <a:endParaRPr/>
           </a:p>
         </p:txBody>
       </p:sp>
@@ -7162,7 +6975,7 @@
           <a:noFill/>
         </p:spPr>
         <p:txBody>
-          <a:bodyPr wrap="square" lIns="36576" rIns="36576" tIns="36576" bIns="36576" anchor="ctr">
+          <a:bodyPr wrap="square" lIns="36576" tIns="36576" rIns="36576" bIns="36576" anchor="ctr">
             <a:spAutoFit/>
           </a:bodyPr>
           <a:lstStyle/>
@@ -7229,6 +7042,7 @@
           <a:lstStyle/>
           <a:p>
             <a:pPr algn="ctr"/>
+            <a:endParaRPr/>
           </a:p>
         </p:txBody>
       </p:sp>
@@ -7249,7 +7063,7 @@
           <a:noFill/>
         </p:spPr>
         <p:txBody>
-          <a:bodyPr wrap="square" lIns="36576" rIns="36576" tIns="36576" bIns="36576" anchor="ctr">
+          <a:bodyPr wrap="square" lIns="36576" tIns="36576" rIns="36576" bIns="36576" anchor="ctr">
             <a:spAutoFit/>
           </a:bodyPr>
           <a:lstStyle/>
@@ -7314,6 +7128,7 @@
           <a:lstStyle/>
           <a:p>
             <a:pPr algn="ctr"/>
+            <a:endParaRPr/>
           </a:p>
         </p:txBody>
       </p:sp>
@@ -7355,7 +7170,7 @@
           </a:fontRef>
         </p:style>
         <p:txBody>
-          <a:bodyPr rtlCol="0" anchor="ctr" lIns="54864" rIns="54864" tIns="9144" bIns="9144"/>
+          <a:bodyPr lIns="54864" tIns="9144" rIns="54864" bIns="9144" rtlCol="0" anchor="ctr"/>
           <a:lstStyle/>
           <a:p>
             <a:pPr algn="ctr"/>
@@ -7413,6 +7228,7 @@
           <a:lstStyle/>
           <a:p>
             <a:pPr algn="ctr"/>
+            <a:endParaRPr/>
           </a:p>
         </p:txBody>
       </p:sp>
@@ -7433,7 +7249,7 @@
           <a:noFill/>
         </p:spPr>
         <p:txBody>
-          <a:bodyPr wrap="square" lIns="36576" rIns="36576" tIns="36576" bIns="36576" anchor="t">
+          <a:bodyPr wrap="square" lIns="36576" tIns="36576" rIns="36576" bIns="36576" anchor="t">
             <a:spAutoFit/>
           </a:bodyPr>
           <a:lstStyle/>
@@ -7500,6 +7316,7 @@
           <a:lstStyle/>
           <a:p>
             <a:pPr algn="ctr"/>
+            <a:endParaRPr/>
           </a:p>
         </p:txBody>
       </p:sp>
@@ -7520,7 +7337,7 @@
           <a:noFill/>
         </p:spPr>
         <p:txBody>
-          <a:bodyPr wrap="square" lIns="36576" rIns="36576" tIns="36576" bIns="36576" anchor="t">
+          <a:bodyPr wrap="square" lIns="36576" tIns="36576" rIns="36576" bIns="36576" anchor="t">
             <a:spAutoFit/>
           </a:bodyPr>
           <a:lstStyle/>
@@ -7587,6 +7404,7 @@
           <a:lstStyle/>
           <a:p>
             <a:pPr algn="ctr"/>
+            <a:endParaRPr/>
           </a:p>
         </p:txBody>
       </p:sp>
@@ -7607,7 +7425,7 @@
           <a:noFill/>
         </p:spPr>
         <p:txBody>
-          <a:bodyPr wrap="square" lIns="36576" rIns="36576" tIns="36576" bIns="36576" anchor="t">
+          <a:bodyPr wrap="square" lIns="36576" tIns="36576" rIns="36576" bIns="36576" anchor="t">
             <a:spAutoFit/>
           </a:bodyPr>
           <a:lstStyle/>
@@ -7674,6 +7492,7 @@
           <a:lstStyle/>
           <a:p>
             <a:pPr algn="ctr"/>
+            <a:endParaRPr/>
           </a:p>
         </p:txBody>
       </p:sp>
@@ -7715,7 +7534,7 @@
           </a:fontRef>
         </p:style>
         <p:txBody>
-          <a:bodyPr rtlCol="0" anchor="ctr" lIns="54864" rIns="54864" tIns="9144" bIns="9144"/>
+          <a:bodyPr lIns="54864" tIns="9144" rIns="54864" bIns="9144" rtlCol="0" anchor="ctr"/>
           <a:lstStyle/>
           <a:p>
             <a:pPr algn="ctr"/>
@@ -7748,7 +7567,7 @@
           <a:noFill/>
         </p:spPr>
         <p:txBody>
-          <a:bodyPr wrap="square" lIns="36576" rIns="36576" tIns="36576" bIns="36576" anchor="t">
+          <a:bodyPr wrap="square" lIns="36576" tIns="36576" rIns="36576" bIns="36576" anchor="t">
             <a:spAutoFit/>
           </a:bodyPr>
           <a:lstStyle/>
@@ -7790,7 +7609,7 @@
           <a:noFill/>
         </p:spPr>
         <p:txBody>
-          <a:bodyPr wrap="square" lIns="36576" rIns="36576" tIns="36576" bIns="36576" anchor="t">
+          <a:bodyPr wrap="square" lIns="36576" tIns="36576" rIns="36576" bIns="36576" anchor="t">
             <a:spAutoFit/>
           </a:bodyPr>
           <a:lstStyle/>
@@ -7857,6 +7676,7 @@
           <a:lstStyle/>
           <a:p>
             <a:pPr algn="ctr"/>
+            <a:endParaRPr/>
           </a:p>
         </p:txBody>
       </p:sp>
@@ -7898,7 +7718,7 @@
           </a:fontRef>
         </p:style>
         <p:txBody>
-          <a:bodyPr rtlCol="0" anchor="ctr" lIns="54864" rIns="54864" tIns="9144" bIns="9144"/>
+          <a:bodyPr lIns="54864" tIns="9144" rIns="54864" bIns="9144" rtlCol="0" anchor="ctr"/>
           <a:lstStyle/>
           <a:p>
             <a:pPr algn="ctr"/>
@@ -7931,7 +7751,7 @@
           <a:noFill/>
         </p:spPr>
         <p:txBody>
-          <a:bodyPr wrap="square" lIns="36576" rIns="36576" tIns="36576" bIns="36576" anchor="t">
+          <a:bodyPr wrap="square" lIns="36576" tIns="36576" rIns="36576" bIns="36576" anchor="t">
             <a:spAutoFit/>
           </a:bodyPr>
           <a:lstStyle/>
@@ -7973,7 +7793,7 @@
           <a:noFill/>
         </p:spPr>
         <p:txBody>
-          <a:bodyPr wrap="square" lIns="36576" rIns="36576" tIns="36576" bIns="36576" anchor="t">
+          <a:bodyPr wrap="square" lIns="36576" tIns="36576" rIns="36576" bIns="36576" anchor="t">
             <a:spAutoFit/>
           </a:bodyPr>
           <a:lstStyle/>
@@ -8040,6 +7860,7 @@
           <a:lstStyle/>
           <a:p>
             <a:pPr algn="ctr"/>
+            <a:endParaRPr/>
           </a:p>
         </p:txBody>
       </p:sp>
@@ -8081,7 +7902,7 @@
           </a:fontRef>
         </p:style>
         <p:txBody>
-          <a:bodyPr rtlCol="0" anchor="ctr" lIns="54864" rIns="54864" tIns="9144" bIns="9144"/>
+          <a:bodyPr lIns="54864" tIns="9144" rIns="54864" bIns="9144" rtlCol="0" anchor="ctr"/>
           <a:lstStyle/>
           <a:p>
             <a:pPr algn="ctr"/>
@@ -8114,7 +7935,7 @@
           <a:noFill/>
         </p:spPr>
         <p:txBody>
-          <a:bodyPr wrap="square" lIns="36576" rIns="36576" tIns="36576" bIns="36576" anchor="t">
+          <a:bodyPr wrap="square" lIns="36576" tIns="36576" rIns="36576" bIns="36576" anchor="t">
             <a:spAutoFit/>
           </a:bodyPr>
           <a:lstStyle/>
@@ -8156,7 +7977,7 @@
           <a:noFill/>
         </p:spPr>
         <p:txBody>
-          <a:bodyPr wrap="square" lIns="36576" rIns="36576" tIns="36576" bIns="36576" anchor="t">
+          <a:bodyPr wrap="square" lIns="36576" tIns="36576" rIns="36576" bIns="36576" anchor="t">
             <a:spAutoFit/>
           </a:bodyPr>
           <a:lstStyle/>
@@ -8223,6 +8044,7 @@
           <a:lstStyle/>
           <a:p>
             <a:pPr algn="ctr"/>
+            <a:endParaRPr/>
           </a:p>
         </p:txBody>
       </p:sp>
@@ -8264,7 +8086,7 @@
           </a:fontRef>
         </p:style>
         <p:txBody>
-          <a:bodyPr rtlCol="0" anchor="ctr" lIns="54864" rIns="54864" tIns="9144" bIns="9144"/>
+          <a:bodyPr lIns="54864" tIns="9144" rIns="54864" bIns="9144" rtlCol="0" anchor="ctr"/>
           <a:lstStyle/>
           <a:p>
             <a:pPr algn="ctr"/>
@@ -8297,7 +8119,7 @@
           <a:noFill/>
         </p:spPr>
         <p:txBody>
-          <a:bodyPr wrap="square" lIns="36576" rIns="36576" tIns="36576" bIns="36576" anchor="t">
+          <a:bodyPr wrap="square" lIns="36576" tIns="36576" rIns="36576" bIns="36576" anchor="t">
             <a:spAutoFit/>
           </a:bodyPr>
           <a:lstStyle/>
@@ -8339,7 +8161,7 @@
           <a:noFill/>
         </p:spPr>
         <p:txBody>
-          <a:bodyPr wrap="square" lIns="36576" rIns="36576" tIns="36576" bIns="36576" anchor="t">
+          <a:bodyPr wrap="square" lIns="36576" tIns="36576" rIns="36576" bIns="36576" anchor="t">
             <a:spAutoFit/>
           </a:bodyPr>
           <a:lstStyle/>
@@ -8416,7 +8238,7 @@
           <a:noFill/>
         </p:spPr>
         <p:txBody>
-          <a:bodyPr wrap="square" lIns="36576" rIns="36576" tIns="36576" bIns="36576" anchor="t">
+          <a:bodyPr wrap="square" lIns="36576" tIns="36576" rIns="36576" bIns="36576" anchor="t">
             <a:spAutoFit/>
           </a:bodyPr>
           <a:lstStyle/>
@@ -8450,7 +8272,7 @@
 </file>
 
 <file path=ppt/slides/slide11.xml><?xml version="1.0" encoding="utf-8"?>
-<p:sld xmlns:a="http://schemas.openxmlformats.org/drawingml/2006/main" xmlns:p="http://schemas.openxmlformats.org/presentationml/2006/main" xmlns:r="http://schemas.openxmlformats.org/officeDocument/2006/relationships">
+<p:sld xmlns:a="http://schemas.openxmlformats.org/drawingml/2006/main" xmlns:r="http://schemas.openxmlformats.org/officeDocument/2006/relationships" xmlns:p="http://schemas.openxmlformats.org/presentationml/2006/main">
   <p:cSld>
     <p:bg>
       <p:bgPr>
@@ -8466,7 +8288,14 @@
         <p:cNvGrpSpPr/>
         <p:nvPr/>
       </p:nvGrpSpPr>
-      <p:grpSpPr/>
+      <p:grpSpPr>
+        <a:xfrm>
+          <a:off x="0" y="0"/>
+          <a:ext cx="0" cy="0"/>
+          <a:chOff x="0" y="0"/>
+          <a:chExt cx="0" cy="0"/>
+        </a:xfrm>
+      </p:grpSpPr>
       <p:sp>
         <p:nvSpPr>
           <p:cNvPr id="2" name="TextBox 1"/>
@@ -8484,7 +8313,7 @@
           <a:noFill/>
         </p:spPr>
         <p:txBody>
-          <a:bodyPr wrap="square" lIns="36576" rIns="36576" tIns="36576" bIns="36576" anchor="t">
+          <a:bodyPr wrap="square" lIns="36576" tIns="36576" rIns="36576" bIns="36576" anchor="t">
             <a:spAutoFit/>
           </a:bodyPr>
           <a:lstStyle/>
@@ -8526,7 +8355,7 @@
           <a:noFill/>
         </p:spPr>
         <p:txBody>
-          <a:bodyPr wrap="square" lIns="36576" rIns="36576" tIns="36576" bIns="36576" anchor="t">
+          <a:bodyPr wrap="square" lIns="36576" tIns="36576" rIns="36576" bIns="36576" anchor="t">
             <a:spAutoFit/>
           </a:bodyPr>
           <a:lstStyle/>
@@ -8568,7 +8397,7 @@
           <a:noFill/>
         </p:spPr>
         <p:txBody>
-          <a:bodyPr wrap="square" lIns="36576" rIns="36576" tIns="36576" bIns="36576" anchor="t">
+          <a:bodyPr wrap="square" lIns="36576" tIns="36576" rIns="36576" bIns="36576" anchor="t">
             <a:spAutoFit/>
           </a:bodyPr>
           <a:lstStyle/>
@@ -8635,6 +8464,7 @@
           <a:lstStyle/>
           <a:p>
             <a:pPr algn="ctr"/>
+            <a:endParaRPr/>
           </a:p>
         </p:txBody>
       </p:sp>
@@ -8680,6 +8510,7 @@
           <a:lstStyle/>
           <a:p>
             <a:pPr algn="ctr"/>
+            <a:endParaRPr/>
           </a:p>
         </p:txBody>
       </p:sp>
@@ -8700,7 +8531,7 @@
           <a:noFill/>
         </p:spPr>
         <p:txBody>
-          <a:bodyPr wrap="square" lIns="36576" rIns="36576" tIns="36576" bIns="36576" anchor="ctr">
+          <a:bodyPr wrap="square" lIns="36576" tIns="36576" rIns="36576" bIns="36576" anchor="ctr">
             <a:spAutoFit/>
           </a:bodyPr>
           <a:lstStyle/>
@@ -8742,7 +8573,7 @@
           <a:noFill/>
         </p:spPr>
         <p:txBody>
-          <a:bodyPr wrap="square" lIns="36576" rIns="36576" tIns="36576" bIns="36576" anchor="t">
+          <a:bodyPr wrap="square" lIns="36576" tIns="36576" rIns="36576" bIns="36576" anchor="t">
             <a:spAutoFit/>
           </a:bodyPr>
           <a:lstStyle/>
@@ -8805,7 +8636,7 @@
           </a:fontRef>
         </p:style>
         <p:txBody>
-          <a:bodyPr rtlCol="0" anchor="ctr" lIns="54864" rIns="54864" tIns="9144" bIns="9144"/>
+          <a:bodyPr lIns="54864" tIns="9144" rIns="54864" bIns="9144" rtlCol="0" anchor="ctr"/>
           <a:lstStyle/>
           <a:p>
             <a:pPr algn="ctr"/>
@@ -8838,7 +8669,7 @@
           <a:noFill/>
         </p:spPr>
         <p:txBody>
-          <a:bodyPr wrap="square" lIns="36576" rIns="36576" tIns="36576" bIns="36576" anchor="t">
+          <a:bodyPr wrap="square" lIns="36576" tIns="36576" rIns="36576" bIns="36576" anchor="t">
             <a:spAutoFit/>
           </a:bodyPr>
           <a:lstStyle/>
@@ -8905,6 +8736,7 @@
           <a:lstStyle/>
           <a:p>
             <a:pPr algn="ctr"/>
+            <a:endParaRPr/>
           </a:p>
         </p:txBody>
       </p:sp>
@@ -8950,6 +8782,7 @@
           <a:lstStyle/>
           <a:p>
             <a:pPr algn="ctr"/>
+            <a:endParaRPr/>
           </a:p>
         </p:txBody>
       </p:sp>
@@ -8970,7 +8803,7 @@
           <a:noFill/>
         </p:spPr>
         <p:txBody>
-          <a:bodyPr wrap="square" lIns="36576" rIns="36576" tIns="36576" bIns="36576" anchor="ctr">
+          <a:bodyPr wrap="square" lIns="36576" tIns="36576" rIns="36576" bIns="36576" anchor="ctr">
             <a:spAutoFit/>
           </a:bodyPr>
           <a:lstStyle/>
@@ -9012,7 +8845,7 @@
           <a:noFill/>
         </p:spPr>
         <p:txBody>
-          <a:bodyPr wrap="square" lIns="36576" rIns="36576" tIns="36576" bIns="36576" anchor="t">
+          <a:bodyPr wrap="square" lIns="36576" tIns="36576" rIns="36576" bIns="36576" anchor="t">
             <a:spAutoFit/>
           </a:bodyPr>
           <a:lstStyle/>
@@ -9075,7 +8908,7 @@
           </a:fontRef>
         </p:style>
         <p:txBody>
-          <a:bodyPr rtlCol="0" anchor="ctr" lIns="54864" rIns="54864" tIns="9144" bIns="9144"/>
+          <a:bodyPr lIns="54864" tIns="9144" rIns="54864" bIns="9144" rtlCol="0" anchor="ctr"/>
           <a:lstStyle/>
           <a:p>
             <a:pPr algn="ctr"/>
@@ -9108,7 +8941,7 @@
           <a:noFill/>
         </p:spPr>
         <p:txBody>
-          <a:bodyPr wrap="square" lIns="36576" rIns="36576" tIns="36576" bIns="36576" anchor="t">
+          <a:bodyPr wrap="square" lIns="36576" tIns="36576" rIns="36576" bIns="36576" anchor="t">
             <a:spAutoFit/>
           </a:bodyPr>
           <a:lstStyle/>
@@ -9175,6 +9008,7 @@
           <a:lstStyle/>
           <a:p>
             <a:pPr algn="ctr"/>
+            <a:endParaRPr/>
           </a:p>
         </p:txBody>
       </p:sp>
@@ -9220,6 +9054,7 @@
           <a:lstStyle/>
           <a:p>
             <a:pPr algn="ctr"/>
+            <a:endParaRPr/>
           </a:p>
         </p:txBody>
       </p:sp>
@@ -9240,7 +9075,7 @@
           <a:noFill/>
         </p:spPr>
         <p:txBody>
-          <a:bodyPr wrap="square" lIns="36576" rIns="36576" tIns="36576" bIns="36576" anchor="ctr">
+          <a:bodyPr wrap="square" lIns="36576" tIns="36576" rIns="36576" bIns="36576" anchor="ctr">
             <a:spAutoFit/>
           </a:bodyPr>
           <a:lstStyle/>
@@ -9282,7 +9117,7 @@
           <a:noFill/>
         </p:spPr>
         <p:txBody>
-          <a:bodyPr wrap="square" lIns="36576" rIns="36576" tIns="36576" bIns="36576" anchor="t">
+          <a:bodyPr wrap="square" lIns="36576" tIns="36576" rIns="36576" bIns="36576" anchor="t">
             <a:spAutoFit/>
           </a:bodyPr>
           <a:lstStyle/>
@@ -9345,7 +9180,7 @@
           </a:fontRef>
         </p:style>
         <p:txBody>
-          <a:bodyPr rtlCol="0" anchor="ctr" lIns="54864" rIns="54864" tIns="9144" bIns="9144"/>
+          <a:bodyPr lIns="54864" tIns="9144" rIns="54864" bIns="9144" rtlCol="0" anchor="ctr"/>
           <a:lstStyle/>
           <a:p>
             <a:pPr algn="ctr"/>
@@ -9378,7 +9213,7 @@
           <a:noFill/>
         </p:spPr>
         <p:txBody>
-          <a:bodyPr wrap="square" lIns="36576" rIns="36576" tIns="36576" bIns="36576" anchor="t">
+          <a:bodyPr wrap="square" lIns="36576" tIns="36576" rIns="36576" bIns="36576" anchor="t">
             <a:spAutoFit/>
           </a:bodyPr>
           <a:lstStyle/>
@@ -9420,7 +9255,7 @@
           <a:noFill/>
         </p:spPr>
         <p:txBody>
-          <a:bodyPr wrap="square" lIns="36576" rIns="36576" tIns="36576" bIns="36576" anchor="t">
+          <a:bodyPr wrap="square" lIns="36576" tIns="36576" rIns="36576" bIns="36576" anchor="t">
             <a:spAutoFit/>
           </a:bodyPr>
           <a:lstStyle/>
@@ -9497,7 +9332,7 @@
           <a:noFill/>
         </p:spPr>
         <p:txBody>
-          <a:bodyPr wrap="square" lIns="36576" rIns="36576" tIns="36576" bIns="36576" anchor="t">
+          <a:bodyPr wrap="square" lIns="36576" tIns="36576" rIns="36576" bIns="36576" anchor="t">
             <a:spAutoFit/>
           </a:bodyPr>
           <a:lstStyle/>
@@ -9531,7 +9366,7 @@
 </file>
 
 <file path=ppt/slides/slide12.xml><?xml version="1.0" encoding="utf-8"?>
-<p:sld xmlns:a="http://schemas.openxmlformats.org/drawingml/2006/main" xmlns:p="http://schemas.openxmlformats.org/presentationml/2006/main" xmlns:r="http://schemas.openxmlformats.org/officeDocument/2006/relationships">
+<p:sld xmlns:a="http://schemas.openxmlformats.org/drawingml/2006/main" xmlns:r="http://schemas.openxmlformats.org/officeDocument/2006/relationships" xmlns:p="http://schemas.openxmlformats.org/presentationml/2006/main">
   <p:cSld>
     <p:bg>
       <p:bgPr>
@@ -9547,7 +9382,14 @@
         <p:cNvGrpSpPr/>
         <p:nvPr/>
       </p:nvGrpSpPr>
-      <p:grpSpPr/>
+      <p:grpSpPr>
+        <a:xfrm>
+          <a:off x="0" y="0"/>
+          <a:ext cx="0" cy="0"/>
+          <a:chOff x="0" y="0"/>
+          <a:chExt cx="0" cy="0"/>
+        </a:xfrm>
+      </p:grpSpPr>
       <p:sp>
         <p:nvSpPr>
           <p:cNvPr id="2" name="TextBox 1"/>
@@ -9565,7 +9407,7 @@
           <a:noFill/>
         </p:spPr>
         <p:txBody>
-          <a:bodyPr wrap="square" lIns="36576" rIns="36576" tIns="36576" bIns="36576" anchor="t">
+          <a:bodyPr wrap="square" lIns="36576" tIns="36576" rIns="36576" bIns="36576" anchor="t">
             <a:spAutoFit/>
           </a:bodyPr>
           <a:lstStyle/>
@@ -9607,7 +9449,7 @@
           <a:noFill/>
         </p:spPr>
         <p:txBody>
-          <a:bodyPr wrap="square" lIns="36576" rIns="36576" tIns="36576" bIns="36576" anchor="t">
+          <a:bodyPr wrap="square" lIns="36576" tIns="36576" rIns="36576" bIns="36576" anchor="t">
             <a:spAutoFit/>
           </a:bodyPr>
           <a:lstStyle/>
@@ -9649,7 +9491,7 @@
           <a:noFill/>
         </p:spPr>
         <p:txBody>
-          <a:bodyPr wrap="square" lIns="36576" rIns="36576" tIns="36576" bIns="36576" anchor="t">
+          <a:bodyPr wrap="square" lIns="36576" tIns="36576" rIns="36576" bIns="36576" anchor="t">
             <a:spAutoFit/>
           </a:bodyPr>
           <a:lstStyle/>
@@ -9716,6 +9558,7 @@
           <a:lstStyle/>
           <a:p>
             <a:pPr algn="ctr"/>
+            <a:endParaRPr/>
           </a:p>
         </p:txBody>
       </p:sp>
@@ -9757,7 +9600,7 @@
           </a:fontRef>
         </p:style>
         <p:txBody>
-          <a:bodyPr rtlCol="0" anchor="ctr" lIns="54864" rIns="54864" tIns="9144" bIns="9144"/>
+          <a:bodyPr lIns="54864" tIns="9144" rIns="54864" bIns="9144" rtlCol="0" anchor="ctr"/>
           <a:lstStyle/>
           <a:p>
             <a:pPr algn="ctr"/>
@@ -9790,7 +9633,7 @@
           <a:noFill/>
         </p:spPr>
         <p:txBody>
-          <a:bodyPr wrap="square" lIns="36576" rIns="36576" tIns="36576" bIns="36576" anchor="t">
+          <a:bodyPr wrap="square" lIns="36576" tIns="36576" rIns="36576" bIns="36576" anchor="t">
             <a:spAutoFit/>
           </a:bodyPr>
           <a:lstStyle/>
@@ -9888,7 +9731,7 @@
           </a:fontRef>
         </p:style>
         <p:txBody>
-          <a:bodyPr rtlCol="0" anchor="ctr" lIns="54864" rIns="54864" tIns="9144" bIns="9144"/>
+          <a:bodyPr lIns="54864" tIns="9144" rIns="54864" bIns="9144" rtlCol="0" anchor="ctr"/>
           <a:lstStyle/>
           <a:p>
             <a:pPr algn="ctr"/>
@@ -9921,7 +9764,7 @@
           <a:noFill/>
         </p:spPr>
         <p:txBody>
-          <a:bodyPr wrap="square" lIns="36576" rIns="36576" tIns="36576" bIns="36576" anchor="t">
+          <a:bodyPr wrap="square" lIns="36576" tIns="36576" rIns="36576" bIns="36576" anchor="t">
             <a:spAutoFit/>
           </a:bodyPr>
           <a:lstStyle/>
@@ -9988,6 +9831,7 @@
           <a:lstStyle/>
           <a:p>
             <a:pPr algn="ctr"/>
+            <a:endParaRPr/>
           </a:p>
         </p:txBody>
       </p:sp>
@@ -10029,7 +9873,7 @@
           </a:fontRef>
         </p:style>
         <p:txBody>
-          <a:bodyPr rtlCol="0" anchor="ctr" lIns="54864" rIns="54864" tIns="9144" bIns="9144"/>
+          <a:bodyPr lIns="54864" tIns="9144" rIns="54864" bIns="9144" rtlCol="0" anchor="ctr"/>
           <a:lstStyle/>
           <a:p>
             <a:pPr algn="ctr"/>
@@ -10062,7 +9906,7 @@
           <a:noFill/>
         </p:spPr>
         <p:txBody>
-          <a:bodyPr wrap="square" lIns="36576" rIns="36576" tIns="36576" bIns="36576" anchor="t">
+          <a:bodyPr wrap="square" lIns="36576" tIns="36576" rIns="36576" bIns="36576" anchor="t">
             <a:spAutoFit/>
           </a:bodyPr>
           <a:lstStyle/>
@@ -10160,7 +10004,7 @@
           </a:fontRef>
         </p:style>
         <p:txBody>
-          <a:bodyPr rtlCol="0" anchor="ctr" lIns="54864" rIns="54864" tIns="9144" bIns="9144"/>
+          <a:bodyPr lIns="54864" tIns="9144" rIns="54864" bIns="9144" rtlCol="0" anchor="ctr"/>
           <a:lstStyle/>
           <a:p>
             <a:pPr algn="ctr"/>
@@ -10193,7 +10037,7 @@
           <a:noFill/>
         </p:spPr>
         <p:txBody>
-          <a:bodyPr wrap="square" lIns="36576" rIns="36576" tIns="36576" bIns="36576" anchor="t">
+          <a:bodyPr wrap="square" lIns="36576" tIns="36576" rIns="36576" bIns="36576" anchor="t">
             <a:spAutoFit/>
           </a:bodyPr>
           <a:lstStyle/>
@@ -10260,6 +10104,7 @@
           <a:lstStyle/>
           <a:p>
             <a:pPr algn="ctr"/>
+            <a:endParaRPr/>
           </a:p>
         </p:txBody>
       </p:sp>
@@ -10301,7 +10146,7 @@
           </a:fontRef>
         </p:style>
         <p:txBody>
-          <a:bodyPr rtlCol="0" anchor="ctr" lIns="54864" rIns="54864" tIns="9144" bIns="9144"/>
+          <a:bodyPr lIns="54864" tIns="9144" rIns="54864" bIns="9144" rtlCol="0" anchor="ctr"/>
           <a:lstStyle/>
           <a:p>
             <a:pPr algn="ctr"/>
@@ -10334,7 +10179,7 @@
           <a:noFill/>
         </p:spPr>
         <p:txBody>
-          <a:bodyPr wrap="square" lIns="36576" rIns="36576" tIns="36576" bIns="36576" anchor="t">
+          <a:bodyPr wrap="square" lIns="36576" tIns="36576" rIns="36576" bIns="36576" anchor="t">
             <a:spAutoFit/>
           </a:bodyPr>
           <a:lstStyle/>
@@ -10432,7 +10277,7 @@
           </a:fontRef>
         </p:style>
         <p:txBody>
-          <a:bodyPr rtlCol="0" anchor="ctr" lIns="54864" rIns="54864" tIns="9144" bIns="9144"/>
+          <a:bodyPr lIns="54864" tIns="9144" rIns="54864" bIns="9144" rtlCol="0" anchor="ctr"/>
           <a:lstStyle/>
           <a:p>
             <a:pPr algn="ctr"/>
@@ -10465,7 +10310,7 @@
           <a:noFill/>
         </p:spPr>
         <p:txBody>
-          <a:bodyPr wrap="square" lIns="36576" rIns="36576" tIns="36576" bIns="36576" anchor="t">
+          <a:bodyPr wrap="square" lIns="36576" tIns="36576" rIns="36576" bIns="36576" anchor="t">
             <a:spAutoFit/>
           </a:bodyPr>
           <a:lstStyle/>
@@ -10532,6 +10377,7 @@
           <a:lstStyle/>
           <a:p>
             <a:pPr algn="ctr"/>
+            <a:endParaRPr/>
           </a:p>
         </p:txBody>
       </p:sp>
@@ -10573,7 +10419,7 @@
           </a:fontRef>
         </p:style>
         <p:txBody>
-          <a:bodyPr rtlCol="0" anchor="ctr" lIns="54864" rIns="54864" tIns="9144" bIns="9144"/>
+          <a:bodyPr lIns="54864" tIns="9144" rIns="54864" bIns="9144" rtlCol="0" anchor="ctr"/>
           <a:lstStyle/>
           <a:p>
             <a:pPr algn="ctr"/>
@@ -10606,7 +10452,7 @@
           <a:noFill/>
         </p:spPr>
         <p:txBody>
-          <a:bodyPr wrap="square" lIns="36576" rIns="36576" tIns="36576" bIns="36576" anchor="t">
+          <a:bodyPr wrap="square" lIns="36576" tIns="36576" rIns="36576" bIns="36576" anchor="t">
             <a:spAutoFit/>
           </a:bodyPr>
           <a:lstStyle/>
@@ -10704,7 +10550,7 @@
           </a:fontRef>
         </p:style>
         <p:txBody>
-          <a:bodyPr rtlCol="0" anchor="ctr" lIns="54864" rIns="54864" tIns="9144" bIns="9144"/>
+          <a:bodyPr lIns="54864" tIns="9144" rIns="54864" bIns="9144" rtlCol="0" anchor="ctr"/>
           <a:lstStyle/>
           <a:p>
             <a:pPr algn="ctr"/>
@@ -10737,7 +10583,7 @@
           <a:noFill/>
         </p:spPr>
         <p:txBody>
-          <a:bodyPr wrap="square" lIns="36576" rIns="36576" tIns="36576" bIns="36576" anchor="t">
+          <a:bodyPr wrap="square" lIns="36576" tIns="36576" rIns="36576" bIns="36576" anchor="t">
             <a:spAutoFit/>
           </a:bodyPr>
           <a:lstStyle/>
@@ -10800,7 +10646,7 @@
           </a:fontRef>
         </p:style>
         <p:txBody>
-          <a:bodyPr rtlCol="0" anchor="ctr" lIns="54864" rIns="54864" tIns="9144" bIns="9144"/>
+          <a:bodyPr lIns="54864" tIns="9144" rIns="54864" bIns="9144" rtlCol="0" anchor="ctr"/>
           <a:lstStyle/>
           <a:p>
             <a:pPr algn="ctr"/>
@@ -10868,7 +10714,7 @@
           <a:noFill/>
         </p:spPr>
         <p:txBody>
-          <a:bodyPr wrap="square" lIns="36576" rIns="36576" tIns="36576" bIns="36576" anchor="t">
+          <a:bodyPr wrap="square" lIns="36576" tIns="36576" rIns="36576" bIns="36576" anchor="t">
             <a:spAutoFit/>
           </a:bodyPr>
           <a:lstStyle/>
@@ -10902,7 +10748,7 @@
 </file>
 
 <file path=ppt/slides/slide13.xml><?xml version="1.0" encoding="utf-8"?>
-<p:sld xmlns:a="http://schemas.openxmlformats.org/drawingml/2006/main" xmlns:p="http://schemas.openxmlformats.org/presentationml/2006/main" xmlns:r="http://schemas.openxmlformats.org/officeDocument/2006/relationships">
+<p:sld xmlns:a="http://schemas.openxmlformats.org/drawingml/2006/main" xmlns:r="http://schemas.openxmlformats.org/officeDocument/2006/relationships" xmlns:p="http://schemas.openxmlformats.org/presentationml/2006/main">
   <p:cSld>
     <p:bg>
       <p:bgPr>
@@ -10918,7 +10764,14 @@
         <p:cNvGrpSpPr/>
         <p:nvPr/>
       </p:nvGrpSpPr>
-      <p:grpSpPr/>
+      <p:grpSpPr>
+        <a:xfrm>
+          <a:off x="0" y="0"/>
+          <a:ext cx="0" cy="0"/>
+          <a:chOff x="0" y="0"/>
+          <a:chExt cx="0" cy="0"/>
+        </a:xfrm>
+      </p:grpSpPr>
       <p:sp>
         <p:nvSpPr>
           <p:cNvPr id="2" name="TextBox 1"/>
@@ -10936,7 +10789,7 @@
           <a:noFill/>
         </p:spPr>
         <p:txBody>
-          <a:bodyPr wrap="square" lIns="36576" rIns="36576" tIns="36576" bIns="36576" anchor="t">
+          <a:bodyPr wrap="square" lIns="36576" tIns="36576" rIns="36576" bIns="36576" anchor="t">
             <a:spAutoFit/>
           </a:bodyPr>
           <a:lstStyle/>
@@ -10978,7 +10831,7 @@
           <a:noFill/>
         </p:spPr>
         <p:txBody>
-          <a:bodyPr wrap="square" lIns="36576" rIns="36576" tIns="36576" bIns="36576" anchor="t">
+          <a:bodyPr wrap="square" lIns="36576" tIns="36576" rIns="36576" bIns="36576" anchor="t">
             <a:spAutoFit/>
           </a:bodyPr>
           <a:lstStyle/>
@@ -11020,7 +10873,7 @@
           <a:noFill/>
         </p:spPr>
         <p:txBody>
-          <a:bodyPr wrap="square" lIns="36576" rIns="36576" tIns="36576" bIns="36576" anchor="t">
+          <a:bodyPr wrap="square" lIns="36576" tIns="36576" rIns="36576" bIns="36576" anchor="t">
             <a:spAutoFit/>
           </a:bodyPr>
           <a:lstStyle/>
@@ -11087,6 +10940,7 @@
           <a:lstStyle/>
           <a:p>
             <a:pPr algn="ctr"/>
+            <a:endParaRPr/>
           </a:p>
         </p:txBody>
       </p:sp>
@@ -11098,7 +10952,7 @@
         </p:nvSpPr>
         <p:spPr>
           <a:xfrm>
-            <a:off x="960120" y="1618488"/>
+            <a:off x="960120" y="1510908"/>
             <a:ext cx="2468880" cy="384048"/>
           </a:xfrm>
           <a:prstGeom prst="rect">
@@ -11107,7 +10961,7 @@
           <a:noFill/>
         </p:spPr>
         <p:txBody>
-          <a:bodyPr wrap="square" lIns="36576" rIns="36576" tIns="36576" bIns="36576" anchor="t">
+          <a:bodyPr wrap="square" lIns="36576" tIns="36576" rIns="36576" bIns="36576" anchor="t">
             <a:spAutoFit/>
           </a:bodyPr>
           <a:lstStyle/>
@@ -11121,7 +10975,7 @@
               </a:spcAft>
             </a:pPr>
             <a:r>
-              <a:rPr sz="2300" b="1" i="0">
+              <a:rPr sz="2300" b="1" i="0" dirty="0">
                 <a:solidFill>
                   <a:srgbClr val="F4B942"/>
                 </a:solidFill>
@@ -11149,7 +11003,7 @@
           <a:noFill/>
         </p:spPr>
         <p:txBody>
-          <a:bodyPr wrap="square" lIns="36576" rIns="36576" tIns="36576" bIns="36576" anchor="t">
+          <a:bodyPr wrap="square" lIns="36576" tIns="36576" rIns="36576" bIns="36576" anchor="t">
             <a:spAutoFit/>
           </a:bodyPr>
           <a:lstStyle/>
@@ -11251,6 +11105,7 @@
           <a:lstStyle/>
           <a:p>
             <a:pPr algn="ctr"/>
+            <a:endParaRPr/>
           </a:p>
         </p:txBody>
       </p:sp>
@@ -11271,7 +11126,7 @@
           <a:noFill/>
         </p:spPr>
         <p:txBody>
-          <a:bodyPr wrap="square" lIns="36576" rIns="36576" tIns="36576" bIns="36576" anchor="ctr">
+          <a:bodyPr wrap="square" lIns="36576" tIns="36576" rIns="36576" bIns="36576" anchor="ctr">
             <a:spAutoFit/>
           </a:bodyPr>
           <a:lstStyle/>
@@ -11313,7 +11168,7 @@
           <a:noFill/>
         </p:spPr>
         <p:txBody>
-          <a:bodyPr wrap="square" lIns="36576" rIns="36576" tIns="36576" bIns="36576" anchor="t">
+          <a:bodyPr wrap="square" lIns="36576" tIns="36576" rIns="36576" bIns="36576" anchor="t">
             <a:spAutoFit/>
           </a:bodyPr>
           <a:lstStyle/>
@@ -11355,7 +11210,7 @@
           <a:noFill/>
         </p:spPr>
         <p:txBody>
-          <a:bodyPr wrap="square" lIns="36576" rIns="36576" tIns="36576" bIns="36576" anchor="t">
+          <a:bodyPr wrap="square" lIns="36576" tIns="36576" rIns="36576" bIns="36576" anchor="t">
             <a:spAutoFit/>
           </a:bodyPr>
           <a:lstStyle/>
@@ -11422,6 +11277,7 @@
           <a:lstStyle/>
           <a:p>
             <a:pPr algn="ctr"/>
+            <a:endParaRPr/>
           </a:p>
         </p:txBody>
       </p:sp>
@@ -11442,7 +11298,7 @@
           <a:noFill/>
         </p:spPr>
         <p:txBody>
-          <a:bodyPr wrap="square" lIns="36576" rIns="36576" tIns="36576" bIns="36576" anchor="ctr">
+          <a:bodyPr wrap="square" lIns="36576" tIns="36576" rIns="36576" bIns="36576" anchor="ctr">
             <a:spAutoFit/>
           </a:bodyPr>
           <a:lstStyle/>
@@ -11484,7 +11340,7 @@
           <a:noFill/>
         </p:spPr>
         <p:txBody>
-          <a:bodyPr wrap="square" lIns="36576" rIns="36576" tIns="36576" bIns="36576" anchor="t">
+          <a:bodyPr wrap="square" lIns="36576" tIns="36576" rIns="36576" bIns="36576" anchor="t">
             <a:spAutoFit/>
           </a:bodyPr>
           <a:lstStyle/>
@@ -11526,7 +11382,7 @@
           <a:noFill/>
         </p:spPr>
         <p:txBody>
-          <a:bodyPr wrap="square" lIns="36576" rIns="36576" tIns="36576" bIns="36576" anchor="t">
+          <a:bodyPr wrap="square" lIns="36576" tIns="36576" rIns="36576" bIns="36576" anchor="t">
             <a:spAutoFit/>
           </a:bodyPr>
           <a:lstStyle/>
@@ -11593,6 +11449,7 @@
           <a:lstStyle/>
           <a:p>
             <a:pPr algn="ctr"/>
+            <a:endParaRPr/>
           </a:p>
         </p:txBody>
       </p:sp>
@@ -11613,7 +11470,7 @@
           <a:noFill/>
         </p:spPr>
         <p:txBody>
-          <a:bodyPr wrap="square" lIns="36576" rIns="36576" tIns="36576" bIns="36576" anchor="ctr">
+          <a:bodyPr wrap="square" lIns="36576" tIns="36576" rIns="36576" bIns="36576" anchor="ctr">
             <a:spAutoFit/>
           </a:bodyPr>
           <a:lstStyle/>
@@ -11655,7 +11512,7 @@
           <a:noFill/>
         </p:spPr>
         <p:txBody>
-          <a:bodyPr wrap="square" lIns="36576" rIns="36576" tIns="36576" bIns="36576" anchor="t">
+          <a:bodyPr wrap="square" lIns="36576" tIns="36576" rIns="36576" bIns="36576" anchor="t">
             <a:spAutoFit/>
           </a:bodyPr>
           <a:lstStyle/>
@@ -11697,7 +11554,7 @@
           <a:noFill/>
         </p:spPr>
         <p:txBody>
-          <a:bodyPr wrap="square" lIns="36576" rIns="36576" tIns="36576" bIns="36576" anchor="t">
+          <a:bodyPr wrap="square" lIns="36576" tIns="36576" rIns="36576" bIns="36576" anchor="t">
             <a:spAutoFit/>
           </a:bodyPr>
           <a:lstStyle/>
@@ -11764,6 +11621,7 @@
           <a:lstStyle/>
           <a:p>
             <a:pPr algn="ctr"/>
+            <a:endParaRPr/>
           </a:p>
         </p:txBody>
       </p:sp>
@@ -11784,7 +11642,7 @@
           <a:noFill/>
         </p:spPr>
         <p:txBody>
-          <a:bodyPr wrap="square" lIns="36576" rIns="36576" tIns="36576" bIns="36576" anchor="ctr">
+          <a:bodyPr wrap="square" lIns="36576" tIns="36576" rIns="36576" bIns="36576" anchor="ctr">
             <a:spAutoFit/>
           </a:bodyPr>
           <a:lstStyle/>
@@ -11826,7 +11684,7 @@
           <a:noFill/>
         </p:spPr>
         <p:txBody>
-          <a:bodyPr wrap="square" lIns="36576" rIns="36576" tIns="36576" bIns="36576" anchor="t">
+          <a:bodyPr wrap="square" lIns="36576" tIns="36576" rIns="36576" bIns="36576" anchor="t">
             <a:spAutoFit/>
           </a:bodyPr>
           <a:lstStyle/>
@@ -11868,7 +11726,7 @@
           <a:noFill/>
         </p:spPr>
         <p:txBody>
-          <a:bodyPr wrap="square" lIns="36576" rIns="36576" tIns="36576" bIns="36576" anchor="t">
+          <a:bodyPr wrap="square" lIns="36576" tIns="36576" rIns="36576" bIns="36576" anchor="t">
             <a:spAutoFit/>
           </a:bodyPr>
           <a:lstStyle/>
@@ -11935,6 +11793,7 @@
           <a:lstStyle/>
           <a:p>
             <a:pPr algn="ctr"/>
+            <a:endParaRPr/>
           </a:p>
         </p:txBody>
       </p:sp>
@@ -11955,7 +11814,7 @@
           <a:noFill/>
         </p:spPr>
         <p:txBody>
-          <a:bodyPr wrap="square" lIns="36576" rIns="36576" tIns="36576" bIns="36576" anchor="ctr">
+          <a:bodyPr wrap="square" lIns="36576" tIns="36576" rIns="36576" bIns="36576" anchor="ctr">
             <a:spAutoFit/>
           </a:bodyPr>
           <a:lstStyle/>
@@ -11997,7 +11856,7 @@
           <a:noFill/>
         </p:spPr>
         <p:txBody>
-          <a:bodyPr wrap="square" lIns="36576" rIns="36576" tIns="36576" bIns="36576" anchor="t">
+          <a:bodyPr wrap="square" lIns="36576" tIns="36576" rIns="36576" bIns="36576" anchor="t">
             <a:spAutoFit/>
           </a:bodyPr>
           <a:lstStyle/>
@@ -12039,7 +11898,7 @@
           <a:noFill/>
         </p:spPr>
         <p:txBody>
-          <a:bodyPr wrap="square" lIns="36576" rIns="36576" tIns="36576" bIns="36576" anchor="t">
+          <a:bodyPr wrap="square" lIns="36576" tIns="36576" rIns="36576" bIns="36576" anchor="t">
             <a:spAutoFit/>
           </a:bodyPr>
           <a:lstStyle/>
@@ -12081,7 +11940,7 @@
           <a:noFill/>
         </p:spPr>
         <p:txBody>
-          <a:bodyPr wrap="square" lIns="36576" rIns="36576" tIns="36576" bIns="36576" anchor="t">
+          <a:bodyPr wrap="square" lIns="36576" tIns="36576" rIns="36576" bIns="36576" anchor="t">
             <a:spAutoFit/>
           </a:bodyPr>
           <a:lstStyle/>
@@ -12158,7 +12017,7 @@
           <a:noFill/>
         </p:spPr>
         <p:txBody>
-          <a:bodyPr wrap="square" lIns="36576" rIns="36576" tIns="36576" bIns="36576" anchor="t">
+          <a:bodyPr wrap="square" lIns="36576" tIns="36576" rIns="36576" bIns="36576" anchor="t">
             <a:spAutoFit/>
           </a:bodyPr>
           <a:lstStyle/>
@@ -12192,7 +12051,7 @@
 </file>
 
 <file path=ppt/slides/slide14.xml><?xml version="1.0" encoding="utf-8"?>
-<p:sld xmlns:a="http://schemas.openxmlformats.org/drawingml/2006/main" xmlns:p="http://schemas.openxmlformats.org/presentationml/2006/main" xmlns:r="http://schemas.openxmlformats.org/officeDocument/2006/relationships">
+<p:sld xmlns:a="http://schemas.openxmlformats.org/drawingml/2006/main" xmlns:r="http://schemas.openxmlformats.org/officeDocument/2006/relationships" xmlns:p="http://schemas.openxmlformats.org/presentationml/2006/main">
   <p:cSld>
     <p:bg>
       <p:bgPr>
@@ -12208,7 +12067,14 @@
         <p:cNvGrpSpPr/>
         <p:nvPr/>
       </p:nvGrpSpPr>
-      <p:grpSpPr/>
+      <p:grpSpPr>
+        <a:xfrm>
+          <a:off x="0" y="0"/>
+          <a:ext cx="0" cy="0"/>
+          <a:chOff x="0" y="0"/>
+          <a:chExt cx="0" cy="0"/>
+        </a:xfrm>
+      </p:grpSpPr>
       <p:sp>
         <p:nvSpPr>
           <p:cNvPr id="2" name="Rounded Rectangle 1"/>
@@ -12247,7 +12113,7 @@
           </a:fontRef>
         </p:style>
         <p:txBody>
-          <a:bodyPr rtlCol="0" anchor="ctr" lIns="54864" rIns="54864" tIns="9144" bIns="9144"/>
+          <a:bodyPr lIns="54864" tIns="9144" rIns="54864" bIns="9144" rtlCol="0" anchor="ctr"/>
           <a:lstStyle/>
           <a:p>
             <a:pPr algn="ctr"/>
@@ -12280,7 +12146,7 @@
           <a:noFill/>
         </p:spPr>
         <p:txBody>
-          <a:bodyPr wrap="square" lIns="36576" rIns="36576" tIns="36576" bIns="36576" anchor="t">
+          <a:bodyPr wrap="square" lIns="36576" tIns="36576" rIns="36576" bIns="36576" anchor="t">
             <a:spAutoFit/>
           </a:bodyPr>
           <a:lstStyle/>
@@ -12322,7 +12188,7 @@
           <a:noFill/>
         </p:spPr>
         <p:txBody>
-          <a:bodyPr wrap="square" lIns="36576" rIns="36576" tIns="36576" bIns="36576" anchor="t">
+          <a:bodyPr wrap="square" lIns="36576" tIns="36576" rIns="36576" bIns="36576" anchor="t">
             <a:spAutoFit/>
           </a:bodyPr>
           <a:lstStyle/>
@@ -12385,7 +12251,7 @@
           </a:fontRef>
         </p:style>
         <p:txBody>
-          <a:bodyPr rtlCol="0" anchor="ctr" lIns="54864" rIns="54864" tIns="9144" bIns="9144"/>
+          <a:bodyPr lIns="54864" tIns="9144" rIns="54864" bIns="9144" rtlCol="0" anchor="ctr"/>
           <a:lstStyle/>
           <a:p>
             <a:pPr algn="ctr"/>
@@ -12418,7 +12284,7 @@
           <a:noFill/>
         </p:spPr>
         <p:txBody>
-          <a:bodyPr wrap="square" lIns="36576" rIns="36576" tIns="36576" bIns="36576" anchor="t">
+          <a:bodyPr wrap="square" lIns="36576" tIns="36576" rIns="36576" bIns="36576" anchor="t">
             <a:spAutoFit/>
           </a:bodyPr>
           <a:lstStyle/>
@@ -12481,7 +12347,7 @@
           </a:fontRef>
         </p:style>
         <p:txBody>
-          <a:bodyPr rtlCol="0" anchor="ctr" lIns="54864" rIns="54864" tIns="9144" bIns="9144"/>
+          <a:bodyPr lIns="54864" tIns="9144" rIns="54864" bIns="9144" rtlCol="0" anchor="ctr"/>
           <a:lstStyle/>
           <a:p>
             <a:pPr algn="ctr"/>
@@ -12514,7 +12380,7 @@
           <a:noFill/>
         </p:spPr>
         <p:txBody>
-          <a:bodyPr wrap="square" lIns="36576" rIns="36576" tIns="36576" bIns="36576" anchor="t">
+          <a:bodyPr wrap="square" lIns="36576" tIns="36576" rIns="36576" bIns="36576" anchor="t">
             <a:spAutoFit/>
           </a:bodyPr>
           <a:lstStyle/>
@@ -12577,7 +12443,7 @@
           </a:fontRef>
         </p:style>
         <p:txBody>
-          <a:bodyPr rtlCol="0" anchor="ctr" lIns="54864" rIns="54864" tIns="9144" bIns="9144"/>
+          <a:bodyPr lIns="54864" tIns="9144" rIns="54864" bIns="9144" rtlCol="0" anchor="ctr"/>
           <a:lstStyle/>
           <a:p>
             <a:pPr algn="ctr"/>
@@ -12610,7 +12476,7 @@
           <a:noFill/>
         </p:spPr>
         <p:txBody>
-          <a:bodyPr wrap="square" lIns="36576" rIns="36576" tIns="36576" bIns="36576" anchor="t">
+          <a:bodyPr wrap="square" lIns="36576" tIns="36576" rIns="36576" bIns="36576" anchor="t">
             <a:spAutoFit/>
           </a:bodyPr>
           <a:lstStyle/>
@@ -12677,6 +12543,7 @@
           <a:lstStyle/>
           <a:p>
             <a:pPr algn="ctr"/>
+            <a:endParaRPr/>
           </a:p>
         </p:txBody>
       </p:sp>
@@ -12697,7 +12564,7 @@
           <a:noFill/>
         </p:spPr>
         <p:txBody>
-          <a:bodyPr wrap="square" lIns="36576" rIns="36576" tIns="36576" bIns="36576" anchor="ctr">
+          <a:bodyPr wrap="square" lIns="36576" tIns="36576" rIns="36576" bIns="36576" anchor="ctr">
             <a:spAutoFit/>
           </a:bodyPr>
           <a:lstStyle/>
@@ -12739,7 +12606,7 @@
           <a:noFill/>
         </p:spPr>
         <p:txBody>
-          <a:bodyPr wrap="square" lIns="36576" rIns="36576" tIns="36576" bIns="36576" anchor="t">
+          <a:bodyPr wrap="square" lIns="36576" tIns="36576" rIns="36576" bIns="36576" anchor="t">
             <a:spAutoFit/>
           </a:bodyPr>
           <a:lstStyle/>
@@ -12781,7 +12648,7 @@
           <a:noFill/>
         </p:spPr>
         <p:txBody>
-          <a:bodyPr wrap="square" lIns="36576" rIns="36576" tIns="36576" bIns="36576" anchor="t">
+          <a:bodyPr wrap="square" lIns="36576" tIns="36576" rIns="36576" bIns="36576" anchor="t">
             <a:spAutoFit/>
           </a:bodyPr>
           <a:lstStyle/>
@@ -12858,7 +12725,7 @@
           <a:noFill/>
         </p:spPr>
         <p:txBody>
-          <a:bodyPr wrap="square" lIns="36576" rIns="36576" tIns="36576" bIns="36576" anchor="t">
+          <a:bodyPr wrap="square" lIns="36576" tIns="36576" rIns="36576" bIns="36576" anchor="t">
             <a:spAutoFit/>
           </a:bodyPr>
           <a:lstStyle/>
@@ -12892,7 +12759,7 @@
 </file>
 
 <file path=ppt/slides/slide15.xml><?xml version="1.0" encoding="utf-8"?>
-<p:sld xmlns:a="http://schemas.openxmlformats.org/drawingml/2006/main" xmlns:p="http://schemas.openxmlformats.org/presentationml/2006/main" xmlns:r="http://schemas.openxmlformats.org/officeDocument/2006/relationships">
+<p:sld xmlns:a="http://schemas.openxmlformats.org/drawingml/2006/main" xmlns:r="http://schemas.openxmlformats.org/officeDocument/2006/relationships" xmlns:p="http://schemas.openxmlformats.org/presentationml/2006/main">
   <p:cSld>
     <p:bg>
       <p:bgPr>
@@ -12908,7 +12775,14 @@
         <p:cNvGrpSpPr/>
         <p:nvPr/>
       </p:nvGrpSpPr>
-      <p:grpSpPr/>
+      <p:grpSpPr>
+        <a:xfrm>
+          <a:off x="0" y="0"/>
+          <a:ext cx="0" cy="0"/>
+          <a:chOff x="0" y="0"/>
+          <a:chExt cx="0" cy="0"/>
+        </a:xfrm>
+      </p:grpSpPr>
       <p:sp>
         <p:nvSpPr>
           <p:cNvPr id="2" name="TextBox 1"/>
@@ -12926,7 +12800,7 @@
           <a:noFill/>
         </p:spPr>
         <p:txBody>
-          <a:bodyPr wrap="square" lIns="36576" rIns="36576" tIns="36576" bIns="36576" anchor="t">
+          <a:bodyPr wrap="square" lIns="36576" tIns="36576" rIns="36576" bIns="36576" anchor="t">
             <a:spAutoFit/>
           </a:bodyPr>
           <a:lstStyle/>
@@ -12968,7 +12842,7 @@
           <a:noFill/>
         </p:spPr>
         <p:txBody>
-          <a:bodyPr wrap="square" lIns="36576" rIns="36576" tIns="36576" bIns="36576" anchor="t">
+          <a:bodyPr wrap="square" lIns="36576" tIns="36576" rIns="36576" bIns="36576" anchor="t">
             <a:spAutoFit/>
           </a:bodyPr>
           <a:lstStyle/>
@@ -13010,7 +12884,7 @@
           <a:noFill/>
         </p:spPr>
         <p:txBody>
-          <a:bodyPr wrap="square" lIns="36576" rIns="36576" tIns="36576" bIns="36576" anchor="t">
+          <a:bodyPr wrap="square" lIns="36576" tIns="36576" rIns="36576" bIns="36576" anchor="t">
             <a:spAutoFit/>
           </a:bodyPr>
           <a:lstStyle/>
@@ -13052,7 +12926,7 @@
           <a:noFill/>
         </p:spPr>
         <p:txBody>
-          <a:bodyPr wrap="square" lIns="36576" rIns="36576" tIns="36576" bIns="36576" anchor="t">
+          <a:bodyPr wrap="square" lIns="36576" tIns="36576" rIns="36576" bIns="36576" anchor="t">
             <a:spAutoFit/>
           </a:bodyPr>
           <a:lstStyle/>
@@ -13094,7 +12968,7 @@
           <a:noFill/>
         </p:spPr>
         <p:txBody>
-          <a:bodyPr wrap="square" lIns="36576" rIns="18288" tIns="18288" bIns="18288">
+          <a:bodyPr wrap="square" lIns="36576" tIns="18288" rIns="18288" bIns="18288">
             <a:spAutoFit/>
           </a:bodyPr>
           <a:lstStyle/>
@@ -13285,7 +13159,7 @@
           <a:noFill/>
         </p:spPr>
         <p:txBody>
-          <a:bodyPr wrap="square" lIns="36576" rIns="36576" tIns="36576" bIns="36576" anchor="t">
+          <a:bodyPr wrap="square" lIns="36576" tIns="36576" rIns="36576" bIns="36576" anchor="t">
             <a:spAutoFit/>
           </a:bodyPr>
           <a:lstStyle/>
@@ -13348,7 +13222,7 @@
           </a:fontRef>
         </p:style>
         <p:txBody>
-          <a:bodyPr rtlCol="0" anchor="ctr" lIns="54864" rIns="54864" tIns="9144" bIns="9144"/>
+          <a:bodyPr lIns="54864" tIns="9144" rIns="54864" bIns="9144" rtlCol="0" anchor="ctr"/>
           <a:lstStyle/>
           <a:p>
             <a:pPr algn="ctr"/>
@@ -13381,7 +13255,7 @@
           <a:noFill/>
         </p:spPr>
         <p:txBody>
-          <a:bodyPr wrap="square" lIns="36576" rIns="36576" tIns="36576" bIns="36576" anchor="t">
+          <a:bodyPr wrap="square" lIns="36576" tIns="36576" rIns="36576" bIns="36576" anchor="t">
             <a:spAutoFit/>
           </a:bodyPr>
           <a:lstStyle/>
@@ -13444,7 +13318,7 @@
           </a:fontRef>
         </p:style>
         <p:txBody>
-          <a:bodyPr rtlCol="0" anchor="ctr" lIns="54864" rIns="54864" tIns="9144" bIns="9144"/>
+          <a:bodyPr lIns="54864" tIns="9144" rIns="54864" bIns="9144" rtlCol="0" anchor="ctr"/>
           <a:lstStyle/>
           <a:p>
             <a:pPr algn="ctr"/>
@@ -13477,7 +13351,7 @@
           <a:noFill/>
         </p:spPr>
         <p:txBody>
-          <a:bodyPr wrap="square" lIns="36576" rIns="36576" tIns="36576" bIns="36576" anchor="t">
+          <a:bodyPr wrap="square" lIns="36576" tIns="36576" rIns="36576" bIns="36576" anchor="t">
             <a:spAutoFit/>
           </a:bodyPr>
           <a:lstStyle/>
@@ -13540,7 +13414,7 @@
           </a:fontRef>
         </p:style>
         <p:txBody>
-          <a:bodyPr rtlCol="0" anchor="ctr" lIns="54864" rIns="54864" tIns="9144" bIns="9144"/>
+          <a:bodyPr lIns="54864" tIns="9144" rIns="54864" bIns="9144" rtlCol="0" anchor="ctr"/>
           <a:lstStyle/>
           <a:p>
             <a:pPr algn="ctr"/>
@@ -13573,7 +13447,7 @@
           <a:noFill/>
         </p:spPr>
         <p:txBody>
-          <a:bodyPr wrap="square" lIns="36576" rIns="36576" tIns="36576" bIns="36576" anchor="t">
+          <a:bodyPr wrap="square" lIns="36576" tIns="36576" rIns="36576" bIns="36576" anchor="t">
             <a:spAutoFit/>
           </a:bodyPr>
           <a:lstStyle/>
@@ -13636,7 +13510,7 @@
           </a:fontRef>
         </p:style>
         <p:txBody>
-          <a:bodyPr rtlCol="0" anchor="ctr" lIns="54864" rIns="54864" tIns="9144" bIns="9144"/>
+          <a:bodyPr lIns="54864" tIns="9144" rIns="54864" bIns="9144" rtlCol="0" anchor="ctr"/>
           <a:lstStyle/>
           <a:p>
             <a:pPr algn="ctr"/>
@@ -13669,7 +13543,7 @@
           <a:noFill/>
         </p:spPr>
         <p:txBody>
-          <a:bodyPr wrap="square" lIns="36576" rIns="36576" tIns="36576" bIns="36576" anchor="t">
+          <a:bodyPr wrap="square" lIns="36576" tIns="36576" rIns="36576" bIns="36576" anchor="t">
             <a:spAutoFit/>
           </a:bodyPr>
           <a:lstStyle/>
@@ -13732,7 +13606,7 @@
           </a:fontRef>
         </p:style>
         <p:txBody>
-          <a:bodyPr rtlCol="0" anchor="ctr" lIns="54864" rIns="54864" tIns="9144" bIns="9144"/>
+          <a:bodyPr lIns="54864" tIns="9144" rIns="54864" bIns="9144" rtlCol="0" anchor="ctr"/>
           <a:lstStyle/>
           <a:p>
             <a:pPr algn="ctr"/>
@@ -13765,7 +13639,7 @@
           <a:noFill/>
         </p:spPr>
         <p:txBody>
-          <a:bodyPr wrap="square" lIns="36576" rIns="36576" tIns="36576" bIns="36576" anchor="t">
+          <a:bodyPr wrap="square" lIns="36576" tIns="36576" rIns="36576" bIns="36576" anchor="t">
             <a:spAutoFit/>
           </a:bodyPr>
           <a:lstStyle/>
@@ -13828,7 +13702,7 @@
           </a:fontRef>
         </p:style>
         <p:txBody>
-          <a:bodyPr rtlCol="0" anchor="ctr" lIns="54864" rIns="54864" tIns="9144" bIns="9144"/>
+          <a:bodyPr lIns="54864" tIns="9144" rIns="54864" bIns="9144" rtlCol="0" anchor="ctr"/>
           <a:lstStyle/>
           <a:p>
             <a:pPr algn="ctr"/>
@@ -13861,7 +13735,7 @@
           <a:noFill/>
         </p:spPr>
         <p:txBody>
-          <a:bodyPr wrap="square" lIns="36576" rIns="36576" tIns="36576" bIns="36576" anchor="t">
+          <a:bodyPr wrap="square" lIns="36576" tIns="36576" rIns="36576" bIns="36576" anchor="t">
             <a:spAutoFit/>
           </a:bodyPr>
           <a:lstStyle/>
@@ -13924,7 +13798,7 @@
           </a:fontRef>
         </p:style>
         <p:txBody>
-          <a:bodyPr rtlCol="0" anchor="ctr" lIns="54864" rIns="54864" tIns="9144" bIns="9144"/>
+          <a:bodyPr lIns="54864" tIns="9144" rIns="54864" bIns="9144" rtlCol="0" anchor="ctr"/>
           <a:lstStyle/>
           <a:p>
             <a:pPr algn="ctr"/>
@@ -13957,7 +13831,7 @@
           <a:noFill/>
         </p:spPr>
         <p:txBody>
-          <a:bodyPr wrap="square" lIns="36576" rIns="36576" tIns="36576" bIns="36576" anchor="t">
+          <a:bodyPr wrap="square" lIns="36576" tIns="36576" rIns="36576" bIns="36576" anchor="t">
             <a:spAutoFit/>
           </a:bodyPr>
           <a:lstStyle/>
@@ -14024,6 +13898,7 @@
           <a:lstStyle/>
           <a:p>
             <a:pPr algn="ctr"/>
+            <a:endParaRPr/>
           </a:p>
         </p:txBody>
       </p:sp>
@@ -14044,7 +13919,7 @@
           <a:noFill/>
         </p:spPr>
         <p:txBody>
-          <a:bodyPr wrap="square" lIns="36576" rIns="36576" tIns="36576" bIns="36576" anchor="t">
+          <a:bodyPr wrap="square" lIns="36576" tIns="36576" rIns="36576" bIns="36576" anchor="t">
             <a:spAutoFit/>
           </a:bodyPr>
           <a:lstStyle/>
@@ -14121,7 +13996,7 @@
           <a:noFill/>
         </p:spPr>
         <p:txBody>
-          <a:bodyPr wrap="square" lIns="36576" rIns="36576" tIns="36576" bIns="36576" anchor="t">
+          <a:bodyPr wrap="square" lIns="36576" tIns="36576" rIns="36576" bIns="36576" anchor="t">
             <a:spAutoFit/>
           </a:bodyPr>
           <a:lstStyle/>
@@ -14155,7 +14030,7 @@
 </file>
 
 <file path=ppt/slides/slide2.xml><?xml version="1.0" encoding="utf-8"?>
-<p:sld xmlns:a="http://schemas.openxmlformats.org/drawingml/2006/main" xmlns:p="http://schemas.openxmlformats.org/presentationml/2006/main" xmlns:r="http://schemas.openxmlformats.org/officeDocument/2006/relationships">
+<p:sld xmlns:a="http://schemas.openxmlformats.org/drawingml/2006/main" xmlns:r="http://schemas.openxmlformats.org/officeDocument/2006/relationships" xmlns:p="http://schemas.openxmlformats.org/presentationml/2006/main">
   <p:cSld>
     <p:bg>
       <p:bgPr>
@@ -14171,7 +14046,14 @@
         <p:cNvGrpSpPr/>
         <p:nvPr/>
       </p:nvGrpSpPr>
-      <p:grpSpPr/>
+      <p:grpSpPr>
+        <a:xfrm>
+          <a:off x="0" y="0"/>
+          <a:ext cx="0" cy="0"/>
+          <a:chOff x="0" y="0"/>
+          <a:chExt cx="0" cy="0"/>
+        </a:xfrm>
+      </p:grpSpPr>
       <p:sp>
         <p:nvSpPr>
           <p:cNvPr id="2" name="TextBox 1"/>
@@ -14189,7 +14071,7 @@
           <a:noFill/>
         </p:spPr>
         <p:txBody>
-          <a:bodyPr wrap="square" lIns="36576" rIns="36576" tIns="36576" bIns="36576" anchor="t">
+          <a:bodyPr wrap="square" lIns="36576" tIns="36576" rIns="36576" bIns="36576" anchor="t">
             <a:spAutoFit/>
           </a:bodyPr>
           <a:lstStyle/>
@@ -14231,7 +14113,7 @@
           <a:noFill/>
         </p:spPr>
         <p:txBody>
-          <a:bodyPr wrap="square" lIns="36576" rIns="36576" tIns="36576" bIns="36576" anchor="t">
+          <a:bodyPr wrap="square" lIns="36576" tIns="36576" rIns="36576" bIns="36576" anchor="t">
             <a:spAutoFit/>
           </a:bodyPr>
           <a:lstStyle/>
@@ -14273,7 +14155,7 @@
           <a:noFill/>
         </p:spPr>
         <p:txBody>
-          <a:bodyPr wrap="square" lIns="36576" rIns="36576" tIns="36576" bIns="36576" anchor="t">
+          <a:bodyPr wrap="square" lIns="36576" tIns="36576" rIns="36576" bIns="36576" anchor="t">
             <a:spAutoFit/>
           </a:bodyPr>
           <a:lstStyle/>
@@ -14340,6 +14222,7 @@
           <a:lstStyle/>
           <a:p>
             <a:pPr algn="ctr"/>
+            <a:endParaRPr/>
           </a:p>
         </p:txBody>
       </p:sp>
@@ -14360,7 +14243,7 @@
           <a:noFill/>
         </p:spPr>
         <p:txBody>
-          <a:bodyPr wrap="square" lIns="36576" rIns="36576" tIns="36576" bIns="36576" anchor="t">
+          <a:bodyPr wrap="square" lIns="36576" tIns="36576" rIns="36576" bIns="36576" anchor="t">
             <a:spAutoFit/>
           </a:bodyPr>
           <a:lstStyle/>
@@ -14402,7 +14285,7 @@
           <a:noFill/>
         </p:spPr>
         <p:txBody>
-          <a:bodyPr wrap="square" lIns="36576" rIns="18288" tIns="18288" bIns="18288">
+          <a:bodyPr wrap="square" lIns="36576" tIns="18288" rIns="18288" bIns="18288">
             <a:spAutoFit/>
           </a:bodyPr>
           <a:lstStyle/>
@@ -14530,7 +14413,7 @@
           </a:fontRef>
         </p:style>
         <p:txBody>
-          <a:bodyPr rtlCol="0" anchor="ctr" lIns="54864" rIns="54864" tIns="9144" bIns="9144"/>
+          <a:bodyPr lIns="54864" tIns="9144" rIns="54864" bIns="9144" rtlCol="0" anchor="ctr"/>
           <a:lstStyle/>
           <a:p>
             <a:pPr algn="ctr"/>
@@ -14563,7 +14446,7 @@
           <a:noFill/>
         </p:spPr>
         <p:txBody>
-          <a:bodyPr wrap="square" lIns="36576" rIns="36576" tIns="36576" bIns="36576" anchor="t">
+          <a:bodyPr wrap="square" lIns="36576" tIns="36576" rIns="36576" bIns="36576" anchor="t">
             <a:spAutoFit/>
           </a:bodyPr>
           <a:lstStyle/>
@@ -14605,7 +14488,7 @@
           <a:noFill/>
         </p:spPr>
         <p:txBody>
-          <a:bodyPr wrap="square" lIns="36576" rIns="36576" tIns="36576" bIns="36576" anchor="t">
+          <a:bodyPr wrap="square" lIns="36576" tIns="36576" rIns="36576" bIns="36576" anchor="t">
             <a:spAutoFit/>
           </a:bodyPr>
           <a:lstStyle/>
@@ -14672,6 +14555,7 @@
           <a:lstStyle/>
           <a:p>
             <a:pPr algn="ctr"/>
+            <a:endParaRPr/>
           </a:p>
         </p:txBody>
       </p:sp>
@@ -14717,6 +14601,7 @@
           <a:lstStyle/>
           <a:p>
             <a:pPr algn="ctr"/>
+            <a:endParaRPr/>
           </a:p>
         </p:txBody>
       </p:sp>
@@ -14762,6 +14647,7 @@
           <a:lstStyle/>
           <a:p>
             <a:pPr algn="ctr"/>
+            <a:endParaRPr/>
           </a:p>
         </p:txBody>
       </p:sp>
@@ -14807,6 +14693,7 @@
           <a:lstStyle/>
           <a:p>
             <a:pPr algn="ctr"/>
+            <a:endParaRPr/>
           </a:p>
         </p:txBody>
       </p:sp>
@@ -14852,6 +14739,7 @@
           <a:lstStyle/>
           <a:p>
             <a:pPr algn="ctr"/>
+            <a:endParaRPr/>
           </a:p>
         </p:txBody>
       </p:sp>
@@ -14897,6 +14785,7 @@
           <a:lstStyle/>
           <a:p>
             <a:pPr algn="ctr"/>
+            <a:endParaRPr/>
           </a:p>
         </p:txBody>
       </p:sp>
@@ -14942,6 +14831,7 @@
           <a:lstStyle/>
           <a:p>
             <a:pPr algn="ctr"/>
+            <a:endParaRPr/>
           </a:p>
         </p:txBody>
       </p:sp>
@@ -14987,6 +14877,7 @@
           <a:lstStyle/>
           <a:p>
             <a:pPr algn="ctr"/>
+            <a:endParaRPr/>
           </a:p>
         </p:txBody>
       </p:sp>
@@ -15032,6 +14923,7 @@
           <a:lstStyle/>
           <a:p>
             <a:pPr algn="ctr"/>
+            <a:endParaRPr/>
           </a:p>
         </p:txBody>
       </p:sp>
@@ -15182,6 +15074,7 @@
           <a:lstStyle/>
           <a:p>
             <a:pPr algn="ctr"/>
+            <a:endParaRPr/>
           </a:p>
         </p:txBody>
       </p:sp>
@@ -15227,6 +15120,7 @@
           <a:lstStyle/>
           <a:p>
             <a:pPr algn="ctr"/>
+            <a:endParaRPr/>
           </a:p>
         </p:txBody>
       </p:sp>
@@ -15272,6 +15166,7 @@
           <a:lstStyle/>
           <a:p>
             <a:pPr algn="ctr"/>
+            <a:endParaRPr/>
           </a:p>
         </p:txBody>
       </p:sp>
@@ -15317,6 +15212,7 @@
           <a:lstStyle/>
           <a:p>
             <a:pPr algn="ctr"/>
+            <a:endParaRPr/>
           </a:p>
         </p:txBody>
       </p:sp>
@@ -15358,7 +15254,7 @@
           </a:fontRef>
         </p:style>
         <p:txBody>
-          <a:bodyPr rtlCol="0" anchor="ctr" lIns="54864" rIns="54864" tIns="9144" bIns="9144"/>
+          <a:bodyPr lIns="54864" tIns="9144" rIns="54864" bIns="9144" rtlCol="0" anchor="ctr"/>
           <a:lstStyle/>
           <a:p>
             <a:pPr algn="ctr"/>
@@ -15461,7 +15357,7 @@
           <a:noFill/>
         </p:spPr>
         <p:txBody>
-          <a:bodyPr wrap="square" lIns="36576" rIns="36576" tIns="36576" bIns="36576" anchor="t">
+          <a:bodyPr wrap="square" lIns="36576" tIns="36576" rIns="36576" bIns="36576" anchor="t">
             <a:spAutoFit/>
           </a:bodyPr>
           <a:lstStyle/>
@@ -15538,7 +15434,7 @@
           <a:noFill/>
         </p:spPr>
         <p:txBody>
-          <a:bodyPr wrap="square" lIns="36576" rIns="36576" tIns="36576" bIns="36576" anchor="t">
+          <a:bodyPr wrap="square" lIns="36576" tIns="36576" rIns="36576" bIns="36576" anchor="t">
             <a:spAutoFit/>
           </a:bodyPr>
           <a:lstStyle/>
@@ -15572,7 +15468,7 @@
 </file>
 
 <file path=ppt/slides/slide3.xml><?xml version="1.0" encoding="utf-8"?>
-<p:sld xmlns:a="http://schemas.openxmlformats.org/drawingml/2006/main" xmlns:p="http://schemas.openxmlformats.org/presentationml/2006/main" xmlns:r="http://schemas.openxmlformats.org/officeDocument/2006/relationships">
+<p:sld xmlns:a="http://schemas.openxmlformats.org/drawingml/2006/main" xmlns:r="http://schemas.openxmlformats.org/officeDocument/2006/relationships" xmlns:p="http://schemas.openxmlformats.org/presentationml/2006/main">
   <p:cSld>
     <p:bg>
       <p:bgPr>
@@ -15588,7 +15484,14 @@
         <p:cNvGrpSpPr/>
         <p:nvPr/>
       </p:nvGrpSpPr>
-      <p:grpSpPr/>
+      <p:grpSpPr>
+        <a:xfrm>
+          <a:off x="0" y="0"/>
+          <a:ext cx="0" cy="0"/>
+          <a:chOff x="0" y="0"/>
+          <a:chExt cx="0" cy="0"/>
+        </a:xfrm>
+      </p:grpSpPr>
       <p:sp>
         <p:nvSpPr>
           <p:cNvPr id="2" name="TextBox 1"/>
@@ -15606,7 +15509,7 @@
           <a:noFill/>
         </p:spPr>
         <p:txBody>
-          <a:bodyPr wrap="square" lIns="36576" rIns="36576" tIns="36576" bIns="36576" anchor="t">
+          <a:bodyPr wrap="square" lIns="36576" tIns="36576" rIns="36576" bIns="36576" anchor="t">
             <a:spAutoFit/>
           </a:bodyPr>
           <a:lstStyle/>
@@ -15648,7 +15551,7 @@
           <a:noFill/>
         </p:spPr>
         <p:txBody>
-          <a:bodyPr wrap="square" lIns="36576" rIns="36576" tIns="36576" bIns="36576" anchor="t">
+          <a:bodyPr wrap="square" lIns="36576" tIns="36576" rIns="36576" bIns="36576" anchor="t">
             <a:spAutoFit/>
           </a:bodyPr>
           <a:lstStyle/>
@@ -15690,7 +15593,7 @@
           <a:noFill/>
         </p:spPr>
         <p:txBody>
-          <a:bodyPr wrap="square" lIns="36576" rIns="36576" tIns="36576" bIns="36576" anchor="t">
+          <a:bodyPr wrap="square" lIns="36576" tIns="36576" rIns="36576" bIns="36576" anchor="t">
             <a:spAutoFit/>
           </a:bodyPr>
           <a:lstStyle/>
@@ -15732,7 +15635,7 @@
           <a:noFill/>
         </p:spPr>
         <p:txBody>
-          <a:bodyPr wrap="square" lIns="36576" rIns="36576" tIns="36576" bIns="36576" anchor="t">
+          <a:bodyPr wrap="square" lIns="36576" tIns="36576" rIns="36576" bIns="36576" anchor="t">
             <a:spAutoFit/>
           </a:bodyPr>
           <a:lstStyle/>
@@ -15799,6 +15702,7 @@
           <a:lstStyle/>
           <a:p>
             <a:pPr algn="ctr"/>
+            <a:endParaRPr/>
           </a:p>
         </p:txBody>
       </p:sp>
@@ -15819,7 +15723,7 @@
           <a:noFill/>
         </p:spPr>
         <p:txBody>
-          <a:bodyPr wrap="square" lIns="36576" rIns="36576" tIns="36576" bIns="36576" anchor="t">
+          <a:bodyPr wrap="square" lIns="36576" tIns="36576" rIns="36576" bIns="36576" anchor="t">
             <a:spAutoFit/>
           </a:bodyPr>
           <a:lstStyle/>
@@ -15886,6 +15790,7 @@
           <a:lstStyle/>
           <a:p>
             <a:pPr algn="ctr"/>
+            <a:endParaRPr/>
           </a:p>
         </p:txBody>
       </p:sp>
@@ -15931,6 +15836,7 @@
           <a:lstStyle/>
           <a:p>
             <a:pPr algn="ctr"/>
+            <a:endParaRPr/>
           </a:p>
         </p:txBody>
       </p:sp>
@@ -15976,6 +15882,7 @@
           <a:lstStyle/>
           <a:p>
             <a:pPr algn="ctr"/>
+            <a:endParaRPr/>
           </a:p>
         </p:txBody>
       </p:sp>
@@ -16021,6 +15928,7 @@
           <a:lstStyle/>
           <a:p>
             <a:pPr algn="ctr"/>
+            <a:endParaRPr/>
           </a:p>
         </p:txBody>
       </p:sp>
@@ -16066,6 +15974,7 @@
           <a:lstStyle/>
           <a:p>
             <a:pPr algn="ctr"/>
+            <a:endParaRPr/>
           </a:p>
         </p:txBody>
       </p:sp>
@@ -16111,6 +16020,7 @@
           <a:lstStyle/>
           <a:p>
             <a:pPr algn="ctr"/>
+            <a:endParaRPr/>
           </a:p>
         </p:txBody>
       </p:sp>
@@ -16156,6 +16066,7 @@
           <a:lstStyle/>
           <a:p>
             <a:pPr algn="ctr"/>
+            <a:endParaRPr/>
           </a:p>
         </p:txBody>
       </p:sp>
@@ -16199,6 +16110,7 @@
           <a:lstStyle/>
           <a:p>
             <a:pPr algn="ctr"/>
+            <a:endParaRPr/>
           </a:p>
         </p:txBody>
       </p:sp>
@@ -16244,6 +16156,7 @@
           <a:lstStyle/>
           <a:p>
             <a:pPr algn="ctr"/>
+            <a:endParaRPr/>
           </a:p>
         </p:txBody>
       </p:sp>
@@ -16289,6 +16202,7 @@
           <a:lstStyle/>
           <a:p>
             <a:pPr algn="ctr"/>
+            <a:endParaRPr/>
           </a:p>
         </p:txBody>
       </p:sp>
@@ -16334,6 +16248,7 @@
           <a:lstStyle/>
           <a:p>
             <a:pPr algn="ctr"/>
+            <a:endParaRPr/>
           </a:p>
         </p:txBody>
       </p:sp>
@@ -16379,6 +16294,7 @@
           <a:lstStyle/>
           <a:p>
             <a:pPr algn="ctr"/>
+            <a:endParaRPr/>
           </a:p>
         </p:txBody>
       </p:sp>
@@ -16424,6 +16340,7 @@
           <a:lstStyle/>
           <a:p>
             <a:pPr algn="ctr"/>
+            <a:endParaRPr/>
           </a:p>
         </p:txBody>
       </p:sp>
@@ -16469,6 +16386,7 @@
           <a:lstStyle/>
           <a:p>
             <a:pPr algn="ctr"/>
+            <a:endParaRPr/>
           </a:p>
         </p:txBody>
       </p:sp>
@@ -16514,6 +16432,7 @@
           <a:lstStyle/>
           <a:p>
             <a:pPr algn="ctr"/>
+            <a:endParaRPr/>
           </a:p>
         </p:txBody>
       </p:sp>
@@ -16559,6 +16478,7 @@
           <a:lstStyle/>
           <a:p>
             <a:pPr algn="ctr"/>
+            <a:endParaRPr/>
           </a:p>
         </p:txBody>
       </p:sp>
@@ -16604,6 +16524,7 @@
           <a:lstStyle/>
           <a:p>
             <a:pPr algn="ctr"/>
+            <a:endParaRPr/>
           </a:p>
         </p:txBody>
       </p:sp>
@@ -16624,7 +16545,7 @@
           <a:noFill/>
         </p:spPr>
         <p:txBody>
-          <a:bodyPr wrap="square" lIns="36576" rIns="36576" tIns="36576" bIns="36576" anchor="t">
+          <a:bodyPr wrap="square" lIns="36576" tIns="36576" rIns="36576" bIns="36576" anchor="t">
             <a:spAutoFit/>
           </a:bodyPr>
           <a:lstStyle/>
@@ -16691,6 +16612,7 @@
           <a:lstStyle/>
           <a:p>
             <a:pPr algn="ctr"/>
+            <a:endParaRPr/>
           </a:p>
         </p:txBody>
       </p:sp>
@@ -16736,6 +16658,7 @@
           <a:lstStyle/>
           <a:p>
             <a:pPr algn="ctr"/>
+            <a:endParaRPr/>
           </a:p>
         </p:txBody>
       </p:sp>
@@ -16756,7 +16679,7 @@
           <a:noFill/>
         </p:spPr>
         <p:txBody>
-          <a:bodyPr wrap="square" lIns="36576" rIns="36576" tIns="36576" bIns="36576" anchor="t">
+          <a:bodyPr wrap="square" lIns="36576" tIns="36576" rIns="36576" bIns="36576" anchor="t">
             <a:spAutoFit/>
           </a:bodyPr>
           <a:lstStyle/>
@@ -16823,6 +16746,7 @@
           <a:lstStyle/>
           <a:p>
             <a:pPr algn="ctr"/>
+            <a:endParaRPr/>
           </a:p>
         </p:txBody>
       </p:sp>
@@ -16868,6 +16792,7 @@
           <a:lstStyle/>
           <a:p>
             <a:pPr algn="ctr"/>
+            <a:endParaRPr/>
           </a:p>
         </p:txBody>
       </p:sp>
@@ -16913,6 +16838,7 @@
           <a:lstStyle/>
           <a:p>
             <a:pPr algn="ctr"/>
+            <a:endParaRPr/>
           </a:p>
         </p:txBody>
       </p:sp>
@@ -16958,6 +16884,7 @@
           <a:lstStyle/>
           <a:p>
             <a:pPr algn="ctr"/>
+            <a:endParaRPr/>
           </a:p>
         </p:txBody>
       </p:sp>
@@ -17003,6 +16930,7 @@
           <a:lstStyle/>
           <a:p>
             <a:pPr algn="ctr"/>
+            <a:endParaRPr/>
           </a:p>
         </p:txBody>
       </p:sp>
@@ -17048,6 +16976,7 @@
           <a:lstStyle/>
           <a:p>
             <a:pPr algn="ctr"/>
+            <a:endParaRPr/>
           </a:p>
         </p:txBody>
       </p:sp>
@@ -17093,6 +17022,7 @@
           <a:lstStyle/>
           <a:p>
             <a:pPr algn="ctr"/>
+            <a:endParaRPr/>
           </a:p>
         </p:txBody>
       </p:sp>
@@ -17138,6 +17068,7 @@
           <a:lstStyle/>
           <a:p>
             <a:pPr algn="ctr"/>
+            <a:endParaRPr/>
           </a:p>
         </p:txBody>
       </p:sp>
@@ -17183,6 +17114,7 @@
           <a:lstStyle/>
           <a:p>
             <a:pPr algn="ctr"/>
+            <a:endParaRPr/>
           </a:p>
         </p:txBody>
       </p:sp>
@@ -17228,6 +17160,7 @@
           <a:lstStyle/>
           <a:p>
             <a:pPr algn="ctr"/>
+            <a:endParaRPr/>
           </a:p>
         </p:txBody>
       </p:sp>
@@ -17773,7 +17706,7 @@
           <a:noFill/>
         </p:spPr>
         <p:txBody>
-          <a:bodyPr wrap="square" lIns="36576" rIns="36576" tIns="36576" bIns="36576" anchor="t">
+          <a:bodyPr wrap="square" lIns="36576" tIns="36576" rIns="36576" bIns="36576" anchor="t">
             <a:spAutoFit/>
           </a:bodyPr>
           <a:lstStyle/>
@@ -17836,7 +17769,7 @@
           </a:fontRef>
         </p:style>
         <p:txBody>
-          <a:bodyPr rtlCol="0" anchor="ctr" lIns="54864" rIns="54864" tIns="9144" bIns="9144"/>
+          <a:bodyPr lIns="54864" tIns="9144" rIns="54864" bIns="9144" rtlCol="0" anchor="ctr"/>
           <a:lstStyle/>
           <a:p>
             <a:pPr algn="ctr"/>
@@ -17904,7 +17837,7 @@
           <a:noFill/>
         </p:spPr>
         <p:txBody>
-          <a:bodyPr wrap="square" lIns="36576" rIns="36576" tIns="36576" bIns="36576" anchor="t">
+          <a:bodyPr wrap="square" lIns="36576" tIns="36576" rIns="36576" bIns="36576" anchor="t">
             <a:spAutoFit/>
           </a:bodyPr>
           <a:lstStyle/>
@@ -17938,7 +17871,7 @@
 </file>
 
 <file path=ppt/slides/slide4.xml><?xml version="1.0" encoding="utf-8"?>
-<p:sld xmlns:a="http://schemas.openxmlformats.org/drawingml/2006/main" xmlns:p="http://schemas.openxmlformats.org/presentationml/2006/main" xmlns:r="http://schemas.openxmlformats.org/officeDocument/2006/relationships">
+<p:sld xmlns:a="http://schemas.openxmlformats.org/drawingml/2006/main" xmlns:r="http://schemas.openxmlformats.org/officeDocument/2006/relationships" xmlns:p="http://schemas.openxmlformats.org/presentationml/2006/main">
   <p:cSld>
     <p:bg>
       <p:bgPr>
@@ -17954,7 +17887,14 @@
         <p:cNvGrpSpPr/>
         <p:nvPr/>
       </p:nvGrpSpPr>
-      <p:grpSpPr/>
+      <p:grpSpPr>
+        <a:xfrm>
+          <a:off x="0" y="0"/>
+          <a:ext cx="0" cy="0"/>
+          <a:chOff x="0" y="0"/>
+          <a:chExt cx="0" cy="0"/>
+        </a:xfrm>
+      </p:grpSpPr>
       <p:sp>
         <p:nvSpPr>
           <p:cNvPr id="2" name="TextBox 1"/>
@@ -17972,7 +17912,7 @@
           <a:noFill/>
         </p:spPr>
         <p:txBody>
-          <a:bodyPr wrap="square" lIns="36576" rIns="36576" tIns="36576" bIns="36576" anchor="t">
+          <a:bodyPr wrap="square" lIns="36576" tIns="36576" rIns="36576" bIns="36576" anchor="t">
             <a:spAutoFit/>
           </a:bodyPr>
           <a:lstStyle/>
@@ -18014,7 +17954,7 @@
           <a:noFill/>
         </p:spPr>
         <p:txBody>
-          <a:bodyPr wrap="square" lIns="36576" rIns="36576" tIns="36576" bIns="36576" anchor="t">
+          <a:bodyPr wrap="square" lIns="36576" tIns="36576" rIns="36576" bIns="36576" anchor="t">
             <a:spAutoFit/>
           </a:bodyPr>
           <a:lstStyle/>
@@ -18056,7 +17996,7 @@
           <a:noFill/>
         </p:spPr>
         <p:txBody>
-          <a:bodyPr wrap="square" lIns="36576" rIns="36576" tIns="36576" bIns="36576" anchor="t">
+          <a:bodyPr wrap="square" lIns="36576" tIns="36576" rIns="36576" bIns="36576" anchor="t">
             <a:spAutoFit/>
           </a:bodyPr>
           <a:lstStyle/>
@@ -18098,7 +18038,7 @@
           <a:noFill/>
         </p:spPr>
         <p:txBody>
-          <a:bodyPr wrap="square" lIns="36576" rIns="36576" tIns="36576" bIns="36576" anchor="t">
+          <a:bodyPr wrap="square" lIns="36576" tIns="36576" rIns="36576" bIns="36576" anchor="t">
             <a:spAutoFit/>
           </a:bodyPr>
           <a:lstStyle/>
@@ -18165,6 +18105,7 @@
           <a:lstStyle/>
           <a:p>
             <a:pPr algn="ctr"/>
+            <a:endParaRPr/>
           </a:p>
         </p:txBody>
       </p:sp>
@@ -18210,6 +18151,7 @@
           <a:lstStyle/>
           <a:p>
             <a:pPr algn="ctr"/>
+            <a:endParaRPr/>
           </a:p>
         </p:txBody>
       </p:sp>
@@ -18230,7 +18172,7 @@
           <a:noFill/>
         </p:spPr>
         <p:txBody>
-          <a:bodyPr wrap="square" lIns="36576" rIns="36576" tIns="36576" bIns="36576" anchor="t">
+          <a:bodyPr wrap="square" lIns="36576" tIns="36576" rIns="36576" bIns="36576" anchor="t">
             <a:spAutoFit/>
           </a:bodyPr>
           <a:lstStyle/>
@@ -18297,6 +18239,7 @@
           <a:lstStyle/>
           <a:p>
             <a:pPr algn="ctr"/>
+            <a:endParaRPr/>
           </a:p>
         </p:txBody>
       </p:sp>
@@ -18342,6 +18285,7 @@
           <a:lstStyle/>
           <a:p>
             <a:pPr algn="ctr"/>
+            <a:endParaRPr/>
           </a:p>
         </p:txBody>
       </p:sp>
@@ -18387,6 +18331,7 @@
           <a:lstStyle/>
           <a:p>
             <a:pPr algn="ctr"/>
+            <a:endParaRPr/>
           </a:p>
         </p:txBody>
       </p:sp>
@@ -18407,7 +18352,7 @@
           <a:noFill/>
         </p:spPr>
         <p:txBody>
-          <a:bodyPr wrap="square" lIns="36576" rIns="36576" tIns="36576" bIns="36576" anchor="t">
+          <a:bodyPr wrap="square" lIns="36576" tIns="36576" rIns="36576" bIns="36576" anchor="t">
             <a:spAutoFit/>
           </a:bodyPr>
           <a:lstStyle/>
@@ -18474,6 +18419,7 @@
           <a:lstStyle/>
           <a:p>
             <a:pPr algn="ctr"/>
+            <a:endParaRPr/>
           </a:p>
         </p:txBody>
       </p:sp>
@@ -18519,6 +18465,7 @@
           <a:lstStyle/>
           <a:p>
             <a:pPr algn="ctr"/>
+            <a:endParaRPr/>
           </a:p>
         </p:txBody>
       </p:sp>
@@ -18539,7 +18486,7 @@
           <a:noFill/>
         </p:spPr>
         <p:txBody>
-          <a:bodyPr wrap="square" lIns="36576" rIns="36576" tIns="36576" bIns="36576" anchor="t">
+          <a:bodyPr wrap="square" lIns="36576" tIns="36576" rIns="36576" bIns="36576" anchor="t">
             <a:spAutoFit/>
           </a:bodyPr>
           <a:lstStyle/>
@@ -18606,6 +18553,7 @@
           <a:lstStyle/>
           <a:p>
             <a:pPr algn="ctr"/>
+            <a:endParaRPr/>
           </a:p>
         </p:txBody>
       </p:sp>
@@ -18651,6 +18599,7 @@
           <a:lstStyle/>
           <a:p>
             <a:pPr algn="ctr"/>
+            <a:endParaRPr/>
           </a:p>
         </p:txBody>
       </p:sp>
@@ -18696,6 +18645,7 @@
           <a:lstStyle/>
           <a:p>
             <a:pPr algn="ctr"/>
+            <a:endParaRPr/>
           </a:p>
         </p:txBody>
       </p:sp>
@@ -18716,7 +18666,7 @@
           <a:noFill/>
         </p:spPr>
         <p:txBody>
-          <a:bodyPr wrap="square" lIns="36576" rIns="36576" tIns="36576" bIns="36576" anchor="t">
+          <a:bodyPr wrap="square" lIns="36576" tIns="36576" rIns="36576" bIns="36576" anchor="t">
             <a:spAutoFit/>
           </a:bodyPr>
           <a:lstStyle/>
@@ -18783,6 +18733,7 @@
           <a:lstStyle/>
           <a:p>
             <a:pPr algn="ctr"/>
+            <a:endParaRPr/>
           </a:p>
         </p:txBody>
       </p:sp>
@@ -18828,6 +18779,7 @@
           <a:lstStyle/>
           <a:p>
             <a:pPr algn="ctr"/>
+            <a:endParaRPr/>
           </a:p>
         </p:txBody>
       </p:sp>
@@ -18848,7 +18800,7 @@
           <a:noFill/>
         </p:spPr>
         <p:txBody>
-          <a:bodyPr wrap="square" lIns="36576" rIns="36576" tIns="36576" bIns="36576" anchor="t">
+          <a:bodyPr wrap="square" lIns="36576" tIns="36576" rIns="36576" bIns="36576" anchor="t">
             <a:spAutoFit/>
           </a:bodyPr>
           <a:lstStyle/>
@@ -18915,6 +18867,7 @@
           <a:lstStyle/>
           <a:p>
             <a:pPr algn="ctr"/>
+            <a:endParaRPr/>
           </a:p>
         </p:txBody>
       </p:sp>
@@ -18960,6 +18913,7 @@
           <a:lstStyle/>
           <a:p>
             <a:pPr algn="ctr"/>
+            <a:endParaRPr/>
           </a:p>
         </p:txBody>
       </p:sp>
@@ -19005,6 +18959,7 @@
           <a:lstStyle/>
           <a:p>
             <a:pPr algn="ctr"/>
+            <a:endParaRPr/>
           </a:p>
         </p:txBody>
       </p:sp>
@@ -19025,7 +18980,7 @@
           <a:noFill/>
         </p:spPr>
         <p:txBody>
-          <a:bodyPr wrap="square" lIns="36576" rIns="36576" tIns="36576" bIns="36576" anchor="t">
+          <a:bodyPr wrap="square" lIns="36576" tIns="36576" rIns="36576" bIns="36576" anchor="t">
             <a:spAutoFit/>
           </a:bodyPr>
           <a:lstStyle/>
@@ -19067,7 +19022,7 @@
           <a:noFill/>
         </p:spPr>
         <p:txBody>
-          <a:bodyPr wrap="square" lIns="36576" rIns="36576" tIns="36576" bIns="36576" anchor="t">
+          <a:bodyPr wrap="square" lIns="36576" tIns="36576" rIns="36576" bIns="36576" anchor="t">
             <a:spAutoFit/>
           </a:bodyPr>
           <a:lstStyle/>
@@ -19109,7 +19064,7 @@
           <a:noFill/>
         </p:spPr>
         <p:txBody>
-          <a:bodyPr wrap="square" lIns="36576" rIns="36576" tIns="36576" bIns="36576" anchor="t">
+          <a:bodyPr wrap="square" lIns="36576" tIns="36576" rIns="36576" bIns="36576" anchor="t">
             <a:spAutoFit/>
           </a:bodyPr>
           <a:lstStyle/>
@@ -19176,6 +19131,7 @@
           <a:lstStyle/>
           <a:p>
             <a:pPr algn="ctr"/>
+            <a:endParaRPr/>
           </a:p>
         </p:txBody>
       </p:sp>
@@ -19221,6 +19177,7 @@
           <a:lstStyle/>
           <a:p>
             <a:pPr algn="ctr"/>
+            <a:endParaRPr/>
           </a:p>
         </p:txBody>
       </p:sp>
@@ -19266,6 +19223,7 @@
           <a:lstStyle/>
           <a:p>
             <a:pPr algn="ctr"/>
+            <a:endParaRPr/>
           </a:p>
         </p:txBody>
       </p:sp>
@@ -19311,6 +19269,7 @@
           <a:lstStyle/>
           <a:p>
             <a:pPr algn="ctr"/>
+            <a:endParaRPr/>
           </a:p>
         </p:txBody>
       </p:sp>
@@ -19356,6 +19315,7 @@
           <a:lstStyle/>
           <a:p>
             <a:pPr algn="ctr"/>
+            <a:endParaRPr/>
           </a:p>
         </p:txBody>
       </p:sp>
@@ -19401,6 +19361,7 @@
           <a:lstStyle/>
           <a:p>
             <a:pPr algn="ctr"/>
+            <a:endParaRPr/>
           </a:p>
         </p:txBody>
       </p:sp>
@@ -19446,6 +19407,7 @@
           <a:lstStyle/>
           <a:p>
             <a:pPr algn="ctr"/>
+            <a:endParaRPr/>
           </a:p>
         </p:txBody>
       </p:sp>
@@ -19491,6 +19453,7 @@
           <a:lstStyle/>
           <a:p>
             <a:pPr algn="ctr"/>
+            <a:endParaRPr/>
           </a:p>
         </p:txBody>
       </p:sp>
@@ -19536,6 +19499,7 @@
           <a:lstStyle/>
           <a:p>
             <a:pPr algn="ctr"/>
+            <a:endParaRPr/>
           </a:p>
         </p:txBody>
       </p:sp>
@@ -19581,6 +19545,7 @@
           <a:lstStyle/>
           <a:p>
             <a:pPr algn="ctr"/>
+            <a:endParaRPr/>
           </a:p>
         </p:txBody>
       </p:sp>
@@ -19601,7 +19566,7 @@
           <a:noFill/>
         </p:spPr>
         <p:txBody>
-          <a:bodyPr wrap="square" lIns="36576" rIns="36576" tIns="36576" bIns="36576" anchor="t">
+          <a:bodyPr wrap="square" lIns="36576" tIns="36576" rIns="36576" bIns="36576" anchor="t">
             <a:spAutoFit/>
           </a:bodyPr>
           <a:lstStyle/>
@@ -19668,6 +19633,7 @@
           <a:lstStyle/>
           <a:p>
             <a:pPr algn="ctr"/>
+            <a:endParaRPr/>
           </a:p>
         </p:txBody>
       </p:sp>
@@ -19709,7 +19675,7 @@
           </a:fontRef>
         </p:style>
         <p:txBody>
-          <a:bodyPr rtlCol="0" anchor="ctr" lIns="54864" rIns="54864" tIns="9144" bIns="9144"/>
+          <a:bodyPr lIns="54864" tIns="9144" rIns="54864" bIns="9144" rtlCol="0" anchor="ctr"/>
           <a:lstStyle/>
           <a:p>
             <a:pPr algn="ctr"/>
@@ -19767,6 +19733,7 @@
           <a:lstStyle/>
           <a:p>
             <a:pPr algn="ctr"/>
+            <a:endParaRPr/>
           </a:p>
         </p:txBody>
       </p:sp>
@@ -19787,7 +19754,7 @@
           <a:noFill/>
         </p:spPr>
         <p:txBody>
-          <a:bodyPr wrap="square" lIns="36576" rIns="36576" tIns="36576" bIns="36576" anchor="t">
+          <a:bodyPr wrap="square" lIns="36576" tIns="36576" rIns="36576" bIns="36576" anchor="t">
             <a:spAutoFit/>
           </a:bodyPr>
           <a:lstStyle/>
@@ -19854,6 +19821,7 @@
           <a:lstStyle/>
           <a:p>
             <a:pPr algn="ctr"/>
+            <a:endParaRPr/>
           </a:p>
         </p:txBody>
       </p:sp>
@@ -19874,7 +19842,7 @@
           <a:noFill/>
         </p:spPr>
         <p:txBody>
-          <a:bodyPr wrap="square" lIns="36576" rIns="36576" tIns="36576" bIns="36576" anchor="ctr">
+          <a:bodyPr wrap="square" lIns="36576" tIns="36576" rIns="36576" bIns="36576" anchor="ctr">
             <a:spAutoFit/>
           </a:bodyPr>
           <a:lstStyle/>
@@ -19941,6 +19909,7 @@
           <a:lstStyle/>
           <a:p>
             <a:pPr algn="ctr"/>
+            <a:endParaRPr/>
           </a:p>
         </p:txBody>
       </p:sp>
@@ -19961,7 +19930,7 @@
           <a:noFill/>
         </p:spPr>
         <p:txBody>
-          <a:bodyPr wrap="square" lIns="36576" rIns="36576" tIns="36576" bIns="36576" anchor="ctr">
+          <a:bodyPr wrap="square" lIns="36576" tIns="36576" rIns="36576" bIns="36576" anchor="ctr">
             <a:spAutoFit/>
           </a:bodyPr>
           <a:lstStyle/>
@@ -20028,6 +19997,7 @@
           <a:lstStyle/>
           <a:p>
             <a:pPr algn="ctr"/>
+            <a:endParaRPr/>
           </a:p>
         </p:txBody>
       </p:sp>
@@ -20048,7 +20018,7 @@
           <a:noFill/>
         </p:spPr>
         <p:txBody>
-          <a:bodyPr wrap="square" lIns="36576" rIns="36576" tIns="36576" bIns="36576" anchor="ctr">
+          <a:bodyPr wrap="square" lIns="36576" tIns="36576" rIns="36576" bIns="36576" anchor="ctr">
             <a:spAutoFit/>
           </a:bodyPr>
           <a:lstStyle/>
@@ -20113,6 +20083,7 @@
           <a:lstStyle/>
           <a:p>
             <a:pPr algn="ctr"/>
+            <a:endParaRPr/>
           </a:p>
         </p:txBody>
       </p:sp>
@@ -20158,6 +20129,7 @@
           <a:lstStyle/>
           <a:p>
             <a:pPr algn="ctr"/>
+            <a:endParaRPr/>
           </a:p>
         </p:txBody>
       </p:sp>
@@ -20178,7 +20150,7 @@
           <a:noFill/>
         </p:spPr>
         <p:txBody>
-          <a:bodyPr wrap="square" lIns="36576" rIns="36576" tIns="36576" bIns="36576" anchor="t">
+          <a:bodyPr wrap="square" lIns="36576" tIns="36576" rIns="36576" bIns="36576" anchor="t">
             <a:spAutoFit/>
           </a:bodyPr>
           <a:lstStyle/>
@@ -20220,7 +20192,7 @@
           <a:noFill/>
         </p:spPr>
         <p:txBody>
-          <a:bodyPr wrap="square" lIns="36576" rIns="36576" tIns="36576" bIns="36576" anchor="t">
+          <a:bodyPr wrap="square" lIns="36576" tIns="36576" rIns="36576" bIns="36576" anchor="t">
             <a:spAutoFit/>
           </a:bodyPr>
           <a:lstStyle/>
@@ -20287,6 +20259,7 @@
           <a:lstStyle/>
           <a:p>
             <a:pPr algn="ctr"/>
+            <a:endParaRPr/>
           </a:p>
         </p:txBody>
       </p:sp>
@@ -20307,7 +20280,7 @@
           <a:noFill/>
         </p:spPr>
         <p:txBody>
-          <a:bodyPr wrap="square" lIns="36576" rIns="36576" tIns="36576" bIns="36576" anchor="t">
+          <a:bodyPr wrap="square" lIns="36576" tIns="36576" rIns="36576" bIns="36576" anchor="t">
             <a:spAutoFit/>
           </a:bodyPr>
           <a:lstStyle/>
@@ -20349,7 +20322,7 @@
           <a:noFill/>
         </p:spPr>
         <p:txBody>
-          <a:bodyPr wrap="square" lIns="36576" rIns="36576" tIns="36576" bIns="36576" anchor="t">
+          <a:bodyPr wrap="square" lIns="36576" tIns="36576" rIns="36576" bIns="36576" anchor="t">
             <a:spAutoFit/>
           </a:bodyPr>
           <a:lstStyle/>
@@ -20416,6 +20389,7 @@
           <a:lstStyle/>
           <a:p>
             <a:pPr algn="ctr"/>
+            <a:endParaRPr/>
           </a:p>
         </p:txBody>
       </p:sp>
@@ -20436,7 +20410,7 @@
           <a:noFill/>
         </p:spPr>
         <p:txBody>
-          <a:bodyPr wrap="square" lIns="36576" rIns="36576" tIns="36576" bIns="36576" anchor="t">
+          <a:bodyPr wrap="square" lIns="36576" tIns="36576" rIns="36576" bIns="36576" anchor="t">
             <a:spAutoFit/>
           </a:bodyPr>
           <a:lstStyle/>
@@ -20478,7 +20452,7 @@
           <a:noFill/>
         </p:spPr>
         <p:txBody>
-          <a:bodyPr wrap="square" lIns="36576" rIns="36576" tIns="36576" bIns="36576" anchor="t">
+          <a:bodyPr wrap="square" lIns="36576" tIns="36576" rIns="36576" bIns="36576" anchor="t">
             <a:spAutoFit/>
           </a:bodyPr>
           <a:lstStyle/>
@@ -20555,7 +20529,7 @@
           <a:noFill/>
         </p:spPr>
         <p:txBody>
-          <a:bodyPr wrap="square" lIns="36576" rIns="36576" tIns="36576" bIns="36576" anchor="t">
+          <a:bodyPr wrap="square" lIns="36576" tIns="36576" rIns="36576" bIns="36576" anchor="t">
             <a:spAutoFit/>
           </a:bodyPr>
           <a:lstStyle/>
@@ -20589,7 +20563,7 @@
 </file>
 
 <file path=ppt/slides/slide5.xml><?xml version="1.0" encoding="utf-8"?>
-<p:sld xmlns:a="http://schemas.openxmlformats.org/drawingml/2006/main" xmlns:p="http://schemas.openxmlformats.org/presentationml/2006/main" xmlns:r="http://schemas.openxmlformats.org/officeDocument/2006/relationships">
+<p:sld xmlns:a="http://schemas.openxmlformats.org/drawingml/2006/main" xmlns:r="http://schemas.openxmlformats.org/officeDocument/2006/relationships" xmlns:p="http://schemas.openxmlformats.org/presentationml/2006/main">
   <p:cSld>
     <p:bg>
       <p:bgPr>
@@ -20605,7 +20579,14 @@
         <p:cNvGrpSpPr/>
         <p:nvPr/>
       </p:nvGrpSpPr>
-      <p:grpSpPr/>
+      <p:grpSpPr>
+        <a:xfrm>
+          <a:off x="0" y="0"/>
+          <a:ext cx="0" cy="0"/>
+          <a:chOff x="0" y="0"/>
+          <a:chExt cx="0" cy="0"/>
+        </a:xfrm>
+      </p:grpSpPr>
       <p:sp>
         <p:nvSpPr>
           <p:cNvPr id="2" name="TextBox 1"/>
@@ -20623,7 +20604,7 @@
           <a:noFill/>
         </p:spPr>
         <p:txBody>
-          <a:bodyPr wrap="square" lIns="36576" rIns="36576" tIns="36576" bIns="36576" anchor="t">
+          <a:bodyPr wrap="square" lIns="36576" tIns="36576" rIns="36576" bIns="36576" anchor="t">
             <a:spAutoFit/>
           </a:bodyPr>
           <a:lstStyle/>
@@ -20665,7 +20646,7 @@
           <a:noFill/>
         </p:spPr>
         <p:txBody>
-          <a:bodyPr wrap="square" lIns="36576" rIns="36576" tIns="36576" bIns="36576" anchor="t">
+          <a:bodyPr wrap="square" lIns="36576" tIns="36576" rIns="36576" bIns="36576" anchor="t">
             <a:spAutoFit/>
           </a:bodyPr>
           <a:lstStyle/>
@@ -20707,7 +20688,7 @@
           <a:noFill/>
         </p:spPr>
         <p:txBody>
-          <a:bodyPr wrap="square" lIns="36576" rIns="36576" tIns="36576" bIns="36576" anchor="t">
+          <a:bodyPr wrap="square" lIns="36576" tIns="36576" rIns="36576" bIns="36576" anchor="t">
             <a:spAutoFit/>
           </a:bodyPr>
           <a:lstStyle/>
@@ -20749,7 +20730,7 @@
           <a:noFill/>
         </p:spPr>
         <p:txBody>
-          <a:bodyPr wrap="square" lIns="36576" rIns="36576" tIns="36576" bIns="36576">
+          <a:bodyPr wrap="square" lIns="36576" tIns="36576" rIns="36576" bIns="36576">
             <a:spAutoFit/>
           </a:bodyPr>
           <a:lstStyle/>
@@ -20818,6 +20799,7 @@
           <a:lstStyle/>
           <a:p>
             <a:pPr algn="ctr"/>
+            <a:endParaRPr/>
           </a:p>
         </p:txBody>
       </p:sp>
@@ -20838,7 +20820,7 @@
           <a:noFill/>
         </p:spPr>
         <p:txBody>
-          <a:bodyPr wrap="square" lIns="36576" rIns="36576" tIns="36576" bIns="36576" anchor="t">
+          <a:bodyPr wrap="square" lIns="36576" tIns="36576" rIns="36576" bIns="36576" anchor="t">
             <a:spAutoFit/>
           </a:bodyPr>
           <a:lstStyle/>
@@ -20901,7 +20883,7 @@
           </a:fontRef>
         </p:style>
         <p:txBody>
-          <a:bodyPr rtlCol="0" anchor="ctr" lIns="54864" rIns="54864" tIns="9144" bIns="9144"/>
+          <a:bodyPr lIns="54864" tIns="9144" rIns="54864" bIns="9144" rtlCol="0" anchor="ctr"/>
           <a:lstStyle/>
           <a:p>
             <a:pPr algn="ctr"/>
@@ -20912,7 +20894,7 @@
                 </a:solidFill>
                 <a:latin typeface="Aptos"/>
               </a:rPr>
-              <a:t>12 cut sites in this peak</a:t>
+              <a:t>24 cut sites in this peak</a:t>
             </a:r>
           </a:p>
         </p:txBody>
@@ -20925,8 +20907,8 @@
         </p:nvCxnSpPr>
         <p:spPr>
           <a:xfrm>
-            <a:off x="1088136" y="2660904"/>
-            <a:ext cx="310896" cy="0"/>
+            <a:off x="1325880" y="2660904"/>
+            <a:ext cx="274320" cy="0"/>
           </a:xfrm>
           <a:prstGeom prst="line">
             <a:avLst/>
@@ -20960,7 +20942,7 @@
         </p:nvCxnSpPr>
         <p:spPr>
           <a:xfrm>
-            <a:off x="1088136" y="2606040"/>
+            <a:off x="1325880" y="2606040"/>
             <a:ext cx="0" cy="109728"/>
           </a:xfrm>
           <a:prstGeom prst="line">
@@ -20995,7 +20977,7 @@
         </p:nvCxnSpPr>
         <p:spPr>
           <a:xfrm>
-            <a:off x="1399032" y="2606040"/>
+            <a:off x="1600200" y="2606040"/>
             <a:ext cx="0" cy="109728"/>
           </a:xfrm>
           <a:prstGeom prst="line">
@@ -21030,8 +21012,8 @@
         </p:nvCxnSpPr>
         <p:spPr>
           <a:xfrm>
-            <a:off x="1837943" y="2660904"/>
-            <a:ext cx="310896" cy="0"/>
+            <a:off x="2075688" y="2660904"/>
+            <a:ext cx="274320" cy="0"/>
           </a:xfrm>
           <a:prstGeom prst="line">
             <a:avLst/>
@@ -21065,7 +21047,7 @@
         </p:nvCxnSpPr>
         <p:spPr>
           <a:xfrm>
-            <a:off x="1837943" y="2606040"/>
+            <a:off x="2075688" y="2606040"/>
             <a:ext cx="0" cy="109728"/>
           </a:xfrm>
           <a:prstGeom prst="line">
@@ -21100,7 +21082,7 @@
         </p:nvCxnSpPr>
         <p:spPr>
           <a:xfrm>
-            <a:off x="2148839" y="2606040"/>
+            <a:off x="2350008" y="2606040"/>
             <a:ext cx="0" cy="109728"/>
           </a:xfrm>
           <a:prstGeom prst="line">
@@ -21135,8 +21117,8 @@
         </p:nvCxnSpPr>
         <p:spPr>
           <a:xfrm>
-            <a:off x="2587752" y="2660904"/>
-            <a:ext cx="310896" cy="0"/>
+            <a:off x="2825496" y="2660904"/>
+            <a:ext cx="274320" cy="0"/>
           </a:xfrm>
           <a:prstGeom prst="line">
             <a:avLst/>
@@ -21170,7 +21152,7 @@
         </p:nvCxnSpPr>
         <p:spPr>
           <a:xfrm>
-            <a:off x="2587752" y="2606040"/>
+            <a:off x="2825496" y="2606040"/>
             <a:ext cx="0" cy="109728"/>
           </a:xfrm>
           <a:prstGeom prst="line">
@@ -21205,7 +21187,7 @@
         </p:nvCxnSpPr>
         <p:spPr>
           <a:xfrm>
-            <a:off x="2898648" y="2606040"/>
+            <a:off x="3099816" y="2606040"/>
             <a:ext cx="0" cy="109728"/>
           </a:xfrm>
           <a:prstGeom prst="line">
@@ -21240,8 +21222,8 @@
         </p:nvCxnSpPr>
         <p:spPr>
           <a:xfrm>
-            <a:off x="3337560" y="2660904"/>
-            <a:ext cx="310896" cy="0"/>
+            <a:off x="3575304" y="2660904"/>
+            <a:ext cx="274320" cy="0"/>
           </a:xfrm>
           <a:prstGeom prst="line">
             <a:avLst/>
@@ -21275,7 +21257,7 @@
         </p:nvCxnSpPr>
         <p:spPr>
           <a:xfrm>
-            <a:off x="3337560" y="2606040"/>
+            <a:off x="3575304" y="2606040"/>
             <a:ext cx="0" cy="109728"/>
           </a:xfrm>
           <a:prstGeom prst="line">
@@ -21310,7 +21292,7 @@
         </p:nvCxnSpPr>
         <p:spPr>
           <a:xfrm>
-            <a:off x="3648456" y="2606040"/>
+            <a:off x="3849624" y="2606040"/>
             <a:ext cx="0" cy="109728"/>
           </a:xfrm>
           <a:prstGeom prst="line">
@@ -21345,8 +21327,8 @@
         </p:nvCxnSpPr>
         <p:spPr>
           <a:xfrm>
-            <a:off x="4087368" y="2660904"/>
-            <a:ext cx="310896" cy="0"/>
+            <a:off x="4325112" y="2660904"/>
+            <a:ext cx="274319" cy="0"/>
           </a:xfrm>
           <a:prstGeom prst="line">
             <a:avLst/>
@@ -21380,7 +21362,7 @@
         </p:nvCxnSpPr>
         <p:spPr>
           <a:xfrm>
-            <a:off x="4087368" y="2606040"/>
+            <a:off x="4325112" y="2606040"/>
             <a:ext cx="0" cy="109728"/>
           </a:xfrm>
           <a:prstGeom prst="line">
@@ -21415,7 +21397,7 @@
         </p:nvCxnSpPr>
         <p:spPr>
           <a:xfrm>
-            <a:off x="4398264" y="2606040"/>
+            <a:off x="4599431" y="2606040"/>
             <a:ext cx="0" cy="109728"/>
           </a:xfrm>
           <a:prstGeom prst="line">
@@ -21450,8 +21432,8 @@
         </p:nvCxnSpPr>
         <p:spPr>
           <a:xfrm>
-            <a:off x="4837175" y="2660904"/>
-            <a:ext cx="310896" cy="0"/>
+            <a:off x="5074919" y="2660904"/>
+            <a:ext cx="274320" cy="0"/>
           </a:xfrm>
           <a:prstGeom prst="line">
             <a:avLst/>
@@ -21485,7 +21467,7 @@
         </p:nvCxnSpPr>
         <p:spPr>
           <a:xfrm>
-            <a:off x="4837175" y="2606040"/>
+            <a:off x="5074919" y="2606040"/>
             <a:ext cx="0" cy="109728"/>
           </a:xfrm>
           <a:prstGeom prst="line">
@@ -21520,7 +21502,7 @@
         </p:nvCxnSpPr>
         <p:spPr>
           <a:xfrm>
-            <a:off x="5148071" y="2606040"/>
+            <a:off x="5349239" y="2606040"/>
             <a:ext cx="0" cy="109728"/>
           </a:xfrm>
           <a:prstGeom prst="line">
@@ -21555,8 +21537,8 @@
         </p:nvCxnSpPr>
         <p:spPr>
           <a:xfrm>
-            <a:off x="1088136" y="3300984"/>
-            <a:ext cx="310896" cy="0"/>
+            <a:off x="1325880" y="3300984"/>
+            <a:ext cx="274320" cy="0"/>
           </a:xfrm>
           <a:prstGeom prst="line">
             <a:avLst/>
@@ -21590,7 +21572,7 @@
         </p:nvCxnSpPr>
         <p:spPr>
           <a:xfrm>
-            <a:off x="1088136" y="3246120"/>
+            <a:off x="1325880" y="3246120"/>
             <a:ext cx="0" cy="109728"/>
           </a:xfrm>
           <a:prstGeom prst="line">
@@ -21625,7 +21607,7 @@
         </p:nvCxnSpPr>
         <p:spPr>
           <a:xfrm>
-            <a:off x="1399032" y="3246120"/>
+            <a:off x="1600200" y="3246120"/>
             <a:ext cx="0" cy="109728"/>
           </a:xfrm>
           <a:prstGeom prst="line">
@@ -21660,8 +21642,8 @@
         </p:nvCxnSpPr>
         <p:spPr>
           <a:xfrm>
-            <a:off x="1837943" y="3300984"/>
-            <a:ext cx="658368" cy="0"/>
+            <a:off x="1984248" y="3300984"/>
+            <a:ext cx="457200" cy="0"/>
           </a:xfrm>
           <a:prstGeom prst="line">
             <a:avLst/>
@@ -21695,7 +21677,7 @@
         </p:nvCxnSpPr>
         <p:spPr>
           <a:xfrm>
-            <a:off x="1837943" y="3246120"/>
+            <a:off x="1984248" y="3246120"/>
             <a:ext cx="0" cy="109728"/>
           </a:xfrm>
           <a:prstGeom prst="line">
@@ -21730,7 +21712,7 @@
         </p:nvCxnSpPr>
         <p:spPr>
           <a:xfrm>
-            <a:off x="2496311" y="3246120"/>
+            <a:off x="2441448" y="3246120"/>
             <a:ext cx="0" cy="109728"/>
           </a:xfrm>
           <a:prstGeom prst="line">
@@ -21765,8 +21747,8 @@
         </p:nvCxnSpPr>
         <p:spPr>
           <a:xfrm>
-            <a:off x="2587752" y="3300984"/>
-            <a:ext cx="658368" cy="0"/>
+            <a:off x="2734056" y="3300984"/>
+            <a:ext cx="457200" cy="0"/>
           </a:xfrm>
           <a:prstGeom prst="line">
             <a:avLst/>
@@ -21800,7 +21782,7 @@
         </p:nvCxnSpPr>
         <p:spPr>
           <a:xfrm>
-            <a:off x="2587752" y="3246120"/>
+            <a:off x="2734056" y="3246120"/>
             <a:ext cx="0" cy="109728"/>
           </a:xfrm>
           <a:prstGeom prst="line">
@@ -21835,7 +21817,7 @@
         </p:nvCxnSpPr>
         <p:spPr>
           <a:xfrm>
-            <a:off x="3246120" y="3246120"/>
+            <a:off x="3191256" y="3246120"/>
             <a:ext cx="0" cy="109728"/>
           </a:xfrm>
           <a:prstGeom prst="line">
@@ -21870,8 +21852,8 @@
         </p:nvCxnSpPr>
         <p:spPr>
           <a:xfrm>
-            <a:off x="3337560" y="3300984"/>
-            <a:ext cx="658368" cy="0"/>
+            <a:off x="3483864" y="3300984"/>
+            <a:ext cx="457200" cy="0"/>
           </a:xfrm>
           <a:prstGeom prst="line">
             <a:avLst/>
@@ -21905,7 +21887,7 @@
         </p:nvCxnSpPr>
         <p:spPr>
           <a:xfrm>
-            <a:off x="3337560" y="3246120"/>
+            <a:off x="3483864" y="3246120"/>
             <a:ext cx="0" cy="109728"/>
           </a:xfrm>
           <a:prstGeom prst="line">
@@ -21940,7 +21922,7 @@
         </p:nvCxnSpPr>
         <p:spPr>
           <a:xfrm>
-            <a:off x="3995928" y="3246120"/>
+            <a:off x="3941064" y="3246120"/>
             <a:ext cx="0" cy="109728"/>
           </a:xfrm>
           <a:prstGeom prst="line">
@@ -21975,8 +21957,8 @@
         </p:nvCxnSpPr>
         <p:spPr>
           <a:xfrm>
-            <a:off x="4087368" y="3300984"/>
-            <a:ext cx="1078991" cy="0"/>
+            <a:off x="4142232" y="3300984"/>
+            <a:ext cx="640080" cy="0"/>
           </a:xfrm>
           <a:prstGeom prst="line">
             <a:avLst/>
@@ -22010,7 +21992,7 @@
         </p:nvCxnSpPr>
         <p:spPr>
           <a:xfrm>
-            <a:off x="4087368" y="3246120"/>
+            <a:off x="4142232" y="3246120"/>
             <a:ext cx="0" cy="109728"/>
           </a:xfrm>
           <a:prstGeom prst="line">
@@ -22045,7 +22027,7 @@
         </p:nvCxnSpPr>
         <p:spPr>
           <a:xfrm>
-            <a:off x="5166359" y="3246120"/>
+            <a:off x="4782312" y="3246120"/>
             <a:ext cx="0" cy="109728"/>
           </a:xfrm>
           <a:prstGeom prst="line">
@@ -22080,8 +22062,8 @@
         </p:nvCxnSpPr>
         <p:spPr>
           <a:xfrm>
-            <a:off x="4837175" y="3300984"/>
-            <a:ext cx="1078992" cy="0"/>
+            <a:off x="4892040" y="3300984"/>
+            <a:ext cx="640080" cy="0"/>
           </a:xfrm>
           <a:prstGeom prst="line">
             <a:avLst/>
@@ -22115,7 +22097,7 @@
         </p:nvCxnSpPr>
         <p:spPr>
           <a:xfrm>
-            <a:off x="4837175" y="3246120"/>
+            <a:off x="4892040" y="3246120"/>
             <a:ext cx="0" cy="109728"/>
           </a:xfrm>
           <a:prstGeom prst="line">
@@ -22150,7 +22132,7 @@
         </p:nvCxnSpPr>
         <p:spPr>
           <a:xfrm>
-            <a:off x="5916167" y="3246120"/>
+            <a:off x="5532120" y="3246120"/>
             <a:ext cx="0" cy="109728"/>
           </a:xfrm>
           <a:prstGeom prst="line">
@@ -22219,6 +22201,7 @@
           <a:lstStyle/>
           <a:p>
             <a:pPr algn="ctr"/>
+            <a:endParaRPr/>
           </a:p>
         </p:txBody>
       </p:sp>
@@ -22264,6 +22247,7 @@
           <a:lstStyle/>
           <a:p>
             <a:pPr algn="ctr"/>
+            <a:endParaRPr/>
           </a:p>
         </p:txBody>
       </p:sp>
@@ -22309,6 +22293,7 @@
           <a:lstStyle/>
           <a:p>
             <a:pPr algn="ctr"/>
+            <a:endParaRPr/>
           </a:p>
         </p:txBody>
       </p:sp>
@@ -22352,6 +22337,7 @@
           <a:lstStyle/>
           <a:p>
             <a:pPr algn="ctr"/>
+            <a:endParaRPr/>
           </a:p>
         </p:txBody>
       </p:sp>
@@ -22397,6 +22383,7 @@
           <a:lstStyle/>
           <a:p>
             <a:pPr algn="ctr"/>
+            <a:endParaRPr/>
           </a:p>
         </p:txBody>
       </p:sp>
@@ -22417,7 +22404,7 @@
           <a:noFill/>
         </p:spPr>
         <p:txBody>
-          <a:bodyPr wrap="square" lIns="36576" rIns="36576" tIns="36576" bIns="36576" anchor="t">
+          <a:bodyPr wrap="square" lIns="36576" tIns="36576" rIns="36576" bIns="36576" anchor="t">
             <a:spAutoFit/>
           </a:bodyPr>
           <a:lstStyle/>
@@ -22480,7 +22467,7 @@
           </a:fontRef>
         </p:style>
         <p:txBody>
-          <a:bodyPr rtlCol="0" anchor="ctr" lIns="54864" rIns="54864" tIns="9144" bIns="9144"/>
+          <a:bodyPr lIns="54864" tIns="9144" rIns="54864" bIns="9144" rtlCol="0" anchor="ctr"/>
           <a:lstStyle/>
           <a:p>
             <a:pPr algn="ctr"/>
@@ -22491,7 +22478,7 @@
                 </a:solidFill>
                 <a:latin typeface="Aptos"/>
               </a:rPr>
-              <a:t>12 cut sites in this peak</a:t>
+              <a:t>24 cut sites in this peak</a:t>
             </a:r>
           </a:p>
         </p:txBody>
@@ -22504,8 +22491,8 @@
         </p:nvCxnSpPr>
         <p:spPr>
           <a:xfrm>
-            <a:off x="6592824" y="2660904"/>
-            <a:ext cx="310896" cy="0"/>
+            <a:off x="6830568" y="2660904"/>
+            <a:ext cx="274320" cy="0"/>
           </a:xfrm>
           <a:prstGeom prst="line">
             <a:avLst/>
@@ -22539,7 +22526,7 @@
         </p:nvCxnSpPr>
         <p:spPr>
           <a:xfrm>
-            <a:off x="6592824" y="2606040"/>
+            <a:off x="6830568" y="2606040"/>
             <a:ext cx="0" cy="109728"/>
           </a:xfrm>
           <a:prstGeom prst="line">
@@ -22574,7 +22561,7 @@
         </p:nvCxnSpPr>
         <p:spPr>
           <a:xfrm>
-            <a:off x="6903720" y="2606040"/>
+            <a:off x="7104888" y="2606040"/>
             <a:ext cx="0" cy="109728"/>
           </a:xfrm>
           <a:prstGeom prst="line">
@@ -22609,8 +22596,8 @@
         </p:nvCxnSpPr>
         <p:spPr>
           <a:xfrm>
-            <a:off x="7342631" y="2660904"/>
-            <a:ext cx="310896" cy="0"/>
+            <a:off x="7580375" y="2660904"/>
+            <a:ext cx="274321" cy="0"/>
           </a:xfrm>
           <a:prstGeom prst="line">
             <a:avLst/>
@@ -22644,7 +22631,7 @@
         </p:nvCxnSpPr>
         <p:spPr>
           <a:xfrm>
-            <a:off x="7342631" y="2606040"/>
+            <a:off x="7580375" y="2606040"/>
             <a:ext cx="0" cy="109728"/>
           </a:xfrm>
           <a:prstGeom prst="line">
@@ -22679,7 +22666,7 @@
         </p:nvCxnSpPr>
         <p:spPr>
           <a:xfrm>
-            <a:off x="7653527" y="2606040"/>
+            <a:off x="7854696" y="2606040"/>
             <a:ext cx="0" cy="109728"/>
           </a:xfrm>
           <a:prstGeom prst="line">
@@ -22714,8 +22701,8 @@
         </p:nvCxnSpPr>
         <p:spPr>
           <a:xfrm>
-            <a:off x="8092440" y="2660904"/>
-            <a:ext cx="658368" cy="0"/>
+            <a:off x="8238744" y="2660904"/>
+            <a:ext cx="457200" cy="0"/>
           </a:xfrm>
           <a:prstGeom prst="line">
             <a:avLst/>
@@ -22749,7 +22736,7 @@
         </p:nvCxnSpPr>
         <p:spPr>
           <a:xfrm>
-            <a:off x="8092440" y="2606040"/>
+            <a:off x="8238744" y="2606040"/>
             <a:ext cx="0" cy="109728"/>
           </a:xfrm>
           <a:prstGeom prst="line">
@@ -22784,7 +22771,7 @@
         </p:nvCxnSpPr>
         <p:spPr>
           <a:xfrm>
-            <a:off x="8750808" y="2606040"/>
+            <a:off x="8695944" y="2606040"/>
             <a:ext cx="0" cy="109728"/>
           </a:xfrm>
           <a:prstGeom prst="line">
@@ -22819,8 +22806,8 @@
         </p:nvCxnSpPr>
         <p:spPr>
           <a:xfrm>
-            <a:off x="8842248" y="2660904"/>
-            <a:ext cx="658368" cy="0"/>
+            <a:off x="8988552" y="2660904"/>
+            <a:ext cx="457200" cy="0"/>
           </a:xfrm>
           <a:prstGeom prst="line">
             <a:avLst/>
@@ -22854,7 +22841,7 @@
         </p:nvCxnSpPr>
         <p:spPr>
           <a:xfrm>
-            <a:off x="8842248" y="2606040"/>
+            <a:off x="8988552" y="2606040"/>
             <a:ext cx="0" cy="109728"/>
           </a:xfrm>
           <a:prstGeom prst="line">
@@ -22889,7 +22876,7 @@
         </p:nvCxnSpPr>
         <p:spPr>
           <a:xfrm>
-            <a:off x="9500616" y="2606040"/>
+            <a:off x="9445752" y="2606040"/>
             <a:ext cx="0" cy="109728"/>
           </a:xfrm>
           <a:prstGeom prst="line">
@@ -22924,8 +22911,8 @@
         </p:nvCxnSpPr>
         <p:spPr>
           <a:xfrm>
-            <a:off x="9592056" y="2660904"/>
-            <a:ext cx="658368" cy="0"/>
+            <a:off x="9738360" y="2660904"/>
+            <a:ext cx="457200" cy="0"/>
           </a:xfrm>
           <a:prstGeom prst="line">
             <a:avLst/>
@@ -22959,7 +22946,7 @@
         </p:nvCxnSpPr>
         <p:spPr>
           <a:xfrm>
-            <a:off x="9592056" y="2606040"/>
+            <a:off x="9738360" y="2606040"/>
             <a:ext cx="0" cy="109728"/>
           </a:xfrm>
           <a:prstGeom prst="line">
@@ -22994,7 +22981,7 @@
         </p:nvCxnSpPr>
         <p:spPr>
           <a:xfrm>
-            <a:off x="10250424" y="2606040"/>
+            <a:off x="10195560" y="2606040"/>
             <a:ext cx="0" cy="109728"/>
           </a:xfrm>
           <a:prstGeom prst="line">
@@ -23029,8 +23016,8 @@
         </p:nvCxnSpPr>
         <p:spPr>
           <a:xfrm>
-            <a:off x="10341863" y="2660904"/>
-            <a:ext cx="658369" cy="0"/>
+            <a:off x="10488167" y="2660904"/>
+            <a:ext cx="457200" cy="0"/>
           </a:xfrm>
           <a:prstGeom prst="line">
             <a:avLst/>
@@ -23064,7 +23051,7 @@
         </p:nvCxnSpPr>
         <p:spPr>
           <a:xfrm>
-            <a:off x="10341863" y="2606040"/>
+            <a:off x="10488167" y="2606040"/>
             <a:ext cx="0" cy="109728"/>
           </a:xfrm>
           <a:prstGeom prst="line">
@@ -23099,7 +23086,7 @@
         </p:nvCxnSpPr>
         <p:spPr>
           <a:xfrm>
-            <a:off x="11000232" y="2606040"/>
+            <a:off x="10945367" y="2606040"/>
             <a:ext cx="0" cy="109728"/>
           </a:xfrm>
           <a:prstGeom prst="line">
@@ -23134,8 +23121,8 @@
         </p:nvCxnSpPr>
         <p:spPr>
           <a:xfrm>
-            <a:off x="6592824" y="3300984"/>
-            <a:ext cx="1078992" cy="0"/>
+            <a:off x="6647688" y="3300984"/>
+            <a:ext cx="640080" cy="0"/>
           </a:xfrm>
           <a:prstGeom prst="line">
             <a:avLst/>
@@ -23169,7 +23156,7 @@
         </p:nvCxnSpPr>
         <p:spPr>
           <a:xfrm>
-            <a:off x="6592824" y="3246120"/>
+            <a:off x="6647688" y="3246120"/>
             <a:ext cx="0" cy="109728"/>
           </a:xfrm>
           <a:prstGeom prst="line">
@@ -23204,7 +23191,7 @@
         </p:nvCxnSpPr>
         <p:spPr>
           <a:xfrm>
-            <a:off x="7671816" y="3246120"/>
+            <a:off x="7287768" y="3246120"/>
             <a:ext cx="0" cy="109728"/>
           </a:xfrm>
           <a:prstGeom prst="line">
@@ -23239,8 +23226,8 @@
         </p:nvCxnSpPr>
         <p:spPr>
           <a:xfrm>
-            <a:off x="7342631" y="3300984"/>
-            <a:ext cx="1078993" cy="0"/>
+            <a:off x="7397496" y="3300984"/>
+            <a:ext cx="640079" cy="0"/>
           </a:xfrm>
           <a:prstGeom prst="line">
             <a:avLst/>
@@ -23274,7 +23261,7 @@
         </p:nvCxnSpPr>
         <p:spPr>
           <a:xfrm>
-            <a:off x="7342631" y="3246120"/>
+            <a:off x="7397496" y="3246120"/>
             <a:ext cx="0" cy="109728"/>
           </a:xfrm>
           <a:prstGeom prst="line">
@@ -23309,7 +23296,7 @@
         </p:nvCxnSpPr>
         <p:spPr>
           <a:xfrm>
-            <a:off x="8421624" y="3246120"/>
+            <a:off x="8037575" y="3246120"/>
             <a:ext cx="0" cy="109728"/>
           </a:xfrm>
           <a:prstGeom prst="line">
@@ -23344,8 +23331,8 @@
         </p:nvCxnSpPr>
         <p:spPr>
           <a:xfrm>
-            <a:off x="8092440" y="3300984"/>
-            <a:ext cx="1078992" cy="0"/>
+            <a:off x="8147304" y="3300984"/>
+            <a:ext cx="640080" cy="0"/>
           </a:xfrm>
           <a:prstGeom prst="line">
             <a:avLst/>
@@ -23379,7 +23366,7 @@
         </p:nvCxnSpPr>
         <p:spPr>
           <a:xfrm>
-            <a:off x="8092440" y="3246120"/>
+            <a:off x="8147304" y="3246120"/>
             <a:ext cx="0" cy="109728"/>
           </a:xfrm>
           <a:prstGeom prst="line">
@@ -23414,7 +23401,7 @@
         </p:nvCxnSpPr>
         <p:spPr>
           <a:xfrm>
-            <a:off x="9171432" y="3246120"/>
+            <a:off x="8787384" y="3246120"/>
             <a:ext cx="0" cy="109728"/>
           </a:xfrm>
           <a:prstGeom prst="line">
@@ -23449,8 +23436,8 @@
         </p:nvCxnSpPr>
         <p:spPr>
           <a:xfrm>
-            <a:off x="8842248" y="3300984"/>
-            <a:ext cx="1078992" cy="0"/>
+            <a:off x="8897112" y="3300984"/>
+            <a:ext cx="640080" cy="0"/>
           </a:xfrm>
           <a:prstGeom prst="line">
             <a:avLst/>
@@ -23484,7 +23471,7 @@
         </p:nvCxnSpPr>
         <p:spPr>
           <a:xfrm>
-            <a:off x="8842248" y="3246120"/>
+            <a:off x="8897112" y="3246120"/>
             <a:ext cx="0" cy="109728"/>
           </a:xfrm>
           <a:prstGeom prst="line">
@@ -23519,7 +23506,7 @@
         </p:nvCxnSpPr>
         <p:spPr>
           <a:xfrm>
-            <a:off x="9921240" y="3246120"/>
+            <a:off x="9537192" y="3246120"/>
             <a:ext cx="0" cy="109728"/>
           </a:xfrm>
           <a:prstGeom prst="line">
@@ -23554,8 +23541,8 @@
         </p:nvCxnSpPr>
         <p:spPr>
           <a:xfrm>
-            <a:off x="9592056" y="3300984"/>
-            <a:ext cx="1078992" cy="0"/>
+            <a:off x="9646920" y="3300984"/>
+            <a:ext cx="640080" cy="0"/>
           </a:xfrm>
           <a:prstGeom prst="line">
             <a:avLst/>
@@ -23589,7 +23576,7 @@
         </p:nvCxnSpPr>
         <p:spPr>
           <a:xfrm>
-            <a:off x="9592056" y="3246120"/>
+            <a:off x="9646920" y="3246120"/>
             <a:ext cx="0" cy="109728"/>
           </a:xfrm>
           <a:prstGeom prst="line">
@@ -23624,7 +23611,7 @@
         </p:nvCxnSpPr>
         <p:spPr>
           <a:xfrm>
-            <a:off x="10671048" y="3246120"/>
+            <a:off x="10287000" y="3246120"/>
             <a:ext cx="0" cy="109728"/>
           </a:xfrm>
           <a:prstGeom prst="line">
@@ -23659,8 +23646,8 @@
         </p:nvCxnSpPr>
         <p:spPr>
           <a:xfrm>
-            <a:off x="10341863" y="3300984"/>
-            <a:ext cx="1078992" cy="0"/>
+            <a:off x="10396728" y="3300984"/>
+            <a:ext cx="640079" cy="0"/>
           </a:xfrm>
           <a:prstGeom prst="line">
             <a:avLst/>
@@ -23694,7 +23681,7 @@
         </p:nvCxnSpPr>
         <p:spPr>
           <a:xfrm>
-            <a:off x="10341863" y="3246120"/>
+            <a:off x="10396728" y="3246120"/>
             <a:ext cx="0" cy="109728"/>
           </a:xfrm>
           <a:prstGeom prst="line">
@@ -23729,7 +23716,7 @@
         </p:nvCxnSpPr>
         <p:spPr>
           <a:xfrm>
-            <a:off x="11420855" y="3246120"/>
+            <a:off x="11036807" y="3246120"/>
             <a:ext cx="0" cy="109728"/>
           </a:xfrm>
           <a:prstGeom prst="line">
@@ -23798,6 +23785,7 @@
           <a:lstStyle/>
           <a:p>
             <a:pPr algn="ctr"/>
+            <a:endParaRPr/>
           </a:p>
         </p:txBody>
       </p:sp>
@@ -23843,6 +23831,7 @@
           <a:lstStyle/>
           <a:p>
             <a:pPr algn="ctr"/>
+            <a:endParaRPr/>
           </a:p>
         </p:txBody>
       </p:sp>
@@ -23888,6 +23877,7 @@
           <a:lstStyle/>
           <a:p>
             <a:pPr algn="ctr"/>
+            <a:endParaRPr/>
           </a:p>
         </p:txBody>
       </p:sp>
@@ -23931,6 +23921,7 @@
           <a:lstStyle/>
           <a:p>
             <a:pPr algn="ctr"/>
+            <a:endParaRPr/>
           </a:p>
         </p:txBody>
       </p:sp>
@@ -23951,7 +23942,7 @@
           <a:noFill/>
         </p:spPr>
         <p:txBody>
-          <a:bodyPr wrap="square" lIns="36576" rIns="36576" tIns="36576" bIns="36576" anchor="t">
+          <a:bodyPr wrap="square" lIns="36576" tIns="36576" rIns="36576" bIns="36576" anchor="t">
             <a:spAutoFit/>
           </a:bodyPr>
           <a:lstStyle/>
@@ -23971,7 +23962,7 @@
                 </a:solidFill>
                 <a:latin typeface="Aptos"/>
               </a:rPr>
-              <a:t>Count-only model sees: 12 = 12</a:t>
+              <a:t>Count-only model sees: 24 = 24</a:t>
             </a:r>
           </a:p>
         </p:txBody>
@@ -23993,7 +23984,7 @@
           <a:noFill/>
         </p:spPr>
         <p:txBody>
-          <a:bodyPr wrap="square" lIns="36576" rIns="36576" tIns="36576" bIns="36576" anchor="t">
+          <a:bodyPr wrap="square" lIns="36576" tIns="36576" rIns="36576" bIns="36576" anchor="t">
             <a:spAutoFit/>
           </a:bodyPr>
           <a:lstStyle/>
@@ -24060,6 +24051,7 @@
           <a:lstStyle/>
           <a:p>
             <a:pPr algn="ctr"/>
+            <a:endParaRPr/>
           </a:p>
         </p:txBody>
       </p:sp>
@@ -24101,7 +24093,7 @@
           </a:fontRef>
         </p:style>
         <p:txBody>
-          <a:bodyPr rtlCol="0" anchor="ctr" lIns="54864" rIns="54864" tIns="9144" bIns="9144"/>
+          <a:bodyPr lIns="54864" tIns="9144" rIns="54864" bIns="9144" rtlCol="0" anchor="ctr"/>
           <a:lstStyle/>
           <a:p>
             <a:pPr algn="ctr"/>
@@ -24134,7 +24126,7 @@
           <a:noFill/>
         </p:spPr>
         <p:txBody>
-          <a:bodyPr wrap="square" lIns="36576" rIns="36576" tIns="36576" bIns="36576" anchor="t">
+          <a:bodyPr wrap="square" lIns="36576" tIns="36576" rIns="36576" bIns="36576" anchor="t">
             <a:spAutoFit/>
           </a:bodyPr>
           <a:lstStyle/>
@@ -24176,7 +24168,7 @@
           <a:noFill/>
         </p:spPr>
         <p:txBody>
-          <a:bodyPr wrap="square" lIns="36576" rIns="36576" tIns="36576" bIns="36576" anchor="t">
+          <a:bodyPr wrap="square" lIns="36576" tIns="36576" rIns="36576" bIns="36576" anchor="t">
             <a:spAutoFit/>
           </a:bodyPr>
           <a:lstStyle/>
@@ -24243,6 +24235,7 @@
           <a:lstStyle/>
           <a:p>
             <a:pPr algn="ctr"/>
+            <a:endParaRPr/>
           </a:p>
         </p:txBody>
       </p:sp>
@@ -24284,7 +24277,7 @@
           </a:fontRef>
         </p:style>
         <p:txBody>
-          <a:bodyPr rtlCol="0" anchor="ctr" lIns="54864" rIns="54864" tIns="9144" bIns="9144"/>
+          <a:bodyPr lIns="54864" tIns="9144" rIns="54864" bIns="9144" rtlCol="0" anchor="ctr"/>
           <a:lstStyle/>
           <a:p>
             <a:pPr algn="ctr"/>
@@ -24317,7 +24310,7 @@
           <a:noFill/>
         </p:spPr>
         <p:txBody>
-          <a:bodyPr wrap="square" lIns="36576" rIns="36576" tIns="36576" bIns="36576" anchor="t">
+          <a:bodyPr wrap="square" lIns="36576" tIns="36576" rIns="36576" bIns="36576" anchor="t">
             <a:spAutoFit/>
           </a:bodyPr>
           <a:lstStyle/>
@@ -24359,7 +24352,7 @@
           <a:noFill/>
         </p:spPr>
         <p:txBody>
-          <a:bodyPr wrap="square" lIns="36576" rIns="36576" tIns="36576" bIns="36576" anchor="t">
+          <a:bodyPr wrap="square" lIns="36576" tIns="36576" rIns="36576" bIns="36576" anchor="t">
             <a:spAutoFit/>
           </a:bodyPr>
           <a:lstStyle/>
@@ -24426,6 +24419,7 @@
           <a:lstStyle/>
           <a:p>
             <a:pPr algn="ctr"/>
+            <a:endParaRPr/>
           </a:p>
         </p:txBody>
       </p:sp>
@@ -24467,7 +24461,7 @@
           </a:fontRef>
         </p:style>
         <p:txBody>
-          <a:bodyPr rtlCol="0" anchor="ctr" lIns="54864" rIns="54864" tIns="9144" bIns="9144"/>
+          <a:bodyPr lIns="54864" tIns="9144" rIns="54864" bIns="9144" rtlCol="0" anchor="ctr"/>
           <a:lstStyle/>
           <a:p>
             <a:pPr algn="ctr"/>
@@ -24500,7 +24494,7 @@
           <a:noFill/>
         </p:spPr>
         <p:txBody>
-          <a:bodyPr wrap="square" lIns="36576" rIns="36576" tIns="36576" bIns="36576" anchor="t">
+          <a:bodyPr wrap="square" lIns="36576" tIns="36576" rIns="36576" bIns="36576" anchor="t">
             <a:spAutoFit/>
           </a:bodyPr>
           <a:lstStyle/>
@@ -24542,7 +24536,7 @@
           <a:noFill/>
         </p:spPr>
         <p:txBody>
-          <a:bodyPr wrap="square" lIns="36576" rIns="36576" tIns="36576" bIns="36576" anchor="t">
+          <a:bodyPr wrap="square" lIns="36576" tIns="36576" rIns="36576" bIns="36576" anchor="t">
             <a:spAutoFit/>
           </a:bodyPr>
           <a:lstStyle/>
@@ -24619,7 +24613,7 @@
           <a:noFill/>
         </p:spPr>
         <p:txBody>
-          <a:bodyPr wrap="square" lIns="36576" rIns="36576" tIns="36576" bIns="36576" anchor="t">
+          <a:bodyPr wrap="square" lIns="36576" tIns="36576" rIns="36576" bIns="36576" anchor="t">
             <a:spAutoFit/>
           </a:bodyPr>
           <a:lstStyle/>
@@ -24653,7 +24647,7 @@
 </file>
 
 <file path=ppt/slides/slide6.xml><?xml version="1.0" encoding="utf-8"?>
-<p:sld xmlns:a="http://schemas.openxmlformats.org/drawingml/2006/main" xmlns:p="http://schemas.openxmlformats.org/presentationml/2006/main" xmlns:r="http://schemas.openxmlformats.org/officeDocument/2006/relationships">
+<p:sld xmlns:a="http://schemas.openxmlformats.org/drawingml/2006/main" xmlns:r="http://schemas.openxmlformats.org/officeDocument/2006/relationships" xmlns:p="http://schemas.openxmlformats.org/presentationml/2006/main">
   <p:cSld>
     <p:bg>
       <p:bgPr>
@@ -24669,7 +24663,14 @@
         <p:cNvGrpSpPr/>
         <p:nvPr/>
       </p:nvGrpSpPr>
-      <p:grpSpPr/>
+      <p:grpSpPr>
+        <a:xfrm>
+          <a:off x="0" y="0"/>
+          <a:ext cx="0" cy="0"/>
+          <a:chOff x="0" y="0"/>
+          <a:chExt cx="0" cy="0"/>
+        </a:xfrm>
+      </p:grpSpPr>
       <p:sp>
         <p:nvSpPr>
           <p:cNvPr id="2" name="TextBox 1"/>
@@ -24687,7 +24688,7 @@
           <a:noFill/>
         </p:spPr>
         <p:txBody>
-          <a:bodyPr wrap="square" lIns="36576" rIns="36576" tIns="36576" bIns="36576" anchor="t">
+          <a:bodyPr wrap="square" lIns="36576" tIns="36576" rIns="36576" bIns="36576" anchor="t">
             <a:spAutoFit/>
           </a:bodyPr>
           <a:lstStyle/>
@@ -24729,7 +24730,7 @@
           <a:noFill/>
         </p:spPr>
         <p:txBody>
-          <a:bodyPr wrap="square" lIns="36576" rIns="36576" tIns="36576" bIns="36576" anchor="t">
+          <a:bodyPr wrap="square" lIns="36576" tIns="36576" rIns="36576" bIns="36576" anchor="t">
             <a:spAutoFit/>
           </a:bodyPr>
           <a:lstStyle/>
@@ -24771,7 +24772,7 @@
           <a:noFill/>
         </p:spPr>
         <p:txBody>
-          <a:bodyPr wrap="square" lIns="36576" rIns="36576" tIns="36576" bIns="36576" anchor="t">
+          <a:bodyPr wrap="square" lIns="36576" tIns="36576" rIns="36576" bIns="36576" anchor="t">
             <a:spAutoFit/>
           </a:bodyPr>
           <a:lstStyle/>
@@ -24838,6 +24839,7 @@
           <a:lstStyle/>
           <a:p>
             <a:pPr algn="ctr"/>
+            <a:endParaRPr/>
           </a:p>
         </p:txBody>
       </p:sp>
@@ -24883,6 +24885,7 @@
           <a:lstStyle/>
           <a:p>
             <a:pPr algn="ctr"/>
+            <a:endParaRPr/>
           </a:p>
         </p:txBody>
       </p:sp>
@@ -24903,7 +24906,7 @@
           <a:noFill/>
         </p:spPr>
         <p:txBody>
-          <a:bodyPr wrap="square" lIns="36576" rIns="36576" tIns="36576" bIns="36576" anchor="ctr">
+          <a:bodyPr wrap="square" lIns="36576" tIns="36576" rIns="36576" bIns="36576" anchor="ctr">
             <a:spAutoFit/>
           </a:bodyPr>
           <a:lstStyle/>
@@ -24970,6 +24973,7 @@
           <a:lstStyle/>
           <a:p>
             <a:pPr algn="ctr"/>
+            <a:endParaRPr/>
           </a:p>
         </p:txBody>
       </p:sp>
@@ -25015,6 +25019,7 @@
           <a:lstStyle/>
           <a:p>
             <a:pPr algn="ctr"/>
+            <a:endParaRPr/>
           </a:p>
         </p:txBody>
       </p:sp>
@@ -25060,6 +25065,7 @@
           <a:lstStyle/>
           <a:p>
             <a:pPr algn="ctr"/>
+            <a:endParaRPr/>
           </a:p>
         </p:txBody>
       </p:sp>
@@ -25105,6 +25111,7 @@
           <a:lstStyle/>
           <a:p>
             <a:pPr algn="ctr"/>
+            <a:endParaRPr/>
           </a:p>
         </p:txBody>
       </p:sp>
@@ -25150,6 +25157,7 @@
           <a:lstStyle/>
           <a:p>
             <a:pPr algn="ctr"/>
+            <a:endParaRPr/>
           </a:p>
         </p:txBody>
       </p:sp>
@@ -25195,6 +25203,7 @@
           <a:lstStyle/>
           <a:p>
             <a:pPr algn="ctr"/>
+            <a:endParaRPr/>
           </a:p>
         </p:txBody>
       </p:sp>
@@ -25240,6 +25249,7 @@
           <a:lstStyle/>
           <a:p>
             <a:pPr algn="ctr"/>
+            <a:endParaRPr/>
           </a:p>
         </p:txBody>
       </p:sp>
@@ -25285,6 +25295,7 @@
           <a:lstStyle/>
           <a:p>
             <a:pPr algn="ctr"/>
+            <a:endParaRPr/>
           </a:p>
         </p:txBody>
       </p:sp>
@@ -25330,6 +25341,7 @@
           <a:lstStyle/>
           <a:p>
             <a:pPr algn="ctr"/>
+            <a:endParaRPr/>
           </a:p>
         </p:txBody>
       </p:sp>
@@ -25375,6 +25387,7 @@
           <a:lstStyle/>
           <a:p>
             <a:pPr algn="ctr"/>
+            <a:endParaRPr/>
           </a:p>
         </p:txBody>
       </p:sp>
@@ -25420,6 +25433,7 @@
           <a:lstStyle/>
           <a:p>
             <a:pPr algn="ctr"/>
+            <a:endParaRPr/>
           </a:p>
         </p:txBody>
       </p:sp>
@@ -25465,6 +25479,7 @@
           <a:lstStyle/>
           <a:p>
             <a:pPr algn="ctr"/>
+            <a:endParaRPr/>
           </a:p>
         </p:txBody>
       </p:sp>
@@ -25485,7 +25500,7 @@
           <a:noFill/>
         </p:spPr>
         <p:txBody>
-          <a:bodyPr wrap="square" lIns="36576" rIns="36576" tIns="36576" bIns="36576" anchor="t">
+          <a:bodyPr wrap="square" lIns="36576" tIns="36576" rIns="36576" bIns="36576" anchor="t">
             <a:spAutoFit/>
           </a:bodyPr>
           <a:lstStyle/>
@@ -25527,7 +25542,7 @@
           <a:noFill/>
         </p:spPr>
         <p:txBody>
-          <a:bodyPr wrap="square" lIns="36576" rIns="36576" tIns="36576" bIns="36576" anchor="t">
+          <a:bodyPr wrap="square" lIns="36576" tIns="36576" rIns="36576" bIns="36576" anchor="t">
             <a:spAutoFit/>
           </a:bodyPr>
           <a:lstStyle/>
@@ -25594,6 +25609,7 @@
           <a:lstStyle/>
           <a:p>
             <a:pPr algn="ctr"/>
+            <a:endParaRPr/>
           </a:p>
         </p:txBody>
       </p:sp>
@@ -25639,6 +25655,7 @@
           <a:lstStyle/>
           <a:p>
             <a:pPr algn="ctr"/>
+            <a:endParaRPr/>
           </a:p>
         </p:txBody>
       </p:sp>
@@ -25684,6 +25701,7 @@
           <a:lstStyle/>
           <a:p>
             <a:pPr algn="ctr"/>
+            <a:endParaRPr/>
           </a:p>
         </p:txBody>
       </p:sp>
@@ -25704,7 +25722,7 @@
           <a:noFill/>
         </p:spPr>
         <p:txBody>
-          <a:bodyPr wrap="square" lIns="36576" rIns="36576" tIns="36576" bIns="36576" anchor="ctr">
+          <a:bodyPr wrap="square" lIns="36576" tIns="36576" rIns="36576" bIns="36576" anchor="ctr">
             <a:spAutoFit/>
           </a:bodyPr>
           <a:lstStyle/>
@@ -26061,7 +26079,7 @@
           <a:noFill/>
         </p:spPr>
         <p:txBody>
-          <a:bodyPr wrap="square" lIns="36576" rIns="36576" tIns="36576" bIns="36576" anchor="t">
+          <a:bodyPr wrap="square" lIns="36576" tIns="36576" rIns="36576" bIns="36576" anchor="t">
             <a:spAutoFit/>
           </a:bodyPr>
           <a:lstStyle/>
@@ -26103,7 +26121,7 @@
           <a:noFill/>
         </p:spPr>
         <p:txBody>
-          <a:bodyPr wrap="square" lIns="36576" rIns="36576" tIns="36576" bIns="36576" anchor="t">
+          <a:bodyPr wrap="square" lIns="36576" tIns="36576" rIns="36576" bIns="36576" anchor="t">
             <a:spAutoFit/>
           </a:bodyPr>
           <a:lstStyle/>
@@ -26170,6 +26188,7 @@
           <a:lstStyle/>
           <a:p>
             <a:pPr algn="ctr"/>
+            <a:endParaRPr/>
           </a:p>
         </p:txBody>
       </p:sp>
@@ -26215,6 +26234,7 @@
           <a:lstStyle/>
           <a:p>
             <a:pPr algn="ctr"/>
+            <a:endParaRPr/>
           </a:p>
         </p:txBody>
       </p:sp>
@@ -26260,6 +26280,7 @@
           <a:lstStyle/>
           <a:p>
             <a:pPr algn="ctr"/>
+            <a:endParaRPr/>
           </a:p>
         </p:txBody>
       </p:sp>
@@ -26280,7 +26301,7 @@
           <a:noFill/>
         </p:spPr>
         <p:txBody>
-          <a:bodyPr wrap="square" lIns="36576" rIns="36576" tIns="36576" bIns="36576" anchor="ctr">
+          <a:bodyPr wrap="square" lIns="36576" tIns="36576" rIns="36576" bIns="36576" anchor="ctr">
             <a:spAutoFit/>
           </a:bodyPr>
           <a:lstStyle/>
@@ -26347,6 +26368,7 @@
           <a:lstStyle/>
           <a:p>
             <a:pPr algn="ctr"/>
+            <a:endParaRPr/>
           </a:p>
         </p:txBody>
       </p:sp>
@@ -26392,6 +26414,7 @@
           <a:lstStyle/>
           <a:p>
             <a:pPr algn="ctr"/>
+            <a:endParaRPr/>
           </a:p>
         </p:txBody>
       </p:sp>
@@ -26437,6 +26460,7 @@
           <a:lstStyle/>
           <a:p>
             <a:pPr algn="ctr"/>
+            <a:endParaRPr/>
           </a:p>
         </p:txBody>
       </p:sp>
@@ -26480,6 +26504,7 @@
           <a:lstStyle/>
           <a:p>
             <a:pPr algn="ctr"/>
+            <a:endParaRPr/>
           </a:p>
         </p:txBody>
       </p:sp>
@@ -26500,7 +26525,7 @@
           <a:noFill/>
         </p:spPr>
         <p:txBody>
-          <a:bodyPr wrap="square" lIns="36576" rIns="36576" tIns="36576" bIns="36576" anchor="t">
+          <a:bodyPr wrap="square" lIns="36576" tIns="36576" rIns="36576" bIns="36576" anchor="t">
             <a:spAutoFit/>
           </a:bodyPr>
           <a:lstStyle/>
@@ -26542,7 +26567,7 @@
           <a:noFill/>
         </p:spPr>
         <p:txBody>
-          <a:bodyPr wrap="square" lIns="36576" rIns="36576" tIns="36576" bIns="36576" anchor="t">
+          <a:bodyPr wrap="square" lIns="36576" tIns="36576" rIns="36576" bIns="36576" anchor="t">
             <a:spAutoFit/>
           </a:bodyPr>
           <a:lstStyle/>
@@ -26584,7 +26609,7 @@
           <a:noFill/>
         </p:spPr>
         <p:txBody>
-          <a:bodyPr wrap="square" lIns="36576" rIns="36576" tIns="36576" bIns="36576" anchor="t">
+          <a:bodyPr wrap="square" lIns="36576" tIns="36576" rIns="36576" bIns="36576" anchor="t">
             <a:spAutoFit/>
           </a:bodyPr>
           <a:lstStyle/>
@@ -26651,6 +26676,7 @@
           <a:lstStyle/>
           <a:p>
             <a:pPr algn="ctr"/>
+            <a:endParaRPr/>
           </a:p>
         </p:txBody>
       </p:sp>
@@ -26696,6 +26722,7 @@
           <a:lstStyle/>
           <a:p>
             <a:pPr algn="ctr"/>
+            <a:endParaRPr/>
           </a:p>
         </p:txBody>
       </p:sp>
@@ -26741,6 +26768,7 @@
           <a:lstStyle/>
           <a:p>
             <a:pPr algn="ctr"/>
+            <a:endParaRPr/>
           </a:p>
         </p:txBody>
       </p:sp>
@@ -26761,7 +26789,7 @@
           <a:noFill/>
         </p:spPr>
         <p:txBody>
-          <a:bodyPr wrap="square" lIns="36576" rIns="36576" tIns="36576" bIns="36576" anchor="ctr">
+          <a:bodyPr wrap="square" lIns="36576" tIns="36576" rIns="36576" bIns="36576" anchor="ctr">
             <a:spAutoFit/>
           </a:bodyPr>
           <a:lstStyle/>
@@ -26828,6 +26856,7 @@
           <a:lstStyle/>
           <a:p>
             <a:pPr algn="ctr"/>
+            <a:endParaRPr/>
           </a:p>
         </p:txBody>
       </p:sp>
@@ -26848,7 +26877,7 @@
           <a:noFill/>
         </p:spPr>
         <p:txBody>
-          <a:bodyPr wrap="square" lIns="36576" rIns="36576" tIns="36576" bIns="36576" anchor="ctr">
+          <a:bodyPr wrap="square" lIns="36576" tIns="36576" rIns="36576" bIns="36576" anchor="ctr">
             <a:spAutoFit/>
           </a:bodyPr>
           <a:lstStyle/>
@@ -26915,6 +26944,7 @@
           <a:lstStyle/>
           <a:p>
             <a:pPr algn="ctr"/>
+            <a:endParaRPr/>
           </a:p>
         </p:txBody>
       </p:sp>
@@ -26935,7 +26965,7 @@
           <a:noFill/>
         </p:spPr>
         <p:txBody>
-          <a:bodyPr wrap="square" lIns="36576" rIns="36576" tIns="36576" bIns="36576" anchor="ctr">
+          <a:bodyPr wrap="square" lIns="36576" tIns="36576" rIns="36576" bIns="36576" anchor="ctr">
             <a:spAutoFit/>
           </a:bodyPr>
           <a:lstStyle/>
@@ -27002,6 +27032,7 @@
           <a:lstStyle/>
           <a:p>
             <a:pPr algn="ctr"/>
+            <a:endParaRPr/>
           </a:p>
         </p:txBody>
       </p:sp>
@@ -27045,6 +27076,7 @@
           <a:lstStyle/>
           <a:p>
             <a:pPr algn="ctr"/>
+            <a:endParaRPr/>
           </a:p>
         </p:txBody>
       </p:sp>
@@ -27056,7 +27088,7 @@
         </p:nvSpPr>
         <p:spPr>
           <a:xfrm>
-            <a:off x="9509760" y="3675887"/>
+            <a:off x="9509760" y="3505558"/>
             <a:ext cx="2121408" cy="384048"/>
           </a:xfrm>
           <a:prstGeom prst="rect">
@@ -27065,7 +27097,7 @@
           <a:noFill/>
         </p:spPr>
         <p:txBody>
-          <a:bodyPr wrap="square" lIns="36576" rIns="36576" tIns="36576" bIns="36576" anchor="t">
+          <a:bodyPr wrap="square" lIns="36576" tIns="36576" rIns="36576" bIns="36576" anchor="t">
             <a:spAutoFit/>
           </a:bodyPr>
           <a:lstStyle/>
@@ -27079,7 +27111,7 @@
               </a:spcAft>
             </a:pPr>
             <a:r>
-              <a:rPr sz="1900" b="1" i="0">
+              <a:rPr sz="1900" b="1" i="0" dirty="0">
                 <a:solidFill>
                   <a:srgbClr val="FFFFFF"/>
                 </a:solidFill>
@@ -27107,7 +27139,7 @@
           <a:noFill/>
         </p:spPr>
         <p:txBody>
-          <a:bodyPr wrap="square" lIns="36576" rIns="36576" tIns="36576" bIns="36576" anchor="t">
+          <a:bodyPr wrap="square" lIns="36576" tIns="36576" rIns="36576" bIns="36576" anchor="t">
             <a:spAutoFit/>
           </a:bodyPr>
           <a:lstStyle/>
@@ -27170,7 +27202,7 @@
           </a:fontRef>
         </p:style>
         <p:txBody>
-          <a:bodyPr rtlCol="0" anchor="ctr" lIns="54864" rIns="54864" tIns="9144" bIns="9144"/>
+          <a:bodyPr lIns="54864" tIns="9144" rIns="54864" bIns="9144" rtlCol="0" anchor="ctr"/>
           <a:lstStyle/>
           <a:p>
             <a:pPr algn="ctr"/>
@@ -27238,7 +27270,7 @@
           <a:noFill/>
         </p:spPr>
         <p:txBody>
-          <a:bodyPr wrap="square" lIns="36576" rIns="36576" tIns="36576" bIns="36576" anchor="t">
+          <a:bodyPr wrap="square" lIns="36576" tIns="36576" rIns="36576" bIns="36576" anchor="t">
             <a:spAutoFit/>
           </a:bodyPr>
           <a:lstStyle/>
@@ -27272,7 +27304,7 @@
 </file>
 
 <file path=ppt/slides/slide7.xml><?xml version="1.0" encoding="utf-8"?>
-<p:sld xmlns:a="http://schemas.openxmlformats.org/drawingml/2006/main" xmlns:p="http://schemas.openxmlformats.org/presentationml/2006/main" xmlns:r="http://schemas.openxmlformats.org/officeDocument/2006/relationships">
+<p:sld xmlns:a="http://schemas.openxmlformats.org/drawingml/2006/main" xmlns:r="http://schemas.openxmlformats.org/officeDocument/2006/relationships" xmlns:p="http://schemas.openxmlformats.org/presentationml/2006/main">
   <p:cSld>
     <p:bg>
       <p:bgPr>
@@ -27288,7 +27320,14 @@
         <p:cNvGrpSpPr/>
         <p:nvPr/>
       </p:nvGrpSpPr>
-      <p:grpSpPr/>
+      <p:grpSpPr>
+        <a:xfrm>
+          <a:off x="0" y="0"/>
+          <a:ext cx="0" cy="0"/>
+          <a:chOff x="0" y="0"/>
+          <a:chExt cx="0" cy="0"/>
+        </a:xfrm>
+      </p:grpSpPr>
       <p:sp>
         <p:nvSpPr>
           <p:cNvPr id="2" name="TextBox 1"/>
@@ -27306,7 +27345,7 @@
           <a:noFill/>
         </p:spPr>
         <p:txBody>
-          <a:bodyPr wrap="square" lIns="36576" rIns="36576" tIns="36576" bIns="36576" anchor="t">
+          <a:bodyPr wrap="square" lIns="36576" tIns="36576" rIns="36576" bIns="36576" anchor="t">
             <a:spAutoFit/>
           </a:bodyPr>
           <a:lstStyle/>
@@ -27348,7 +27387,7 @@
           <a:noFill/>
         </p:spPr>
         <p:txBody>
-          <a:bodyPr wrap="square" lIns="36576" rIns="36576" tIns="36576" bIns="36576" anchor="t">
+          <a:bodyPr wrap="square" lIns="36576" tIns="36576" rIns="36576" bIns="36576" anchor="t">
             <a:spAutoFit/>
           </a:bodyPr>
           <a:lstStyle/>
@@ -27390,7 +27429,7 @@
           <a:noFill/>
         </p:spPr>
         <p:txBody>
-          <a:bodyPr wrap="square" lIns="36576" rIns="36576" tIns="36576" bIns="36576" anchor="t">
+          <a:bodyPr wrap="square" lIns="36576" tIns="36576" rIns="36576" bIns="36576" anchor="t">
             <a:spAutoFit/>
           </a:bodyPr>
           <a:lstStyle/>
@@ -27432,7 +27471,7 @@
           <a:noFill/>
         </p:spPr>
         <p:txBody>
-          <a:bodyPr wrap="square" lIns="36576" rIns="36576" tIns="36576" bIns="36576" anchor="t">
+          <a:bodyPr wrap="square" lIns="36576" tIns="36576" rIns="36576" bIns="36576" anchor="t">
             <a:spAutoFit/>
           </a:bodyPr>
           <a:lstStyle/>
@@ -27499,6 +27538,7 @@
           <a:lstStyle/>
           <a:p>
             <a:pPr algn="ctr"/>
+            <a:endParaRPr/>
           </a:p>
         </p:txBody>
       </p:sp>
@@ -27519,7 +27559,7 @@
           <a:noFill/>
         </p:spPr>
         <p:txBody>
-          <a:bodyPr wrap="square" lIns="36576" rIns="36576" tIns="36576" bIns="36576" anchor="t">
+          <a:bodyPr wrap="square" lIns="36576" tIns="36576" rIns="36576" bIns="36576" anchor="t">
             <a:spAutoFit/>
           </a:bodyPr>
           <a:lstStyle/>
@@ -27586,6 +27626,7 @@
           <a:lstStyle/>
           <a:p>
             <a:pPr algn="ctr"/>
+            <a:endParaRPr/>
           </a:p>
         </p:txBody>
       </p:sp>
@@ -27606,7 +27647,7 @@
           <a:noFill/>
         </p:spPr>
         <p:txBody>
-          <a:bodyPr wrap="square" lIns="36576" rIns="36576" tIns="36576" bIns="36576" anchor="ctr">
+          <a:bodyPr wrap="square" lIns="36576" tIns="36576" rIns="36576" bIns="36576" anchor="ctr">
             <a:spAutoFit/>
           </a:bodyPr>
           <a:lstStyle/>
@@ -27673,6 +27714,7 @@
           <a:lstStyle/>
           <a:p>
             <a:pPr algn="ctr"/>
+            <a:endParaRPr/>
           </a:p>
         </p:txBody>
       </p:sp>
@@ -27693,7 +27735,7 @@
           <a:noFill/>
         </p:spPr>
         <p:txBody>
-          <a:bodyPr wrap="square" lIns="36576" rIns="36576" tIns="36576" bIns="36576" anchor="ctr">
+          <a:bodyPr wrap="square" lIns="36576" tIns="36576" rIns="36576" bIns="36576" anchor="ctr">
             <a:spAutoFit/>
           </a:bodyPr>
           <a:lstStyle/>
@@ -27758,6 +27800,7 @@
           <a:lstStyle/>
           <a:p>
             <a:pPr algn="ctr"/>
+            <a:endParaRPr/>
           </a:p>
         </p:txBody>
       </p:sp>
@@ -27778,7 +27821,7 @@
           <a:noFill/>
         </p:spPr>
         <p:txBody>
-          <a:bodyPr wrap="square" lIns="36576" rIns="36576" tIns="36576" bIns="36576" anchor="t">
+          <a:bodyPr wrap="square" lIns="36576" tIns="36576" rIns="36576" bIns="36576" anchor="t">
             <a:spAutoFit/>
           </a:bodyPr>
           <a:lstStyle/>
@@ -27820,7 +27863,7 @@
           <a:noFill/>
         </p:spPr>
         <p:txBody>
-          <a:bodyPr wrap="square" lIns="36576" rIns="36576" tIns="36576" bIns="36576" anchor="t">
+          <a:bodyPr wrap="square" lIns="36576" tIns="36576" rIns="36576" bIns="36576" anchor="t">
             <a:spAutoFit/>
           </a:bodyPr>
           <a:lstStyle/>
@@ -27862,7 +27905,7 @@
           <a:noFill/>
         </p:spPr>
         <p:txBody>
-          <a:bodyPr wrap="square" lIns="36576" rIns="18288" tIns="18288" bIns="18288">
+          <a:bodyPr wrap="square" lIns="36576" tIns="18288" rIns="18288" bIns="18288">
             <a:spAutoFit/>
           </a:bodyPr>
           <a:lstStyle/>
@@ -27994,6 +28037,7 @@
           <a:lstStyle/>
           <a:p>
             <a:pPr algn="ctr"/>
+            <a:endParaRPr/>
           </a:p>
         </p:txBody>
       </p:sp>
@@ -28014,7 +28058,7 @@
           <a:noFill/>
         </p:spPr>
         <p:txBody>
-          <a:bodyPr wrap="square" lIns="36576" rIns="36576" tIns="36576" bIns="36576" anchor="t">
+          <a:bodyPr wrap="square" lIns="36576" tIns="36576" rIns="36576" bIns="36576" anchor="t">
             <a:spAutoFit/>
           </a:bodyPr>
           <a:lstStyle/>
@@ -28056,7 +28100,7 @@
           <a:noFill/>
         </p:spPr>
         <p:txBody>
-          <a:bodyPr wrap="square" lIns="36576" rIns="36576" tIns="36576" bIns="36576" anchor="t">
+          <a:bodyPr wrap="square" lIns="36576" tIns="36576" rIns="36576" bIns="36576" anchor="t">
             <a:spAutoFit/>
           </a:bodyPr>
           <a:lstStyle/>
@@ -28123,6 +28167,7 @@
           <a:lstStyle/>
           <a:p>
             <a:pPr algn="ctr"/>
+            <a:endParaRPr/>
           </a:p>
         </p:txBody>
       </p:sp>
@@ -28168,6 +28213,7 @@
           <a:lstStyle/>
           <a:p>
             <a:pPr algn="ctr"/>
+            <a:endParaRPr/>
           </a:p>
         </p:txBody>
       </p:sp>
@@ -28213,6 +28259,7 @@
           <a:lstStyle/>
           <a:p>
             <a:pPr algn="ctr"/>
+            <a:endParaRPr/>
           </a:p>
         </p:txBody>
       </p:sp>
@@ -28258,6 +28305,7 @@
           <a:lstStyle/>
           <a:p>
             <a:pPr algn="ctr"/>
+            <a:endParaRPr/>
           </a:p>
         </p:txBody>
       </p:sp>
@@ -28303,6 +28351,7 @@
           <a:lstStyle/>
           <a:p>
             <a:pPr algn="ctr"/>
+            <a:endParaRPr/>
           </a:p>
         </p:txBody>
       </p:sp>
@@ -28323,7 +28372,7 @@
           <a:noFill/>
         </p:spPr>
         <p:txBody>
-          <a:bodyPr wrap="square" lIns="36576" rIns="36576" tIns="36576" bIns="36576" anchor="t">
+          <a:bodyPr wrap="square" lIns="36576" tIns="36576" rIns="36576" bIns="36576" anchor="t">
             <a:spAutoFit/>
           </a:bodyPr>
           <a:lstStyle/>
@@ -28386,7 +28435,7 @@
           </a:fontRef>
         </p:style>
         <p:txBody>
-          <a:bodyPr rtlCol="0" anchor="ctr" lIns="54864" rIns="54864" tIns="9144" bIns="9144"/>
+          <a:bodyPr lIns="54864" tIns="9144" rIns="54864" bIns="9144" rtlCol="0" anchor="ctr"/>
           <a:lstStyle/>
           <a:p>
             <a:pPr algn="ctr"/>
@@ -28444,6 +28493,7 @@
           <a:lstStyle/>
           <a:p>
             <a:pPr algn="ctr"/>
+            <a:endParaRPr/>
           </a:p>
         </p:txBody>
       </p:sp>
@@ -28464,7 +28514,7 @@
           <a:noFill/>
         </p:spPr>
         <p:txBody>
-          <a:bodyPr wrap="square" lIns="36576" rIns="36576" tIns="36576" bIns="36576" anchor="t">
+          <a:bodyPr wrap="square" lIns="36576" tIns="36576" rIns="36576" bIns="36576" anchor="t">
             <a:spAutoFit/>
           </a:bodyPr>
           <a:lstStyle/>
@@ -28506,7 +28556,7 @@
           <a:noFill/>
         </p:spPr>
         <p:txBody>
-          <a:bodyPr wrap="square" lIns="36576" rIns="36576" tIns="36576" bIns="36576" anchor="t">
+          <a:bodyPr wrap="square" lIns="36576" tIns="36576" rIns="36576" bIns="36576" anchor="t">
             <a:spAutoFit/>
           </a:bodyPr>
           <a:lstStyle/>
@@ -28573,6 +28623,7 @@
           <a:lstStyle/>
           <a:p>
             <a:pPr algn="ctr"/>
+            <a:endParaRPr/>
           </a:p>
         </p:txBody>
       </p:sp>
@@ -28618,6 +28669,7 @@
           <a:lstStyle/>
           <a:p>
             <a:pPr algn="ctr"/>
+            <a:endParaRPr/>
           </a:p>
         </p:txBody>
       </p:sp>
@@ -28663,6 +28715,7 @@
           <a:lstStyle/>
           <a:p>
             <a:pPr algn="ctr"/>
+            <a:endParaRPr/>
           </a:p>
         </p:txBody>
       </p:sp>
@@ -28706,6 +28759,7 @@
           <a:lstStyle/>
           <a:p>
             <a:pPr algn="ctr"/>
+            <a:endParaRPr/>
           </a:p>
         </p:txBody>
       </p:sp>
@@ -28726,7 +28780,7 @@
           <a:noFill/>
         </p:spPr>
         <p:txBody>
-          <a:bodyPr wrap="square" lIns="36576" rIns="36576" tIns="36576" bIns="36576" anchor="t">
+          <a:bodyPr wrap="square" lIns="36576" tIns="36576" rIns="36576" bIns="36576" anchor="t">
             <a:spAutoFit/>
           </a:bodyPr>
           <a:lstStyle/>
@@ -28789,7 +28843,7 @@
           </a:fontRef>
         </p:style>
         <p:txBody>
-          <a:bodyPr rtlCol="0" anchor="ctr" lIns="54864" rIns="54864" tIns="9144" bIns="9144"/>
+          <a:bodyPr lIns="54864" tIns="9144" rIns="54864" bIns="9144" rtlCol="0" anchor="ctr"/>
           <a:lstStyle/>
           <a:p>
             <a:pPr algn="ctr"/>
@@ -28843,7 +28897,7 @@
           </a:fontRef>
         </p:style>
         <p:txBody>
-          <a:bodyPr rtlCol="0" anchor="ctr" lIns="54864" rIns="54864" tIns="9144" bIns="9144"/>
+          <a:bodyPr lIns="54864" tIns="9144" rIns="54864" bIns="9144" rtlCol="0" anchor="ctr"/>
           <a:lstStyle/>
           <a:p>
             <a:pPr algn="ctr"/>
@@ -28911,7 +28965,7 @@
           <a:noFill/>
         </p:spPr>
         <p:txBody>
-          <a:bodyPr wrap="square" lIns="36576" rIns="36576" tIns="36576" bIns="36576" anchor="t">
+          <a:bodyPr wrap="square" lIns="36576" tIns="36576" rIns="36576" bIns="36576" anchor="t">
             <a:spAutoFit/>
           </a:bodyPr>
           <a:lstStyle/>
@@ -28945,7 +28999,7 @@
 </file>
 
 <file path=ppt/slides/slide8.xml><?xml version="1.0" encoding="utf-8"?>
-<p:sld xmlns:a="http://schemas.openxmlformats.org/drawingml/2006/main" xmlns:p="http://schemas.openxmlformats.org/presentationml/2006/main" xmlns:r="http://schemas.openxmlformats.org/officeDocument/2006/relationships">
+<p:sld xmlns:a="http://schemas.openxmlformats.org/drawingml/2006/main" xmlns:r="http://schemas.openxmlformats.org/officeDocument/2006/relationships" xmlns:p="http://schemas.openxmlformats.org/presentationml/2006/main">
   <p:cSld>
     <p:bg>
       <p:bgPr>
@@ -28961,7 +29015,14 @@
         <p:cNvGrpSpPr/>
         <p:nvPr/>
       </p:nvGrpSpPr>
-      <p:grpSpPr/>
+      <p:grpSpPr>
+        <a:xfrm>
+          <a:off x="0" y="0"/>
+          <a:ext cx="0" cy="0"/>
+          <a:chOff x="0" y="0"/>
+          <a:chExt cx="0" cy="0"/>
+        </a:xfrm>
+      </p:grpSpPr>
       <p:sp>
         <p:nvSpPr>
           <p:cNvPr id="2" name="TextBox 1"/>
@@ -28979,7 +29040,7 @@
           <a:noFill/>
         </p:spPr>
         <p:txBody>
-          <a:bodyPr wrap="square" lIns="36576" rIns="36576" tIns="36576" bIns="36576" anchor="t">
+          <a:bodyPr wrap="square" lIns="36576" tIns="36576" rIns="36576" bIns="36576" anchor="t">
             <a:spAutoFit/>
           </a:bodyPr>
           <a:lstStyle/>
@@ -29021,7 +29082,7 @@
           <a:noFill/>
         </p:spPr>
         <p:txBody>
-          <a:bodyPr wrap="square" lIns="36576" rIns="36576" tIns="36576" bIns="36576" anchor="t">
+          <a:bodyPr wrap="square" lIns="36576" tIns="36576" rIns="36576" bIns="36576" anchor="t">
             <a:spAutoFit/>
           </a:bodyPr>
           <a:lstStyle/>
@@ -29063,7 +29124,7 @@
           <a:noFill/>
         </p:spPr>
         <p:txBody>
-          <a:bodyPr wrap="square" lIns="36576" rIns="36576" tIns="36576" bIns="36576" anchor="t">
+          <a:bodyPr wrap="square" lIns="36576" tIns="36576" rIns="36576" bIns="36576" anchor="t">
             <a:spAutoFit/>
           </a:bodyPr>
           <a:lstStyle/>
@@ -29105,7 +29166,7 @@
           <a:noFill/>
         </p:spPr>
         <p:txBody>
-          <a:bodyPr wrap="square" lIns="36576" rIns="36576" tIns="36576" bIns="36576" anchor="t">
+          <a:bodyPr wrap="square" lIns="36576" tIns="36576" rIns="36576" bIns="36576" anchor="t">
             <a:spAutoFit/>
           </a:bodyPr>
           <a:lstStyle/>
@@ -29172,6 +29233,7 @@
           <a:lstStyle/>
           <a:p>
             <a:pPr algn="ctr"/>
+            <a:endParaRPr/>
           </a:p>
         </p:txBody>
       </p:sp>
@@ -29217,6 +29279,7 @@
           <a:lstStyle/>
           <a:p>
             <a:pPr algn="ctr"/>
+            <a:endParaRPr/>
           </a:p>
         </p:txBody>
       </p:sp>
@@ -29237,7 +29300,7 @@
           <a:noFill/>
         </p:spPr>
         <p:txBody>
-          <a:bodyPr wrap="square" lIns="36576" rIns="36576" tIns="36576" bIns="36576" anchor="t">
+          <a:bodyPr wrap="square" lIns="36576" tIns="36576" rIns="36576" bIns="36576" anchor="t">
             <a:spAutoFit/>
           </a:bodyPr>
           <a:lstStyle/>
@@ -29279,7 +29342,7 @@
           <a:noFill/>
         </p:spPr>
         <p:txBody>
-          <a:bodyPr wrap="square" lIns="36576" rIns="36576" tIns="36576" bIns="36576" anchor="t">
+          <a:bodyPr wrap="square" lIns="36576" tIns="36576" rIns="36576" bIns="36576" anchor="t">
             <a:spAutoFit/>
           </a:bodyPr>
           <a:lstStyle/>
@@ -29346,6 +29409,7 @@
           <a:lstStyle/>
           <a:p>
             <a:pPr algn="ctr"/>
+            <a:endParaRPr/>
           </a:p>
         </p:txBody>
       </p:sp>
@@ -29391,6 +29455,7 @@
           <a:lstStyle/>
           <a:p>
             <a:pPr algn="ctr"/>
+            <a:endParaRPr/>
           </a:p>
         </p:txBody>
       </p:sp>
@@ -29411,7 +29476,7 @@
           <a:noFill/>
         </p:spPr>
         <p:txBody>
-          <a:bodyPr wrap="square" lIns="36576" rIns="36576" tIns="36576" bIns="36576" anchor="t">
+          <a:bodyPr wrap="square" lIns="36576" tIns="36576" rIns="36576" bIns="36576" anchor="t">
             <a:spAutoFit/>
           </a:bodyPr>
           <a:lstStyle/>
@@ -29453,7 +29518,7 @@
           <a:noFill/>
         </p:spPr>
         <p:txBody>
-          <a:bodyPr wrap="square" lIns="36576" rIns="36576" tIns="36576" bIns="36576" anchor="t">
+          <a:bodyPr wrap="square" lIns="36576" tIns="36576" rIns="36576" bIns="36576" anchor="t">
             <a:spAutoFit/>
           </a:bodyPr>
           <a:lstStyle/>
@@ -29520,6 +29585,7 @@
           <a:lstStyle/>
           <a:p>
             <a:pPr algn="ctr"/>
+            <a:endParaRPr/>
           </a:p>
         </p:txBody>
       </p:sp>
@@ -29565,6 +29631,7 @@
           <a:lstStyle/>
           <a:p>
             <a:pPr algn="ctr"/>
+            <a:endParaRPr/>
           </a:p>
         </p:txBody>
       </p:sp>
@@ -29585,7 +29652,7 @@
           <a:noFill/>
         </p:spPr>
         <p:txBody>
-          <a:bodyPr wrap="square" lIns="36576" rIns="36576" tIns="36576" bIns="36576" anchor="t">
+          <a:bodyPr wrap="square" lIns="36576" tIns="36576" rIns="36576" bIns="36576" anchor="t">
             <a:spAutoFit/>
           </a:bodyPr>
           <a:lstStyle/>
@@ -29627,7 +29694,7 @@
           <a:noFill/>
         </p:spPr>
         <p:txBody>
-          <a:bodyPr wrap="square" lIns="36576" rIns="36576" tIns="36576" bIns="36576" anchor="t">
+          <a:bodyPr wrap="square" lIns="36576" tIns="36576" rIns="36576" bIns="36576" anchor="t">
             <a:spAutoFit/>
           </a:bodyPr>
           <a:lstStyle/>
@@ -29694,6 +29761,7 @@
           <a:lstStyle/>
           <a:p>
             <a:pPr algn="ctr"/>
+            <a:endParaRPr/>
           </a:p>
         </p:txBody>
       </p:sp>
@@ -29739,6 +29807,7 @@
           <a:lstStyle/>
           <a:p>
             <a:pPr algn="ctr"/>
+            <a:endParaRPr/>
           </a:p>
         </p:txBody>
       </p:sp>
@@ -29759,7 +29828,7 @@
           <a:noFill/>
         </p:spPr>
         <p:txBody>
-          <a:bodyPr wrap="square" lIns="36576" rIns="36576" tIns="36576" bIns="36576" anchor="t">
+          <a:bodyPr wrap="square" lIns="36576" tIns="36576" rIns="36576" bIns="36576" anchor="t">
             <a:spAutoFit/>
           </a:bodyPr>
           <a:lstStyle/>
@@ -29801,7 +29870,7 @@
           <a:noFill/>
         </p:spPr>
         <p:txBody>
-          <a:bodyPr wrap="square" lIns="36576" rIns="36576" tIns="36576" bIns="36576" anchor="t">
+          <a:bodyPr wrap="square" lIns="36576" tIns="36576" rIns="36576" bIns="36576" anchor="t">
             <a:spAutoFit/>
           </a:bodyPr>
           <a:lstStyle/>
@@ -29868,6 +29937,7 @@
           <a:lstStyle/>
           <a:p>
             <a:pPr algn="ctr"/>
+            <a:endParaRPr/>
           </a:p>
         </p:txBody>
       </p:sp>
@@ -29913,6 +29983,7 @@
           <a:lstStyle/>
           <a:p>
             <a:pPr algn="ctr"/>
+            <a:endParaRPr/>
           </a:p>
         </p:txBody>
       </p:sp>
@@ -29933,7 +30004,7 @@
           <a:noFill/>
         </p:spPr>
         <p:txBody>
-          <a:bodyPr wrap="square" lIns="36576" rIns="36576" tIns="36576" bIns="36576" anchor="t">
+          <a:bodyPr wrap="square" lIns="36576" tIns="36576" rIns="36576" bIns="36576" anchor="t">
             <a:spAutoFit/>
           </a:bodyPr>
           <a:lstStyle/>
@@ -29975,7 +30046,7 @@
           <a:noFill/>
         </p:spPr>
         <p:txBody>
-          <a:bodyPr wrap="square" lIns="36576" rIns="36576" tIns="36576" bIns="36576" anchor="t">
+          <a:bodyPr wrap="square" lIns="36576" tIns="36576" rIns="36576" bIns="36576" anchor="t">
             <a:spAutoFit/>
           </a:bodyPr>
           <a:lstStyle/>
@@ -30042,6 +30113,7 @@
           <a:lstStyle/>
           <a:p>
             <a:pPr algn="ctr"/>
+            <a:endParaRPr/>
           </a:p>
         </p:txBody>
       </p:sp>
@@ -30087,6 +30159,7 @@
           <a:lstStyle/>
           <a:p>
             <a:pPr algn="ctr"/>
+            <a:endParaRPr/>
           </a:p>
         </p:txBody>
       </p:sp>
@@ -30107,7 +30180,7 @@
           <a:noFill/>
         </p:spPr>
         <p:txBody>
-          <a:bodyPr wrap="square" lIns="36576" rIns="36576" tIns="36576" bIns="36576" anchor="t">
+          <a:bodyPr wrap="square" lIns="36576" tIns="36576" rIns="36576" bIns="36576" anchor="t">
             <a:spAutoFit/>
           </a:bodyPr>
           <a:lstStyle/>
@@ -30149,7 +30222,7 @@
           <a:noFill/>
         </p:spPr>
         <p:txBody>
-          <a:bodyPr wrap="square" lIns="36576" rIns="36576" tIns="36576" bIns="36576" anchor="t">
+          <a:bodyPr wrap="square" lIns="36576" tIns="36576" rIns="36576" bIns="36576" anchor="t">
             <a:spAutoFit/>
           </a:bodyPr>
           <a:lstStyle/>
@@ -30216,6 +30289,7 @@
           <a:lstStyle/>
           <a:p>
             <a:pPr algn="ctr"/>
+            <a:endParaRPr/>
           </a:p>
         </p:txBody>
       </p:sp>
@@ -30236,7 +30310,7 @@
           <a:noFill/>
         </p:spPr>
         <p:txBody>
-          <a:bodyPr wrap="square" lIns="36576" rIns="36576" tIns="36576" bIns="36576" anchor="t">
+          <a:bodyPr wrap="square" lIns="36576" tIns="36576" rIns="36576" bIns="36576" anchor="t">
             <a:spAutoFit/>
           </a:bodyPr>
           <a:lstStyle/>
@@ -30278,7 +30352,7 @@
           <a:noFill/>
         </p:spPr>
         <p:txBody>
-          <a:bodyPr wrap="square" lIns="36576" rIns="36576" tIns="36576" bIns="36576" anchor="t">
+          <a:bodyPr wrap="square" lIns="36576" tIns="36576" rIns="36576" bIns="36576" anchor="t">
             <a:spAutoFit/>
           </a:bodyPr>
           <a:lstStyle/>
@@ -30341,7 +30415,7 @@
           </a:fontRef>
         </p:style>
         <p:txBody>
-          <a:bodyPr rtlCol="0" anchor="ctr" lIns="54864" rIns="54864" tIns="9144" bIns="9144"/>
+          <a:bodyPr lIns="54864" tIns="9144" rIns="54864" bIns="9144" rtlCol="0" anchor="ctr"/>
           <a:lstStyle/>
           <a:p>
             <a:pPr algn="ctr"/>
@@ -30409,7 +30483,7 @@
           <a:noFill/>
         </p:spPr>
         <p:txBody>
-          <a:bodyPr wrap="square" lIns="36576" rIns="36576" tIns="36576" bIns="36576" anchor="t">
+          <a:bodyPr wrap="square" lIns="36576" tIns="36576" rIns="36576" bIns="36576" anchor="t">
             <a:spAutoFit/>
           </a:bodyPr>
           <a:lstStyle/>
@@ -30443,7 +30517,7 @@
 </file>
 
 <file path=ppt/slides/slide9.xml><?xml version="1.0" encoding="utf-8"?>
-<p:sld xmlns:a="http://schemas.openxmlformats.org/drawingml/2006/main" xmlns:p="http://schemas.openxmlformats.org/presentationml/2006/main" xmlns:r="http://schemas.openxmlformats.org/officeDocument/2006/relationships">
+<p:sld xmlns:a="http://schemas.openxmlformats.org/drawingml/2006/main" xmlns:r="http://schemas.openxmlformats.org/officeDocument/2006/relationships" xmlns:p="http://schemas.openxmlformats.org/presentationml/2006/main">
   <p:cSld>
     <p:bg>
       <p:bgPr>
@@ -30459,7 +30533,14 @@
         <p:cNvGrpSpPr/>
         <p:nvPr/>
       </p:nvGrpSpPr>
-      <p:grpSpPr/>
+      <p:grpSpPr>
+        <a:xfrm>
+          <a:off x="0" y="0"/>
+          <a:ext cx="0" cy="0"/>
+          <a:chOff x="0" y="0"/>
+          <a:chExt cx="0" cy="0"/>
+        </a:xfrm>
+      </p:grpSpPr>
       <p:sp>
         <p:nvSpPr>
           <p:cNvPr id="2" name="TextBox 1"/>
@@ -30477,7 +30558,7 @@
           <a:noFill/>
         </p:spPr>
         <p:txBody>
-          <a:bodyPr wrap="square" lIns="36576" rIns="36576" tIns="36576" bIns="36576" anchor="t">
+          <a:bodyPr wrap="square" lIns="36576" tIns="36576" rIns="36576" bIns="36576" anchor="t">
             <a:spAutoFit/>
           </a:bodyPr>
           <a:lstStyle/>
@@ -30519,7 +30600,7 @@
           <a:noFill/>
         </p:spPr>
         <p:txBody>
-          <a:bodyPr wrap="square" lIns="36576" rIns="36576" tIns="36576" bIns="36576" anchor="t">
+          <a:bodyPr wrap="square" lIns="36576" tIns="36576" rIns="36576" bIns="36576" anchor="t">
             <a:spAutoFit/>
           </a:bodyPr>
           <a:lstStyle/>
@@ -30561,7 +30642,7 @@
           <a:noFill/>
         </p:spPr>
         <p:txBody>
-          <a:bodyPr wrap="square" lIns="36576" rIns="36576" tIns="36576" bIns="36576" anchor="t">
+          <a:bodyPr wrap="square" lIns="36576" tIns="36576" rIns="36576" bIns="36576" anchor="t">
             <a:spAutoFit/>
           </a:bodyPr>
           <a:lstStyle/>
@@ -30603,7 +30684,7 @@
           <a:noFill/>
         </p:spPr>
         <p:txBody>
-          <a:bodyPr wrap="square" lIns="36576" rIns="36576" tIns="36576" bIns="36576" anchor="t">
+          <a:bodyPr wrap="square" lIns="36576" tIns="36576" rIns="36576" bIns="36576" anchor="t">
             <a:spAutoFit/>
           </a:bodyPr>
           <a:lstStyle/>
@@ -30666,7 +30747,7 @@
           </a:fontRef>
         </p:style>
         <p:txBody>
-          <a:bodyPr rtlCol="0" anchor="ctr" lIns="54864" rIns="54864" tIns="9144" bIns="9144"/>
+          <a:bodyPr lIns="54864" tIns="9144" rIns="54864" bIns="9144" rtlCol="0" anchor="ctr"/>
           <a:lstStyle/>
           <a:p>
             <a:pPr algn="ctr"/>
@@ -30720,7 +30801,7 @@
           </a:fontRef>
         </p:style>
         <p:txBody>
-          <a:bodyPr rtlCol="0" anchor="ctr" lIns="54864" rIns="54864" tIns="9144" bIns="9144"/>
+          <a:bodyPr lIns="54864" tIns="9144" rIns="54864" bIns="9144" rtlCol="0" anchor="ctr"/>
           <a:lstStyle/>
           <a:p>
             <a:pPr algn="ctr"/>
@@ -30774,7 +30855,7 @@
           </a:fontRef>
         </p:style>
         <p:txBody>
-          <a:bodyPr rtlCol="0" anchor="ctr" lIns="54864" rIns="54864" tIns="9144" bIns="9144"/>
+          <a:bodyPr lIns="54864" tIns="9144" rIns="54864" bIns="9144" rtlCol="0" anchor="ctr"/>
           <a:lstStyle/>
           <a:p>
             <a:pPr algn="ctr"/>
@@ -30832,6 +30913,7 @@
           <a:lstStyle/>
           <a:p>
             <a:pPr algn="ctr"/>
+            <a:endParaRPr/>
           </a:p>
         </p:txBody>
       </p:sp>
@@ -30852,7 +30934,7 @@
           <a:noFill/>
         </p:spPr>
         <p:txBody>
-          <a:bodyPr wrap="square" lIns="36576" rIns="36576" tIns="36576" bIns="36576" anchor="t">
+          <a:bodyPr wrap="square" lIns="36576" tIns="36576" rIns="36576" bIns="36576" anchor="t">
             <a:spAutoFit/>
           </a:bodyPr>
           <a:lstStyle/>
@@ -30894,7 +30976,7 @@
           <a:noFill/>
         </p:spPr>
         <p:txBody>
-          <a:bodyPr wrap="square" lIns="36576" rIns="36576" tIns="36576" bIns="36576" anchor="t">
+          <a:bodyPr wrap="square" lIns="36576" tIns="36576" rIns="36576" bIns="36576" anchor="t">
             <a:spAutoFit/>
           </a:bodyPr>
           <a:lstStyle/>
@@ -30936,7 +31018,7 @@
           <a:noFill/>
         </p:spPr>
         <p:txBody>
-          <a:bodyPr wrap="square" lIns="36576" rIns="36576" tIns="36576" bIns="36576" anchor="t">
+          <a:bodyPr wrap="square" lIns="36576" tIns="36576" rIns="36576" bIns="36576" anchor="t">
             <a:spAutoFit/>
           </a:bodyPr>
           <a:lstStyle/>
@@ -31003,6 +31085,7 @@
           <a:lstStyle/>
           <a:p>
             <a:pPr algn="ctr"/>
+            <a:endParaRPr/>
           </a:p>
         </p:txBody>
       </p:sp>
@@ -31023,7 +31106,7 @@
           <a:noFill/>
         </p:spPr>
         <p:txBody>
-          <a:bodyPr wrap="square" lIns="36576" rIns="36576" tIns="36576" bIns="36576" anchor="t">
+          <a:bodyPr wrap="square" lIns="36576" tIns="36576" rIns="36576" bIns="36576" anchor="t">
             <a:spAutoFit/>
           </a:bodyPr>
           <a:lstStyle/>
@@ -31065,7 +31148,7 @@
           <a:noFill/>
         </p:spPr>
         <p:txBody>
-          <a:bodyPr wrap="square" lIns="36576" rIns="36576" tIns="36576" bIns="36576" anchor="t">
+          <a:bodyPr wrap="square" lIns="36576" tIns="36576" rIns="36576" bIns="36576" anchor="t">
             <a:spAutoFit/>
           </a:bodyPr>
           <a:lstStyle/>
@@ -31107,7 +31190,7 @@
           <a:noFill/>
         </p:spPr>
         <p:txBody>
-          <a:bodyPr wrap="square" lIns="36576" rIns="36576" tIns="36576" bIns="36576" anchor="t">
+          <a:bodyPr wrap="square" lIns="36576" tIns="36576" rIns="36576" bIns="36576" anchor="t">
             <a:spAutoFit/>
           </a:bodyPr>
           <a:lstStyle/>
@@ -31174,6 +31257,7 @@
           <a:lstStyle/>
           <a:p>
             <a:pPr algn="ctr"/>
+            <a:endParaRPr/>
           </a:p>
         </p:txBody>
       </p:sp>
@@ -31194,7 +31278,7 @@
           <a:noFill/>
         </p:spPr>
         <p:txBody>
-          <a:bodyPr wrap="square" lIns="36576" rIns="36576" tIns="36576" bIns="36576" anchor="t">
+          <a:bodyPr wrap="square" lIns="36576" tIns="36576" rIns="36576" bIns="36576" anchor="t">
             <a:spAutoFit/>
           </a:bodyPr>
           <a:lstStyle/>
@@ -31236,7 +31320,7 @@
           <a:noFill/>
         </p:spPr>
         <p:txBody>
-          <a:bodyPr wrap="square" lIns="36576" rIns="36576" tIns="36576" bIns="36576" anchor="t">
+          <a:bodyPr wrap="square" lIns="36576" tIns="36576" rIns="36576" bIns="36576" anchor="t">
             <a:spAutoFit/>
           </a:bodyPr>
           <a:lstStyle/>
@@ -31278,7 +31362,7 @@
           <a:noFill/>
         </p:spPr>
         <p:txBody>
-          <a:bodyPr wrap="square" lIns="36576" rIns="36576" tIns="36576" bIns="36576" anchor="t">
+          <a:bodyPr wrap="square" lIns="36576" tIns="36576" rIns="36576" bIns="36576" anchor="t">
             <a:spAutoFit/>
           </a:bodyPr>
           <a:lstStyle/>
@@ -31345,6 +31429,7 @@
           <a:lstStyle/>
           <a:p>
             <a:pPr algn="ctr"/>
+            <a:endParaRPr/>
           </a:p>
         </p:txBody>
       </p:sp>
@@ -31365,7 +31450,7 @@
           <a:noFill/>
         </p:spPr>
         <p:txBody>
-          <a:bodyPr wrap="square" lIns="36576" rIns="36576" tIns="36576" bIns="36576" anchor="t">
+          <a:bodyPr wrap="square" lIns="36576" tIns="36576" rIns="36576" bIns="36576" anchor="t">
             <a:spAutoFit/>
           </a:bodyPr>
           <a:lstStyle/>
@@ -31407,7 +31492,7 @@
           <a:noFill/>
         </p:spPr>
         <p:txBody>
-          <a:bodyPr wrap="square" lIns="36576" rIns="36576" tIns="36576" bIns="36576" anchor="t">
+          <a:bodyPr wrap="square" lIns="36576" tIns="36576" rIns="36576" bIns="36576" anchor="t">
             <a:spAutoFit/>
           </a:bodyPr>
           <a:lstStyle/>
@@ -31449,7 +31534,7 @@
           <a:noFill/>
         </p:spPr>
         <p:txBody>
-          <a:bodyPr wrap="square" lIns="36576" rIns="36576" tIns="36576" bIns="36576" anchor="t">
+          <a:bodyPr wrap="square" lIns="36576" tIns="36576" rIns="36576" bIns="36576" anchor="t">
             <a:spAutoFit/>
           </a:bodyPr>
           <a:lstStyle/>
@@ -31516,6 +31601,7 @@
           <a:lstStyle/>
           <a:p>
             <a:pPr algn="ctr"/>
+            <a:endParaRPr/>
           </a:p>
         </p:txBody>
       </p:sp>
@@ -31536,7 +31622,7 @@
           <a:noFill/>
         </p:spPr>
         <p:txBody>
-          <a:bodyPr wrap="square" lIns="36576" rIns="36576" tIns="36576" bIns="36576">
+          <a:bodyPr wrap="square" lIns="36576" tIns="36576" rIns="36576" bIns="36576">
             <a:spAutoFit/>
           </a:bodyPr>
           <a:lstStyle/>
@@ -31615,7 +31701,7 @@
           <a:noFill/>
         </p:spPr>
         <p:txBody>
-          <a:bodyPr wrap="square" lIns="36576" rIns="36576" tIns="36576" bIns="36576" anchor="t">
+          <a:bodyPr wrap="square" lIns="36576" tIns="36576" rIns="36576" bIns="36576" anchor="t">
             <a:spAutoFit/>
           </a:bodyPr>
           <a:lstStyle/>
@@ -31979,44 +32065,44 @@
         <a:sysClr val="window" lastClr="FFFFFF"/>
       </a:lt1>
       <a:dk2>
-        <a:srgbClr val="1F497D"/>
+        <a:srgbClr val="0E2841"/>
       </a:dk2>
       <a:lt2>
-        <a:srgbClr val="EEECE1"/>
+        <a:srgbClr val="E8E8E8"/>
       </a:lt2>
       <a:accent1>
-        <a:srgbClr val="4F81BD"/>
+        <a:srgbClr val="156082"/>
       </a:accent1>
       <a:accent2>
-        <a:srgbClr val="C0504D"/>
+        <a:srgbClr val="E97132"/>
       </a:accent2>
       <a:accent3>
-        <a:srgbClr val="9BBB59"/>
+        <a:srgbClr val="196B24"/>
       </a:accent3>
       <a:accent4>
-        <a:srgbClr val="8064A2"/>
+        <a:srgbClr val="0F9ED5"/>
       </a:accent4>
       <a:accent5>
-        <a:srgbClr val="4BACC6"/>
+        <a:srgbClr val="A02B93"/>
       </a:accent5>
       <a:accent6>
-        <a:srgbClr val="F79646"/>
+        <a:srgbClr val="4EA72E"/>
       </a:accent6>
       <a:hlink>
-        <a:srgbClr val="0000FF"/>
+        <a:srgbClr val="467886"/>
       </a:hlink>
       <a:folHlink>
-        <a:srgbClr val="800080"/>
+        <a:srgbClr val="96607D"/>
       </a:folHlink>
     </a:clrScheme>
     <a:fontScheme name="Office">
       <a:majorFont>
-        <a:latin typeface="Calibri"/>
+        <a:latin typeface="Aptos Display" panose="02110004020202020204"/>
         <a:ea typeface=""/>
         <a:cs typeface=""/>
-        <a:font script="Jpan" typeface="ＭＳ Ｐゴシック"/>
+        <a:font script="Jpan" typeface="游ゴシック Light"/>
         <a:font script="Hang" typeface="맑은 고딕"/>
-        <a:font script="Hans" typeface="宋体"/>
+        <a:font script="Hans" typeface="等线 Light"/>
         <a:font script="Hant" typeface="新細明體"/>
         <a:font script="Arab" typeface="Times New Roman"/>
         <a:font script="Hebr" typeface="Times New Roman"/>
@@ -32044,14 +32130,31 @@
         <a:font script="Viet" typeface="Times New Roman"/>
         <a:font script="Uigh" typeface="Microsoft Uighur"/>
         <a:font script="Geor" typeface="Sylfaen"/>
+        <a:font script="Armn" typeface="Arial"/>
+        <a:font script="Bugi" typeface="Leelawadee UI"/>
+        <a:font script="Bopo" typeface="Microsoft JhengHei"/>
+        <a:font script="Java" typeface="Javanese Text"/>
+        <a:font script="Lisu" typeface="Segoe UI"/>
+        <a:font script="Mymr" typeface="Myanmar Text"/>
+        <a:font script="Nkoo" typeface="Ebrima"/>
+        <a:font script="Olck" typeface="Nirmala UI"/>
+        <a:font script="Osma" typeface="Ebrima"/>
+        <a:font script="Phag" typeface="Phagspa"/>
+        <a:font script="Syrn" typeface="Estrangelo Edessa"/>
+        <a:font script="Syrj" typeface="Estrangelo Edessa"/>
+        <a:font script="Syre" typeface="Estrangelo Edessa"/>
+        <a:font script="Sora" typeface="Nirmala UI"/>
+        <a:font script="Tale" typeface="Microsoft Tai Le"/>
+        <a:font script="Talu" typeface="Microsoft New Tai Lue"/>
+        <a:font script="Tfng" typeface="Ebrima"/>
       </a:majorFont>
       <a:minorFont>
-        <a:latin typeface="Calibri"/>
+        <a:latin typeface="Aptos" panose="02110004020202020204"/>
         <a:ea typeface=""/>
         <a:cs typeface=""/>
-        <a:font script="Jpan" typeface="ＭＳ Ｐゴシック"/>
+        <a:font script="Jpan" typeface="游ゴシック"/>
         <a:font script="Hang" typeface="맑은 고딕"/>
-        <a:font script="Hans" typeface="宋体"/>
+        <a:font script="Hans" typeface="等线"/>
         <a:font script="Hant" typeface="新細明體"/>
         <a:font script="Arab" typeface="Arial"/>
         <a:font script="Hebr" typeface="Arial"/>
@@ -32079,6 +32182,23 @@
         <a:font script="Viet" typeface="Arial"/>
         <a:font script="Uigh" typeface="Microsoft Uighur"/>
         <a:font script="Geor" typeface="Sylfaen"/>
+        <a:font script="Armn" typeface="Arial"/>
+        <a:font script="Bugi" typeface="Leelawadee UI"/>
+        <a:font script="Bopo" typeface="Microsoft JhengHei"/>
+        <a:font script="Java" typeface="Javanese Text"/>
+        <a:font script="Lisu" typeface="Segoe UI"/>
+        <a:font script="Mymr" typeface="Myanmar Text"/>
+        <a:font script="Nkoo" typeface="Ebrima"/>
+        <a:font script="Olck" typeface="Nirmala UI"/>
+        <a:font script="Osma" typeface="Ebrima"/>
+        <a:font script="Phag" typeface="Phagspa"/>
+        <a:font script="Syrn" typeface="Estrangelo Edessa"/>
+        <a:font script="Syrj" typeface="Estrangelo Edessa"/>
+        <a:font script="Syre" typeface="Estrangelo Edessa"/>
+        <a:font script="Sora" typeface="Nirmala UI"/>
+        <a:font script="Tale" typeface="Microsoft Tai Le"/>
+        <a:font script="Talu" typeface="Microsoft New Tai Lue"/>
+        <a:font script="Tfng" typeface="Ebrima"/>
       </a:minorFont>
     </a:fontScheme>
     <a:fmtScheme name="Office">
@@ -32090,180 +32210,136 @@
           <a:gsLst>
             <a:gs pos="0">
               <a:schemeClr val="phClr">
-                <a:tint val="50000"/>
-                <a:satMod val="300000"/>
+                <a:lumMod val="110000"/>
+                <a:satMod val="105000"/>
+                <a:tint val="67000"/>
               </a:schemeClr>
             </a:gs>
-            <a:gs pos="35000">
+            <a:gs pos="50000">
               <a:schemeClr val="phClr">
-                <a:tint val="37000"/>
-                <a:satMod val="300000"/>
+                <a:lumMod val="105000"/>
+                <a:satMod val="103000"/>
+                <a:tint val="73000"/>
               </a:schemeClr>
             </a:gs>
             <a:gs pos="100000">
               <a:schemeClr val="phClr">
-                <a:tint val="15000"/>
-                <a:satMod val="350000"/>
+                <a:lumMod val="105000"/>
+                <a:satMod val="109000"/>
+                <a:tint val="81000"/>
               </a:schemeClr>
             </a:gs>
           </a:gsLst>
-          <a:lin ang="16200000" scaled="1"/>
+          <a:lin ang="5400000" scaled="0"/>
         </a:gradFill>
         <a:gradFill rotWithShape="1">
           <a:gsLst>
             <a:gs pos="0">
               <a:schemeClr val="phClr">
-                <a:tint val="100000"/>
+                <a:satMod val="103000"/>
+                <a:lumMod val="102000"/>
+                <a:tint val="94000"/>
+              </a:schemeClr>
+            </a:gs>
+            <a:gs pos="50000">
+              <a:schemeClr val="phClr">
+                <a:satMod val="110000"/>
+                <a:lumMod val="100000"/>
                 <a:shade val="100000"/>
-                <a:satMod val="130000"/>
               </a:schemeClr>
             </a:gs>
             <a:gs pos="100000">
               <a:schemeClr val="phClr">
-                <a:tint val="50000"/>
-                <a:shade val="100000"/>
-                <a:satMod val="350000"/>
+                <a:lumMod val="99000"/>
+                <a:satMod val="120000"/>
+                <a:shade val="78000"/>
               </a:schemeClr>
             </a:gs>
           </a:gsLst>
-          <a:lin ang="16200000" scaled="0"/>
+          <a:lin ang="5400000" scaled="0"/>
         </a:gradFill>
       </a:fillStyleLst>
       <a:lnStyleLst>
-        <a:ln w="9525" cap="flat" cmpd="sng" algn="ctr">
+        <a:ln w="12700" cap="flat" cmpd="sng" algn="ctr">
           <a:solidFill>
-            <a:schemeClr val="phClr">
-              <a:shade val="95000"/>
-              <a:satMod val="105000"/>
-            </a:schemeClr>
+            <a:schemeClr val="phClr"/>
           </a:solidFill>
           <a:prstDash val="solid"/>
+          <a:miter lim="800000"/>
+        </a:ln>
+        <a:ln w="19050" cap="flat" cmpd="sng" algn="ctr">
+          <a:solidFill>
+            <a:schemeClr val="phClr"/>
+          </a:solidFill>
+          <a:prstDash val="solid"/>
+          <a:miter lim="800000"/>
         </a:ln>
         <a:ln w="25400" cap="flat" cmpd="sng" algn="ctr">
           <a:solidFill>
             <a:schemeClr val="phClr"/>
           </a:solidFill>
           <a:prstDash val="solid"/>
-        </a:ln>
-        <a:ln w="38100" cap="flat" cmpd="sng" algn="ctr">
-          <a:solidFill>
-            <a:schemeClr val="phClr"/>
-          </a:solidFill>
-          <a:prstDash val="solid"/>
+          <a:miter lim="800000"/>
         </a:ln>
       </a:lnStyleLst>
       <a:effectStyleLst>
         <a:effectStyle>
+          <a:effectLst/>
+        </a:effectStyle>
+        <a:effectStyle>
+          <a:effectLst/>
+        </a:effectStyle>
+        <a:effectStyle>
           <a:effectLst>
-            <a:outerShdw blurRad="40000" dist="20000" dir="5400000" rotWithShape="0">
+            <a:outerShdw blurRad="57150" dist="19050" dir="5400000" algn="ctr" rotWithShape="0">
               <a:srgbClr val="000000">
-                <a:alpha val="38000"/>
+                <a:alpha val="63000"/>
               </a:srgbClr>
             </a:outerShdw>
           </a:effectLst>
-        </a:effectStyle>
-        <a:effectStyle>
-          <a:effectLst>
-            <a:outerShdw blurRad="40000" dist="23000" dir="5400000" rotWithShape="0">
-              <a:srgbClr val="000000">
-                <a:alpha val="35000"/>
-              </a:srgbClr>
-            </a:outerShdw>
-          </a:effectLst>
-        </a:effectStyle>
-        <a:effectStyle>
-          <a:effectLst>
-            <a:outerShdw blurRad="40000" dist="23000" dir="5400000" rotWithShape="0">
-              <a:srgbClr val="000000">
-                <a:alpha val="35000"/>
-              </a:srgbClr>
-            </a:outerShdw>
-          </a:effectLst>
-          <a:scene3d>
-            <a:camera prst="orthographicFront">
-              <a:rot lat="0" lon="0" rev="0"/>
-            </a:camera>
-            <a:lightRig rig="threePt" dir="t">
-              <a:rot lat="0" lon="0" rev="1200000"/>
-            </a:lightRig>
-          </a:scene3d>
-          <a:sp3d>
-            <a:bevelT w="63500" h="25400"/>
-          </a:sp3d>
         </a:effectStyle>
       </a:effectStyleLst>
       <a:bgFillStyleLst>
         <a:solidFill>
           <a:schemeClr val="phClr"/>
         </a:solidFill>
+        <a:solidFill>
+          <a:schemeClr val="phClr">
+            <a:tint val="95000"/>
+            <a:satMod val="170000"/>
+          </a:schemeClr>
+        </a:solidFill>
         <a:gradFill rotWithShape="1">
           <a:gsLst>
             <a:gs pos="0">
               <a:schemeClr val="phClr">
-                <a:tint val="40000"/>
-                <a:satMod val="350000"/>
+                <a:tint val="93000"/>
+                <a:satMod val="150000"/>
+                <a:shade val="98000"/>
+                <a:lumMod val="102000"/>
               </a:schemeClr>
             </a:gs>
-            <a:gs pos="40000">
+            <a:gs pos="50000">
               <a:schemeClr val="phClr">
-                <a:tint val="45000"/>
-                <a:shade val="99000"/>
-                <a:satMod val="350000"/>
+                <a:tint val="98000"/>
+                <a:satMod val="130000"/>
+                <a:shade val="90000"/>
+                <a:lumMod val="103000"/>
               </a:schemeClr>
             </a:gs>
             <a:gs pos="100000">
               <a:schemeClr val="phClr">
-                <a:shade val="20000"/>
-                <a:satMod val="255000"/>
+                <a:shade val="63000"/>
+                <a:satMod val="120000"/>
               </a:schemeClr>
             </a:gs>
           </a:gsLst>
-          <a:path path="circle">
-            <a:fillToRect l="50000" t="-80000" r="50000" b="180000"/>
-          </a:path>
-        </a:gradFill>
-        <a:gradFill rotWithShape="1">
-          <a:gsLst>
-            <a:gs pos="0">
-              <a:schemeClr val="phClr">
-                <a:tint val="80000"/>
-                <a:satMod val="300000"/>
-              </a:schemeClr>
-            </a:gs>
-            <a:gs pos="100000">
-              <a:schemeClr val="phClr">
-                <a:shade val="30000"/>
-                <a:satMod val="200000"/>
-              </a:schemeClr>
-            </a:gs>
-          </a:gsLst>
-          <a:path path="circle">
-            <a:fillToRect l="50000" t="50000" r="50000" b="50000"/>
-          </a:path>
+          <a:lin ang="5400000" scaled="0"/>
         </a:gradFill>
       </a:bgFillStyleLst>
     </a:fmtScheme>
   </a:themeElements>
   <a:objectDefaults>
-    <a:spDef>
-      <a:spPr/>
-      <a:bodyPr/>
-      <a:lstStyle/>
-      <a:style>
-        <a:lnRef idx="1">
-          <a:schemeClr val="accent1"/>
-        </a:lnRef>
-        <a:fillRef idx="3">
-          <a:schemeClr val="accent1"/>
-        </a:fillRef>
-        <a:effectRef idx="2">
-          <a:schemeClr val="accent1"/>
-        </a:effectRef>
-        <a:fontRef idx="minor">
-          <a:schemeClr val="lt1"/>
-        </a:fontRef>
-      </a:style>
-    </a:spDef>
     <a:lnDef>
       <a:spPr/>
       <a:bodyPr/>
@@ -32285,5 +32361,10 @@
     </a:lnDef>
   </a:objectDefaults>
   <a:extraClrSchemeLst/>
+  <a:extLst>
+    <a:ext uri="{05A4C25C-085E-4340-85A3-A5531E510DB2}">
+      <thm15:themeFamily xmlns:thm15="http://schemas.microsoft.com/office/thememl/2012/main" name="Office Theme" id="{2E142A2C-CD16-42D6-873A-C26D2A0506FA}" vid="{1BDDFF52-6CD6-40A5-AB3C-68EB2F1E4D0A}"/>
+    </a:ext>
+  </a:extLst>
 </a:theme>
 </file>
--- a/docs/ShapeMix/ShapeMix_High_School_Research_Deck.pptx
+++ b/docs/ShapeMix/ShapeMix_High_School_Research_Deck.pptx
@@ -4,31 +4,34 @@
   <p:sldMasterIdLst>
     <p:sldMasterId id="2147483648" r:id="rId1"/>
   </p:sldMasterIdLst>
+  <p:notesMasterIdLst>
+    <p:notesMasterId r:id="rId24"/>
+  </p:notesMasterIdLst>
   <p:sldIdLst>
-    <p:sldId id="256" r:id="rId7"/>
-    <p:sldId id="257" r:id="rId9"/>
-    <p:sldId id="258" r:id="rId10"/>
-    <p:sldId id="259" r:id="rId11"/>
-    <p:sldId id="260" r:id="rId12"/>
-    <p:sldId id="261" r:id="rId13"/>
-    <p:sldId id="262" r:id="rId14"/>
-    <p:sldId id="263" r:id="rId15"/>
-    <p:sldId id="264" r:id="rId16"/>
-    <p:sldId id="265" r:id="rId17"/>
-    <p:sldId id="266" r:id="rId18"/>
-    <p:sldId id="267" r:id="rId19"/>
-    <p:sldId id="268" r:id="rId20"/>
-    <p:sldId id="269" r:id="rId21"/>
-    <p:sldId id="270" r:id="rId22"/>
-    <p:sldId id="271" r:id="rId23"/>
-    <p:sldId id="272" r:id="rId24"/>
-    <p:sldId id="273" r:id="rId25"/>
-    <p:sldId id="274" r:id="rId26"/>
-    <p:sldId id="275" r:id="rId27"/>
-    <p:sldId id="276" r:id="rId28"/>
-    <p:sldId id="277" r:id="rId29"/>
+    <p:sldId id="256" r:id="rId2"/>
+    <p:sldId id="257" r:id="rId3"/>
+    <p:sldId id="258" r:id="rId4"/>
+    <p:sldId id="259" r:id="rId5"/>
+    <p:sldId id="260" r:id="rId6"/>
+    <p:sldId id="261" r:id="rId7"/>
+    <p:sldId id="262" r:id="rId8"/>
+    <p:sldId id="263" r:id="rId9"/>
+    <p:sldId id="264" r:id="rId10"/>
+    <p:sldId id="265" r:id="rId11"/>
+    <p:sldId id="266" r:id="rId12"/>
+    <p:sldId id="267" r:id="rId13"/>
+    <p:sldId id="268" r:id="rId14"/>
+    <p:sldId id="269" r:id="rId15"/>
+    <p:sldId id="270" r:id="rId16"/>
+    <p:sldId id="271" r:id="rId17"/>
+    <p:sldId id="272" r:id="rId18"/>
+    <p:sldId id="273" r:id="rId19"/>
+    <p:sldId id="274" r:id="rId20"/>
+    <p:sldId id="275" r:id="rId21"/>
+    <p:sldId id="276" r:id="rId22"/>
+    <p:sldId id="277" r:id="rId23"/>
   </p:sldIdLst>
-  <p:sldSz cx="12191695" cy="6858000" type="screen4x3"/>
+  <p:sldSz cx="12192000" cy="6858000"/>
   <p:notesSz cx="6858000" cy="9144000"/>
   <p:defaultTextStyle>
     <a:defPPr>
@@ -125,11 +128,27 @@
       </a:defRPr>
     </a:lvl9pPr>
   </p:defaultTextStyle>
+  <p:extLst>
+    <p:ext uri="{EFAFB233-063F-42B5-8137-9DF3F51BA10A}">
+      <p15:sldGuideLst xmlns:p15="http://schemas.microsoft.com/office/powerpoint/2012/main">
+        <p15:guide id="1" orient="horz" pos="2160">
+          <p15:clr>
+            <a:srgbClr val="A4A3A4"/>
+          </p15:clr>
+        </p15:guide>
+        <p15:guide id="2" pos="2880">
+          <p15:clr>
+            <a:srgbClr val="A4A3A4"/>
+          </p15:clr>
+        </p15:guide>
+      </p15:sldGuideLst>
+    </p:ext>
+  </p:extLst>
 </p:presentation>
 </file>
 
 <file path=ppt/notesMasters/notesMaster1.xml><?xml version="1.0" encoding="utf-8"?>
-<p:notesMaster xmlns:a="http://schemas.openxmlformats.org/drawingml/2006/main" xmlns:p="http://schemas.openxmlformats.org/presentationml/2006/main" xmlns:r="http://schemas.openxmlformats.org/officeDocument/2006/relationships">
+<p:notesMaster xmlns:a="http://schemas.openxmlformats.org/drawingml/2006/main" xmlns:r="http://schemas.openxmlformats.org/officeDocument/2006/relationships" xmlns:p="http://schemas.openxmlformats.org/presentationml/2006/main">
   <p:cSld>
     <p:bg>
       <p:bgRef idx="1001">
@@ -150,241 +169,16 @@
           <a:chExt cx="0" cy="0"/>
         </a:xfrm>
       </p:grpSpPr>
-      <p:sp>
-        <p:nvSpPr>
-          <p:cNvPr id="2" name="Header Placeholder 1"/>
-          <p:cNvSpPr>
-            <a:spLocks noGrp="1"/>
-          </p:cNvSpPr>
-          <p:nvPr>
-            <p:ph type="hdr" sz="quarter"/>
-          </p:nvPr>
-        </p:nvSpPr>
-        <p:spPr>
-          <a:xfrm>
-            <a:off x="0" y="0"/>
-            <a:ext cx="2971800" cy="457200"/>
-          </a:xfrm>
-          <a:prstGeom prst="rect">
-            <a:avLst/>
-          </a:prstGeom>
-        </p:spPr>
-        <p:txBody>
-          <a:bodyPr vert="horz" lIns="91440" tIns="45720" rIns="91440" bIns="45720" rtlCol="0"/>
-          <a:lstStyle>
-            <a:lvl1pPr algn="l">
-              <a:defRPr sz="1200"/>
-            </a:lvl1pPr>
-          </a:lstStyle>
-          <a:p>
-            <a:endParaRPr lang="en-US"/>
-          </a:p>
-        </p:txBody>
-      </p:sp>
-      <p:sp>
-        <p:nvSpPr>
-          <p:cNvPr id="3" name="Date Placeholder 2"/>
-          <p:cNvSpPr>
-            <a:spLocks noGrp="1"/>
-          </p:cNvSpPr>
-          <p:nvPr>
-            <p:ph type="dt" idx="1"/>
-          </p:nvPr>
-        </p:nvSpPr>
-        <p:spPr>
-          <a:xfrm>
-            <a:off x="3884613" y="0"/>
-            <a:ext cx="2971800" cy="457200"/>
-          </a:xfrm>
-          <a:prstGeom prst="rect">
-            <a:avLst/>
-          </a:prstGeom>
-        </p:spPr>
-        <p:txBody>
-          <a:bodyPr vert="horz" lIns="91440" tIns="45720" rIns="91440" bIns="45720" rtlCol="0"/>
-          <a:lstStyle>
-            <a:lvl1pPr algn="r">
-              <a:defRPr sz="1200"/>
-            </a:lvl1pPr>
-          </a:lstStyle>
-          <a:p>
-            <a:fld id="{0F89C1C7-3DCD-1040-A9CF-14679D8B5DDD}" type="datetimeFigureOut">
-              <a:rPr lang="en-US" smtClean="0"/>
-              <a:t>10/17/16</a:t>
-            </a:fld>
-            <a:endParaRPr lang="en-US"/>
-          </a:p>
-        </p:txBody>
-      </p:sp>
-      <p:sp>
-        <p:nvSpPr>
-          <p:cNvPr id="4" name="Slide Image Placeholder 3"/>
-          <p:cNvSpPr>
-            <a:spLocks noGrp="1" noRot="1" noChangeAspect="1"/>
-          </p:cNvSpPr>
-          <p:nvPr>
-            <p:ph type="sldImg" idx="2"/>
-          </p:nvPr>
-        </p:nvSpPr>
-        <p:spPr>
-          <a:xfrm>
-            <a:off x="1143000" y="685800"/>
-            <a:ext cx="4572000" cy="3429000"/>
-          </a:xfrm>
-          <a:prstGeom prst="rect">
-            <a:avLst/>
-          </a:prstGeom>
-          <a:noFill/>
-          <a:ln w="12700">
-            <a:solidFill>
-              <a:prstClr val="black"/>
-            </a:solidFill>
-          </a:ln>
-        </p:spPr>
-        <p:txBody>
-          <a:bodyPr vert="horz" lIns="91440" tIns="45720" rIns="91440" bIns="45720" rtlCol="0" anchor="ctr"/>
-          <a:lstStyle/>
-          <a:p>
-            <a:endParaRPr lang="en-US"/>
-          </a:p>
-        </p:txBody>
-      </p:sp>
-      <p:sp>
-        <p:nvSpPr>
-          <p:cNvPr id="5" name="Notes Placeholder 4"/>
-          <p:cNvSpPr>
-            <a:spLocks noGrp="1"/>
-          </p:cNvSpPr>
-          <p:nvPr>
-            <p:ph type="body" sz="quarter" idx="3"/>
-          </p:nvPr>
-        </p:nvSpPr>
-        <p:spPr>
-          <a:xfrm>
-            <a:off x="685800" y="4343400"/>
-            <a:ext cx="5486400" cy="4114800"/>
-          </a:xfrm>
-          <a:prstGeom prst="rect">
-            <a:avLst/>
-          </a:prstGeom>
-        </p:spPr>
-        <p:txBody>
-          <a:bodyPr vert="horz" lIns="91440" tIns="45720" rIns="91440" bIns="45720" rtlCol="0"/>
-          <a:lstStyle/>
-          <a:p>
-            <a:pPr lvl="0"/>
-            <a:r>
-              <a:rPr lang="en-US" smtClean="0"/>
-              <a:t>Click to edit Master text styles</a:t>
-            </a:r>
-          </a:p>
-          <a:p>
-            <a:pPr lvl="1"/>
-            <a:r>
-              <a:rPr lang="en-US" smtClean="0"/>
-              <a:t>Second level</a:t>
-            </a:r>
-          </a:p>
-          <a:p>
-            <a:pPr lvl="2"/>
-            <a:r>
-              <a:rPr lang="en-US" smtClean="0"/>
-              <a:t>Third level</a:t>
-            </a:r>
-          </a:p>
-          <a:p>
-            <a:pPr lvl="3"/>
-            <a:r>
-              <a:rPr lang="en-US" smtClean="0"/>
-              <a:t>Fourth level</a:t>
-            </a:r>
-          </a:p>
-          <a:p>
-            <a:pPr lvl="4"/>
-            <a:r>
-              <a:rPr lang="en-US" smtClean="0"/>
-              <a:t>Fifth level</a:t>
-            </a:r>
-            <a:endParaRPr lang="en-US"/>
-          </a:p>
-        </p:txBody>
-      </p:sp>
-      <p:sp>
-        <p:nvSpPr>
-          <p:cNvPr id="6" name="Footer Placeholder 5"/>
-          <p:cNvSpPr>
-            <a:spLocks noGrp="1"/>
-          </p:cNvSpPr>
-          <p:nvPr>
-            <p:ph type="ftr" sz="quarter" idx="4"/>
-          </p:nvPr>
-        </p:nvSpPr>
-        <p:spPr>
-          <a:xfrm>
-            <a:off x="0" y="8685213"/>
-            <a:ext cx="2971800" cy="457200"/>
-          </a:xfrm>
-          <a:prstGeom prst="rect">
-            <a:avLst/>
-          </a:prstGeom>
-        </p:spPr>
-        <p:txBody>
-          <a:bodyPr vert="horz" lIns="91440" tIns="45720" rIns="91440" bIns="45720" rtlCol="0" anchor="b"/>
-          <a:lstStyle>
-            <a:lvl1pPr algn="l">
-              <a:defRPr sz="1200"/>
-            </a:lvl1pPr>
-          </a:lstStyle>
-          <a:p>
-            <a:endParaRPr lang="en-US"/>
-          </a:p>
-        </p:txBody>
-      </p:sp>
-      <p:sp>
-        <p:nvSpPr>
-          <p:cNvPr id="7" name="Slide Number Placeholder 6"/>
-          <p:cNvSpPr>
-            <a:spLocks noGrp="1"/>
-          </p:cNvSpPr>
-          <p:nvPr>
-            <p:ph type="sldNum" sz="quarter" idx="5"/>
-          </p:nvPr>
-        </p:nvSpPr>
-        <p:spPr>
-          <a:xfrm>
-            <a:off x="3884613" y="8685213"/>
-            <a:ext cx="2971800" cy="457200"/>
-          </a:xfrm>
-          <a:prstGeom prst="rect">
-            <a:avLst/>
-          </a:prstGeom>
-        </p:spPr>
-        <p:txBody>
-          <a:bodyPr vert="horz" lIns="91440" tIns="45720" rIns="91440" bIns="45720" rtlCol="0" anchor="b"/>
-          <a:lstStyle>
-            <a:lvl1pPr algn="r">
-              <a:defRPr sz="1200"/>
-            </a:lvl1pPr>
-          </a:lstStyle>
-          <a:p>
-            <a:fld id="{BB5E49A5-4136-284D-997B-48E1D791AD67}" type="slidenum">
-              <a:rPr lang="en-US" smtClean="0"/>
-              <a:t>‹#›</a:t>
-            </a:fld>
-            <a:endParaRPr lang="en-US"/>
-          </a:p>
-        </p:txBody>
-      </p:sp>
     </p:spTree>
     <p:extLst>
       <p:ext uri="{BB962C8B-B14F-4D97-AF65-F5344CB8AC3E}">
-        <p14:creationId xmlns:p14="http://schemas.microsoft.com/office/powerpoint/2010/main" val="2623252185"/>
+        <p14:creationId xmlns:p14="http://schemas.microsoft.com/office/powerpoint/2010/main" val="1620625448"/>
       </p:ext>
     </p:extLst>
   </p:cSld>
   <p:clrMap bg1="lt1" tx1="dk1" bg2="lt2" tx2="dk2" accent1="accent1" accent2="accent2" accent3="accent3" accent4="accent4" accent5="accent5" accent6="accent6" hlink="hlink" folHlink="folHlink"/>
   <p:notesStyle>
-    <a:lvl1pPr marL="0" algn="l" defTabSz="457200" rtl="0" eaLnBrk="1" latinLnBrk="0" hangingPunct="1">
+    <a:lvl1pPr marL="0" algn="l" defTabSz="914400" rtl="0" eaLnBrk="1" latinLnBrk="0" hangingPunct="1">
       <a:defRPr sz="1200" kern="1200">
         <a:solidFill>
           <a:schemeClr val="tx1"/>
@@ -394,7 +188,7 @@
         <a:cs typeface="+mn-cs"/>
       </a:defRPr>
     </a:lvl1pPr>
-    <a:lvl2pPr marL="457200" algn="l" defTabSz="457200" rtl="0" eaLnBrk="1" latinLnBrk="0" hangingPunct="1">
+    <a:lvl2pPr marL="457200" algn="l" defTabSz="914400" rtl="0" eaLnBrk="1" latinLnBrk="0" hangingPunct="1">
       <a:defRPr sz="1200" kern="1200">
         <a:solidFill>
           <a:schemeClr val="tx1"/>
@@ -404,7 +198,7 @@
         <a:cs typeface="+mn-cs"/>
       </a:defRPr>
     </a:lvl2pPr>
-    <a:lvl3pPr marL="914400" algn="l" defTabSz="457200" rtl="0" eaLnBrk="1" latinLnBrk="0" hangingPunct="1">
+    <a:lvl3pPr marL="914400" algn="l" defTabSz="914400" rtl="0" eaLnBrk="1" latinLnBrk="0" hangingPunct="1">
       <a:defRPr sz="1200" kern="1200">
         <a:solidFill>
           <a:schemeClr val="tx1"/>
@@ -414,7 +208,7 @@
         <a:cs typeface="+mn-cs"/>
       </a:defRPr>
     </a:lvl3pPr>
-    <a:lvl4pPr marL="1371600" algn="l" defTabSz="457200" rtl="0" eaLnBrk="1" latinLnBrk="0" hangingPunct="1">
+    <a:lvl4pPr marL="1371600" algn="l" defTabSz="914400" rtl="0" eaLnBrk="1" latinLnBrk="0" hangingPunct="1">
       <a:defRPr sz="1200" kern="1200">
         <a:solidFill>
           <a:schemeClr val="tx1"/>
@@ -424,7 +218,7 @@
         <a:cs typeface="+mn-cs"/>
       </a:defRPr>
     </a:lvl4pPr>
-    <a:lvl5pPr marL="1828800" algn="l" defTabSz="457200" rtl="0" eaLnBrk="1" latinLnBrk="0" hangingPunct="1">
+    <a:lvl5pPr marL="1828800" algn="l" defTabSz="914400" rtl="0" eaLnBrk="1" latinLnBrk="0" hangingPunct="1">
       <a:defRPr sz="1200" kern="1200">
         <a:solidFill>
           <a:schemeClr val="tx1"/>
@@ -434,7 +228,7 @@
         <a:cs typeface="+mn-cs"/>
       </a:defRPr>
     </a:lvl5pPr>
-    <a:lvl6pPr marL="2286000" algn="l" defTabSz="457200" rtl="0" eaLnBrk="1" latinLnBrk="0" hangingPunct="1">
+    <a:lvl6pPr marL="2286000" algn="l" defTabSz="914400" rtl="0" eaLnBrk="1" latinLnBrk="0" hangingPunct="1">
       <a:defRPr sz="1200" kern="1200">
         <a:solidFill>
           <a:schemeClr val="tx1"/>
@@ -444,7 +238,7 @@
         <a:cs typeface="+mn-cs"/>
       </a:defRPr>
     </a:lvl6pPr>
-    <a:lvl7pPr marL="2743200" algn="l" defTabSz="457200" rtl="0" eaLnBrk="1" latinLnBrk="0" hangingPunct="1">
+    <a:lvl7pPr marL="2743200" algn="l" defTabSz="914400" rtl="0" eaLnBrk="1" latinLnBrk="0" hangingPunct="1">
       <a:defRPr sz="1200" kern="1200">
         <a:solidFill>
           <a:schemeClr val="tx1"/>
@@ -454,7 +248,7 @@
         <a:cs typeface="+mn-cs"/>
       </a:defRPr>
     </a:lvl7pPr>
-    <a:lvl8pPr marL="3200400" algn="l" defTabSz="457200" rtl="0" eaLnBrk="1" latinLnBrk="0" hangingPunct="1">
+    <a:lvl8pPr marL="3200400" algn="l" defTabSz="914400" rtl="0" eaLnBrk="1" latinLnBrk="0" hangingPunct="1">
       <a:defRPr sz="1200" kern="1200">
         <a:solidFill>
           <a:schemeClr val="tx1"/>
@@ -464,7 +258,7 @@
         <a:cs typeface="+mn-cs"/>
       </a:defRPr>
     </a:lvl8pPr>
-    <a:lvl9pPr marL="3657600" algn="l" defTabSz="457200" rtl="0" eaLnBrk="1" latinLnBrk="0" hangingPunct="1">
+    <a:lvl9pPr marL="3657600" algn="l" defTabSz="914400" rtl="0" eaLnBrk="1" latinLnBrk="0" hangingPunct="1">
       <a:defRPr sz="1200" kern="1200">
         <a:solidFill>
           <a:schemeClr val="tx1"/>
@@ -479,7 +273,7 @@
 </file>
 
 <file path=ppt/notesSlides/notesSlide1.xml><?xml version="1.0" encoding="utf-8"?>
-<p:notes xmlns:a="http://schemas.openxmlformats.org/drawingml/2006/main" xmlns:p="http://schemas.openxmlformats.org/presentationml/2006/main" xmlns:r="http://schemas.openxmlformats.org/officeDocument/2006/relationships">
+<p:notes xmlns:a="http://schemas.openxmlformats.org/drawingml/2006/main" xmlns:r="http://schemas.openxmlformats.org/officeDocument/2006/relationships" xmlns:p="http://schemas.openxmlformats.org/presentationml/2006/main">
   <p:cSld>
     <p:spTree>
       <p:nvGrpSpPr>
@@ -499,7 +293,7 @@
         <p:nvSpPr>
           <p:cNvPr id="2" name="Slide Image Placeholder 1"/>
           <p:cNvSpPr>
-            <a:spLocks noGrp="1"/>
+            <a:spLocks noGrp="1" noRot="1" noChangeAspect="1"/>
           </p:cNvSpPr>
           <p:nvPr>
             <p:ph type="sldImg" idx="2"/>
@@ -514,7 +308,7 @@
             <a:spLocks noGrp="1"/>
           </p:cNvSpPr>
           <p:nvPr>
-            <p:ph type="body" idx="3" sz="quarter"/>
+            <p:ph type="body" sz="quarter" idx="3"/>
           </p:nvPr>
         </p:nvSpPr>
         <p:spPr/>
@@ -535,7 +329,7 @@
             <a:spLocks noGrp="1"/>
           </p:cNvSpPr>
           <p:nvPr>
-            <p:ph type="sldNum" idx="5" sz="quarter"/>
+            <p:ph type="sldNum" sz="quarter" idx="5"/>
           </p:nvPr>
         </p:nvSpPr>
         <p:spPr/>
@@ -549,7 +343,7 @@
 </file>
 
 <file path=ppt/notesSlides/notesSlide10.xml><?xml version="1.0" encoding="utf-8"?>
-<p:notes xmlns:a="http://schemas.openxmlformats.org/drawingml/2006/main" xmlns:p="http://schemas.openxmlformats.org/presentationml/2006/main" xmlns:r="http://schemas.openxmlformats.org/officeDocument/2006/relationships">
+<p:notes xmlns:a="http://schemas.openxmlformats.org/drawingml/2006/main" xmlns:r="http://schemas.openxmlformats.org/officeDocument/2006/relationships" xmlns:p="http://schemas.openxmlformats.org/presentationml/2006/main">
   <p:cSld>
     <p:spTree>
       <p:nvGrpSpPr>
@@ -569,7 +363,7 @@
         <p:nvSpPr>
           <p:cNvPr id="2" name="Slide Image Placeholder 1"/>
           <p:cNvSpPr>
-            <a:spLocks noGrp="1"/>
+            <a:spLocks noGrp="1" noRot="1" noChangeAspect="1"/>
           </p:cNvSpPr>
           <p:nvPr>
             <p:ph type="sldImg" idx="2"/>
@@ -584,7 +378,7 @@
             <a:spLocks noGrp="1"/>
           </p:cNvSpPr>
           <p:nvPr>
-            <p:ph type="body" idx="3" sz="quarter"/>
+            <p:ph type="body" sz="quarter" idx="3"/>
           </p:nvPr>
         </p:nvSpPr>
         <p:spPr/>
@@ -605,7 +399,7 @@
             <a:spLocks noGrp="1"/>
           </p:cNvSpPr>
           <p:nvPr>
-            <p:ph type="sldNum" idx="5" sz="quarter"/>
+            <p:ph type="sldNum" sz="quarter" idx="5"/>
           </p:nvPr>
         </p:nvSpPr>
         <p:spPr/>
@@ -619,7 +413,7 @@
 </file>
 
 <file path=ppt/notesSlides/notesSlide11.xml><?xml version="1.0" encoding="utf-8"?>
-<p:notes xmlns:a="http://schemas.openxmlformats.org/drawingml/2006/main" xmlns:p="http://schemas.openxmlformats.org/presentationml/2006/main" xmlns:r="http://schemas.openxmlformats.org/officeDocument/2006/relationships">
+<p:notes xmlns:a="http://schemas.openxmlformats.org/drawingml/2006/main" xmlns:r="http://schemas.openxmlformats.org/officeDocument/2006/relationships" xmlns:p="http://schemas.openxmlformats.org/presentationml/2006/main">
   <p:cSld>
     <p:spTree>
       <p:nvGrpSpPr>
@@ -639,7 +433,7 @@
         <p:nvSpPr>
           <p:cNvPr id="2" name="Slide Image Placeholder 1"/>
           <p:cNvSpPr>
-            <a:spLocks noGrp="1"/>
+            <a:spLocks noGrp="1" noRot="1" noChangeAspect="1"/>
           </p:cNvSpPr>
           <p:nvPr>
             <p:ph type="sldImg" idx="2"/>
@@ -654,7 +448,7 @@
             <a:spLocks noGrp="1"/>
           </p:cNvSpPr>
           <p:nvPr>
-            <p:ph type="body" idx="3" sz="quarter"/>
+            <p:ph type="body" sz="quarter" idx="3"/>
           </p:nvPr>
         </p:nvSpPr>
         <p:spPr/>
@@ -675,7 +469,7 @@
             <a:spLocks noGrp="1"/>
           </p:cNvSpPr>
           <p:nvPr>
-            <p:ph type="sldNum" idx="5" sz="quarter"/>
+            <p:ph type="sldNum" sz="quarter" idx="5"/>
           </p:nvPr>
         </p:nvSpPr>
         <p:spPr/>
@@ -689,7 +483,7 @@
 </file>
 
 <file path=ppt/notesSlides/notesSlide12.xml><?xml version="1.0" encoding="utf-8"?>
-<p:notes xmlns:a="http://schemas.openxmlformats.org/drawingml/2006/main" xmlns:p="http://schemas.openxmlformats.org/presentationml/2006/main" xmlns:r="http://schemas.openxmlformats.org/officeDocument/2006/relationships">
+<p:notes xmlns:a="http://schemas.openxmlformats.org/drawingml/2006/main" xmlns:r="http://schemas.openxmlformats.org/officeDocument/2006/relationships" xmlns:p="http://schemas.openxmlformats.org/presentationml/2006/main">
   <p:cSld>
     <p:spTree>
       <p:nvGrpSpPr>
@@ -709,7 +503,7 @@
         <p:nvSpPr>
           <p:cNvPr id="2" name="Slide Image Placeholder 1"/>
           <p:cNvSpPr>
-            <a:spLocks noGrp="1"/>
+            <a:spLocks noGrp="1" noRot="1" noChangeAspect="1"/>
           </p:cNvSpPr>
           <p:nvPr>
             <p:ph type="sldImg" idx="2"/>
@@ -724,7 +518,7 @@
             <a:spLocks noGrp="1"/>
           </p:cNvSpPr>
           <p:nvPr>
-            <p:ph type="body" idx="3" sz="quarter"/>
+            <p:ph type="body" sz="quarter" idx="3"/>
           </p:nvPr>
         </p:nvSpPr>
         <p:spPr/>
@@ -745,7 +539,7 @@
             <a:spLocks noGrp="1"/>
           </p:cNvSpPr>
           <p:nvPr>
-            <p:ph type="sldNum" idx="5" sz="quarter"/>
+            <p:ph type="sldNum" sz="quarter" idx="5"/>
           </p:nvPr>
         </p:nvSpPr>
         <p:spPr/>
@@ -759,7 +553,7 @@
 </file>
 
 <file path=ppt/notesSlides/notesSlide13.xml><?xml version="1.0" encoding="utf-8"?>
-<p:notes xmlns:a="http://schemas.openxmlformats.org/drawingml/2006/main" xmlns:p="http://schemas.openxmlformats.org/presentationml/2006/main" xmlns:r="http://schemas.openxmlformats.org/officeDocument/2006/relationships">
+<p:notes xmlns:a="http://schemas.openxmlformats.org/drawingml/2006/main" xmlns:r="http://schemas.openxmlformats.org/officeDocument/2006/relationships" xmlns:p="http://schemas.openxmlformats.org/presentationml/2006/main">
   <p:cSld>
     <p:spTree>
       <p:nvGrpSpPr>
@@ -779,7 +573,7 @@
         <p:nvSpPr>
           <p:cNvPr id="2" name="Slide Image Placeholder 1"/>
           <p:cNvSpPr>
-            <a:spLocks noGrp="1"/>
+            <a:spLocks noGrp="1" noRot="1" noChangeAspect="1"/>
           </p:cNvSpPr>
           <p:nvPr>
             <p:ph type="sldImg" idx="2"/>
@@ -794,7 +588,7 @@
             <a:spLocks noGrp="1"/>
           </p:cNvSpPr>
           <p:nvPr>
-            <p:ph type="body" idx="3" sz="quarter"/>
+            <p:ph type="body" sz="quarter" idx="3"/>
           </p:nvPr>
         </p:nvSpPr>
         <p:spPr/>
@@ -815,7 +609,7 @@
             <a:spLocks noGrp="1"/>
           </p:cNvSpPr>
           <p:nvPr>
-            <p:ph type="sldNum" idx="5" sz="quarter"/>
+            <p:ph type="sldNum" sz="quarter" idx="5"/>
           </p:nvPr>
         </p:nvSpPr>
         <p:spPr/>
@@ -829,7 +623,7 @@
 </file>
 
 <file path=ppt/notesSlides/notesSlide14.xml><?xml version="1.0" encoding="utf-8"?>
-<p:notes xmlns:a="http://schemas.openxmlformats.org/drawingml/2006/main" xmlns:p="http://schemas.openxmlformats.org/presentationml/2006/main" xmlns:r="http://schemas.openxmlformats.org/officeDocument/2006/relationships">
+<p:notes xmlns:a="http://schemas.openxmlformats.org/drawingml/2006/main" xmlns:r="http://schemas.openxmlformats.org/officeDocument/2006/relationships" xmlns:p="http://schemas.openxmlformats.org/presentationml/2006/main">
   <p:cSld>
     <p:spTree>
       <p:nvGrpSpPr>
@@ -849,7 +643,7 @@
         <p:nvSpPr>
           <p:cNvPr id="2" name="Slide Image Placeholder 1"/>
           <p:cNvSpPr>
-            <a:spLocks noGrp="1"/>
+            <a:spLocks noGrp="1" noRot="1" noChangeAspect="1"/>
           </p:cNvSpPr>
           <p:nvPr>
             <p:ph type="sldImg" idx="2"/>
@@ -864,7 +658,7 @@
             <a:spLocks noGrp="1"/>
           </p:cNvSpPr>
           <p:nvPr>
-            <p:ph type="body" idx="3" sz="quarter"/>
+            <p:ph type="body" sz="quarter" idx="3"/>
           </p:nvPr>
         </p:nvSpPr>
         <p:spPr/>
@@ -885,7 +679,7 @@
             <a:spLocks noGrp="1"/>
           </p:cNvSpPr>
           <p:nvPr>
-            <p:ph type="sldNum" idx="5" sz="quarter"/>
+            <p:ph type="sldNum" sz="quarter" idx="5"/>
           </p:nvPr>
         </p:nvSpPr>
         <p:spPr/>
@@ -899,7 +693,7 @@
 </file>
 
 <file path=ppt/notesSlides/notesSlide15.xml><?xml version="1.0" encoding="utf-8"?>
-<p:notes xmlns:a="http://schemas.openxmlformats.org/drawingml/2006/main" xmlns:p="http://schemas.openxmlformats.org/presentationml/2006/main" xmlns:r="http://schemas.openxmlformats.org/officeDocument/2006/relationships">
+<p:notes xmlns:a="http://schemas.openxmlformats.org/drawingml/2006/main" xmlns:r="http://schemas.openxmlformats.org/officeDocument/2006/relationships" xmlns:p="http://schemas.openxmlformats.org/presentationml/2006/main">
   <p:cSld>
     <p:spTree>
       <p:nvGrpSpPr>
@@ -919,7 +713,7 @@
         <p:nvSpPr>
           <p:cNvPr id="2" name="Slide Image Placeholder 1"/>
           <p:cNvSpPr>
-            <a:spLocks noGrp="1"/>
+            <a:spLocks noGrp="1" noRot="1" noChangeAspect="1"/>
           </p:cNvSpPr>
           <p:nvPr>
             <p:ph type="sldImg" idx="2"/>
@@ -934,7 +728,7 @@
             <a:spLocks noGrp="1"/>
           </p:cNvSpPr>
           <p:nvPr>
-            <p:ph type="body" idx="3" sz="quarter"/>
+            <p:ph type="body" sz="quarter" idx="3"/>
           </p:nvPr>
         </p:nvSpPr>
         <p:spPr/>
@@ -955,7 +749,7 @@
             <a:spLocks noGrp="1"/>
           </p:cNvSpPr>
           <p:nvPr>
-            <p:ph type="sldNum" idx="5" sz="quarter"/>
+            <p:ph type="sldNum" sz="quarter" idx="5"/>
           </p:nvPr>
         </p:nvSpPr>
         <p:spPr/>
@@ -969,7 +763,7 @@
 </file>
 
 <file path=ppt/notesSlides/notesSlide16.xml><?xml version="1.0" encoding="utf-8"?>
-<p:notes xmlns:a="http://schemas.openxmlformats.org/drawingml/2006/main" xmlns:p="http://schemas.openxmlformats.org/presentationml/2006/main" xmlns:r="http://schemas.openxmlformats.org/officeDocument/2006/relationships">
+<p:notes xmlns:a="http://schemas.openxmlformats.org/drawingml/2006/main" xmlns:r="http://schemas.openxmlformats.org/officeDocument/2006/relationships" xmlns:p="http://schemas.openxmlformats.org/presentationml/2006/main">
   <p:cSld>
     <p:spTree>
       <p:nvGrpSpPr>
@@ -989,7 +783,7 @@
         <p:nvSpPr>
           <p:cNvPr id="2" name="Slide Image Placeholder 1"/>
           <p:cNvSpPr>
-            <a:spLocks noGrp="1"/>
+            <a:spLocks noGrp="1" noRot="1" noChangeAspect="1"/>
           </p:cNvSpPr>
           <p:nvPr>
             <p:ph type="sldImg" idx="2"/>
@@ -1004,7 +798,7 @@
             <a:spLocks noGrp="1"/>
           </p:cNvSpPr>
           <p:nvPr>
-            <p:ph type="body" idx="3" sz="quarter"/>
+            <p:ph type="body" sz="quarter" idx="3"/>
           </p:nvPr>
         </p:nvSpPr>
         <p:spPr/>
@@ -1025,7 +819,7 @@
             <a:spLocks noGrp="1"/>
           </p:cNvSpPr>
           <p:nvPr>
-            <p:ph type="sldNum" idx="5" sz="quarter"/>
+            <p:ph type="sldNum" sz="quarter" idx="5"/>
           </p:nvPr>
         </p:nvSpPr>
         <p:spPr/>
@@ -1039,7 +833,7 @@
 </file>
 
 <file path=ppt/notesSlides/notesSlide17.xml><?xml version="1.0" encoding="utf-8"?>
-<p:notes xmlns:a="http://schemas.openxmlformats.org/drawingml/2006/main" xmlns:p="http://schemas.openxmlformats.org/presentationml/2006/main" xmlns:r="http://schemas.openxmlformats.org/officeDocument/2006/relationships">
+<p:notes xmlns:a="http://schemas.openxmlformats.org/drawingml/2006/main" xmlns:r="http://schemas.openxmlformats.org/officeDocument/2006/relationships" xmlns:p="http://schemas.openxmlformats.org/presentationml/2006/main">
   <p:cSld>
     <p:spTree>
       <p:nvGrpSpPr>
@@ -1059,7 +853,7 @@
         <p:nvSpPr>
           <p:cNvPr id="2" name="Slide Image Placeholder 1"/>
           <p:cNvSpPr>
-            <a:spLocks noGrp="1"/>
+            <a:spLocks noGrp="1" noRot="1" noChangeAspect="1"/>
           </p:cNvSpPr>
           <p:nvPr>
             <p:ph type="sldImg" idx="2"/>
@@ -1074,7 +868,7 @@
             <a:spLocks noGrp="1"/>
           </p:cNvSpPr>
           <p:nvPr>
-            <p:ph type="body" idx="3" sz="quarter"/>
+            <p:ph type="body" sz="quarter" idx="3"/>
           </p:nvPr>
         </p:nvSpPr>
         <p:spPr/>
@@ -1095,7 +889,7 @@
             <a:spLocks noGrp="1"/>
           </p:cNvSpPr>
           <p:nvPr>
-            <p:ph type="sldNum" idx="5" sz="quarter"/>
+            <p:ph type="sldNum" sz="quarter" idx="5"/>
           </p:nvPr>
         </p:nvSpPr>
         <p:spPr/>
@@ -1109,7 +903,7 @@
 </file>
 
 <file path=ppt/notesSlides/notesSlide18.xml><?xml version="1.0" encoding="utf-8"?>
-<p:notes xmlns:a="http://schemas.openxmlformats.org/drawingml/2006/main" xmlns:p="http://schemas.openxmlformats.org/presentationml/2006/main" xmlns:r="http://schemas.openxmlformats.org/officeDocument/2006/relationships">
+<p:notes xmlns:a="http://schemas.openxmlformats.org/drawingml/2006/main" xmlns:r="http://schemas.openxmlformats.org/officeDocument/2006/relationships" xmlns:p="http://schemas.openxmlformats.org/presentationml/2006/main">
   <p:cSld>
     <p:spTree>
       <p:nvGrpSpPr>
@@ -1129,7 +923,7 @@
         <p:nvSpPr>
           <p:cNvPr id="2" name="Slide Image Placeholder 1"/>
           <p:cNvSpPr>
-            <a:spLocks noGrp="1"/>
+            <a:spLocks noGrp="1" noRot="1" noChangeAspect="1"/>
           </p:cNvSpPr>
           <p:nvPr>
             <p:ph type="sldImg" idx="2"/>
@@ -1144,7 +938,7 @@
             <a:spLocks noGrp="1"/>
           </p:cNvSpPr>
           <p:nvPr>
-            <p:ph type="body" idx="3" sz="quarter"/>
+            <p:ph type="body" sz="quarter" idx="3"/>
           </p:nvPr>
         </p:nvSpPr>
         <p:spPr/>
@@ -1165,7 +959,7 @@
             <a:spLocks noGrp="1"/>
           </p:cNvSpPr>
           <p:nvPr>
-            <p:ph type="sldNum" idx="5" sz="quarter"/>
+            <p:ph type="sldNum" sz="quarter" idx="5"/>
           </p:nvPr>
         </p:nvSpPr>
         <p:spPr/>
@@ -1179,7 +973,7 @@
 </file>
 
 <file path=ppt/notesSlides/notesSlide19.xml><?xml version="1.0" encoding="utf-8"?>
-<p:notes xmlns:a="http://schemas.openxmlformats.org/drawingml/2006/main" xmlns:p="http://schemas.openxmlformats.org/presentationml/2006/main" xmlns:r="http://schemas.openxmlformats.org/officeDocument/2006/relationships">
+<p:notes xmlns:a="http://schemas.openxmlformats.org/drawingml/2006/main" xmlns:r="http://schemas.openxmlformats.org/officeDocument/2006/relationships" xmlns:p="http://schemas.openxmlformats.org/presentationml/2006/main">
   <p:cSld>
     <p:spTree>
       <p:nvGrpSpPr>
@@ -1199,7 +993,7 @@
         <p:nvSpPr>
           <p:cNvPr id="2" name="Slide Image Placeholder 1"/>
           <p:cNvSpPr>
-            <a:spLocks noGrp="1"/>
+            <a:spLocks noGrp="1" noRot="1" noChangeAspect="1"/>
           </p:cNvSpPr>
           <p:nvPr>
             <p:ph type="sldImg" idx="2"/>
@@ -1214,7 +1008,7 @@
             <a:spLocks noGrp="1"/>
           </p:cNvSpPr>
           <p:nvPr>
-            <p:ph type="body" idx="3" sz="quarter"/>
+            <p:ph type="body" sz="quarter" idx="3"/>
           </p:nvPr>
         </p:nvSpPr>
         <p:spPr/>
@@ -1235,7 +1029,7 @@
             <a:spLocks noGrp="1"/>
           </p:cNvSpPr>
           <p:nvPr>
-            <p:ph type="sldNum" idx="5" sz="quarter"/>
+            <p:ph type="sldNum" sz="quarter" idx="5"/>
           </p:nvPr>
         </p:nvSpPr>
         <p:spPr/>
@@ -1249,7 +1043,7 @@
 </file>
 
 <file path=ppt/notesSlides/notesSlide2.xml><?xml version="1.0" encoding="utf-8"?>
-<p:notes xmlns:a="http://schemas.openxmlformats.org/drawingml/2006/main" xmlns:p="http://schemas.openxmlformats.org/presentationml/2006/main" xmlns:r="http://schemas.openxmlformats.org/officeDocument/2006/relationships">
+<p:notes xmlns:a="http://schemas.openxmlformats.org/drawingml/2006/main" xmlns:r="http://schemas.openxmlformats.org/officeDocument/2006/relationships" xmlns:p="http://schemas.openxmlformats.org/presentationml/2006/main">
   <p:cSld>
     <p:spTree>
       <p:nvGrpSpPr>
@@ -1269,7 +1063,7 @@
         <p:nvSpPr>
           <p:cNvPr id="2" name="Slide Image Placeholder 1"/>
           <p:cNvSpPr>
-            <a:spLocks noGrp="1"/>
+            <a:spLocks noGrp="1" noRot="1" noChangeAspect="1"/>
           </p:cNvSpPr>
           <p:nvPr>
             <p:ph type="sldImg" idx="2"/>
@@ -1284,7 +1078,7 @@
             <a:spLocks noGrp="1"/>
           </p:cNvSpPr>
           <p:nvPr>
-            <p:ph type="body" idx="3" sz="quarter"/>
+            <p:ph type="body" sz="quarter" idx="3"/>
           </p:nvPr>
         </p:nvSpPr>
         <p:spPr/>
@@ -1305,7 +1099,7 @@
             <a:spLocks noGrp="1"/>
           </p:cNvSpPr>
           <p:nvPr>
-            <p:ph type="sldNum" idx="5" sz="quarter"/>
+            <p:ph type="sldNum" sz="quarter" idx="5"/>
           </p:nvPr>
         </p:nvSpPr>
         <p:spPr/>
@@ -1319,7 +1113,7 @@
 </file>
 
 <file path=ppt/notesSlides/notesSlide20.xml><?xml version="1.0" encoding="utf-8"?>
-<p:notes xmlns:a="http://schemas.openxmlformats.org/drawingml/2006/main" xmlns:p="http://schemas.openxmlformats.org/presentationml/2006/main" xmlns:r="http://schemas.openxmlformats.org/officeDocument/2006/relationships">
+<p:notes xmlns:a="http://schemas.openxmlformats.org/drawingml/2006/main" xmlns:r="http://schemas.openxmlformats.org/officeDocument/2006/relationships" xmlns:p="http://schemas.openxmlformats.org/presentationml/2006/main">
   <p:cSld>
     <p:spTree>
       <p:nvGrpSpPr>
@@ -1339,7 +1133,7 @@
         <p:nvSpPr>
           <p:cNvPr id="2" name="Slide Image Placeholder 1"/>
           <p:cNvSpPr>
-            <a:spLocks noGrp="1"/>
+            <a:spLocks noGrp="1" noRot="1" noChangeAspect="1"/>
           </p:cNvSpPr>
           <p:nvPr>
             <p:ph type="sldImg" idx="2"/>
@@ -1354,7 +1148,7 @@
             <a:spLocks noGrp="1"/>
           </p:cNvSpPr>
           <p:nvPr>
-            <p:ph type="body" idx="3" sz="quarter"/>
+            <p:ph type="body" sz="quarter" idx="3"/>
           </p:nvPr>
         </p:nvSpPr>
         <p:spPr/>
@@ -1375,7 +1169,7 @@
             <a:spLocks noGrp="1"/>
           </p:cNvSpPr>
           <p:nvPr>
-            <p:ph type="sldNum" idx="5" sz="quarter"/>
+            <p:ph type="sldNum" sz="quarter" idx="5"/>
           </p:nvPr>
         </p:nvSpPr>
         <p:spPr/>
@@ -1389,7 +1183,7 @@
 </file>
 
 <file path=ppt/notesSlides/notesSlide21.xml><?xml version="1.0" encoding="utf-8"?>
-<p:notes xmlns:a="http://schemas.openxmlformats.org/drawingml/2006/main" xmlns:p="http://schemas.openxmlformats.org/presentationml/2006/main" xmlns:r="http://schemas.openxmlformats.org/officeDocument/2006/relationships">
+<p:notes xmlns:a="http://schemas.openxmlformats.org/drawingml/2006/main" xmlns:r="http://schemas.openxmlformats.org/officeDocument/2006/relationships" xmlns:p="http://schemas.openxmlformats.org/presentationml/2006/main">
   <p:cSld>
     <p:spTree>
       <p:nvGrpSpPr>
@@ -1409,7 +1203,7 @@
         <p:nvSpPr>
           <p:cNvPr id="2" name="Slide Image Placeholder 1"/>
           <p:cNvSpPr>
-            <a:spLocks noGrp="1"/>
+            <a:spLocks noGrp="1" noRot="1" noChangeAspect="1"/>
           </p:cNvSpPr>
           <p:nvPr>
             <p:ph type="sldImg" idx="2"/>
@@ -1424,7 +1218,7 @@
             <a:spLocks noGrp="1"/>
           </p:cNvSpPr>
           <p:nvPr>
-            <p:ph type="body" idx="3" sz="quarter"/>
+            <p:ph type="body" sz="quarter" idx="3"/>
           </p:nvPr>
         </p:nvSpPr>
         <p:spPr/>
@@ -1445,7 +1239,7 @@
             <a:spLocks noGrp="1"/>
           </p:cNvSpPr>
           <p:nvPr>
-            <p:ph type="sldNum" idx="5" sz="quarter"/>
+            <p:ph type="sldNum" sz="quarter" idx="5"/>
           </p:nvPr>
         </p:nvSpPr>
         <p:spPr/>
@@ -1459,7 +1253,7 @@
 </file>
 
 <file path=ppt/notesSlides/notesSlide22.xml><?xml version="1.0" encoding="utf-8"?>
-<p:notes xmlns:a="http://schemas.openxmlformats.org/drawingml/2006/main" xmlns:p="http://schemas.openxmlformats.org/presentationml/2006/main" xmlns:r="http://schemas.openxmlformats.org/officeDocument/2006/relationships">
+<p:notes xmlns:a="http://schemas.openxmlformats.org/drawingml/2006/main" xmlns:r="http://schemas.openxmlformats.org/officeDocument/2006/relationships" xmlns:p="http://schemas.openxmlformats.org/presentationml/2006/main">
   <p:cSld>
     <p:spTree>
       <p:nvGrpSpPr>
@@ -1479,7 +1273,7 @@
         <p:nvSpPr>
           <p:cNvPr id="2" name="Slide Image Placeholder 1"/>
           <p:cNvSpPr>
-            <a:spLocks noGrp="1"/>
+            <a:spLocks noGrp="1" noRot="1" noChangeAspect="1"/>
           </p:cNvSpPr>
           <p:nvPr>
             <p:ph type="sldImg" idx="2"/>
@@ -1494,7 +1288,7 @@
             <a:spLocks noGrp="1"/>
           </p:cNvSpPr>
           <p:nvPr>
-            <p:ph type="body" idx="3" sz="quarter"/>
+            <p:ph type="body" sz="quarter" idx="3"/>
           </p:nvPr>
         </p:nvSpPr>
         <p:spPr/>
@@ -1515,7 +1309,7 @@
             <a:spLocks noGrp="1"/>
           </p:cNvSpPr>
           <p:nvPr>
-            <p:ph type="sldNum" idx="5" sz="quarter"/>
+            <p:ph type="sldNum" sz="quarter" idx="5"/>
           </p:nvPr>
         </p:nvSpPr>
         <p:spPr/>
@@ -1529,7 +1323,7 @@
 </file>
 
 <file path=ppt/notesSlides/notesSlide3.xml><?xml version="1.0" encoding="utf-8"?>
-<p:notes xmlns:a="http://schemas.openxmlformats.org/drawingml/2006/main" xmlns:p="http://schemas.openxmlformats.org/presentationml/2006/main" xmlns:r="http://schemas.openxmlformats.org/officeDocument/2006/relationships">
+<p:notes xmlns:a="http://schemas.openxmlformats.org/drawingml/2006/main" xmlns:r="http://schemas.openxmlformats.org/officeDocument/2006/relationships" xmlns:p="http://schemas.openxmlformats.org/presentationml/2006/main">
   <p:cSld>
     <p:spTree>
       <p:nvGrpSpPr>
@@ -1549,7 +1343,7 @@
         <p:nvSpPr>
           <p:cNvPr id="2" name="Slide Image Placeholder 1"/>
           <p:cNvSpPr>
-            <a:spLocks noGrp="1"/>
+            <a:spLocks noGrp="1" noRot="1" noChangeAspect="1"/>
           </p:cNvSpPr>
           <p:nvPr>
             <p:ph type="sldImg" idx="2"/>
@@ -1564,7 +1358,7 @@
             <a:spLocks noGrp="1"/>
           </p:cNvSpPr>
           <p:nvPr>
-            <p:ph type="body" idx="3" sz="quarter"/>
+            <p:ph type="body" sz="quarter" idx="3"/>
           </p:nvPr>
         </p:nvSpPr>
         <p:spPr/>
@@ -1585,7 +1379,7 @@
             <a:spLocks noGrp="1"/>
           </p:cNvSpPr>
           <p:nvPr>
-            <p:ph type="sldNum" idx="5" sz="quarter"/>
+            <p:ph type="sldNum" sz="quarter" idx="5"/>
           </p:nvPr>
         </p:nvSpPr>
         <p:spPr/>
@@ -1599,7 +1393,7 @@
 </file>
 
 <file path=ppt/notesSlides/notesSlide4.xml><?xml version="1.0" encoding="utf-8"?>
-<p:notes xmlns:a="http://schemas.openxmlformats.org/drawingml/2006/main" xmlns:p="http://schemas.openxmlformats.org/presentationml/2006/main" xmlns:r="http://schemas.openxmlformats.org/officeDocument/2006/relationships">
+<p:notes xmlns:a="http://schemas.openxmlformats.org/drawingml/2006/main" xmlns:r="http://schemas.openxmlformats.org/officeDocument/2006/relationships" xmlns:p="http://schemas.openxmlformats.org/presentationml/2006/main">
   <p:cSld>
     <p:spTree>
       <p:nvGrpSpPr>
@@ -1619,7 +1413,7 @@
         <p:nvSpPr>
           <p:cNvPr id="2" name="Slide Image Placeholder 1"/>
           <p:cNvSpPr>
-            <a:spLocks noGrp="1"/>
+            <a:spLocks noGrp="1" noRot="1" noChangeAspect="1"/>
           </p:cNvSpPr>
           <p:nvPr>
             <p:ph type="sldImg" idx="2"/>
@@ -1634,7 +1428,7 @@
             <a:spLocks noGrp="1"/>
           </p:cNvSpPr>
           <p:nvPr>
-            <p:ph type="body" idx="3" sz="quarter"/>
+            <p:ph type="body" sz="quarter" idx="3"/>
           </p:nvPr>
         </p:nvSpPr>
         <p:spPr/>
@@ -1655,7 +1449,7 @@
             <a:spLocks noGrp="1"/>
           </p:cNvSpPr>
           <p:nvPr>
-            <p:ph type="sldNum" idx="5" sz="quarter"/>
+            <p:ph type="sldNum" sz="quarter" idx="5"/>
           </p:nvPr>
         </p:nvSpPr>
         <p:spPr/>
@@ -1669,7 +1463,7 @@
 </file>
 
 <file path=ppt/notesSlides/notesSlide5.xml><?xml version="1.0" encoding="utf-8"?>
-<p:notes xmlns:a="http://schemas.openxmlformats.org/drawingml/2006/main" xmlns:p="http://schemas.openxmlformats.org/presentationml/2006/main" xmlns:r="http://schemas.openxmlformats.org/officeDocument/2006/relationships">
+<p:notes xmlns:a="http://schemas.openxmlformats.org/drawingml/2006/main" xmlns:r="http://schemas.openxmlformats.org/officeDocument/2006/relationships" xmlns:p="http://schemas.openxmlformats.org/presentationml/2006/main">
   <p:cSld>
     <p:spTree>
       <p:nvGrpSpPr>
@@ -1689,7 +1483,7 @@
         <p:nvSpPr>
           <p:cNvPr id="2" name="Slide Image Placeholder 1"/>
           <p:cNvSpPr>
-            <a:spLocks noGrp="1"/>
+            <a:spLocks noGrp="1" noRot="1" noChangeAspect="1"/>
           </p:cNvSpPr>
           <p:nvPr>
             <p:ph type="sldImg" idx="2"/>
@@ -1704,7 +1498,7 @@
             <a:spLocks noGrp="1"/>
           </p:cNvSpPr>
           <p:nvPr>
-            <p:ph type="body" idx="3" sz="quarter"/>
+            <p:ph type="body" sz="quarter" idx="3"/>
           </p:nvPr>
         </p:nvSpPr>
         <p:spPr/>
@@ -1725,7 +1519,7 @@
             <a:spLocks noGrp="1"/>
           </p:cNvSpPr>
           <p:nvPr>
-            <p:ph type="sldNum" idx="5" sz="quarter"/>
+            <p:ph type="sldNum" sz="quarter" idx="5"/>
           </p:nvPr>
         </p:nvSpPr>
         <p:spPr/>
@@ -1739,7 +1533,7 @@
 </file>
 
 <file path=ppt/notesSlides/notesSlide6.xml><?xml version="1.0" encoding="utf-8"?>
-<p:notes xmlns:a="http://schemas.openxmlformats.org/drawingml/2006/main" xmlns:p="http://schemas.openxmlformats.org/presentationml/2006/main" xmlns:r="http://schemas.openxmlformats.org/officeDocument/2006/relationships">
+<p:notes xmlns:a="http://schemas.openxmlformats.org/drawingml/2006/main" xmlns:r="http://schemas.openxmlformats.org/officeDocument/2006/relationships" xmlns:p="http://schemas.openxmlformats.org/presentationml/2006/main">
   <p:cSld>
     <p:spTree>
       <p:nvGrpSpPr>
@@ -1759,7 +1553,7 @@
         <p:nvSpPr>
           <p:cNvPr id="2" name="Slide Image Placeholder 1"/>
           <p:cNvSpPr>
-            <a:spLocks noGrp="1"/>
+            <a:spLocks noGrp="1" noRot="1" noChangeAspect="1"/>
           </p:cNvSpPr>
           <p:nvPr>
             <p:ph type="sldImg" idx="2"/>
@@ -1774,7 +1568,7 @@
             <a:spLocks noGrp="1"/>
           </p:cNvSpPr>
           <p:nvPr>
-            <p:ph type="body" idx="3" sz="quarter"/>
+            <p:ph type="body" sz="quarter" idx="3"/>
           </p:nvPr>
         </p:nvSpPr>
         <p:spPr/>
@@ -1795,7 +1589,7 @@
             <a:spLocks noGrp="1"/>
           </p:cNvSpPr>
           <p:nvPr>
-            <p:ph type="sldNum" idx="5" sz="quarter"/>
+            <p:ph type="sldNum" sz="quarter" idx="5"/>
           </p:nvPr>
         </p:nvSpPr>
         <p:spPr/>
@@ -1809,7 +1603,7 @@
 </file>
 
 <file path=ppt/notesSlides/notesSlide7.xml><?xml version="1.0" encoding="utf-8"?>
-<p:notes xmlns:a="http://schemas.openxmlformats.org/drawingml/2006/main" xmlns:p="http://schemas.openxmlformats.org/presentationml/2006/main" xmlns:r="http://schemas.openxmlformats.org/officeDocument/2006/relationships">
+<p:notes xmlns:a="http://schemas.openxmlformats.org/drawingml/2006/main" xmlns:r="http://schemas.openxmlformats.org/officeDocument/2006/relationships" xmlns:p="http://schemas.openxmlformats.org/presentationml/2006/main">
   <p:cSld>
     <p:spTree>
       <p:nvGrpSpPr>
@@ -1829,7 +1623,7 @@
         <p:nvSpPr>
           <p:cNvPr id="2" name="Slide Image Placeholder 1"/>
           <p:cNvSpPr>
-            <a:spLocks noGrp="1"/>
+            <a:spLocks noGrp="1" noRot="1" noChangeAspect="1"/>
           </p:cNvSpPr>
           <p:nvPr>
             <p:ph type="sldImg" idx="2"/>
@@ -1844,7 +1638,7 @@
             <a:spLocks noGrp="1"/>
           </p:cNvSpPr>
           <p:nvPr>
-            <p:ph type="body" idx="3" sz="quarter"/>
+            <p:ph type="body" sz="quarter" idx="3"/>
           </p:nvPr>
         </p:nvSpPr>
         <p:spPr/>
@@ -1865,7 +1659,7 @@
             <a:spLocks noGrp="1"/>
           </p:cNvSpPr>
           <p:nvPr>
-            <p:ph type="sldNum" idx="5" sz="quarter"/>
+            <p:ph type="sldNum" sz="quarter" idx="5"/>
           </p:nvPr>
         </p:nvSpPr>
         <p:spPr/>
@@ -1879,7 +1673,7 @@
 </file>
 
 <file path=ppt/notesSlides/notesSlide8.xml><?xml version="1.0" encoding="utf-8"?>
-<p:notes xmlns:a="http://schemas.openxmlformats.org/drawingml/2006/main" xmlns:p="http://schemas.openxmlformats.org/presentationml/2006/main" xmlns:r="http://schemas.openxmlformats.org/officeDocument/2006/relationships">
+<p:notes xmlns:a="http://schemas.openxmlformats.org/drawingml/2006/main" xmlns:r="http://schemas.openxmlformats.org/officeDocument/2006/relationships" xmlns:p="http://schemas.openxmlformats.org/presentationml/2006/main">
   <p:cSld>
     <p:spTree>
       <p:nvGrpSpPr>
@@ -1899,7 +1693,7 @@
         <p:nvSpPr>
           <p:cNvPr id="2" name="Slide Image Placeholder 1"/>
           <p:cNvSpPr>
-            <a:spLocks noGrp="1"/>
+            <a:spLocks noGrp="1" noRot="1" noChangeAspect="1"/>
           </p:cNvSpPr>
           <p:nvPr>
             <p:ph type="sldImg" idx="2"/>
@@ -1914,7 +1708,7 @@
             <a:spLocks noGrp="1"/>
           </p:cNvSpPr>
           <p:nvPr>
-            <p:ph type="body" idx="3" sz="quarter"/>
+            <p:ph type="body" sz="quarter" idx="3"/>
           </p:nvPr>
         </p:nvSpPr>
         <p:spPr/>
@@ -1935,7 +1729,7 @@
             <a:spLocks noGrp="1"/>
           </p:cNvSpPr>
           <p:nvPr>
-            <p:ph type="sldNum" idx="5" sz="quarter"/>
+            <p:ph type="sldNum" sz="quarter" idx="5"/>
           </p:nvPr>
         </p:nvSpPr>
         <p:spPr/>
@@ -1949,7 +1743,7 @@
 </file>
 
 <file path=ppt/notesSlides/notesSlide9.xml><?xml version="1.0" encoding="utf-8"?>
-<p:notes xmlns:a="http://schemas.openxmlformats.org/drawingml/2006/main" xmlns:p="http://schemas.openxmlformats.org/presentationml/2006/main" xmlns:r="http://schemas.openxmlformats.org/officeDocument/2006/relationships">
+<p:notes xmlns:a="http://schemas.openxmlformats.org/drawingml/2006/main" xmlns:r="http://schemas.openxmlformats.org/officeDocument/2006/relationships" xmlns:p="http://schemas.openxmlformats.org/presentationml/2006/main">
   <p:cSld>
     <p:spTree>
       <p:nvGrpSpPr>
@@ -1969,7 +1763,7 @@
         <p:nvSpPr>
           <p:cNvPr id="2" name="Slide Image Placeholder 1"/>
           <p:cNvSpPr>
-            <a:spLocks noGrp="1"/>
+            <a:spLocks noGrp="1" noRot="1" noChangeAspect="1"/>
           </p:cNvSpPr>
           <p:nvPr>
             <p:ph type="sldImg" idx="2"/>
@@ -1984,7 +1778,7 @@
             <a:spLocks noGrp="1"/>
           </p:cNvSpPr>
           <p:nvPr>
-            <p:ph type="body" idx="3" sz="quarter"/>
+            <p:ph type="body" sz="quarter" idx="3"/>
           </p:nvPr>
         </p:nvSpPr>
         <p:spPr/>
@@ -2005,7 +1799,7 @@
             <a:spLocks noGrp="1"/>
           </p:cNvSpPr>
           <p:nvPr>
-            <p:ph type="sldNum" idx="5" sz="quarter"/>
+            <p:ph type="sldNum" sz="quarter" idx="5"/>
           </p:nvPr>
         </p:nvSpPr>
         <p:spPr/>
@@ -2056,10 +1850,9 @@
           <a:lstStyle/>
           <a:p>
             <a:r>
-              <a:rPr lang="en-US" smtClean="0"/>
+              <a:rPr lang="en-US"/>
               <a:t>Click to edit Master title style</a:t>
             </a:r>
-            <a:endParaRPr lang="en-US"/>
           </a:p>
         </p:txBody>
       </p:sp>
@@ -2175,10 +1968,9 @@
           </a:lstStyle>
           <a:p>
             <a:r>
-              <a:rPr lang="en-US" smtClean="0"/>
+              <a:rPr lang="en-US"/>
               <a:t>Click to edit Master subtitle style</a:t>
             </a:r>
-            <a:endParaRPr lang="en-US"/>
           </a:p>
         </p:txBody>
       </p:sp>
@@ -2199,7 +1991,7 @@
           <a:p>
             <a:fld id="{5BCAD085-E8A6-8845-BD4E-CB4CCA059FC4}" type="datetimeFigureOut">
               <a:rPr lang="en-US" smtClean="0"/>
-              <a:t>1/27/13</a:t>
+              <a:t>8/26/26</a:t>
             </a:fld>
             <a:endParaRPr lang="en-US"/>
           </a:p>
@@ -2293,10 +2085,9 @@
           <a:lstStyle/>
           <a:p>
             <a:r>
-              <a:rPr lang="en-US" smtClean="0"/>
+              <a:rPr lang="en-US"/>
               <a:t>Click to edit Master title style</a:t>
             </a:r>
-            <a:endParaRPr lang="en-US"/>
           </a:p>
         </p:txBody>
       </p:sp>
@@ -2317,38 +2108,37 @@
           <a:p>
             <a:pPr lvl="0"/>
             <a:r>
-              <a:rPr lang="en-US" smtClean="0"/>
+              <a:rPr lang="en-US"/>
               <a:t>Click to edit Master text styles</a:t>
             </a:r>
           </a:p>
           <a:p>
             <a:pPr lvl="1"/>
             <a:r>
-              <a:rPr lang="en-US" smtClean="0"/>
+              <a:rPr lang="en-US"/>
               <a:t>Second level</a:t>
             </a:r>
           </a:p>
           <a:p>
             <a:pPr lvl="2"/>
             <a:r>
-              <a:rPr lang="en-US" smtClean="0"/>
+              <a:rPr lang="en-US"/>
               <a:t>Third level</a:t>
             </a:r>
           </a:p>
           <a:p>
             <a:pPr lvl="3"/>
             <a:r>
-              <a:rPr lang="en-US" smtClean="0"/>
+              <a:rPr lang="en-US"/>
               <a:t>Fourth level</a:t>
             </a:r>
           </a:p>
           <a:p>
             <a:pPr lvl="4"/>
             <a:r>
-              <a:rPr lang="en-US" smtClean="0"/>
+              <a:rPr lang="en-US"/>
               <a:t>Fifth level</a:t>
             </a:r>
-            <a:endParaRPr lang="en-US"/>
           </a:p>
         </p:txBody>
       </p:sp>
@@ -2369,7 +2159,7 @@
           <a:p>
             <a:fld id="{5BCAD085-E8A6-8845-BD4E-CB4CCA059FC4}" type="datetimeFigureOut">
               <a:rPr lang="en-US" smtClean="0"/>
-              <a:t>1/27/13</a:t>
+              <a:t>8/26/26</a:t>
             </a:fld>
             <a:endParaRPr lang="en-US"/>
           </a:p>
@@ -2468,10 +2258,9 @@
           <a:lstStyle/>
           <a:p>
             <a:r>
-              <a:rPr lang="en-US" smtClean="0"/>
+              <a:rPr lang="en-US"/>
               <a:t>Click to edit Master title style</a:t>
             </a:r>
-            <a:endParaRPr lang="en-US"/>
           </a:p>
         </p:txBody>
       </p:sp>
@@ -2497,38 +2286,37 @@
           <a:p>
             <a:pPr lvl="0"/>
             <a:r>
-              <a:rPr lang="en-US" smtClean="0"/>
+              <a:rPr lang="en-US"/>
               <a:t>Click to edit Master text styles</a:t>
             </a:r>
           </a:p>
           <a:p>
             <a:pPr lvl="1"/>
             <a:r>
-              <a:rPr lang="en-US" smtClean="0"/>
+              <a:rPr lang="en-US"/>
               <a:t>Second level</a:t>
             </a:r>
           </a:p>
           <a:p>
             <a:pPr lvl="2"/>
             <a:r>
-              <a:rPr lang="en-US" smtClean="0"/>
+              <a:rPr lang="en-US"/>
               <a:t>Third level</a:t>
             </a:r>
           </a:p>
           <a:p>
             <a:pPr lvl="3"/>
             <a:r>
-              <a:rPr lang="en-US" smtClean="0"/>
+              <a:rPr lang="en-US"/>
               <a:t>Fourth level</a:t>
             </a:r>
           </a:p>
           <a:p>
             <a:pPr lvl="4"/>
             <a:r>
-              <a:rPr lang="en-US" smtClean="0"/>
+              <a:rPr lang="en-US"/>
               <a:t>Fifth level</a:t>
             </a:r>
-            <a:endParaRPr lang="en-US"/>
           </a:p>
         </p:txBody>
       </p:sp>
@@ -2549,7 +2337,7 @@
           <a:p>
             <a:fld id="{5BCAD085-E8A6-8845-BD4E-CB4CCA059FC4}" type="datetimeFigureOut">
               <a:rPr lang="en-US" smtClean="0"/>
-              <a:t>1/27/13</a:t>
+              <a:t>8/26/26</a:t>
             </a:fld>
             <a:endParaRPr lang="en-US"/>
           </a:p>
@@ -2643,10 +2431,9 @@
           <a:lstStyle/>
           <a:p>
             <a:r>
-              <a:rPr lang="en-US" smtClean="0"/>
+              <a:rPr lang="en-US"/>
               <a:t>Click to edit Master title style</a:t>
             </a:r>
-            <a:endParaRPr lang="en-US"/>
           </a:p>
         </p:txBody>
       </p:sp>
@@ -2667,38 +2454,37 @@
           <a:p>
             <a:pPr lvl="0"/>
             <a:r>
-              <a:rPr lang="en-US" smtClean="0"/>
+              <a:rPr lang="en-US"/>
               <a:t>Click to edit Master text styles</a:t>
             </a:r>
           </a:p>
           <a:p>
             <a:pPr lvl="1"/>
             <a:r>
-              <a:rPr lang="en-US" smtClean="0"/>
+              <a:rPr lang="en-US"/>
               <a:t>Second level</a:t>
             </a:r>
           </a:p>
           <a:p>
             <a:pPr lvl="2"/>
             <a:r>
-              <a:rPr lang="en-US" smtClean="0"/>
+              <a:rPr lang="en-US"/>
               <a:t>Third level</a:t>
             </a:r>
           </a:p>
           <a:p>
             <a:pPr lvl="3"/>
             <a:r>
-              <a:rPr lang="en-US" smtClean="0"/>
+              <a:rPr lang="en-US"/>
               <a:t>Fourth level</a:t>
             </a:r>
           </a:p>
           <a:p>
             <a:pPr lvl="4"/>
             <a:r>
-              <a:rPr lang="en-US" smtClean="0"/>
+              <a:rPr lang="en-US"/>
               <a:t>Fifth level</a:t>
             </a:r>
-            <a:endParaRPr lang="en-US"/>
           </a:p>
         </p:txBody>
       </p:sp>
@@ -2719,7 +2505,7 @@
           <a:p>
             <a:fld id="{5BCAD085-E8A6-8845-BD4E-CB4CCA059FC4}" type="datetimeFigureOut">
               <a:rPr lang="en-US" smtClean="0"/>
-              <a:t>1/27/13</a:t>
+              <a:t>8/26/26</a:t>
             </a:fld>
             <a:endParaRPr lang="en-US"/>
           </a:p>
@@ -2822,10 +2608,9 @@
           </a:lstStyle>
           <a:p>
             <a:r>
-              <a:rPr lang="en-US" smtClean="0"/>
+              <a:rPr lang="en-US"/>
               <a:t>Click to edit Master title style</a:t>
             </a:r>
-            <a:endParaRPr lang="en-US"/>
           </a:p>
         </p:txBody>
       </p:sp>
@@ -2942,7 +2727,7 @@
           <a:p>
             <a:pPr lvl="0"/>
             <a:r>
-              <a:rPr lang="en-US" smtClean="0"/>
+              <a:rPr lang="en-US"/>
               <a:t>Click to edit Master text styles</a:t>
             </a:r>
           </a:p>
@@ -2965,7 +2750,7 @@
           <a:p>
             <a:fld id="{5BCAD085-E8A6-8845-BD4E-CB4CCA059FC4}" type="datetimeFigureOut">
               <a:rPr lang="en-US" smtClean="0"/>
-              <a:t>1/27/13</a:t>
+              <a:t>8/26/26</a:t>
             </a:fld>
             <a:endParaRPr lang="en-US"/>
           </a:p>
@@ -3059,10 +2844,9 @@
           <a:lstStyle/>
           <a:p>
             <a:r>
-              <a:rPr lang="en-US" smtClean="0"/>
+              <a:rPr lang="en-US"/>
               <a:t>Click to edit Master title style</a:t>
             </a:r>
-            <a:endParaRPr lang="en-US"/>
           </a:p>
         </p:txBody>
       </p:sp>
@@ -3116,38 +2900,37 @@
           <a:p>
             <a:pPr lvl="0"/>
             <a:r>
-              <a:rPr lang="en-US" smtClean="0"/>
+              <a:rPr lang="en-US"/>
               <a:t>Click to edit Master text styles</a:t>
             </a:r>
           </a:p>
           <a:p>
             <a:pPr lvl="1"/>
             <a:r>
-              <a:rPr lang="en-US" smtClean="0"/>
+              <a:rPr lang="en-US"/>
               <a:t>Second level</a:t>
             </a:r>
           </a:p>
           <a:p>
             <a:pPr lvl="2"/>
             <a:r>
-              <a:rPr lang="en-US" smtClean="0"/>
+              <a:rPr lang="en-US"/>
               <a:t>Third level</a:t>
             </a:r>
           </a:p>
           <a:p>
             <a:pPr lvl="3"/>
             <a:r>
-              <a:rPr lang="en-US" smtClean="0"/>
+              <a:rPr lang="en-US"/>
               <a:t>Fourth level</a:t>
             </a:r>
           </a:p>
           <a:p>
             <a:pPr lvl="4"/>
             <a:r>
-              <a:rPr lang="en-US" smtClean="0"/>
+              <a:rPr lang="en-US"/>
               <a:t>Fifth level</a:t>
             </a:r>
-            <a:endParaRPr lang="en-US"/>
           </a:p>
         </p:txBody>
       </p:sp>
@@ -3201,38 +2984,37 @@
           <a:p>
             <a:pPr lvl="0"/>
             <a:r>
-              <a:rPr lang="en-US" smtClean="0"/>
+              <a:rPr lang="en-US"/>
               <a:t>Click to edit Master text styles</a:t>
             </a:r>
           </a:p>
           <a:p>
             <a:pPr lvl="1"/>
             <a:r>
-              <a:rPr lang="en-US" smtClean="0"/>
+              <a:rPr lang="en-US"/>
               <a:t>Second level</a:t>
             </a:r>
           </a:p>
           <a:p>
             <a:pPr lvl="2"/>
             <a:r>
-              <a:rPr lang="en-US" smtClean="0"/>
+              <a:rPr lang="en-US"/>
               <a:t>Third level</a:t>
             </a:r>
           </a:p>
           <a:p>
             <a:pPr lvl="3"/>
             <a:r>
-              <a:rPr lang="en-US" smtClean="0"/>
+              <a:rPr lang="en-US"/>
               <a:t>Fourth level</a:t>
             </a:r>
           </a:p>
           <a:p>
             <a:pPr lvl="4"/>
             <a:r>
-              <a:rPr lang="en-US" smtClean="0"/>
+              <a:rPr lang="en-US"/>
               <a:t>Fifth level</a:t>
             </a:r>
-            <a:endParaRPr lang="en-US"/>
           </a:p>
         </p:txBody>
       </p:sp>
@@ -3253,7 +3035,7 @@
           <a:p>
             <a:fld id="{5BCAD085-E8A6-8845-BD4E-CB4CCA059FC4}" type="datetimeFigureOut">
               <a:rPr lang="en-US" smtClean="0"/>
-              <a:t>1/27/13</a:t>
+              <a:t>8/26/26</a:t>
             </a:fld>
             <a:endParaRPr lang="en-US"/>
           </a:p>
@@ -3351,10 +3133,9 @@
           </a:lstStyle>
           <a:p>
             <a:r>
-              <a:rPr lang="en-US" smtClean="0"/>
+              <a:rPr lang="en-US"/>
               <a:t>Click to edit Master title style</a:t>
             </a:r>
-            <a:endParaRPr lang="en-US"/>
           </a:p>
         </p:txBody>
       </p:sp>
@@ -3417,7 +3198,7 @@
           <a:p>
             <a:pPr lvl="0"/>
             <a:r>
-              <a:rPr lang="en-US" smtClean="0"/>
+              <a:rPr lang="en-US"/>
               <a:t>Click to edit Master text styles</a:t>
             </a:r>
           </a:p>
@@ -3473,38 +3254,37 @@
           <a:p>
             <a:pPr lvl="0"/>
             <a:r>
-              <a:rPr lang="en-US" smtClean="0"/>
+              <a:rPr lang="en-US"/>
               <a:t>Click to edit Master text styles</a:t>
             </a:r>
           </a:p>
           <a:p>
             <a:pPr lvl="1"/>
             <a:r>
-              <a:rPr lang="en-US" smtClean="0"/>
+              <a:rPr lang="en-US"/>
               <a:t>Second level</a:t>
             </a:r>
           </a:p>
           <a:p>
             <a:pPr lvl="2"/>
             <a:r>
-              <a:rPr lang="en-US" smtClean="0"/>
+              <a:rPr lang="en-US"/>
               <a:t>Third level</a:t>
             </a:r>
           </a:p>
           <a:p>
             <a:pPr lvl="3"/>
             <a:r>
-              <a:rPr lang="en-US" smtClean="0"/>
+              <a:rPr lang="en-US"/>
               <a:t>Fourth level</a:t>
             </a:r>
           </a:p>
           <a:p>
             <a:pPr lvl="4"/>
             <a:r>
-              <a:rPr lang="en-US" smtClean="0"/>
+              <a:rPr lang="en-US"/>
               <a:t>Fifth level</a:t>
             </a:r>
-            <a:endParaRPr lang="en-US"/>
           </a:p>
         </p:txBody>
       </p:sp>
@@ -3567,7 +3347,7 @@
           <a:p>
             <a:pPr lvl="0"/>
             <a:r>
-              <a:rPr lang="en-US" smtClean="0"/>
+              <a:rPr lang="en-US"/>
               <a:t>Click to edit Master text styles</a:t>
             </a:r>
           </a:p>
@@ -3623,38 +3403,37 @@
           <a:p>
             <a:pPr lvl="0"/>
             <a:r>
-              <a:rPr lang="en-US" smtClean="0"/>
+              <a:rPr lang="en-US"/>
               <a:t>Click to edit Master text styles</a:t>
             </a:r>
           </a:p>
           <a:p>
             <a:pPr lvl="1"/>
             <a:r>
-              <a:rPr lang="en-US" smtClean="0"/>
+              <a:rPr lang="en-US"/>
               <a:t>Second level</a:t>
             </a:r>
           </a:p>
           <a:p>
             <a:pPr lvl="2"/>
             <a:r>
-              <a:rPr lang="en-US" smtClean="0"/>
+              <a:rPr lang="en-US"/>
               <a:t>Third level</a:t>
             </a:r>
           </a:p>
           <a:p>
             <a:pPr lvl="3"/>
             <a:r>
-              <a:rPr lang="en-US" smtClean="0"/>
+              <a:rPr lang="en-US"/>
               <a:t>Fourth level</a:t>
             </a:r>
           </a:p>
           <a:p>
             <a:pPr lvl="4"/>
             <a:r>
-              <a:rPr lang="en-US" smtClean="0"/>
+              <a:rPr lang="en-US"/>
               <a:t>Fifth level</a:t>
             </a:r>
-            <a:endParaRPr lang="en-US"/>
           </a:p>
         </p:txBody>
       </p:sp>
@@ -3675,7 +3454,7 @@
           <a:p>
             <a:fld id="{5BCAD085-E8A6-8845-BD4E-CB4CCA059FC4}" type="datetimeFigureOut">
               <a:rPr lang="en-US" smtClean="0"/>
-              <a:t>1/27/13</a:t>
+              <a:t>8/26/26</a:t>
             </a:fld>
             <a:endParaRPr lang="en-US"/>
           </a:p>
@@ -3769,10 +3548,9 @@
           <a:lstStyle/>
           <a:p>
             <a:r>
-              <a:rPr lang="en-US" smtClean="0"/>
+              <a:rPr lang="en-US"/>
               <a:t>Click to edit Master title style</a:t>
             </a:r>
-            <a:endParaRPr lang="en-US"/>
           </a:p>
         </p:txBody>
       </p:sp>
@@ -3793,7 +3571,7 @@
           <a:p>
             <a:fld id="{5BCAD085-E8A6-8845-BD4E-CB4CCA059FC4}" type="datetimeFigureOut">
               <a:rPr lang="en-US" smtClean="0"/>
-              <a:t>1/27/13</a:t>
+              <a:t>8/26/26</a:t>
             </a:fld>
             <a:endParaRPr lang="en-US"/>
           </a:p>
@@ -3888,7 +3666,7 @@
           <a:p>
             <a:fld id="{5BCAD085-E8A6-8845-BD4E-CB4CCA059FC4}" type="datetimeFigureOut">
               <a:rPr lang="en-US" smtClean="0"/>
-              <a:t>1/27/13</a:t>
+              <a:t>8/26/26</a:t>
             </a:fld>
             <a:endParaRPr lang="en-US"/>
           </a:p>
@@ -3991,10 +3769,9 @@
           </a:lstStyle>
           <a:p>
             <a:r>
-              <a:rPr lang="en-US" smtClean="0"/>
+              <a:rPr lang="en-US"/>
               <a:t>Click to edit Master title style</a:t>
             </a:r>
-            <a:endParaRPr lang="en-US"/>
           </a:p>
         </p:txBody>
       </p:sp>
@@ -4048,38 +3825,37 @@
           <a:p>
             <a:pPr lvl="0"/>
             <a:r>
-              <a:rPr lang="en-US" smtClean="0"/>
+              <a:rPr lang="en-US"/>
               <a:t>Click to edit Master text styles</a:t>
             </a:r>
           </a:p>
           <a:p>
             <a:pPr lvl="1"/>
             <a:r>
-              <a:rPr lang="en-US" smtClean="0"/>
+              <a:rPr lang="en-US"/>
               <a:t>Second level</a:t>
             </a:r>
           </a:p>
           <a:p>
             <a:pPr lvl="2"/>
             <a:r>
-              <a:rPr lang="en-US" smtClean="0"/>
+              <a:rPr lang="en-US"/>
               <a:t>Third level</a:t>
             </a:r>
           </a:p>
           <a:p>
             <a:pPr lvl="3"/>
             <a:r>
-              <a:rPr lang="en-US" smtClean="0"/>
+              <a:rPr lang="en-US"/>
               <a:t>Fourth level</a:t>
             </a:r>
           </a:p>
           <a:p>
             <a:pPr lvl="4"/>
             <a:r>
-              <a:rPr lang="en-US" smtClean="0"/>
+              <a:rPr lang="en-US"/>
               <a:t>Fifth level</a:t>
             </a:r>
-            <a:endParaRPr lang="en-US"/>
           </a:p>
         </p:txBody>
       </p:sp>
@@ -4142,7 +3918,7 @@
           <a:p>
             <a:pPr lvl="0"/>
             <a:r>
-              <a:rPr lang="en-US" smtClean="0"/>
+              <a:rPr lang="en-US"/>
               <a:t>Click to edit Master text styles</a:t>
             </a:r>
           </a:p>
@@ -4165,7 +3941,7 @@
           <a:p>
             <a:fld id="{5BCAD085-E8A6-8845-BD4E-CB4CCA059FC4}" type="datetimeFigureOut">
               <a:rPr lang="en-US" smtClean="0"/>
-              <a:t>1/27/13</a:t>
+              <a:t>8/26/26</a:t>
             </a:fld>
             <a:endParaRPr lang="en-US"/>
           </a:p>
@@ -4268,10 +4044,9 @@
           </a:lstStyle>
           <a:p>
             <a:r>
-              <a:rPr lang="en-US" smtClean="0"/>
+              <a:rPr lang="en-US"/>
               <a:t>Click to edit Master title style</a:t>
             </a:r>
-            <a:endParaRPr lang="en-US"/>
           </a:p>
         </p:txBody>
       </p:sp>
@@ -4395,7 +4170,7 @@
           <a:p>
             <a:pPr lvl="0"/>
             <a:r>
-              <a:rPr lang="en-US" smtClean="0"/>
+              <a:rPr lang="en-US"/>
               <a:t>Click to edit Master text styles</a:t>
             </a:r>
           </a:p>
@@ -4418,7 +4193,7 @@
           <a:p>
             <a:fld id="{5BCAD085-E8A6-8845-BD4E-CB4CCA059FC4}" type="datetimeFigureOut">
               <a:rPr lang="en-US" smtClean="0"/>
-              <a:t>1/27/13</a:t>
+              <a:t>8/26/26</a:t>
             </a:fld>
             <a:endParaRPr lang="en-US"/>
           </a:p>
@@ -4527,10 +4302,9 @@
           <a:lstStyle/>
           <a:p>
             <a:r>
-              <a:rPr lang="en-US" smtClean="0"/>
+              <a:rPr lang="en-US"/>
               <a:t>Click to edit Master title style</a:t>
             </a:r>
-            <a:endParaRPr lang="en-US"/>
           </a:p>
         </p:txBody>
       </p:sp>
@@ -4561,38 +4335,37 @@
           <a:p>
             <a:pPr lvl="0"/>
             <a:r>
-              <a:rPr lang="en-US" smtClean="0"/>
+              <a:rPr lang="en-US"/>
               <a:t>Click to edit Master text styles</a:t>
             </a:r>
           </a:p>
           <a:p>
             <a:pPr lvl="1"/>
             <a:r>
-              <a:rPr lang="en-US" smtClean="0"/>
+              <a:rPr lang="en-US"/>
               <a:t>Second level</a:t>
             </a:r>
           </a:p>
           <a:p>
             <a:pPr lvl="2"/>
             <a:r>
-              <a:rPr lang="en-US" smtClean="0"/>
+              <a:rPr lang="en-US"/>
               <a:t>Third level</a:t>
             </a:r>
           </a:p>
           <a:p>
             <a:pPr lvl="3"/>
             <a:r>
-              <a:rPr lang="en-US" smtClean="0"/>
+              <a:rPr lang="en-US"/>
               <a:t>Fourth level</a:t>
             </a:r>
           </a:p>
           <a:p>
             <a:pPr lvl="4"/>
             <a:r>
-              <a:rPr lang="en-US" smtClean="0"/>
+              <a:rPr lang="en-US"/>
               <a:t>Fifth level</a:t>
             </a:r>
-            <a:endParaRPr lang="en-US"/>
           </a:p>
         </p:txBody>
       </p:sp>
@@ -4631,7 +4404,7 @@
           <a:p>
             <a:fld id="{5BCAD085-E8A6-8845-BD4E-CB4CCA059FC4}" type="datetimeFigureOut">
               <a:rPr lang="en-US" smtClean="0"/>
-              <a:t>1/27/13</a:t>
+              <a:t>8/26/26</a:t>
             </a:fld>
             <a:endParaRPr lang="en-US"/>
           </a:p>
@@ -4990,7 +4763,7 @@
 </file>
 
 <file path=ppt/slides/slide1.xml><?xml version="1.0" encoding="utf-8"?>
-<p:sld xmlns:a="http://schemas.openxmlformats.org/drawingml/2006/main" xmlns:p="http://schemas.openxmlformats.org/presentationml/2006/main" xmlns:r="http://schemas.openxmlformats.org/officeDocument/2006/relationships">
+<p:sld xmlns:a="http://schemas.openxmlformats.org/drawingml/2006/main" xmlns:r="http://schemas.openxmlformats.org/officeDocument/2006/relationships" xmlns:p="http://schemas.openxmlformats.org/presentationml/2006/main">
   <p:cSld>
     <p:bg>
       <p:bgPr>
@@ -5006,7 +4779,14 @@
         <p:cNvGrpSpPr/>
         <p:nvPr/>
       </p:nvGrpSpPr>
-      <p:grpSpPr/>
+      <p:grpSpPr>
+        <a:xfrm>
+          <a:off x="0" y="0"/>
+          <a:ext cx="0" cy="0"/>
+          <a:chOff x="0" y="0"/>
+          <a:chExt cx="0" cy="0"/>
+        </a:xfrm>
+      </p:grpSpPr>
       <p:sp>
         <p:nvSpPr>
           <p:cNvPr id="2" name="Rounded Rectangle 1"/>
@@ -5045,7 +4825,7 @@
           </a:fontRef>
         </p:style>
         <p:txBody>
-          <a:bodyPr rtlCol="0" anchor="ctr" lIns="54864" rIns="54864" tIns="9144" bIns="9144"/>
+          <a:bodyPr lIns="54864" tIns="9144" rIns="54864" bIns="9144" rtlCol="0" anchor="ctr"/>
           <a:lstStyle/>
           <a:p>
             <a:pPr algn="ctr"/>
@@ -5078,7 +4858,7 @@
           <a:noFill/>
         </p:spPr>
         <p:txBody>
-          <a:bodyPr wrap="square" lIns="36576" rIns="36576" tIns="36576" bIns="36576" anchor="t">
+          <a:bodyPr wrap="square" lIns="36576" tIns="36576" rIns="36576" bIns="36576" anchor="t">
             <a:spAutoFit/>
           </a:bodyPr>
           <a:lstStyle/>
@@ -5120,7 +4900,7 @@
           <a:noFill/>
         </p:spPr>
         <p:txBody>
-          <a:bodyPr wrap="square" lIns="36576" rIns="36576" tIns="36576" bIns="36576" anchor="t">
+          <a:bodyPr wrap="square" lIns="36576" tIns="36576" rIns="36576" bIns="36576" anchor="t">
             <a:spAutoFit/>
           </a:bodyPr>
           <a:lstStyle/>
@@ -5162,7 +4942,7 @@
           <a:noFill/>
         </p:spPr>
         <p:txBody>
-          <a:bodyPr wrap="square" lIns="36576" rIns="36576" tIns="36576" bIns="36576" anchor="t">
+          <a:bodyPr wrap="square" lIns="36576" tIns="36576" rIns="36576" bIns="36576" anchor="t">
             <a:spAutoFit/>
           </a:bodyPr>
           <a:lstStyle/>
@@ -5229,6 +5009,7 @@
           <a:lstStyle/>
           <a:p>
             <a:pPr algn="ctr"/>
+            <a:endParaRPr/>
           </a:p>
         </p:txBody>
       </p:sp>
@@ -5274,6 +5055,7 @@
           <a:lstStyle/>
           <a:p>
             <a:pPr algn="ctr"/>
+            <a:endParaRPr/>
           </a:p>
         </p:txBody>
       </p:sp>
@@ -5319,6 +5101,7 @@
           <a:lstStyle/>
           <a:p>
             <a:pPr algn="ctr"/>
+            <a:endParaRPr/>
           </a:p>
         </p:txBody>
       </p:sp>
@@ -5364,6 +5147,7 @@
           <a:lstStyle/>
           <a:p>
             <a:pPr algn="ctr"/>
+            <a:endParaRPr/>
           </a:p>
         </p:txBody>
       </p:sp>
@@ -5409,6 +5193,7 @@
           <a:lstStyle/>
           <a:p>
             <a:pPr algn="ctr"/>
+            <a:endParaRPr/>
           </a:p>
         </p:txBody>
       </p:sp>
@@ -5454,6 +5239,7 @@
           <a:lstStyle/>
           <a:p>
             <a:pPr algn="ctr"/>
+            <a:endParaRPr/>
           </a:p>
         </p:txBody>
       </p:sp>
@@ -5499,6 +5285,7 @@
           <a:lstStyle/>
           <a:p>
             <a:pPr algn="ctr"/>
+            <a:endParaRPr/>
           </a:p>
         </p:txBody>
       </p:sp>
@@ -5544,6 +5331,7 @@
           <a:lstStyle/>
           <a:p>
             <a:pPr algn="ctr"/>
+            <a:endParaRPr/>
           </a:p>
         </p:txBody>
       </p:sp>
@@ -5589,6 +5377,7 @@
           <a:lstStyle/>
           <a:p>
             <a:pPr algn="ctr"/>
+            <a:endParaRPr/>
           </a:p>
         </p:txBody>
       </p:sp>
@@ -5634,6 +5423,7 @@
           <a:lstStyle/>
           <a:p>
             <a:pPr algn="ctr"/>
+            <a:endParaRPr/>
           </a:p>
         </p:txBody>
       </p:sp>
@@ -5679,6 +5469,7 @@
           <a:lstStyle/>
           <a:p>
             <a:pPr algn="ctr"/>
+            <a:endParaRPr/>
           </a:p>
         </p:txBody>
       </p:sp>
@@ -5724,6 +5515,7 @@
           <a:lstStyle/>
           <a:p>
             <a:pPr algn="ctr"/>
+            <a:endParaRPr/>
           </a:p>
         </p:txBody>
       </p:sp>
@@ -5769,6 +5561,7 @@
           <a:lstStyle/>
           <a:p>
             <a:pPr algn="ctr"/>
+            <a:endParaRPr/>
           </a:p>
         </p:txBody>
       </p:sp>
@@ -5814,6 +5607,7 @@
           <a:lstStyle/>
           <a:p>
             <a:pPr algn="ctr"/>
+            <a:endParaRPr/>
           </a:p>
         </p:txBody>
       </p:sp>
@@ -5859,6 +5653,7 @@
           <a:lstStyle/>
           <a:p>
             <a:pPr algn="ctr"/>
+            <a:endParaRPr/>
           </a:p>
         </p:txBody>
       </p:sp>
@@ -5879,7 +5674,7 @@
           <a:noFill/>
         </p:spPr>
         <p:txBody>
-          <a:bodyPr wrap="square" lIns="36576" rIns="36576" tIns="36576" bIns="36576" anchor="t">
+          <a:bodyPr wrap="square" lIns="36576" tIns="36576" rIns="36576" bIns="36576" anchor="t">
             <a:spAutoFit/>
           </a:bodyPr>
           <a:lstStyle/>
@@ -6438,7 +6233,7 @@
 </file>
 
 <file path=ppt/slides/slide10.xml><?xml version="1.0" encoding="utf-8"?>
-<p:sld xmlns:a="http://schemas.openxmlformats.org/drawingml/2006/main" xmlns:p="http://schemas.openxmlformats.org/presentationml/2006/main" xmlns:r="http://schemas.openxmlformats.org/officeDocument/2006/relationships">
+<p:sld xmlns:a="http://schemas.openxmlformats.org/drawingml/2006/main" xmlns:r="http://schemas.openxmlformats.org/officeDocument/2006/relationships" xmlns:p="http://schemas.openxmlformats.org/presentationml/2006/main">
   <p:cSld>
     <p:bg>
       <p:bgPr>
@@ -6454,7 +6249,14 @@
         <p:cNvGrpSpPr/>
         <p:nvPr/>
       </p:nvGrpSpPr>
-      <p:grpSpPr/>
+      <p:grpSpPr>
+        <a:xfrm>
+          <a:off x="0" y="0"/>
+          <a:ext cx="0" cy="0"/>
+          <a:chOff x="0" y="0"/>
+          <a:chExt cx="0" cy="0"/>
+        </a:xfrm>
+      </p:grpSpPr>
       <p:sp>
         <p:nvSpPr>
           <p:cNvPr id="2" name="TextBox 1"/>
@@ -6472,7 +6274,7 @@
           <a:noFill/>
         </p:spPr>
         <p:txBody>
-          <a:bodyPr wrap="square" lIns="36576" rIns="36576" tIns="36576" bIns="36576" anchor="t">
+          <a:bodyPr wrap="square" lIns="36576" tIns="36576" rIns="36576" bIns="36576" anchor="t">
             <a:spAutoFit/>
           </a:bodyPr>
           <a:lstStyle/>
@@ -6514,7 +6316,7 @@
           <a:noFill/>
         </p:spPr>
         <p:txBody>
-          <a:bodyPr wrap="square" lIns="36576" rIns="36576" tIns="36576" bIns="36576" anchor="t">
+          <a:bodyPr wrap="square" lIns="36576" tIns="36576" rIns="36576" bIns="36576" anchor="t">
             <a:spAutoFit/>
           </a:bodyPr>
           <a:lstStyle/>
@@ -6556,7 +6358,7 @@
           <a:noFill/>
         </p:spPr>
         <p:txBody>
-          <a:bodyPr wrap="square" lIns="36576" rIns="36576" tIns="36576" bIns="36576" anchor="t">
+          <a:bodyPr wrap="square" lIns="36576" tIns="36576" rIns="36576" bIns="36576" anchor="t">
             <a:spAutoFit/>
           </a:bodyPr>
           <a:lstStyle/>
@@ -6598,7 +6400,7 @@
           <a:noFill/>
         </p:spPr>
         <p:txBody>
-          <a:bodyPr wrap="square" lIns="36576" rIns="36576" tIns="36576" bIns="36576" anchor="t">
+          <a:bodyPr wrap="square" lIns="36576" tIns="36576" rIns="36576" bIns="36576" anchor="t">
             <a:spAutoFit/>
           </a:bodyPr>
           <a:lstStyle/>
@@ -6665,6 +6467,7 @@
           <a:lstStyle/>
           <a:p>
             <a:pPr algn="ctr"/>
+            <a:endParaRPr/>
           </a:p>
         </p:txBody>
       </p:sp>
@@ -6706,7 +6509,7 @@
           </a:fontRef>
         </p:style>
         <p:txBody>
-          <a:bodyPr rtlCol="0" anchor="ctr" lIns="54864" rIns="54864" tIns="9144" bIns="9144"/>
+          <a:bodyPr lIns="54864" tIns="9144" rIns="54864" bIns="9144" rtlCol="0" anchor="ctr"/>
           <a:lstStyle/>
           <a:p>
             <a:pPr algn="ctr"/>
@@ -6739,7 +6542,7 @@
           <a:noFill/>
         </p:spPr>
         <p:txBody>
-          <a:bodyPr wrap="square" lIns="36576" rIns="36576" tIns="36576" bIns="36576" anchor="t">
+          <a:bodyPr wrap="square" lIns="36576" tIns="36576" rIns="36576" bIns="36576" anchor="t">
             <a:spAutoFit/>
           </a:bodyPr>
           <a:lstStyle/>
@@ -6781,7 +6584,7 @@
           <a:noFill/>
         </p:spPr>
         <p:txBody>
-          <a:bodyPr wrap="square" lIns="36576" rIns="36576" tIns="36576" bIns="36576" anchor="t">
+          <a:bodyPr wrap="square" lIns="36576" tIns="36576" rIns="36576" bIns="36576" anchor="t">
             <a:spAutoFit/>
           </a:bodyPr>
           <a:lstStyle/>
@@ -6848,6 +6651,7 @@
           <a:lstStyle/>
           <a:p>
             <a:pPr algn="ctr"/>
+            <a:endParaRPr/>
           </a:p>
         </p:txBody>
       </p:sp>
@@ -6893,6 +6697,7 @@
           <a:lstStyle/>
           <a:p>
             <a:pPr algn="ctr"/>
+            <a:endParaRPr/>
           </a:p>
         </p:txBody>
       </p:sp>
@@ -6938,6 +6743,7 @@
           <a:lstStyle/>
           <a:p>
             <a:pPr algn="ctr"/>
+            <a:endParaRPr/>
           </a:p>
         </p:txBody>
       </p:sp>
@@ -6983,6 +6789,7 @@
           <a:lstStyle/>
           <a:p>
             <a:pPr algn="ctr"/>
+            <a:endParaRPr/>
           </a:p>
         </p:txBody>
       </p:sp>
@@ -7028,6 +6835,7 @@
           <a:lstStyle/>
           <a:p>
             <a:pPr algn="ctr"/>
+            <a:endParaRPr/>
           </a:p>
         </p:txBody>
       </p:sp>
@@ -7073,6 +6881,7 @@
           <a:lstStyle/>
           <a:p>
             <a:pPr algn="ctr"/>
+            <a:endParaRPr/>
           </a:p>
         </p:txBody>
       </p:sp>
@@ -7093,7 +6902,7 @@
           <a:noFill/>
         </p:spPr>
         <p:txBody>
-          <a:bodyPr wrap="square" lIns="36576" rIns="36576" tIns="36576" bIns="36576" anchor="t">
+          <a:bodyPr wrap="square" lIns="36576" tIns="36576" rIns="36576" bIns="36576" anchor="t">
             <a:spAutoFit/>
           </a:bodyPr>
           <a:lstStyle/>
@@ -7135,7 +6944,7 @@
           <a:noFill/>
         </p:spPr>
         <p:txBody>
-          <a:bodyPr wrap="square" lIns="36576" rIns="36576" tIns="36576" bIns="36576" anchor="t">
+          <a:bodyPr wrap="square" lIns="36576" tIns="36576" rIns="36576" bIns="36576" anchor="t">
             <a:spAutoFit/>
           </a:bodyPr>
           <a:lstStyle/>
@@ -7202,6 +7011,7 @@
           <a:lstStyle/>
           <a:p>
             <a:pPr algn="ctr"/>
+            <a:endParaRPr/>
           </a:p>
         </p:txBody>
       </p:sp>
@@ -7243,7 +7053,7 @@
           </a:fontRef>
         </p:style>
         <p:txBody>
-          <a:bodyPr rtlCol="0" anchor="ctr" lIns="54864" rIns="54864" tIns="9144" bIns="9144"/>
+          <a:bodyPr lIns="54864" tIns="9144" rIns="54864" bIns="9144" rtlCol="0" anchor="ctr"/>
           <a:lstStyle/>
           <a:p>
             <a:pPr algn="ctr"/>
@@ -7276,7 +7086,7 @@
           <a:noFill/>
         </p:spPr>
         <p:txBody>
-          <a:bodyPr wrap="square" lIns="36576" rIns="36576" tIns="36576" bIns="36576" anchor="t">
+          <a:bodyPr wrap="square" lIns="36576" tIns="36576" rIns="36576" bIns="36576" anchor="t">
             <a:spAutoFit/>
           </a:bodyPr>
           <a:lstStyle/>
@@ -7318,7 +7128,7 @@
           <a:noFill/>
         </p:spPr>
         <p:txBody>
-          <a:bodyPr wrap="square" lIns="36576" rIns="36576" tIns="36576" bIns="36576" anchor="t">
+          <a:bodyPr wrap="square" lIns="36576" tIns="36576" rIns="36576" bIns="36576" anchor="t">
             <a:spAutoFit/>
           </a:bodyPr>
           <a:lstStyle/>
@@ -7385,6 +7195,7 @@
           <a:lstStyle/>
           <a:p>
             <a:pPr algn="ctr"/>
+            <a:endParaRPr/>
           </a:p>
         </p:txBody>
       </p:sp>
@@ -7405,7 +7216,7 @@
           <a:noFill/>
         </p:spPr>
         <p:txBody>
-          <a:bodyPr wrap="square" lIns="36576" rIns="36576" tIns="36576" bIns="36576" anchor="ctr">
+          <a:bodyPr wrap="square" lIns="36576" tIns="36576" rIns="36576" bIns="36576" anchor="ctr">
             <a:spAutoFit/>
           </a:bodyPr>
           <a:lstStyle/>
@@ -7472,6 +7283,7 @@
           <a:lstStyle/>
           <a:p>
             <a:pPr algn="ctr"/>
+            <a:endParaRPr/>
           </a:p>
         </p:txBody>
       </p:sp>
@@ -7492,7 +7304,7 @@
           <a:noFill/>
         </p:spPr>
         <p:txBody>
-          <a:bodyPr wrap="square" lIns="36576" rIns="36576" tIns="36576" bIns="36576" anchor="ctr">
+          <a:bodyPr wrap="square" lIns="36576" tIns="36576" rIns="36576" bIns="36576" anchor="ctr">
             <a:spAutoFit/>
           </a:bodyPr>
           <a:lstStyle/>
@@ -7559,6 +7371,7 @@
           <a:lstStyle/>
           <a:p>
             <a:pPr algn="ctr"/>
+            <a:endParaRPr/>
           </a:p>
         </p:txBody>
       </p:sp>
@@ -7579,7 +7392,7 @@
           <a:noFill/>
         </p:spPr>
         <p:txBody>
-          <a:bodyPr wrap="square" lIns="36576" rIns="36576" tIns="36576" bIns="36576" anchor="ctr">
+          <a:bodyPr wrap="square" lIns="36576" tIns="36576" rIns="36576" bIns="36576" anchor="ctr">
             <a:spAutoFit/>
           </a:bodyPr>
           <a:lstStyle/>
@@ -7644,6 +7457,7 @@
           <a:lstStyle/>
           <a:p>
             <a:pPr algn="ctr"/>
+            <a:endParaRPr/>
           </a:p>
         </p:txBody>
       </p:sp>
@@ -7664,7 +7478,7 @@
           <a:noFill/>
         </p:spPr>
         <p:txBody>
-          <a:bodyPr wrap="square" lIns="36576" rIns="36576" tIns="36576" bIns="36576" anchor="t">
+          <a:bodyPr wrap="square" lIns="36576" tIns="36576" rIns="36576" bIns="36576" anchor="t">
             <a:spAutoFit/>
           </a:bodyPr>
           <a:lstStyle/>
@@ -7706,7 +7520,7 @@
           <a:noFill/>
         </p:spPr>
         <p:txBody>
-          <a:bodyPr wrap="square" lIns="36576" rIns="36576" tIns="36576" bIns="36576" anchor="t">
+          <a:bodyPr wrap="square" lIns="36576" tIns="36576" rIns="36576" bIns="36576" anchor="t">
             <a:spAutoFit/>
           </a:bodyPr>
           <a:lstStyle/>
@@ -7769,7 +7583,7 @@
           </a:fontRef>
         </p:style>
         <p:txBody>
-          <a:bodyPr rtlCol="0" anchor="ctr" lIns="54864" rIns="54864" tIns="9144" bIns="9144"/>
+          <a:bodyPr lIns="54864" tIns="9144" rIns="54864" bIns="9144" rtlCol="0" anchor="ctr"/>
           <a:lstStyle/>
           <a:p>
             <a:pPr algn="ctr"/>
@@ -7837,7 +7651,7 @@
           <a:noFill/>
         </p:spPr>
         <p:txBody>
-          <a:bodyPr wrap="square" lIns="36576" rIns="36576" tIns="36576" bIns="36576" anchor="t">
+          <a:bodyPr wrap="square" lIns="36576" tIns="36576" rIns="36576" bIns="36576" anchor="t">
             <a:spAutoFit/>
           </a:bodyPr>
           <a:lstStyle/>
@@ -7871,7 +7685,7 @@
 </file>
 
 <file path=ppt/slides/slide11.xml><?xml version="1.0" encoding="utf-8"?>
-<p:sld xmlns:a="http://schemas.openxmlformats.org/drawingml/2006/main" xmlns:p="http://schemas.openxmlformats.org/presentationml/2006/main" xmlns:r="http://schemas.openxmlformats.org/officeDocument/2006/relationships">
+<p:sld xmlns:a="http://schemas.openxmlformats.org/drawingml/2006/main" xmlns:r="http://schemas.openxmlformats.org/officeDocument/2006/relationships" xmlns:p="http://schemas.openxmlformats.org/presentationml/2006/main">
   <p:cSld>
     <p:bg>
       <p:bgPr>
@@ -7887,7 +7701,14 @@
         <p:cNvGrpSpPr/>
         <p:nvPr/>
       </p:nvGrpSpPr>
-      <p:grpSpPr/>
+      <p:grpSpPr>
+        <a:xfrm>
+          <a:off x="0" y="0"/>
+          <a:ext cx="0" cy="0"/>
+          <a:chOff x="0" y="0"/>
+          <a:chExt cx="0" cy="0"/>
+        </a:xfrm>
+      </p:grpSpPr>
       <p:sp>
         <p:nvSpPr>
           <p:cNvPr id="2" name="TextBox 1"/>
@@ -7905,7 +7726,7 @@
           <a:noFill/>
         </p:spPr>
         <p:txBody>
-          <a:bodyPr wrap="square" lIns="36576" rIns="36576" tIns="36576" bIns="36576" anchor="t">
+          <a:bodyPr wrap="square" lIns="36576" tIns="36576" rIns="36576" bIns="36576" anchor="t">
             <a:spAutoFit/>
           </a:bodyPr>
           <a:lstStyle/>
@@ -7947,7 +7768,7 @@
           <a:noFill/>
         </p:spPr>
         <p:txBody>
-          <a:bodyPr wrap="square" lIns="36576" rIns="36576" tIns="36576" bIns="36576" anchor="t">
+          <a:bodyPr wrap="square" lIns="36576" tIns="36576" rIns="36576" bIns="36576" anchor="t">
             <a:spAutoFit/>
           </a:bodyPr>
           <a:lstStyle/>
@@ -7989,7 +7810,7 @@
           <a:noFill/>
         </p:spPr>
         <p:txBody>
-          <a:bodyPr wrap="square" lIns="36576" rIns="36576" tIns="36576" bIns="36576" anchor="t">
+          <a:bodyPr wrap="square" lIns="36576" tIns="36576" rIns="36576" bIns="36576" anchor="t">
             <a:spAutoFit/>
           </a:bodyPr>
           <a:lstStyle/>
@@ -8031,7 +7852,7 @@
           <a:noFill/>
         </p:spPr>
         <p:txBody>
-          <a:bodyPr wrap="square" lIns="36576" rIns="36576" tIns="36576" bIns="36576" anchor="t">
+          <a:bodyPr wrap="square" lIns="36576" tIns="36576" rIns="36576" bIns="36576" anchor="t">
             <a:spAutoFit/>
           </a:bodyPr>
           <a:lstStyle/>
@@ -8098,6 +7919,7 @@
           <a:lstStyle/>
           <a:p>
             <a:pPr algn="ctr"/>
+            <a:endParaRPr/>
           </a:p>
         </p:txBody>
       </p:sp>
@@ -8118,7 +7940,7 @@
           <a:noFill/>
         </p:spPr>
         <p:txBody>
-          <a:bodyPr wrap="square" lIns="36576" rIns="36576" tIns="36576" bIns="36576" anchor="t">
+          <a:bodyPr wrap="square" lIns="36576" tIns="36576" rIns="36576" bIns="36576" anchor="t">
             <a:spAutoFit/>
           </a:bodyPr>
           <a:lstStyle/>
@@ -8160,7 +7982,7 @@
           <a:noFill/>
         </p:spPr>
         <p:txBody>
-          <a:bodyPr wrap="square" lIns="36576" rIns="36576" tIns="36576" bIns="36576" anchor="t">
+          <a:bodyPr wrap="square" lIns="36576" tIns="36576" rIns="36576" bIns="36576" anchor="t">
             <a:spAutoFit/>
           </a:bodyPr>
           <a:lstStyle/>
@@ -8223,7 +8045,7 @@
           </a:fontRef>
         </p:style>
         <p:txBody>
-          <a:bodyPr rtlCol="0" anchor="ctr" lIns="54864" rIns="54864" tIns="9144" bIns="9144"/>
+          <a:bodyPr lIns="54864" tIns="9144" rIns="54864" bIns="9144" rtlCol="0" anchor="ctr"/>
           <a:lstStyle/>
           <a:p>
             <a:pPr algn="ctr"/>
@@ -8256,7 +8078,7 @@
           <a:noFill/>
         </p:spPr>
         <p:txBody>
-          <a:bodyPr wrap="square" lIns="36576" rIns="36576" tIns="36576" bIns="36576" anchor="t">
+          <a:bodyPr wrap="square" lIns="36576" tIns="36576" rIns="36576" bIns="36576" anchor="t">
             <a:spAutoFit/>
           </a:bodyPr>
           <a:lstStyle/>
@@ -8298,7 +8120,7 @@
           <a:noFill/>
         </p:spPr>
         <p:txBody>
-          <a:bodyPr wrap="square" lIns="36576" rIns="36576" tIns="36576" bIns="36576" anchor="t">
+          <a:bodyPr wrap="square" lIns="36576" tIns="36576" rIns="36576" bIns="36576" anchor="t">
             <a:spAutoFit/>
           </a:bodyPr>
           <a:lstStyle/>
@@ -8361,7 +8183,7 @@
           </a:fontRef>
         </p:style>
         <p:txBody>
-          <a:bodyPr rtlCol="0" anchor="ctr" lIns="54864" rIns="54864" tIns="9144" bIns="9144"/>
+          <a:bodyPr lIns="54864" tIns="9144" rIns="54864" bIns="9144" rtlCol="0" anchor="ctr"/>
           <a:lstStyle/>
           <a:p>
             <a:pPr algn="ctr"/>
@@ -8394,7 +8216,7 @@
           <a:noFill/>
         </p:spPr>
         <p:txBody>
-          <a:bodyPr wrap="square" lIns="36576" rIns="36576" tIns="36576" bIns="36576" anchor="t">
+          <a:bodyPr wrap="square" lIns="36576" tIns="36576" rIns="36576" bIns="36576" anchor="t">
             <a:spAutoFit/>
           </a:bodyPr>
           <a:lstStyle/>
@@ -8436,7 +8258,7 @@
           <a:noFill/>
         </p:spPr>
         <p:txBody>
-          <a:bodyPr wrap="square" lIns="36576" rIns="36576" tIns="36576" bIns="36576" anchor="t">
+          <a:bodyPr wrap="square" lIns="36576" tIns="36576" rIns="36576" bIns="36576" anchor="t">
             <a:spAutoFit/>
           </a:bodyPr>
           <a:lstStyle/>
@@ -8499,7 +8321,7 @@
           </a:fontRef>
         </p:style>
         <p:txBody>
-          <a:bodyPr rtlCol="0" anchor="ctr" lIns="54864" rIns="54864" tIns="9144" bIns="9144"/>
+          <a:bodyPr lIns="54864" tIns="9144" rIns="54864" bIns="9144" rtlCol="0" anchor="ctr"/>
           <a:lstStyle/>
           <a:p>
             <a:pPr algn="ctr"/>
@@ -8532,7 +8354,7 @@
           <a:noFill/>
         </p:spPr>
         <p:txBody>
-          <a:bodyPr wrap="square" lIns="36576" rIns="36576" tIns="36576" bIns="36576" anchor="t">
+          <a:bodyPr wrap="square" lIns="36576" tIns="36576" rIns="36576" bIns="36576" anchor="t">
             <a:spAutoFit/>
           </a:bodyPr>
           <a:lstStyle/>
@@ -8574,7 +8396,7 @@
           <a:noFill/>
         </p:spPr>
         <p:txBody>
-          <a:bodyPr wrap="square" lIns="36576" rIns="36576" tIns="36576" bIns="36576" anchor="t">
+          <a:bodyPr wrap="square" lIns="36576" tIns="36576" rIns="36576" bIns="36576" anchor="t">
             <a:spAutoFit/>
           </a:bodyPr>
           <a:lstStyle/>
@@ -8676,6 +8498,7 @@
           <a:lstStyle/>
           <a:p>
             <a:pPr algn="ctr"/>
+            <a:endParaRPr/>
           </a:p>
         </p:txBody>
       </p:sp>
@@ -8696,7 +8519,7 @@
           <a:noFill/>
         </p:spPr>
         <p:txBody>
-          <a:bodyPr wrap="square" lIns="36576" rIns="36576" tIns="36576" bIns="36576" anchor="ctr">
+          <a:bodyPr wrap="square" lIns="36576" tIns="36576" rIns="36576" bIns="36576" anchor="ctr">
             <a:spAutoFit/>
           </a:bodyPr>
           <a:lstStyle/>
@@ -8759,7 +8582,7 @@
           </a:fontRef>
         </p:style>
         <p:txBody>
-          <a:bodyPr rtlCol="0" anchor="ctr" lIns="54864" rIns="54864" tIns="9144" bIns="9144"/>
+          <a:bodyPr lIns="54864" tIns="9144" rIns="54864" bIns="9144" rtlCol="0" anchor="ctr"/>
           <a:lstStyle/>
           <a:p>
             <a:pPr algn="ctr"/>
@@ -8792,7 +8615,7 @@
           <a:noFill/>
         </p:spPr>
         <p:txBody>
-          <a:bodyPr wrap="square" lIns="36576" rIns="36576" tIns="36576" bIns="36576" anchor="t">
+          <a:bodyPr wrap="square" lIns="36576" tIns="36576" rIns="36576" bIns="36576" anchor="t">
             <a:spAutoFit/>
           </a:bodyPr>
           <a:lstStyle/>
@@ -8834,7 +8657,7 @@
           <a:noFill/>
         </p:spPr>
         <p:txBody>
-          <a:bodyPr wrap="square" lIns="36576" rIns="36576" tIns="36576" bIns="36576" anchor="t">
+          <a:bodyPr wrap="square" lIns="36576" tIns="36576" rIns="36576" bIns="36576" anchor="t">
             <a:spAutoFit/>
           </a:bodyPr>
           <a:lstStyle/>
@@ -8901,6 +8724,7 @@
           <a:lstStyle/>
           <a:p>
             <a:pPr algn="ctr"/>
+            <a:endParaRPr/>
           </a:p>
         </p:txBody>
       </p:sp>
@@ -8921,7 +8745,7 @@
           <a:noFill/>
         </p:spPr>
         <p:txBody>
-          <a:bodyPr wrap="square" lIns="36576" rIns="36576" tIns="36576" bIns="36576" anchor="ctr">
+          <a:bodyPr wrap="square" lIns="36576" tIns="36576" rIns="36576" bIns="36576" anchor="ctr">
             <a:spAutoFit/>
           </a:bodyPr>
           <a:lstStyle/>
@@ -8984,7 +8808,7 @@
           </a:fontRef>
         </p:style>
         <p:txBody>
-          <a:bodyPr rtlCol="0" anchor="ctr" lIns="54864" rIns="54864" tIns="9144" bIns="9144"/>
+          <a:bodyPr lIns="54864" tIns="9144" rIns="54864" bIns="9144" rtlCol="0" anchor="ctr"/>
           <a:lstStyle/>
           <a:p>
             <a:pPr algn="ctr"/>
@@ -9017,7 +8841,7 @@
           <a:noFill/>
         </p:spPr>
         <p:txBody>
-          <a:bodyPr wrap="square" lIns="36576" rIns="36576" tIns="36576" bIns="36576" anchor="t">
+          <a:bodyPr wrap="square" lIns="36576" tIns="36576" rIns="36576" bIns="36576" anchor="t">
             <a:spAutoFit/>
           </a:bodyPr>
           <a:lstStyle/>
@@ -9059,7 +8883,7 @@
           <a:noFill/>
         </p:spPr>
         <p:txBody>
-          <a:bodyPr wrap="square" lIns="36576" rIns="36576" tIns="36576" bIns="36576" anchor="t">
+          <a:bodyPr wrap="square" lIns="36576" tIns="36576" rIns="36576" bIns="36576" anchor="t">
             <a:spAutoFit/>
           </a:bodyPr>
           <a:lstStyle/>
@@ -9126,6 +8950,7 @@
           <a:lstStyle/>
           <a:p>
             <a:pPr algn="ctr"/>
+            <a:endParaRPr/>
           </a:p>
         </p:txBody>
       </p:sp>
@@ -9146,7 +8971,7 @@
           <a:noFill/>
         </p:spPr>
         <p:txBody>
-          <a:bodyPr wrap="square" lIns="36576" rIns="36576" tIns="36576" bIns="36576" anchor="ctr">
+          <a:bodyPr wrap="square" lIns="36576" tIns="36576" rIns="36576" bIns="36576" anchor="ctr">
             <a:spAutoFit/>
           </a:bodyPr>
           <a:lstStyle/>
@@ -9209,7 +9034,7 @@
           </a:fontRef>
         </p:style>
         <p:txBody>
-          <a:bodyPr rtlCol="0" anchor="ctr" lIns="54864" rIns="54864" tIns="9144" bIns="9144"/>
+          <a:bodyPr lIns="54864" tIns="9144" rIns="54864" bIns="9144" rtlCol="0" anchor="ctr"/>
           <a:lstStyle/>
           <a:p>
             <a:pPr algn="ctr"/>
@@ -9242,7 +9067,7 @@
           <a:noFill/>
         </p:spPr>
         <p:txBody>
-          <a:bodyPr wrap="square" lIns="36576" rIns="36576" tIns="36576" bIns="36576" anchor="t">
+          <a:bodyPr wrap="square" lIns="36576" tIns="36576" rIns="36576" bIns="36576" anchor="t">
             <a:spAutoFit/>
           </a:bodyPr>
           <a:lstStyle/>
@@ -9284,7 +9109,7 @@
           <a:noFill/>
         </p:spPr>
         <p:txBody>
-          <a:bodyPr wrap="square" lIns="36576" rIns="36576" tIns="36576" bIns="36576" anchor="t">
+          <a:bodyPr wrap="square" lIns="36576" tIns="36576" rIns="36576" bIns="36576" anchor="t">
             <a:spAutoFit/>
           </a:bodyPr>
           <a:lstStyle/>
@@ -9351,6 +9176,7 @@
           <a:lstStyle/>
           <a:p>
             <a:pPr algn="ctr"/>
+            <a:endParaRPr/>
           </a:p>
         </p:txBody>
       </p:sp>
@@ -9371,7 +9197,7 @@
           <a:noFill/>
         </p:spPr>
         <p:txBody>
-          <a:bodyPr wrap="square" lIns="36576" rIns="36576" tIns="36576" bIns="36576" anchor="ctr">
+          <a:bodyPr wrap="square" lIns="36576" tIns="36576" rIns="36576" bIns="36576" anchor="ctr">
             <a:spAutoFit/>
           </a:bodyPr>
           <a:lstStyle/>
@@ -9434,7 +9260,7 @@
           </a:fontRef>
         </p:style>
         <p:txBody>
-          <a:bodyPr rtlCol="0" anchor="ctr" lIns="54864" rIns="54864" tIns="9144" bIns="9144"/>
+          <a:bodyPr lIns="54864" tIns="9144" rIns="54864" bIns="9144" rtlCol="0" anchor="ctr"/>
           <a:lstStyle/>
           <a:p>
             <a:pPr algn="ctr"/>
@@ -9467,7 +9293,7 @@
           <a:noFill/>
         </p:spPr>
         <p:txBody>
-          <a:bodyPr wrap="square" lIns="36576" rIns="36576" tIns="36576" bIns="36576" anchor="t">
+          <a:bodyPr wrap="square" lIns="36576" tIns="36576" rIns="36576" bIns="36576" anchor="t">
             <a:spAutoFit/>
           </a:bodyPr>
           <a:lstStyle/>
@@ -9509,7 +9335,7 @@
           <a:noFill/>
         </p:spPr>
         <p:txBody>
-          <a:bodyPr wrap="square" lIns="36576" rIns="36576" tIns="36576" bIns="36576" anchor="t">
+          <a:bodyPr wrap="square" lIns="36576" tIns="36576" rIns="36576" bIns="36576" anchor="t">
             <a:spAutoFit/>
           </a:bodyPr>
           <a:lstStyle/>
@@ -9576,6 +9402,7 @@
           <a:lstStyle/>
           <a:p>
             <a:pPr algn="ctr"/>
+            <a:endParaRPr/>
           </a:p>
         </p:txBody>
       </p:sp>
@@ -9596,7 +9423,7 @@
           <a:noFill/>
         </p:spPr>
         <p:txBody>
-          <a:bodyPr wrap="square" lIns="36576" rIns="36576" tIns="36576" bIns="36576" anchor="ctr">
+          <a:bodyPr wrap="square" lIns="36576" tIns="36576" rIns="36576" bIns="36576" anchor="ctr">
             <a:spAutoFit/>
           </a:bodyPr>
           <a:lstStyle/>
@@ -9659,7 +9486,7 @@
           </a:fontRef>
         </p:style>
         <p:txBody>
-          <a:bodyPr rtlCol="0" anchor="ctr" lIns="54864" rIns="54864" tIns="9144" bIns="9144"/>
+          <a:bodyPr lIns="54864" tIns="9144" rIns="54864" bIns="9144" rtlCol="0" anchor="ctr"/>
           <a:lstStyle/>
           <a:p>
             <a:pPr algn="ctr"/>
@@ -9692,7 +9519,7 @@
           <a:noFill/>
         </p:spPr>
         <p:txBody>
-          <a:bodyPr wrap="square" lIns="36576" rIns="36576" tIns="36576" bIns="36576" anchor="t">
+          <a:bodyPr wrap="square" lIns="36576" tIns="36576" rIns="36576" bIns="36576" anchor="t">
             <a:spAutoFit/>
           </a:bodyPr>
           <a:lstStyle/>
@@ -9734,7 +9561,7 @@
           <a:noFill/>
         </p:spPr>
         <p:txBody>
-          <a:bodyPr wrap="square" lIns="36576" rIns="36576" tIns="36576" bIns="36576" anchor="t">
+          <a:bodyPr wrap="square" lIns="36576" tIns="36576" rIns="36576" bIns="36576" anchor="t">
             <a:spAutoFit/>
           </a:bodyPr>
           <a:lstStyle/>
@@ -9801,6 +9628,7 @@
           <a:lstStyle/>
           <a:p>
             <a:pPr algn="ctr"/>
+            <a:endParaRPr/>
           </a:p>
         </p:txBody>
       </p:sp>
@@ -9821,7 +9649,7 @@
           <a:noFill/>
         </p:spPr>
         <p:txBody>
-          <a:bodyPr wrap="square" lIns="36576" rIns="36576" tIns="36576" bIns="36576" anchor="t">
+          <a:bodyPr wrap="square" lIns="36576" tIns="36576" rIns="36576" bIns="36576" anchor="t">
             <a:spAutoFit/>
           </a:bodyPr>
           <a:lstStyle/>
@@ -9898,7 +9726,7 @@
           <a:noFill/>
         </p:spPr>
         <p:txBody>
-          <a:bodyPr wrap="square" lIns="36576" rIns="36576" tIns="36576" bIns="36576" anchor="t">
+          <a:bodyPr wrap="square" lIns="36576" tIns="36576" rIns="36576" bIns="36576" anchor="t">
             <a:spAutoFit/>
           </a:bodyPr>
           <a:lstStyle/>
@@ -9932,7 +9760,7 @@
 </file>
 
 <file path=ppt/slides/slide12.xml><?xml version="1.0" encoding="utf-8"?>
-<p:sld xmlns:a="http://schemas.openxmlformats.org/drawingml/2006/main" xmlns:p="http://schemas.openxmlformats.org/presentationml/2006/main" xmlns:r="http://schemas.openxmlformats.org/officeDocument/2006/relationships">
+<p:sld xmlns:a="http://schemas.openxmlformats.org/drawingml/2006/main" xmlns:r="http://schemas.openxmlformats.org/officeDocument/2006/relationships" xmlns:p="http://schemas.openxmlformats.org/presentationml/2006/main">
   <p:cSld>
     <p:bg>
       <p:bgPr>
@@ -9948,7 +9776,14 @@
         <p:cNvGrpSpPr/>
         <p:nvPr/>
       </p:nvGrpSpPr>
-      <p:grpSpPr/>
+      <p:grpSpPr>
+        <a:xfrm>
+          <a:off x="0" y="0"/>
+          <a:ext cx="0" cy="0"/>
+          <a:chOff x="0" y="0"/>
+          <a:chExt cx="0" cy="0"/>
+        </a:xfrm>
+      </p:grpSpPr>
       <p:sp>
         <p:nvSpPr>
           <p:cNvPr id="2" name="TextBox 1"/>
@@ -9966,7 +9801,7 @@
           <a:noFill/>
         </p:spPr>
         <p:txBody>
-          <a:bodyPr wrap="square" lIns="36576" rIns="36576" tIns="36576" bIns="36576" anchor="t">
+          <a:bodyPr wrap="square" lIns="36576" tIns="36576" rIns="36576" bIns="36576" anchor="t">
             <a:spAutoFit/>
           </a:bodyPr>
           <a:lstStyle/>
@@ -10008,7 +9843,7 @@
           <a:noFill/>
         </p:spPr>
         <p:txBody>
-          <a:bodyPr wrap="square" lIns="36576" rIns="36576" tIns="36576" bIns="36576" anchor="t">
+          <a:bodyPr wrap="square" lIns="36576" tIns="36576" rIns="36576" bIns="36576" anchor="t">
             <a:spAutoFit/>
           </a:bodyPr>
           <a:lstStyle/>
@@ -10050,7 +9885,7 @@
           <a:noFill/>
         </p:spPr>
         <p:txBody>
-          <a:bodyPr wrap="square" lIns="36576" rIns="36576" tIns="36576" bIns="36576" anchor="t">
+          <a:bodyPr wrap="square" lIns="36576" tIns="36576" rIns="36576" bIns="36576" anchor="t">
             <a:spAutoFit/>
           </a:bodyPr>
           <a:lstStyle/>
@@ -10117,6 +9952,7 @@
           <a:lstStyle/>
           <a:p>
             <a:pPr algn="ctr"/>
+            <a:endParaRPr/>
           </a:p>
         </p:txBody>
       </p:sp>
@@ -10162,6 +9998,7 @@
           <a:lstStyle/>
           <a:p>
             <a:pPr algn="ctr"/>
+            <a:endParaRPr/>
           </a:p>
         </p:txBody>
       </p:sp>
@@ -10182,7 +10019,7 @@
           <a:noFill/>
         </p:spPr>
         <p:txBody>
-          <a:bodyPr wrap="square" lIns="36576" rIns="36576" tIns="36576" bIns="36576" anchor="ctr">
+          <a:bodyPr wrap="square" lIns="36576" tIns="36576" rIns="36576" bIns="36576" anchor="ctr">
             <a:spAutoFit/>
           </a:bodyPr>
           <a:lstStyle/>
@@ -10249,6 +10086,7 @@
           <a:lstStyle/>
           <a:p>
             <a:pPr algn="ctr"/>
+            <a:endParaRPr/>
           </a:p>
         </p:txBody>
       </p:sp>
@@ -10294,6 +10132,7 @@
           <a:lstStyle/>
           <a:p>
             <a:pPr algn="ctr"/>
+            <a:endParaRPr/>
           </a:p>
         </p:txBody>
       </p:sp>
@@ -10339,6 +10178,7 @@
           <a:lstStyle/>
           <a:p>
             <a:pPr algn="ctr"/>
+            <a:endParaRPr/>
           </a:p>
         </p:txBody>
       </p:sp>
@@ -10384,6 +10224,7 @@
           <a:lstStyle/>
           <a:p>
             <a:pPr algn="ctr"/>
+            <a:endParaRPr/>
           </a:p>
         </p:txBody>
       </p:sp>
@@ -10429,6 +10270,7 @@
           <a:lstStyle/>
           <a:p>
             <a:pPr algn="ctr"/>
+            <a:endParaRPr/>
           </a:p>
         </p:txBody>
       </p:sp>
@@ -10474,6 +10316,7 @@
           <a:lstStyle/>
           <a:p>
             <a:pPr algn="ctr"/>
+            <a:endParaRPr/>
           </a:p>
         </p:txBody>
       </p:sp>
@@ -10519,6 +10362,7 @@
           <a:lstStyle/>
           <a:p>
             <a:pPr algn="ctr"/>
+            <a:endParaRPr/>
           </a:p>
         </p:txBody>
       </p:sp>
@@ -10564,6 +10408,7 @@
           <a:lstStyle/>
           <a:p>
             <a:pPr algn="ctr"/>
+            <a:endParaRPr/>
           </a:p>
         </p:txBody>
       </p:sp>
@@ -10609,6 +10454,7 @@
           <a:lstStyle/>
           <a:p>
             <a:pPr algn="ctr"/>
+            <a:endParaRPr/>
           </a:p>
         </p:txBody>
       </p:sp>
@@ -10654,6 +10500,7 @@
           <a:lstStyle/>
           <a:p>
             <a:pPr algn="ctr"/>
+            <a:endParaRPr/>
           </a:p>
         </p:txBody>
       </p:sp>
@@ -10699,6 +10546,7 @@
           <a:lstStyle/>
           <a:p>
             <a:pPr algn="ctr"/>
+            <a:endParaRPr/>
           </a:p>
         </p:txBody>
       </p:sp>
@@ -10744,6 +10592,7 @@
           <a:lstStyle/>
           <a:p>
             <a:pPr algn="ctr"/>
+            <a:endParaRPr/>
           </a:p>
         </p:txBody>
       </p:sp>
@@ -10764,7 +10613,7 @@
           <a:noFill/>
         </p:spPr>
         <p:txBody>
-          <a:bodyPr wrap="square" lIns="36576" rIns="36576" tIns="36576" bIns="36576" anchor="t">
+          <a:bodyPr wrap="square" lIns="36576" tIns="36576" rIns="36576" bIns="36576" anchor="t">
             <a:spAutoFit/>
           </a:bodyPr>
           <a:lstStyle/>
@@ -10806,7 +10655,7 @@
           <a:noFill/>
         </p:spPr>
         <p:txBody>
-          <a:bodyPr wrap="square" lIns="36576" rIns="36576" tIns="36576" bIns="36576" anchor="t">
+          <a:bodyPr wrap="square" lIns="36576" tIns="36576" rIns="36576" bIns="36576" anchor="t">
             <a:spAutoFit/>
           </a:bodyPr>
           <a:lstStyle/>
@@ -10873,6 +10722,7 @@
           <a:lstStyle/>
           <a:p>
             <a:pPr algn="ctr"/>
+            <a:endParaRPr/>
           </a:p>
         </p:txBody>
       </p:sp>
@@ -10918,6 +10768,7 @@
           <a:lstStyle/>
           <a:p>
             <a:pPr algn="ctr"/>
+            <a:endParaRPr/>
           </a:p>
         </p:txBody>
       </p:sp>
@@ -10963,6 +10814,7 @@
           <a:lstStyle/>
           <a:p>
             <a:pPr algn="ctr"/>
+            <a:endParaRPr/>
           </a:p>
         </p:txBody>
       </p:sp>
@@ -10983,7 +10835,7 @@
           <a:noFill/>
         </p:spPr>
         <p:txBody>
-          <a:bodyPr wrap="square" lIns="36576" rIns="36576" tIns="36576" bIns="36576" anchor="ctr">
+          <a:bodyPr wrap="square" lIns="36576" tIns="36576" rIns="36576" bIns="36576" anchor="ctr">
             <a:spAutoFit/>
           </a:bodyPr>
           <a:lstStyle/>
@@ -11340,7 +11192,7 @@
           <a:noFill/>
         </p:spPr>
         <p:txBody>
-          <a:bodyPr wrap="square" lIns="36576" rIns="36576" tIns="36576" bIns="36576" anchor="t">
+          <a:bodyPr wrap="square" lIns="36576" tIns="36576" rIns="36576" bIns="36576" anchor="t">
             <a:spAutoFit/>
           </a:bodyPr>
           <a:lstStyle/>
@@ -11382,7 +11234,7 @@
           <a:noFill/>
         </p:spPr>
         <p:txBody>
-          <a:bodyPr wrap="square" lIns="36576" rIns="36576" tIns="36576" bIns="36576" anchor="t">
+          <a:bodyPr wrap="square" lIns="36576" tIns="36576" rIns="36576" bIns="36576" anchor="t">
             <a:spAutoFit/>
           </a:bodyPr>
           <a:lstStyle/>
@@ -11449,6 +11301,7 @@
           <a:lstStyle/>
           <a:p>
             <a:pPr algn="ctr"/>
+            <a:endParaRPr/>
           </a:p>
         </p:txBody>
       </p:sp>
@@ -11494,6 +11347,7 @@
           <a:lstStyle/>
           <a:p>
             <a:pPr algn="ctr"/>
+            <a:endParaRPr/>
           </a:p>
         </p:txBody>
       </p:sp>
@@ -11539,6 +11393,7 @@
           <a:lstStyle/>
           <a:p>
             <a:pPr algn="ctr"/>
+            <a:endParaRPr/>
           </a:p>
         </p:txBody>
       </p:sp>
@@ -11559,7 +11414,7 @@
           <a:noFill/>
         </p:spPr>
         <p:txBody>
-          <a:bodyPr wrap="square" lIns="36576" rIns="36576" tIns="36576" bIns="36576" anchor="ctr">
+          <a:bodyPr wrap="square" lIns="36576" tIns="36576" rIns="36576" bIns="36576" anchor="ctr">
             <a:spAutoFit/>
           </a:bodyPr>
           <a:lstStyle/>
@@ -11626,6 +11481,7 @@
           <a:lstStyle/>
           <a:p>
             <a:pPr algn="ctr"/>
+            <a:endParaRPr/>
           </a:p>
         </p:txBody>
       </p:sp>
@@ -11671,6 +11527,7 @@
           <a:lstStyle/>
           <a:p>
             <a:pPr algn="ctr"/>
+            <a:endParaRPr/>
           </a:p>
         </p:txBody>
       </p:sp>
@@ -11716,6 +11573,7 @@
           <a:lstStyle/>
           <a:p>
             <a:pPr algn="ctr"/>
+            <a:endParaRPr/>
           </a:p>
         </p:txBody>
       </p:sp>
@@ -11759,6 +11617,7 @@
           <a:lstStyle/>
           <a:p>
             <a:pPr algn="ctr"/>
+            <a:endParaRPr/>
           </a:p>
         </p:txBody>
       </p:sp>
@@ -11779,7 +11638,7 @@
           <a:noFill/>
         </p:spPr>
         <p:txBody>
-          <a:bodyPr wrap="square" lIns="36576" rIns="36576" tIns="36576" bIns="36576" anchor="t">
+          <a:bodyPr wrap="square" lIns="36576" tIns="36576" rIns="36576" bIns="36576" anchor="t">
             <a:spAutoFit/>
           </a:bodyPr>
           <a:lstStyle/>
@@ -11821,7 +11680,7 @@
           <a:noFill/>
         </p:spPr>
         <p:txBody>
-          <a:bodyPr wrap="square" lIns="36576" rIns="36576" tIns="36576" bIns="36576" anchor="t">
+          <a:bodyPr wrap="square" lIns="36576" tIns="36576" rIns="36576" bIns="36576" anchor="t">
             <a:spAutoFit/>
           </a:bodyPr>
           <a:lstStyle/>
@@ -11863,7 +11722,7 @@
           <a:noFill/>
         </p:spPr>
         <p:txBody>
-          <a:bodyPr wrap="square" lIns="36576" rIns="36576" tIns="36576" bIns="36576" anchor="t">
+          <a:bodyPr wrap="square" lIns="36576" tIns="36576" rIns="36576" bIns="36576" anchor="t">
             <a:spAutoFit/>
           </a:bodyPr>
           <a:lstStyle/>
@@ -11930,6 +11789,7 @@
           <a:lstStyle/>
           <a:p>
             <a:pPr algn="ctr"/>
+            <a:endParaRPr/>
           </a:p>
         </p:txBody>
       </p:sp>
@@ -11975,6 +11835,7 @@
           <a:lstStyle/>
           <a:p>
             <a:pPr algn="ctr"/>
+            <a:endParaRPr/>
           </a:p>
         </p:txBody>
       </p:sp>
@@ -12020,6 +11881,7 @@
           <a:lstStyle/>
           <a:p>
             <a:pPr algn="ctr"/>
+            <a:endParaRPr/>
           </a:p>
         </p:txBody>
       </p:sp>
@@ -12040,7 +11902,7 @@
           <a:noFill/>
         </p:spPr>
         <p:txBody>
-          <a:bodyPr wrap="square" lIns="36576" rIns="36576" tIns="36576" bIns="36576" anchor="ctr">
+          <a:bodyPr wrap="square" lIns="36576" tIns="36576" rIns="36576" bIns="36576" anchor="ctr">
             <a:spAutoFit/>
           </a:bodyPr>
           <a:lstStyle/>
@@ -12107,6 +11969,7 @@
           <a:lstStyle/>
           <a:p>
             <a:pPr algn="ctr"/>
+            <a:endParaRPr/>
           </a:p>
         </p:txBody>
       </p:sp>
@@ -12127,7 +11990,7 @@
           <a:noFill/>
         </p:spPr>
         <p:txBody>
-          <a:bodyPr wrap="square" lIns="36576" rIns="36576" tIns="36576" bIns="36576" anchor="ctr">
+          <a:bodyPr wrap="square" lIns="36576" tIns="36576" rIns="36576" bIns="36576" anchor="ctr">
             <a:spAutoFit/>
           </a:bodyPr>
           <a:lstStyle/>
@@ -12194,6 +12057,7 @@
           <a:lstStyle/>
           <a:p>
             <a:pPr algn="ctr"/>
+            <a:endParaRPr/>
           </a:p>
         </p:txBody>
       </p:sp>
@@ -12214,7 +12078,7 @@
           <a:noFill/>
         </p:spPr>
         <p:txBody>
-          <a:bodyPr wrap="square" lIns="36576" rIns="36576" tIns="36576" bIns="36576" anchor="ctr">
+          <a:bodyPr wrap="square" lIns="36576" tIns="36576" rIns="36576" bIns="36576" anchor="ctr">
             <a:spAutoFit/>
           </a:bodyPr>
           <a:lstStyle/>
@@ -12281,6 +12145,7 @@
           <a:lstStyle/>
           <a:p>
             <a:pPr algn="ctr"/>
+            <a:endParaRPr/>
           </a:p>
         </p:txBody>
       </p:sp>
@@ -12324,6 +12189,7 @@
           <a:lstStyle/>
           <a:p>
             <a:pPr algn="ctr"/>
+            <a:endParaRPr/>
           </a:p>
         </p:txBody>
       </p:sp>
@@ -12344,7 +12210,7 @@
           <a:noFill/>
         </p:spPr>
         <p:txBody>
-          <a:bodyPr wrap="square" lIns="36576" rIns="36576" tIns="36576" bIns="36576" anchor="t">
+          <a:bodyPr wrap="square" lIns="36576" tIns="36576" rIns="36576" bIns="36576" anchor="t">
             <a:spAutoFit/>
           </a:bodyPr>
           <a:lstStyle/>
@@ -12386,7 +12252,7 @@
           <a:noFill/>
         </p:spPr>
         <p:txBody>
-          <a:bodyPr wrap="square" lIns="36576" rIns="36576" tIns="36576" bIns="36576" anchor="t">
+          <a:bodyPr wrap="square" lIns="36576" tIns="36576" rIns="36576" bIns="36576" anchor="t">
             <a:spAutoFit/>
           </a:bodyPr>
           <a:lstStyle/>
@@ -12449,7 +12315,7 @@
           </a:fontRef>
         </p:style>
         <p:txBody>
-          <a:bodyPr rtlCol="0" anchor="ctr" lIns="54864" rIns="54864" tIns="9144" bIns="9144"/>
+          <a:bodyPr lIns="54864" tIns="9144" rIns="54864" bIns="9144" rtlCol="0" anchor="ctr"/>
           <a:lstStyle/>
           <a:p>
             <a:pPr algn="ctr"/>
@@ -12517,7 +12383,7 @@
           <a:noFill/>
         </p:spPr>
         <p:txBody>
-          <a:bodyPr wrap="square" lIns="36576" rIns="36576" tIns="36576" bIns="36576" anchor="t">
+          <a:bodyPr wrap="square" lIns="36576" tIns="36576" rIns="36576" bIns="36576" anchor="t">
             <a:spAutoFit/>
           </a:bodyPr>
           <a:lstStyle/>
@@ -12551,7 +12417,7 @@
 </file>
 
 <file path=ppt/slides/slide13.xml><?xml version="1.0" encoding="utf-8"?>
-<p:sld xmlns:a="http://schemas.openxmlformats.org/drawingml/2006/main" xmlns:p="http://schemas.openxmlformats.org/presentationml/2006/main" xmlns:r="http://schemas.openxmlformats.org/officeDocument/2006/relationships">
+<p:sld xmlns:a="http://schemas.openxmlformats.org/drawingml/2006/main" xmlns:r="http://schemas.openxmlformats.org/officeDocument/2006/relationships" xmlns:p="http://schemas.openxmlformats.org/presentationml/2006/main">
   <p:cSld>
     <p:bg>
       <p:bgPr>
@@ -12567,7 +12433,14 @@
         <p:cNvGrpSpPr/>
         <p:nvPr/>
       </p:nvGrpSpPr>
-      <p:grpSpPr/>
+      <p:grpSpPr>
+        <a:xfrm>
+          <a:off x="0" y="0"/>
+          <a:ext cx="0" cy="0"/>
+          <a:chOff x="0" y="0"/>
+          <a:chExt cx="0" cy="0"/>
+        </a:xfrm>
+      </p:grpSpPr>
       <p:sp>
         <p:nvSpPr>
           <p:cNvPr id="2" name="TextBox 1"/>
@@ -12585,7 +12458,7 @@
           <a:noFill/>
         </p:spPr>
         <p:txBody>
-          <a:bodyPr wrap="square" lIns="36576" rIns="36576" tIns="36576" bIns="36576" anchor="t">
+          <a:bodyPr wrap="square" lIns="36576" tIns="36576" rIns="36576" bIns="36576" anchor="t">
             <a:spAutoFit/>
           </a:bodyPr>
           <a:lstStyle/>
@@ -12627,7 +12500,7 @@
           <a:noFill/>
         </p:spPr>
         <p:txBody>
-          <a:bodyPr wrap="square" lIns="36576" rIns="36576" tIns="36576" bIns="36576" anchor="t">
+          <a:bodyPr wrap="square" lIns="36576" tIns="36576" rIns="36576" bIns="36576" anchor="t">
             <a:spAutoFit/>
           </a:bodyPr>
           <a:lstStyle/>
@@ -12669,7 +12542,7 @@
           <a:noFill/>
         </p:spPr>
         <p:txBody>
-          <a:bodyPr wrap="square" lIns="36576" rIns="36576" tIns="36576" bIns="36576" anchor="t">
+          <a:bodyPr wrap="square" lIns="36576" tIns="36576" rIns="36576" bIns="36576" anchor="t">
             <a:spAutoFit/>
           </a:bodyPr>
           <a:lstStyle/>
@@ -12711,7 +12584,7 @@
           <a:noFill/>
         </p:spPr>
         <p:txBody>
-          <a:bodyPr wrap="square" lIns="36576" rIns="36576" tIns="36576" bIns="36576" anchor="t">
+          <a:bodyPr wrap="square" lIns="36576" tIns="36576" rIns="36576" bIns="36576" anchor="t">
             <a:spAutoFit/>
           </a:bodyPr>
           <a:lstStyle/>
@@ -12778,6 +12651,7 @@
           <a:lstStyle/>
           <a:p>
             <a:pPr algn="ctr"/>
+            <a:endParaRPr/>
           </a:p>
         </p:txBody>
       </p:sp>
@@ -12798,7 +12672,7 @@
           <a:noFill/>
         </p:spPr>
         <p:txBody>
-          <a:bodyPr wrap="square" lIns="36576" rIns="36576" tIns="36576" bIns="36576" anchor="t">
+          <a:bodyPr wrap="square" lIns="36576" tIns="36576" rIns="36576" bIns="36576" anchor="t">
             <a:spAutoFit/>
           </a:bodyPr>
           <a:lstStyle/>
@@ -12865,6 +12739,7 @@
           <a:lstStyle/>
           <a:p>
             <a:pPr algn="ctr"/>
+            <a:endParaRPr/>
           </a:p>
         </p:txBody>
       </p:sp>
@@ -12885,7 +12760,7 @@
           <a:noFill/>
         </p:spPr>
         <p:txBody>
-          <a:bodyPr wrap="square" lIns="36576" rIns="36576" tIns="36576" bIns="36576" anchor="ctr">
+          <a:bodyPr wrap="square" lIns="36576" tIns="36576" rIns="36576" bIns="36576" anchor="ctr">
             <a:spAutoFit/>
           </a:bodyPr>
           <a:lstStyle/>
@@ -12952,6 +12827,7 @@
           <a:lstStyle/>
           <a:p>
             <a:pPr algn="ctr"/>
+            <a:endParaRPr/>
           </a:p>
         </p:txBody>
       </p:sp>
@@ -12972,7 +12848,7 @@
           <a:noFill/>
         </p:spPr>
         <p:txBody>
-          <a:bodyPr wrap="square" lIns="36576" rIns="36576" tIns="36576" bIns="36576" anchor="ctr">
+          <a:bodyPr wrap="square" lIns="36576" tIns="36576" rIns="36576" bIns="36576" anchor="ctr">
             <a:spAutoFit/>
           </a:bodyPr>
           <a:lstStyle/>
@@ -13037,6 +12913,7 @@
           <a:lstStyle/>
           <a:p>
             <a:pPr algn="ctr"/>
+            <a:endParaRPr/>
           </a:p>
         </p:txBody>
       </p:sp>
@@ -13057,7 +12934,7 @@
           <a:noFill/>
         </p:spPr>
         <p:txBody>
-          <a:bodyPr wrap="square" lIns="36576" rIns="36576" tIns="36576" bIns="36576" anchor="t">
+          <a:bodyPr wrap="square" lIns="36576" tIns="36576" rIns="36576" bIns="36576" anchor="t">
             <a:spAutoFit/>
           </a:bodyPr>
           <a:lstStyle/>
@@ -13099,7 +12976,7 @@
           <a:noFill/>
         </p:spPr>
         <p:txBody>
-          <a:bodyPr wrap="square" lIns="36576" rIns="36576" tIns="36576" bIns="36576" anchor="t">
+          <a:bodyPr wrap="square" lIns="36576" tIns="36576" rIns="36576" bIns="36576" anchor="t">
             <a:spAutoFit/>
           </a:bodyPr>
           <a:lstStyle/>
@@ -13141,7 +13018,7 @@
           <a:noFill/>
         </p:spPr>
         <p:txBody>
-          <a:bodyPr wrap="square" lIns="36576" rIns="18288" tIns="18288" bIns="18288">
+          <a:bodyPr wrap="square" lIns="36576" tIns="18288" rIns="18288" bIns="18288">
             <a:spAutoFit/>
           </a:bodyPr>
           <a:lstStyle/>
@@ -13273,6 +13150,7 @@
           <a:lstStyle/>
           <a:p>
             <a:pPr algn="ctr"/>
+            <a:endParaRPr/>
           </a:p>
         </p:txBody>
       </p:sp>
@@ -13293,7 +13171,7 @@
           <a:noFill/>
         </p:spPr>
         <p:txBody>
-          <a:bodyPr wrap="square" lIns="36576" rIns="36576" tIns="36576" bIns="36576" anchor="t">
+          <a:bodyPr wrap="square" lIns="36576" tIns="36576" rIns="36576" bIns="36576" anchor="t">
             <a:spAutoFit/>
           </a:bodyPr>
           <a:lstStyle/>
@@ -13335,7 +13213,7 @@
           <a:noFill/>
         </p:spPr>
         <p:txBody>
-          <a:bodyPr wrap="square" lIns="36576" rIns="36576" tIns="36576" bIns="36576" anchor="t">
+          <a:bodyPr wrap="square" lIns="36576" tIns="36576" rIns="36576" bIns="36576" anchor="t">
             <a:spAutoFit/>
           </a:bodyPr>
           <a:lstStyle/>
@@ -13402,6 +13280,7 @@
           <a:lstStyle/>
           <a:p>
             <a:pPr algn="ctr"/>
+            <a:endParaRPr/>
           </a:p>
         </p:txBody>
       </p:sp>
@@ -13447,6 +13326,7 @@
           <a:lstStyle/>
           <a:p>
             <a:pPr algn="ctr"/>
+            <a:endParaRPr/>
           </a:p>
         </p:txBody>
       </p:sp>
@@ -13492,6 +13372,7 @@
           <a:lstStyle/>
           <a:p>
             <a:pPr algn="ctr"/>
+            <a:endParaRPr/>
           </a:p>
         </p:txBody>
       </p:sp>
@@ -13537,6 +13418,7 @@
           <a:lstStyle/>
           <a:p>
             <a:pPr algn="ctr"/>
+            <a:endParaRPr/>
           </a:p>
         </p:txBody>
       </p:sp>
@@ -13582,6 +13464,7 @@
           <a:lstStyle/>
           <a:p>
             <a:pPr algn="ctr"/>
+            <a:endParaRPr/>
           </a:p>
         </p:txBody>
       </p:sp>
@@ -13602,7 +13485,7 @@
           <a:noFill/>
         </p:spPr>
         <p:txBody>
-          <a:bodyPr wrap="square" lIns="36576" rIns="36576" tIns="36576" bIns="36576" anchor="t">
+          <a:bodyPr wrap="square" lIns="36576" tIns="36576" rIns="36576" bIns="36576" anchor="t">
             <a:spAutoFit/>
           </a:bodyPr>
           <a:lstStyle/>
@@ -13665,7 +13548,7 @@
           </a:fontRef>
         </p:style>
         <p:txBody>
-          <a:bodyPr rtlCol="0" anchor="ctr" lIns="54864" rIns="54864" tIns="9144" bIns="9144"/>
+          <a:bodyPr lIns="54864" tIns="9144" rIns="54864" bIns="9144" rtlCol="0" anchor="ctr"/>
           <a:lstStyle/>
           <a:p>
             <a:pPr algn="ctr"/>
@@ -13723,6 +13606,7 @@
           <a:lstStyle/>
           <a:p>
             <a:pPr algn="ctr"/>
+            <a:endParaRPr/>
           </a:p>
         </p:txBody>
       </p:sp>
@@ -13743,7 +13627,7 @@
           <a:noFill/>
         </p:spPr>
         <p:txBody>
-          <a:bodyPr wrap="square" lIns="36576" rIns="36576" tIns="36576" bIns="36576" anchor="t">
+          <a:bodyPr wrap="square" lIns="36576" tIns="36576" rIns="36576" bIns="36576" anchor="t">
             <a:spAutoFit/>
           </a:bodyPr>
           <a:lstStyle/>
@@ -13785,7 +13669,7 @@
           <a:noFill/>
         </p:spPr>
         <p:txBody>
-          <a:bodyPr wrap="square" lIns="36576" rIns="36576" tIns="36576" bIns="36576" anchor="t">
+          <a:bodyPr wrap="square" lIns="36576" tIns="36576" rIns="36576" bIns="36576" anchor="t">
             <a:spAutoFit/>
           </a:bodyPr>
           <a:lstStyle/>
@@ -13852,6 +13736,7 @@
           <a:lstStyle/>
           <a:p>
             <a:pPr algn="ctr"/>
+            <a:endParaRPr/>
           </a:p>
         </p:txBody>
       </p:sp>
@@ -13897,6 +13782,7 @@
           <a:lstStyle/>
           <a:p>
             <a:pPr algn="ctr"/>
+            <a:endParaRPr/>
           </a:p>
         </p:txBody>
       </p:sp>
@@ -13942,6 +13828,7 @@
           <a:lstStyle/>
           <a:p>
             <a:pPr algn="ctr"/>
+            <a:endParaRPr/>
           </a:p>
         </p:txBody>
       </p:sp>
@@ -13985,6 +13872,7 @@
           <a:lstStyle/>
           <a:p>
             <a:pPr algn="ctr"/>
+            <a:endParaRPr/>
           </a:p>
         </p:txBody>
       </p:sp>
@@ -14005,7 +13893,7 @@
           <a:noFill/>
         </p:spPr>
         <p:txBody>
-          <a:bodyPr wrap="square" lIns="36576" rIns="36576" tIns="36576" bIns="36576" anchor="t">
+          <a:bodyPr wrap="square" lIns="36576" tIns="36576" rIns="36576" bIns="36576" anchor="t">
             <a:spAutoFit/>
           </a:bodyPr>
           <a:lstStyle/>
@@ -14068,7 +13956,7 @@
           </a:fontRef>
         </p:style>
         <p:txBody>
-          <a:bodyPr rtlCol="0" anchor="ctr" lIns="54864" rIns="54864" tIns="9144" bIns="9144"/>
+          <a:bodyPr lIns="54864" tIns="9144" rIns="54864" bIns="9144" rtlCol="0" anchor="ctr"/>
           <a:lstStyle/>
           <a:p>
             <a:pPr algn="ctr"/>
@@ -14122,7 +14010,7 @@
           </a:fontRef>
         </p:style>
         <p:txBody>
-          <a:bodyPr rtlCol="0" anchor="ctr" lIns="54864" rIns="54864" tIns="9144" bIns="9144"/>
+          <a:bodyPr lIns="54864" tIns="9144" rIns="54864" bIns="9144" rtlCol="0" anchor="ctr"/>
           <a:lstStyle/>
           <a:p>
             <a:pPr algn="ctr"/>
@@ -14190,7 +14078,7 @@
           <a:noFill/>
         </p:spPr>
         <p:txBody>
-          <a:bodyPr wrap="square" lIns="36576" rIns="36576" tIns="36576" bIns="36576" anchor="t">
+          <a:bodyPr wrap="square" lIns="36576" tIns="36576" rIns="36576" bIns="36576" anchor="t">
             <a:spAutoFit/>
           </a:bodyPr>
           <a:lstStyle/>
@@ -14224,7 +14112,7 @@
 </file>
 
 <file path=ppt/slides/slide14.xml><?xml version="1.0" encoding="utf-8"?>
-<p:sld xmlns:a="http://schemas.openxmlformats.org/drawingml/2006/main" xmlns:p="http://schemas.openxmlformats.org/presentationml/2006/main" xmlns:r="http://schemas.openxmlformats.org/officeDocument/2006/relationships">
+<p:sld xmlns:a="http://schemas.openxmlformats.org/drawingml/2006/main" xmlns:r="http://schemas.openxmlformats.org/officeDocument/2006/relationships" xmlns:p="http://schemas.openxmlformats.org/presentationml/2006/main">
   <p:cSld>
     <p:bg>
       <p:bgPr>
@@ -14240,7 +14128,14 @@
         <p:cNvGrpSpPr/>
         <p:nvPr/>
       </p:nvGrpSpPr>
-      <p:grpSpPr/>
+      <p:grpSpPr>
+        <a:xfrm>
+          <a:off x="0" y="0"/>
+          <a:ext cx="0" cy="0"/>
+          <a:chOff x="0" y="0"/>
+          <a:chExt cx="0" cy="0"/>
+        </a:xfrm>
+      </p:grpSpPr>
       <p:sp>
         <p:nvSpPr>
           <p:cNvPr id="2" name="TextBox 1"/>
@@ -14258,7 +14153,7 @@
           <a:noFill/>
         </p:spPr>
         <p:txBody>
-          <a:bodyPr wrap="square" lIns="36576" rIns="36576" tIns="36576" bIns="36576" anchor="t">
+          <a:bodyPr wrap="square" lIns="36576" tIns="36576" rIns="36576" bIns="36576" anchor="t">
             <a:spAutoFit/>
           </a:bodyPr>
           <a:lstStyle/>
@@ -14300,7 +14195,7 @@
           <a:noFill/>
         </p:spPr>
         <p:txBody>
-          <a:bodyPr wrap="square" lIns="36576" rIns="36576" tIns="36576" bIns="36576" anchor="t">
+          <a:bodyPr wrap="square" lIns="36576" tIns="36576" rIns="36576" bIns="36576" anchor="t">
             <a:spAutoFit/>
           </a:bodyPr>
           <a:lstStyle/>
@@ -14342,7 +14237,7 @@
           <a:noFill/>
         </p:spPr>
         <p:txBody>
-          <a:bodyPr wrap="square" lIns="36576" rIns="36576" tIns="36576" bIns="36576" anchor="t">
+          <a:bodyPr wrap="square" lIns="36576" tIns="36576" rIns="36576" bIns="36576" anchor="t">
             <a:spAutoFit/>
           </a:bodyPr>
           <a:lstStyle/>
@@ -14384,7 +14279,7 @@
           <a:noFill/>
         </p:spPr>
         <p:txBody>
-          <a:bodyPr wrap="square" lIns="36576" rIns="36576" tIns="36576" bIns="36576" anchor="t">
+          <a:bodyPr wrap="square" lIns="36576" tIns="36576" rIns="36576" bIns="36576" anchor="t">
             <a:spAutoFit/>
           </a:bodyPr>
           <a:lstStyle/>
@@ -14451,6 +14346,7 @@
           <a:lstStyle/>
           <a:p>
             <a:pPr algn="ctr"/>
+            <a:endParaRPr/>
           </a:p>
         </p:txBody>
       </p:sp>
@@ -14496,6 +14392,7 @@
           <a:lstStyle/>
           <a:p>
             <a:pPr algn="ctr"/>
+            <a:endParaRPr/>
           </a:p>
         </p:txBody>
       </p:sp>
@@ -14516,7 +14413,7 @@
           <a:noFill/>
         </p:spPr>
         <p:txBody>
-          <a:bodyPr wrap="square" lIns="36576" rIns="36576" tIns="36576" bIns="36576" anchor="t">
+          <a:bodyPr wrap="square" lIns="36576" tIns="36576" rIns="36576" bIns="36576" anchor="t">
             <a:spAutoFit/>
           </a:bodyPr>
           <a:lstStyle/>
@@ -14558,7 +14455,7 @@
           <a:noFill/>
         </p:spPr>
         <p:txBody>
-          <a:bodyPr wrap="square" lIns="36576" rIns="36576" tIns="36576" bIns="36576" anchor="t">
+          <a:bodyPr wrap="square" lIns="36576" tIns="36576" rIns="36576" bIns="36576" anchor="t">
             <a:spAutoFit/>
           </a:bodyPr>
           <a:lstStyle/>
@@ -14625,6 +14522,7 @@
           <a:lstStyle/>
           <a:p>
             <a:pPr algn="ctr"/>
+            <a:endParaRPr/>
           </a:p>
         </p:txBody>
       </p:sp>
@@ -14670,6 +14568,7 @@
           <a:lstStyle/>
           <a:p>
             <a:pPr algn="ctr"/>
+            <a:endParaRPr/>
           </a:p>
         </p:txBody>
       </p:sp>
@@ -14690,7 +14589,7 @@
           <a:noFill/>
         </p:spPr>
         <p:txBody>
-          <a:bodyPr wrap="square" lIns="36576" rIns="36576" tIns="36576" bIns="36576" anchor="t">
+          <a:bodyPr wrap="square" lIns="36576" tIns="36576" rIns="36576" bIns="36576" anchor="t">
             <a:spAutoFit/>
           </a:bodyPr>
           <a:lstStyle/>
@@ -14732,7 +14631,7 @@
           <a:noFill/>
         </p:spPr>
         <p:txBody>
-          <a:bodyPr wrap="square" lIns="36576" rIns="36576" tIns="36576" bIns="36576" anchor="t">
+          <a:bodyPr wrap="square" lIns="36576" tIns="36576" rIns="36576" bIns="36576" anchor="t">
             <a:spAutoFit/>
           </a:bodyPr>
           <a:lstStyle/>
@@ -14799,6 +14698,7 @@
           <a:lstStyle/>
           <a:p>
             <a:pPr algn="ctr"/>
+            <a:endParaRPr/>
           </a:p>
         </p:txBody>
       </p:sp>
@@ -14844,6 +14744,7 @@
           <a:lstStyle/>
           <a:p>
             <a:pPr algn="ctr"/>
+            <a:endParaRPr/>
           </a:p>
         </p:txBody>
       </p:sp>
@@ -14864,7 +14765,7 @@
           <a:noFill/>
         </p:spPr>
         <p:txBody>
-          <a:bodyPr wrap="square" lIns="36576" rIns="36576" tIns="36576" bIns="36576" anchor="t">
+          <a:bodyPr wrap="square" lIns="36576" tIns="36576" rIns="36576" bIns="36576" anchor="t">
             <a:spAutoFit/>
           </a:bodyPr>
           <a:lstStyle/>
@@ -14906,7 +14807,7 @@
           <a:noFill/>
         </p:spPr>
         <p:txBody>
-          <a:bodyPr wrap="square" lIns="36576" rIns="36576" tIns="36576" bIns="36576" anchor="t">
+          <a:bodyPr wrap="square" lIns="36576" tIns="36576" rIns="36576" bIns="36576" anchor="t">
             <a:spAutoFit/>
           </a:bodyPr>
           <a:lstStyle/>
@@ -14973,6 +14874,7 @@
           <a:lstStyle/>
           <a:p>
             <a:pPr algn="ctr"/>
+            <a:endParaRPr/>
           </a:p>
         </p:txBody>
       </p:sp>
@@ -15018,6 +14920,7 @@
           <a:lstStyle/>
           <a:p>
             <a:pPr algn="ctr"/>
+            <a:endParaRPr/>
           </a:p>
         </p:txBody>
       </p:sp>
@@ -15038,7 +14941,7 @@
           <a:noFill/>
         </p:spPr>
         <p:txBody>
-          <a:bodyPr wrap="square" lIns="36576" rIns="36576" tIns="36576" bIns="36576" anchor="t">
+          <a:bodyPr wrap="square" lIns="36576" tIns="36576" rIns="36576" bIns="36576" anchor="t">
             <a:spAutoFit/>
           </a:bodyPr>
           <a:lstStyle/>
@@ -15080,7 +14983,7 @@
           <a:noFill/>
         </p:spPr>
         <p:txBody>
-          <a:bodyPr wrap="square" lIns="36576" rIns="36576" tIns="36576" bIns="36576" anchor="t">
+          <a:bodyPr wrap="square" lIns="36576" tIns="36576" rIns="36576" bIns="36576" anchor="t">
             <a:spAutoFit/>
           </a:bodyPr>
           <a:lstStyle/>
@@ -15147,6 +15050,7 @@
           <a:lstStyle/>
           <a:p>
             <a:pPr algn="ctr"/>
+            <a:endParaRPr/>
           </a:p>
         </p:txBody>
       </p:sp>
@@ -15192,6 +15096,7 @@
           <a:lstStyle/>
           <a:p>
             <a:pPr algn="ctr"/>
+            <a:endParaRPr/>
           </a:p>
         </p:txBody>
       </p:sp>
@@ -15212,7 +15117,7 @@
           <a:noFill/>
         </p:spPr>
         <p:txBody>
-          <a:bodyPr wrap="square" lIns="36576" rIns="36576" tIns="36576" bIns="36576" anchor="t">
+          <a:bodyPr wrap="square" lIns="36576" tIns="36576" rIns="36576" bIns="36576" anchor="t">
             <a:spAutoFit/>
           </a:bodyPr>
           <a:lstStyle/>
@@ -15254,7 +15159,7 @@
           <a:noFill/>
         </p:spPr>
         <p:txBody>
-          <a:bodyPr wrap="square" lIns="36576" rIns="36576" tIns="36576" bIns="36576" anchor="t">
+          <a:bodyPr wrap="square" lIns="36576" tIns="36576" rIns="36576" bIns="36576" anchor="t">
             <a:spAutoFit/>
           </a:bodyPr>
           <a:lstStyle/>
@@ -15321,6 +15226,7 @@
           <a:lstStyle/>
           <a:p>
             <a:pPr algn="ctr"/>
+            <a:endParaRPr/>
           </a:p>
         </p:txBody>
       </p:sp>
@@ -15366,6 +15272,7 @@
           <a:lstStyle/>
           <a:p>
             <a:pPr algn="ctr"/>
+            <a:endParaRPr/>
           </a:p>
         </p:txBody>
       </p:sp>
@@ -15386,7 +15293,7 @@
           <a:noFill/>
         </p:spPr>
         <p:txBody>
-          <a:bodyPr wrap="square" lIns="36576" rIns="36576" tIns="36576" bIns="36576" anchor="t">
+          <a:bodyPr wrap="square" lIns="36576" tIns="36576" rIns="36576" bIns="36576" anchor="t">
             <a:spAutoFit/>
           </a:bodyPr>
           <a:lstStyle/>
@@ -15428,7 +15335,7 @@
           <a:noFill/>
         </p:spPr>
         <p:txBody>
-          <a:bodyPr wrap="square" lIns="36576" rIns="36576" tIns="36576" bIns="36576" anchor="t">
+          <a:bodyPr wrap="square" lIns="36576" tIns="36576" rIns="36576" bIns="36576" anchor="t">
             <a:spAutoFit/>
           </a:bodyPr>
           <a:lstStyle/>
@@ -15495,6 +15402,7 @@
           <a:lstStyle/>
           <a:p>
             <a:pPr algn="ctr"/>
+            <a:endParaRPr/>
           </a:p>
         </p:txBody>
       </p:sp>
@@ -15515,7 +15423,7 @@
           <a:noFill/>
         </p:spPr>
         <p:txBody>
-          <a:bodyPr wrap="square" lIns="36576" rIns="36576" tIns="36576" bIns="36576" anchor="t">
+          <a:bodyPr wrap="square" lIns="36576" tIns="36576" rIns="36576" bIns="36576" anchor="t">
             <a:spAutoFit/>
           </a:bodyPr>
           <a:lstStyle/>
@@ -15557,7 +15465,7 @@
           <a:noFill/>
         </p:spPr>
         <p:txBody>
-          <a:bodyPr wrap="square" lIns="36576" rIns="36576" tIns="36576" bIns="36576" anchor="t">
+          <a:bodyPr wrap="square" lIns="36576" tIns="36576" rIns="36576" bIns="36576" anchor="t">
             <a:spAutoFit/>
           </a:bodyPr>
           <a:lstStyle/>
@@ -15620,7 +15528,7 @@
           </a:fontRef>
         </p:style>
         <p:txBody>
-          <a:bodyPr rtlCol="0" anchor="ctr" lIns="54864" rIns="54864" tIns="9144" bIns="9144"/>
+          <a:bodyPr lIns="54864" tIns="9144" rIns="54864" bIns="9144" rtlCol="0" anchor="ctr"/>
           <a:lstStyle/>
           <a:p>
             <a:pPr algn="ctr"/>
@@ -15688,7 +15596,7 @@
           <a:noFill/>
         </p:spPr>
         <p:txBody>
-          <a:bodyPr wrap="square" lIns="36576" rIns="36576" tIns="36576" bIns="36576" anchor="t">
+          <a:bodyPr wrap="square" lIns="36576" tIns="36576" rIns="36576" bIns="36576" anchor="t">
             <a:spAutoFit/>
           </a:bodyPr>
           <a:lstStyle/>
@@ -15722,7 +15630,7 @@
 </file>
 
 <file path=ppt/slides/slide15.xml><?xml version="1.0" encoding="utf-8"?>
-<p:sld xmlns:a="http://schemas.openxmlformats.org/drawingml/2006/main" xmlns:p="http://schemas.openxmlformats.org/presentationml/2006/main" xmlns:r="http://schemas.openxmlformats.org/officeDocument/2006/relationships">
+<p:sld xmlns:a="http://schemas.openxmlformats.org/drawingml/2006/main" xmlns:r="http://schemas.openxmlformats.org/officeDocument/2006/relationships" xmlns:p="http://schemas.openxmlformats.org/presentationml/2006/main">
   <p:cSld>
     <p:bg>
       <p:bgPr>
@@ -15738,7 +15646,14 @@
         <p:cNvGrpSpPr/>
         <p:nvPr/>
       </p:nvGrpSpPr>
-      <p:grpSpPr/>
+      <p:grpSpPr>
+        <a:xfrm>
+          <a:off x="0" y="0"/>
+          <a:ext cx="0" cy="0"/>
+          <a:chOff x="0" y="0"/>
+          <a:chExt cx="0" cy="0"/>
+        </a:xfrm>
+      </p:grpSpPr>
       <p:sp>
         <p:nvSpPr>
           <p:cNvPr id="2" name="TextBox 1"/>
@@ -15756,7 +15671,7 @@
           <a:noFill/>
         </p:spPr>
         <p:txBody>
-          <a:bodyPr wrap="square" lIns="36576" rIns="36576" tIns="36576" bIns="36576" anchor="t">
+          <a:bodyPr wrap="square" lIns="36576" tIns="36576" rIns="36576" bIns="36576" anchor="t">
             <a:spAutoFit/>
           </a:bodyPr>
           <a:lstStyle/>
@@ -15798,7 +15713,7 @@
           <a:noFill/>
         </p:spPr>
         <p:txBody>
-          <a:bodyPr wrap="square" lIns="36576" rIns="36576" tIns="36576" bIns="36576" anchor="t">
+          <a:bodyPr wrap="square" lIns="36576" tIns="36576" rIns="36576" bIns="36576" anchor="t">
             <a:spAutoFit/>
           </a:bodyPr>
           <a:lstStyle/>
@@ -15840,7 +15755,7 @@
           <a:noFill/>
         </p:spPr>
         <p:txBody>
-          <a:bodyPr wrap="square" lIns="36576" rIns="36576" tIns="36576" bIns="36576" anchor="t">
+          <a:bodyPr wrap="square" lIns="36576" tIns="36576" rIns="36576" bIns="36576" anchor="t">
             <a:spAutoFit/>
           </a:bodyPr>
           <a:lstStyle/>
@@ -15882,7 +15797,7 @@
           <a:noFill/>
         </p:spPr>
         <p:txBody>
-          <a:bodyPr wrap="square" lIns="36576" rIns="36576" tIns="36576" bIns="36576" anchor="t">
+          <a:bodyPr wrap="square" lIns="36576" tIns="36576" rIns="36576" bIns="36576" anchor="t">
             <a:spAutoFit/>
           </a:bodyPr>
           <a:lstStyle/>
@@ -15945,7 +15860,7 @@
           </a:fontRef>
         </p:style>
         <p:txBody>
-          <a:bodyPr rtlCol="0" anchor="ctr" lIns="54864" rIns="54864" tIns="9144" bIns="9144"/>
+          <a:bodyPr lIns="54864" tIns="9144" rIns="54864" bIns="9144" rtlCol="0" anchor="ctr"/>
           <a:lstStyle/>
           <a:p>
             <a:pPr algn="ctr"/>
@@ -15999,7 +15914,7 @@
           </a:fontRef>
         </p:style>
         <p:txBody>
-          <a:bodyPr rtlCol="0" anchor="ctr" lIns="54864" rIns="54864" tIns="9144" bIns="9144"/>
+          <a:bodyPr lIns="54864" tIns="9144" rIns="54864" bIns="9144" rtlCol="0" anchor="ctr"/>
           <a:lstStyle/>
           <a:p>
             <a:pPr algn="ctr"/>
@@ -16053,7 +15968,7 @@
           </a:fontRef>
         </p:style>
         <p:txBody>
-          <a:bodyPr rtlCol="0" anchor="ctr" lIns="54864" rIns="54864" tIns="9144" bIns="9144"/>
+          <a:bodyPr lIns="54864" tIns="9144" rIns="54864" bIns="9144" rtlCol="0" anchor="ctr"/>
           <a:lstStyle/>
           <a:p>
             <a:pPr algn="ctr"/>
@@ -16111,6 +16026,7 @@
           <a:lstStyle/>
           <a:p>
             <a:pPr algn="ctr"/>
+            <a:endParaRPr/>
           </a:p>
         </p:txBody>
       </p:sp>
@@ -16131,7 +16047,7 @@
           <a:noFill/>
         </p:spPr>
         <p:txBody>
-          <a:bodyPr wrap="square" lIns="36576" rIns="36576" tIns="36576" bIns="36576" anchor="t">
+          <a:bodyPr wrap="square" lIns="36576" tIns="36576" rIns="36576" bIns="36576" anchor="t">
             <a:spAutoFit/>
           </a:bodyPr>
           <a:lstStyle/>
@@ -16173,7 +16089,7 @@
           <a:noFill/>
         </p:spPr>
         <p:txBody>
-          <a:bodyPr wrap="square" lIns="36576" rIns="36576" tIns="36576" bIns="36576" anchor="t">
+          <a:bodyPr wrap="square" lIns="36576" tIns="36576" rIns="36576" bIns="36576" anchor="t">
             <a:spAutoFit/>
           </a:bodyPr>
           <a:lstStyle/>
@@ -16215,7 +16131,7 @@
           <a:noFill/>
         </p:spPr>
         <p:txBody>
-          <a:bodyPr wrap="square" lIns="36576" rIns="36576" tIns="36576" bIns="36576" anchor="t">
+          <a:bodyPr wrap="square" lIns="36576" tIns="36576" rIns="36576" bIns="36576" anchor="t">
             <a:spAutoFit/>
           </a:bodyPr>
           <a:lstStyle/>
@@ -16282,6 +16198,7 @@
           <a:lstStyle/>
           <a:p>
             <a:pPr algn="ctr"/>
+            <a:endParaRPr/>
           </a:p>
         </p:txBody>
       </p:sp>
@@ -16302,7 +16219,7 @@
           <a:noFill/>
         </p:spPr>
         <p:txBody>
-          <a:bodyPr wrap="square" lIns="36576" rIns="36576" tIns="36576" bIns="36576" anchor="t">
+          <a:bodyPr wrap="square" lIns="36576" tIns="36576" rIns="36576" bIns="36576" anchor="t">
             <a:spAutoFit/>
           </a:bodyPr>
           <a:lstStyle/>
@@ -16344,7 +16261,7 @@
           <a:noFill/>
         </p:spPr>
         <p:txBody>
-          <a:bodyPr wrap="square" lIns="36576" rIns="36576" tIns="36576" bIns="36576" anchor="t">
+          <a:bodyPr wrap="square" lIns="36576" tIns="36576" rIns="36576" bIns="36576" anchor="t">
             <a:spAutoFit/>
           </a:bodyPr>
           <a:lstStyle/>
@@ -16386,7 +16303,7 @@
           <a:noFill/>
         </p:spPr>
         <p:txBody>
-          <a:bodyPr wrap="square" lIns="36576" rIns="36576" tIns="36576" bIns="36576" anchor="t">
+          <a:bodyPr wrap="square" lIns="36576" tIns="36576" rIns="36576" bIns="36576" anchor="t">
             <a:spAutoFit/>
           </a:bodyPr>
           <a:lstStyle/>
@@ -16453,6 +16370,7 @@
           <a:lstStyle/>
           <a:p>
             <a:pPr algn="ctr"/>
+            <a:endParaRPr/>
           </a:p>
         </p:txBody>
       </p:sp>
@@ -16473,7 +16391,7 @@
           <a:noFill/>
         </p:spPr>
         <p:txBody>
-          <a:bodyPr wrap="square" lIns="36576" rIns="36576" tIns="36576" bIns="36576" anchor="t">
+          <a:bodyPr wrap="square" lIns="36576" tIns="36576" rIns="36576" bIns="36576" anchor="t">
             <a:spAutoFit/>
           </a:bodyPr>
           <a:lstStyle/>
@@ -16515,7 +16433,7 @@
           <a:noFill/>
         </p:spPr>
         <p:txBody>
-          <a:bodyPr wrap="square" lIns="36576" rIns="36576" tIns="36576" bIns="36576" anchor="t">
+          <a:bodyPr wrap="square" lIns="36576" tIns="36576" rIns="36576" bIns="36576" anchor="t">
             <a:spAutoFit/>
           </a:bodyPr>
           <a:lstStyle/>
@@ -16557,7 +16475,7 @@
           <a:noFill/>
         </p:spPr>
         <p:txBody>
-          <a:bodyPr wrap="square" lIns="36576" rIns="36576" tIns="36576" bIns="36576" anchor="t">
+          <a:bodyPr wrap="square" lIns="36576" tIns="36576" rIns="36576" bIns="36576" anchor="t">
             <a:spAutoFit/>
           </a:bodyPr>
           <a:lstStyle/>
@@ -16624,6 +16542,7 @@
           <a:lstStyle/>
           <a:p>
             <a:pPr algn="ctr"/>
+            <a:endParaRPr/>
           </a:p>
         </p:txBody>
       </p:sp>
@@ -16644,7 +16563,7 @@
           <a:noFill/>
         </p:spPr>
         <p:txBody>
-          <a:bodyPr wrap="square" lIns="36576" rIns="36576" tIns="36576" bIns="36576" anchor="t">
+          <a:bodyPr wrap="square" lIns="36576" tIns="36576" rIns="36576" bIns="36576" anchor="t">
             <a:spAutoFit/>
           </a:bodyPr>
           <a:lstStyle/>
@@ -16686,7 +16605,7 @@
           <a:noFill/>
         </p:spPr>
         <p:txBody>
-          <a:bodyPr wrap="square" lIns="36576" rIns="36576" tIns="36576" bIns="36576" anchor="t">
+          <a:bodyPr wrap="square" lIns="36576" tIns="36576" rIns="36576" bIns="36576" anchor="t">
             <a:spAutoFit/>
           </a:bodyPr>
           <a:lstStyle/>
@@ -16728,7 +16647,7 @@
           <a:noFill/>
         </p:spPr>
         <p:txBody>
-          <a:bodyPr wrap="square" lIns="36576" rIns="36576" tIns="36576" bIns="36576" anchor="t">
+          <a:bodyPr wrap="square" lIns="36576" tIns="36576" rIns="36576" bIns="36576" anchor="t">
             <a:spAutoFit/>
           </a:bodyPr>
           <a:lstStyle/>
@@ -16795,6 +16714,7 @@
           <a:lstStyle/>
           <a:p>
             <a:pPr algn="ctr"/>
+            <a:endParaRPr/>
           </a:p>
         </p:txBody>
       </p:sp>
@@ -16815,7 +16735,7 @@
           <a:noFill/>
         </p:spPr>
         <p:txBody>
-          <a:bodyPr wrap="square" lIns="36576" rIns="36576" tIns="36576" bIns="36576">
+          <a:bodyPr wrap="square" lIns="36576" tIns="36576" rIns="36576" bIns="36576">
             <a:spAutoFit/>
           </a:bodyPr>
           <a:lstStyle/>
@@ -16894,7 +16814,7 @@
           <a:noFill/>
         </p:spPr>
         <p:txBody>
-          <a:bodyPr wrap="square" lIns="36576" rIns="36576" tIns="36576" bIns="36576" anchor="t">
+          <a:bodyPr wrap="square" lIns="36576" tIns="36576" rIns="36576" bIns="36576" anchor="t">
             <a:spAutoFit/>
           </a:bodyPr>
           <a:lstStyle/>
@@ -16928,7 +16848,7 @@
 </file>
 
 <file path=ppt/slides/slide16.xml><?xml version="1.0" encoding="utf-8"?>
-<p:sld xmlns:a="http://schemas.openxmlformats.org/drawingml/2006/main" xmlns:p="http://schemas.openxmlformats.org/presentationml/2006/main" xmlns:r="http://schemas.openxmlformats.org/officeDocument/2006/relationships">
+<p:sld xmlns:a="http://schemas.openxmlformats.org/drawingml/2006/main" xmlns:r="http://schemas.openxmlformats.org/officeDocument/2006/relationships" xmlns:p="http://schemas.openxmlformats.org/presentationml/2006/main">
   <p:cSld>
     <p:bg>
       <p:bgPr>
@@ -16944,7 +16864,14 @@
         <p:cNvGrpSpPr/>
         <p:nvPr/>
       </p:nvGrpSpPr>
-      <p:grpSpPr/>
+      <p:grpSpPr>
+        <a:xfrm>
+          <a:off x="0" y="0"/>
+          <a:ext cx="0" cy="0"/>
+          <a:chOff x="0" y="0"/>
+          <a:chExt cx="0" cy="0"/>
+        </a:xfrm>
+      </p:grpSpPr>
       <p:sp>
         <p:nvSpPr>
           <p:cNvPr id="2" name="TextBox 1"/>
@@ -16962,7 +16889,7 @@
           <a:noFill/>
         </p:spPr>
         <p:txBody>
-          <a:bodyPr wrap="square" lIns="36576" rIns="36576" tIns="36576" bIns="36576" anchor="t">
+          <a:bodyPr wrap="square" lIns="36576" tIns="36576" rIns="36576" bIns="36576" anchor="t">
             <a:spAutoFit/>
           </a:bodyPr>
           <a:lstStyle/>
@@ -17004,7 +16931,7 @@
           <a:noFill/>
         </p:spPr>
         <p:txBody>
-          <a:bodyPr wrap="square" lIns="36576" rIns="36576" tIns="36576" bIns="36576" anchor="t">
+          <a:bodyPr wrap="square" lIns="36576" tIns="36576" rIns="36576" bIns="36576" anchor="t">
             <a:spAutoFit/>
           </a:bodyPr>
           <a:lstStyle/>
@@ -17046,7 +16973,7 @@
           <a:noFill/>
         </p:spPr>
         <p:txBody>
-          <a:bodyPr wrap="square" lIns="36576" rIns="36576" tIns="36576" bIns="36576" anchor="t">
+          <a:bodyPr wrap="square" lIns="36576" tIns="36576" rIns="36576" bIns="36576" anchor="t">
             <a:spAutoFit/>
           </a:bodyPr>
           <a:lstStyle/>
@@ -17109,7 +17036,7 @@
           </a:fontRef>
         </p:style>
         <p:txBody>
-          <a:bodyPr rtlCol="0" anchor="ctr" lIns="54864" rIns="54864" tIns="9144" bIns="9144"/>
+          <a:bodyPr lIns="54864" tIns="9144" rIns="54864" bIns="9144" rtlCol="0" anchor="ctr"/>
           <a:lstStyle/>
           <a:p>
             <a:pPr algn="ctr"/>
@@ -17167,6 +17094,7 @@
           <a:lstStyle/>
           <a:p>
             <a:pPr algn="ctr"/>
+            <a:endParaRPr/>
           </a:p>
         </p:txBody>
       </p:sp>
@@ -17187,7 +17115,7 @@
           <a:noFill/>
         </p:spPr>
         <p:txBody>
-          <a:bodyPr wrap="square" lIns="36576" rIns="36576" tIns="36576" bIns="36576" anchor="t">
+          <a:bodyPr wrap="square" lIns="36576" tIns="36576" rIns="36576" bIns="36576" anchor="t">
             <a:spAutoFit/>
           </a:bodyPr>
           <a:lstStyle/>
@@ -17229,7 +17157,7 @@
           <a:noFill/>
         </p:spPr>
         <p:txBody>
-          <a:bodyPr wrap="square" lIns="36576" rIns="36576" tIns="36576" bIns="36576" anchor="t">
+          <a:bodyPr wrap="square" lIns="36576" tIns="36576" rIns="36576" bIns="36576" anchor="t">
             <a:spAutoFit/>
           </a:bodyPr>
           <a:lstStyle/>
@@ -17296,6 +17224,7 @@
           <a:lstStyle/>
           <a:p>
             <a:pPr algn="ctr"/>
+            <a:endParaRPr/>
           </a:p>
         </p:txBody>
       </p:sp>
@@ -17316,7 +17245,7 @@
           <a:noFill/>
         </p:spPr>
         <p:txBody>
-          <a:bodyPr wrap="square" lIns="36576" rIns="36576" tIns="36576" bIns="36576" anchor="ctr">
+          <a:bodyPr wrap="square" lIns="36576" tIns="36576" rIns="36576" bIns="36576" anchor="ctr">
             <a:spAutoFit/>
           </a:bodyPr>
           <a:lstStyle/>
@@ -17383,6 +17312,7 @@
           <a:lstStyle/>
           <a:p>
             <a:pPr algn="ctr"/>
+            <a:endParaRPr/>
           </a:p>
         </p:txBody>
       </p:sp>
@@ -17403,7 +17333,7 @@
           <a:noFill/>
         </p:spPr>
         <p:txBody>
-          <a:bodyPr wrap="square" lIns="36576" rIns="36576" tIns="36576" bIns="36576" anchor="ctr">
+          <a:bodyPr wrap="square" lIns="36576" tIns="36576" rIns="36576" bIns="36576" anchor="ctr">
             <a:spAutoFit/>
           </a:bodyPr>
           <a:lstStyle/>
@@ -17470,6 +17400,7 @@
           <a:lstStyle/>
           <a:p>
             <a:pPr algn="ctr"/>
+            <a:endParaRPr/>
           </a:p>
         </p:txBody>
       </p:sp>
@@ -17490,7 +17421,7 @@
           <a:noFill/>
         </p:spPr>
         <p:txBody>
-          <a:bodyPr wrap="square" lIns="36576" rIns="36576" tIns="36576" bIns="36576" anchor="ctr">
+          <a:bodyPr wrap="square" lIns="36576" tIns="36576" rIns="36576" bIns="36576" anchor="ctr">
             <a:spAutoFit/>
           </a:bodyPr>
           <a:lstStyle/>
@@ -17555,6 +17486,7 @@
           <a:lstStyle/>
           <a:p>
             <a:pPr algn="ctr"/>
+            <a:endParaRPr/>
           </a:p>
         </p:txBody>
       </p:sp>
@@ -17575,7 +17507,7 @@
           <a:noFill/>
         </p:spPr>
         <p:txBody>
-          <a:bodyPr wrap="square" lIns="36576" rIns="36576" tIns="36576" bIns="36576" anchor="t">
+          <a:bodyPr wrap="square" lIns="36576" tIns="36576" rIns="36576" bIns="36576" anchor="t">
             <a:spAutoFit/>
           </a:bodyPr>
           <a:lstStyle/>
@@ -17642,6 +17574,7 @@
           <a:lstStyle/>
           <a:p>
             <a:pPr algn="ctr"/>
+            <a:endParaRPr/>
           </a:p>
         </p:txBody>
       </p:sp>
@@ -17662,7 +17595,7 @@
           <a:noFill/>
         </p:spPr>
         <p:txBody>
-          <a:bodyPr wrap="square" lIns="36576" rIns="36576" tIns="36576" bIns="36576" anchor="ctr">
+          <a:bodyPr wrap="square" lIns="36576" tIns="36576" rIns="36576" bIns="36576" anchor="ctr">
             <a:spAutoFit/>
           </a:bodyPr>
           <a:lstStyle/>
@@ -17729,6 +17662,7 @@
           <a:lstStyle/>
           <a:p>
             <a:pPr algn="ctr"/>
+            <a:endParaRPr/>
           </a:p>
         </p:txBody>
       </p:sp>
@@ -17749,7 +17683,7 @@
           <a:noFill/>
         </p:spPr>
         <p:txBody>
-          <a:bodyPr wrap="square" lIns="36576" rIns="36576" tIns="36576" bIns="36576" anchor="ctr">
+          <a:bodyPr wrap="square" lIns="36576" tIns="36576" rIns="36576" bIns="36576" anchor="ctr">
             <a:spAutoFit/>
           </a:bodyPr>
           <a:lstStyle/>
@@ -17816,6 +17750,7 @@
           <a:lstStyle/>
           <a:p>
             <a:pPr algn="ctr"/>
+            <a:endParaRPr/>
           </a:p>
         </p:txBody>
       </p:sp>
@@ -17836,7 +17771,7 @@
           <a:noFill/>
         </p:spPr>
         <p:txBody>
-          <a:bodyPr wrap="square" lIns="36576" rIns="36576" tIns="36576" bIns="36576" anchor="ctr">
+          <a:bodyPr wrap="square" lIns="36576" tIns="36576" rIns="36576" bIns="36576" anchor="ctr">
             <a:spAutoFit/>
           </a:bodyPr>
           <a:lstStyle/>
@@ -17901,6 +17836,7 @@
           <a:lstStyle/>
           <a:p>
             <a:pPr algn="ctr"/>
+            <a:endParaRPr/>
           </a:p>
         </p:txBody>
       </p:sp>
@@ -17942,7 +17878,7 @@
           </a:fontRef>
         </p:style>
         <p:txBody>
-          <a:bodyPr rtlCol="0" anchor="ctr" lIns="54864" rIns="54864" tIns="9144" bIns="9144"/>
+          <a:bodyPr lIns="54864" tIns="9144" rIns="54864" bIns="9144" rtlCol="0" anchor="ctr"/>
           <a:lstStyle/>
           <a:p>
             <a:pPr algn="ctr"/>
@@ -17975,7 +17911,7 @@
           <a:noFill/>
         </p:spPr>
         <p:txBody>
-          <a:bodyPr wrap="square" lIns="36576" rIns="36576" tIns="36576" bIns="36576" anchor="t">
+          <a:bodyPr wrap="square" lIns="36576" tIns="36576" rIns="36576" bIns="36576" anchor="t">
             <a:spAutoFit/>
           </a:bodyPr>
           <a:lstStyle/>
@@ -18042,6 +17978,7 @@
           <a:lstStyle/>
           <a:p>
             <a:pPr algn="ctr"/>
+            <a:endParaRPr/>
           </a:p>
         </p:txBody>
       </p:sp>
@@ -18062,7 +17999,7 @@
           <a:noFill/>
         </p:spPr>
         <p:txBody>
-          <a:bodyPr wrap="square" lIns="36576" rIns="36576" tIns="36576" bIns="36576" anchor="ctr">
+          <a:bodyPr wrap="square" lIns="36576" tIns="36576" rIns="36576" bIns="36576" anchor="ctr">
             <a:spAutoFit/>
           </a:bodyPr>
           <a:lstStyle/>
@@ -18129,6 +18066,7 @@
           <a:lstStyle/>
           <a:p>
             <a:pPr algn="ctr"/>
+            <a:endParaRPr/>
           </a:p>
         </p:txBody>
       </p:sp>
@@ -18149,7 +18087,7 @@
           <a:noFill/>
         </p:spPr>
         <p:txBody>
-          <a:bodyPr wrap="square" lIns="36576" rIns="36576" tIns="36576" bIns="36576" anchor="ctr">
+          <a:bodyPr wrap="square" lIns="36576" tIns="36576" rIns="36576" bIns="36576" anchor="ctr">
             <a:spAutoFit/>
           </a:bodyPr>
           <a:lstStyle/>
@@ -18216,6 +18154,7 @@
           <a:lstStyle/>
           <a:p>
             <a:pPr algn="ctr"/>
+            <a:endParaRPr/>
           </a:p>
         </p:txBody>
       </p:sp>
@@ -18236,7 +18175,7 @@
           <a:noFill/>
         </p:spPr>
         <p:txBody>
-          <a:bodyPr wrap="square" lIns="36576" rIns="36576" tIns="36576" bIns="36576" anchor="ctr">
+          <a:bodyPr wrap="square" lIns="36576" tIns="36576" rIns="36576" bIns="36576" anchor="ctr">
             <a:spAutoFit/>
           </a:bodyPr>
           <a:lstStyle/>
@@ -18301,6 +18240,7 @@
           <a:lstStyle/>
           <a:p>
             <a:pPr algn="ctr"/>
+            <a:endParaRPr/>
           </a:p>
         </p:txBody>
       </p:sp>
@@ -18342,7 +18282,7 @@
           </a:fontRef>
         </p:style>
         <p:txBody>
-          <a:bodyPr rtlCol="0" anchor="ctr" lIns="54864" rIns="54864" tIns="9144" bIns="9144"/>
+          <a:bodyPr lIns="54864" tIns="9144" rIns="54864" bIns="9144" rtlCol="0" anchor="ctr"/>
           <a:lstStyle/>
           <a:p>
             <a:pPr algn="ctr"/>
@@ -18400,6 +18340,7 @@
           <a:lstStyle/>
           <a:p>
             <a:pPr algn="ctr"/>
+            <a:endParaRPr/>
           </a:p>
         </p:txBody>
       </p:sp>
@@ -18420,7 +18361,7 @@
           <a:noFill/>
         </p:spPr>
         <p:txBody>
-          <a:bodyPr wrap="square" lIns="36576" rIns="36576" tIns="36576" bIns="36576" anchor="t">
+          <a:bodyPr wrap="square" lIns="36576" tIns="36576" rIns="36576" bIns="36576" anchor="t">
             <a:spAutoFit/>
           </a:bodyPr>
           <a:lstStyle/>
@@ -18487,6 +18428,7 @@
           <a:lstStyle/>
           <a:p>
             <a:pPr algn="ctr"/>
+            <a:endParaRPr/>
           </a:p>
         </p:txBody>
       </p:sp>
@@ -18507,7 +18449,7 @@
           <a:noFill/>
         </p:spPr>
         <p:txBody>
-          <a:bodyPr wrap="square" lIns="36576" rIns="36576" tIns="36576" bIns="36576" anchor="t">
+          <a:bodyPr wrap="square" lIns="36576" tIns="36576" rIns="36576" bIns="36576" anchor="t">
             <a:spAutoFit/>
           </a:bodyPr>
           <a:lstStyle/>
@@ -18574,6 +18516,7 @@
           <a:lstStyle/>
           <a:p>
             <a:pPr algn="ctr"/>
+            <a:endParaRPr/>
           </a:p>
         </p:txBody>
       </p:sp>
@@ -18594,7 +18537,7 @@
           <a:noFill/>
         </p:spPr>
         <p:txBody>
-          <a:bodyPr wrap="square" lIns="36576" rIns="36576" tIns="36576" bIns="36576" anchor="t">
+          <a:bodyPr wrap="square" lIns="36576" tIns="36576" rIns="36576" bIns="36576" anchor="t">
             <a:spAutoFit/>
           </a:bodyPr>
           <a:lstStyle/>
@@ -18661,6 +18604,7 @@
           <a:lstStyle/>
           <a:p>
             <a:pPr algn="ctr"/>
+            <a:endParaRPr/>
           </a:p>
         </p:txBody>
       </p:sp>
@@ -18702,7 +18646,7 @@
           </a:fontRef>
         </p:style>
         <p:txBody>
-          <a:bodyPr rtlCol="0" anchor="ctr" lIns="54864" rIns="54864" tIns="9144" bIns="9144"/>
+          <a:bodyPr lIns="54864" tIns="9144" rIns="54864" bIns="9144" rtlCol="0" anchor="ctr"/>
           <a:lstStyle/>
           <a:p>
             <a:pPr algn="ctr"/>
@@ -18735,7 +18679,7 @@
           <a:noFill/>
         </p:spPr>
         <p:txBody>
-          <a:bodyPr wrap="square" lIns="36576" rIns="36576" tIns="36576" bIns="36576" anchor="t">
+          <a:bodyPr wrap="square" lIns="36576" tIns="36576" rIns="36576" bIns="36576" anchor="t">
             <a:spAutoFit/>
           </a:bodyPr>
           <a:lstStyle/>
@@ -18777,7 +18721,7 @@
           <a:noFill/>
         </p:spPr>
         <p:txBody>
-          <a:bodyPr wrap="square" lIns="36576" rIns="36576" tIns="36576" bIns="36576" anchor="t">
+          <a:bodyPr wrap="square" lIns="36576" tIns="36576" rIns="36576" bIns="36576" anchor="t">
             <a:spAutoFit/>
           </a:bodyPr>
           <a:lstStyle/>
@@ -18844,6 +18788,7 @@
           <a:lstStyle/>
           <a:p>
             <a:pPr algn="ctr"/>
+            <a:endParaRPr/>
           </a:p>
         </p:txBody>
       </p:sp>
@@ -18885,7 +18830,7 @@
           </a:fontRef>
         </p:style>
         <p:txBody>
-          <a:bodyPr rtlCol="0" anchor="ctr" lIns="54864" rIns="54864" tIns="9144" bIns="9144"/>
+          <a:bodyPr lIns="54864" tIns="9144" rIns="54864" bIns="9144" rtlCol="0" anchor="ctr"/>
           <a:lstStyle/>
           <a:p>
             <a:pPr algn="ctr"/>
@@ -18918,7 +18863,7 @@
           <a:noFill/>
         </p:spPr>
         <p:txBody>
-          <a:bodyPr wrap="square" lIns="36576" rIns="36576" tIns="36576" bIns="36576" anchor="t">
+          <a:bodyPr wrap="square" lIns="36576" tIns="36576" rIns="36576" bIns="36576" anchor="t">
             <a:spAutoFit/>
           </a:bodyPr>
           <a:lstStyle/>
@@ -18960,7 +18905,7 @@
           <a:noFill/>
         </p:spPr>
         <p:txBody>
-          <a:bodyPr wrap="square" lIns="36576" rIns="36576" tIns="36576" bIns="36576" anchor="t">
+          <a:bodyPr wrap="square" lIns="36576" tIns="36576" rIns="36576" bIns="36576" anchor="t">
             <a:spAutoFit/>
           </a:bodyPr>
           <a:lstStyle/>
@@ -19027,6 +18972,7 @@
           <a:lstStyle/>
           <a:p>
             <a:pPr algn="ctr"/>
+            <a:endParaRPr/>
           </a:p>
         </p:txBody>
       </p:sp>
@@ -19068,7 +19014,7 @@
           </a:fontRef>
         </p:style>
         <p:txBody>
-          <a:bodyPr rtlCol="0" anchor="ctr" lIns="54864" rIns="54864" tIns="9144" bIns="9144"/>
+          <a:bodyPr lIns="54864" tIns="9144" rIns="54864" bIns="9144" rtlCol="0" anchor="ctr"/>
           <a:lstStyle/>
           <a:p>
             <a:pPr algn="ctr"/>
@@ -19101,7 +19047,7 @@
           <a:noFill/>
         </p:spPr>
         <p:txBody>
-          <a:bodyPr wrap="square" lIns="36576" rIns="36576" tIns="36576" bIns="36576" anchor="t">
+          <a:bodyPr wrap="square" lIns="36576" tIns="36576" rIns="36576" bIns="36576" anchor="t">
             <a:spAutoFit/>
           </a:bodyPr>
           <a:lstStyle/>
@@ -19143,7 +19089,7 @@
           <a:noFill/>
         </p:spPr>
         <p:txBody>
-          <a:bodyPr wrap="square" lIns="36576" rIns="36576" tIns="36576" bIns="36576" anchor="t">
+          <a:bodyPr wrap="square" lIns="36576" tIns="36576" rIns="36576" bIns="36576" anchor="t">
             <a:spAutoFit/>
           </a:bodyPr>
           <a:lstStyle/>
@@ -19210,6 +19156,7 @@
           <a:lstStyle/>
           <a:p>
             <a:pPr algn="ctr"/>
+            <a:endParaRPr/>
           </a:p>
         </p:txBody>
       </p:sp>
@@ -19251,7 +19198,7 @@
           </a:fontRef>
         </p:style>
         <p:txBody>
-          <a:bodyPr rtlCol="0" anchor="ctr" lIns="54864" rIns="54864" tIns="9144" bIns="9144"/>
+          <a:bodyPr lIns="54864" tIns="9144" rIns="54864" bIns="9144" rtlCol="0" anchor="ctr"/>
           <a:lstStyle/>
           <a:p>
             <a:pPr algn="ctr"/>
@@ -19284,7 +19231,7 @@
           <a:noFill/>
         </p:spPr>
         <p:txBody>
-          <a:bodyPr wrap="square" lIns="36576" rIns="36576" tIns="36576" bIns="36576" anchor="t">
+          <a:bodyPr wrap="square" lIns="36576" tIns="36576" rIns="36576" bIns="36576" anchor="t">
             <a:spAutoFit/>
           </a:bodyPr>
           <a:lstStyle/>
@@ -19326,7 +19273,7 @@
           <a:noFill/>
         </p:spPr>
         <p:txBody>
-          <a:bodyPr wrap="square" lIns="36576" rIns="36576" tIns="36576" bIns="36576" anchor="t">
+          <a:bodyPr wrap="square" lIns="36576" tIns="36576" rIns="36576" bIns="36576" anchor="t">
             <a:spAutoFit/>
           </a:bodyPr>
           <a:lstStyle/>
@@ -19403,7 +19350,7 @@
           <a:noFill/>
         </p:spPr>
         <p:txBody>
-          <a:bodyPr wrap="square" lIns="36576" rIns="36576" tIns="36576" bIns="36576" anchor="t">
+          <a:bodyPr wrap="square" lIns="36576" tIns="36576" rIns="36576" bIns="36576" anchor="t">
             <a:spAutoFit/>
           </a:bodyPr>
           <a:lstStyle/>
@@ -19437,7 +19384,7 @@
 </file>
 
 <file path=ppt/slides/slide17.xml><?xml version="1.0" encoding="utf-8"?>
-<p:sld xmlns:a="http://schemas.openxmlformats.org/drawingml/2006/main" xmlns:p="http://schemas.openxmlformats.org/presentationml/2006/main" xmlns:r="http://schemas.openxmlformats.org/officeDocument/2006/relationships">
+<p:sld xmlns:a="http://schemas.openxmlformats.org/drawingml/2006/main" xmlns:r="http://schemas.openxmlformats.org/officeDocument/2006/relationships" xmlns:p="http://schemas.openxmlformats.org/presentationml/2006/main">
   <p:cSld>
     <p:bg>
       <p:bgPr>
@@ -19453,7 +19400,14 @@
         <p:cNvGrpSpPr/>
         <p:nvPr/>
       </p:nvGrpSpPr>
-      <p:grpSpPr/>
+      <p:grpSpPr>
+        <a:xfrm>
+          <a:off x="0" y="0"/>
+          <a:ext cx="0" cy="0"/>
+          <a:chOff x="0" y="0"/>
+          <a:chExt cx="0" cy="0"/>
+        </a:xfrm>
+      </p:grpSpPr>
       <p:sp>
         <p:nvSpPr>
           <p:cNvPr id="2" name="TextBox 1"/>
@@ -19471,7 +19425,7 @@
           <a:noFill/>
         </p:spPr>
         <p:txBody>
-          <a:bodyPr wrap="square" lIns="36576" rIns="36576" tIns="36576" bIns="36576" anchor="t">
+          <a:bodyPr wrap="square" lIns="36576" tIns="36576" rIns="36576" bIns="36576" anchor="t">
             <a:spAutoFit/>
           </a:bodyPr>
           <a:lstStyle/>
@@ -19513,7 +19467,7 @@
           <a:noFill/>
         </p:spPr>
         <p:txBody>
-          <a:bodyPr wrap="square" lIns="36576" rIns="36576" tIns="36576" bIns="36576" anchor="t">
+          <a:bodyPr wrap="square" lIns="36576" tIns="36576" rIns="36576" bIns="36576" anchor="t">
             <a:spAutoFit/>
           </a:bodyPr>
           <a:lstStyle/>
@@ -19555,7 +19509,7 @@
           <a:noFill/>
         </p:spPr>
         <p:txBody>
-          <a:bodyPr wrap="square" lIns="36576" rIns="36576" tIns="36576" bIns="36576" anchor="t">
+          <a:bodyPr wrap="square" lIns="36576" tIns="36576" rIns="36576" bIns="36576" anchor="t">
             <a:spAutoFit/>
           </a:bodyPr>
           <a:lstStyle/>
@@ -19622,6 +19576,7 @@
           <a:lstStyle/>
           <a:p>
             <a:pPr algn="ctr"/>
+            <a:endParaRPr/>
           </a:p>
         </p:txBody>
       </p:sp>
@@ -19667,6 +19622,7 @@
           <a:lstStyle/>
           <a:p>
             <a:pPr algn="ctr"/>
+            <a:endParaRPr/>
           </a:p>
         </p:txBody>
       </p:sp>
@@ -19687,7 +19643,7 @@
           <a:noFill/>
         </p:spPr>
         <p:txBody>
-          <a:bodyPr wrap="square" lIns="36576" rIns="36576" tIns="36576" bIns="36576" anchor="ctr">
+          <a:bodyPr wrap="square" lIns="36576" tIns="36576" rIns="36576" bIns="36576" anchor="ctr">
             <a:spAutoFit/>
           </a:bodyPr>
           <a:lstStyle/>
@@ -19729,7 +19685,7 @@
           <a:noFill/>
         </p:spPr>
         <p:txBody>
-          <a:bodyPr wrap="square" lIns="36576" rIns="36576" tIns="36576" bIns="36576" anchor="t">
+          <a:bodyPr wrap="square" lIns="36576" tIns="36576" rIns="36576" bIns="36576" anchor="t">
             <a:spAutoFit/>
           </a:bodyPr>
           <a:lstStyle/>
@@ -19792,7 +19748,7 @@
           </a:fontRef>
         </p:style>
         <p:txBody>
-          <a:bodyPr rtlCol="0" anchor="ctr" lIns="54864" rIns="54864" tIns="9144" bIns="9144"/>
+          <a:bodyPr lIns="54864" tIns="9144" rIns="54864" bIns="9144" rtlCol="0" anchor="ctr"/>
           <a:lstStyle/>
           <a:p>
             <a:pPr algn="ctr"/>
@@ -19825,7 +19781,7 @@
           <a:noFill/>
         </p:spPr>
         <p:txBody>
-          <a:bodyPr wrap="square" lIns="36576" rIns="36576" tIns="36576" bIns="36576" anchor="t">
+          <a:bodyPr wrap="square" lIns="36576" tIns="36576" rIns="36576" bIns="36576" anchor="t">
             <a:spAutoFit/>
           </a:bodyPr>
           <a:lstStyle/>
@@ -19892,6 +19848,7 @@
           <a:lstStyle/>
           <a:p>
             <a:pPr algn="ctr"/>
+            <a:endParaRPr/>
           </a:p>
         </p:txBody>
       </p:sp>
@@ -19937,6 +19894,7 @@
           <a:lstStyle/>
           <a:p>
             <a:pPr algn="ctr"/>
+            <a:endParaRPr/>
           </a:p>
         </p:txBody>
       </p:sp>
@@ -19957,7 +19915,7 @@
           <a:noFill/>
         </p:spPr>
         <p:txBody>
-          <a:bodyPr wrap="square" lIns="36576" rIns="36576" tIns="36576" bIns="36576" anchor="ctr">
+          <a:bodyPr wrap="square" lIns="36576" tIns="36576" rIns="36576" bIns="36576" anchor="ctr">
             <a:spAutoFit/>
           </a:bodyPr>
           <a:lstStyle/>
@@ -19999,7 +19957,7 @@
           <a:noFill/>
         </p:spPr>
         <p:txBody>
-          <a:bodyPr wrap="square" lIns="36576" rIns="36576" tIns="36576" bIns="36576" anchor="t">
+          <a:bodyPr wrap="square" lIns="36576" tIns="36576" rIns="36576" bIns="36576" anchor="t">
             <a:spAutoFit/>
           </a:bodyPr>
           <a:lstStyle/>
@@ -20062,7 +20020,7 @@
           </a:fontRef>
         </p:style>
         <p:txBody>
-          <a:bodyPr rtlCol="0" anchor="ctr" lIns="54864" rIns="54864" tIns="9144" bIns="9144"/>
+          <a:bodyPr lIns="54864" tIns="9144" rIns="54864" bIns="9144" rtlCol="0" anchor="ctr"/>
           <a:lstStyle/>
           <a:p>
             <a:pPr algn="ctr"/>
@@ -20095,7 +20053,7 @@
           <a:noFill/>
         </p:spPr>
         <p:txBody>
-          <a:bodyPr wrap="square" lIns="36576" rIns="36576" tIns="36576" bIns="36576" anchor="t">
+          <a:bodyPr wrap="square" lIns="36576" tIns="36576" rIns="36576" bIns="36576" anchor="t">
             <a:spAutoFit/>
           </a:bodyPr>
           <a:lstStyle/>
@@ -20162,6 +20120,7 @@
           <a:lstStyle/>
           <a:p>
             <a:pPr algn="ctr"/>
+            <a:endParaRPr/>
           </a:p>
         </p:txBody>
       </p:sp>
@@ -20207,6 +20166,7 @@
           <a:lstStyle/>
           <a:p>
             <a:pPr algn="ctr"/>
+            <a:endParaRPr/>
           </a:p>
         </p:txBody>
       </p:sp>
@@ -20227,7 +20187,7 @@
           <a:noFill/>
         </p:spPr>
         <p:txBody>
-          <a:bodyPr wrap="square" lIns="36576" rIns="36576" tIns="36576" bIns="36576" anchor="ctr">
+          <a:bodyPr wrap="square" lIns="36576" tIns="36576" rIns="36576" bIns="36576" anchor="ctr">
             <a:spAutoFit/>
           </a:bodyPr>
           <a:lstStyle/>
@@ -20269,7 +20229,7 @@
           <a:noFill/>
         </p:spPr>
         <p:txBody>
-          <a:bodyPr wrap="square" lIns="36576" rIns="36576" tIns="36576" bIns="36576" anchor="t">
+          <a:bodyPr wrap="square" lIns="36576" tIns="36576" rIns="36576" bIns="36576" anchor="t">
             <a:spAutoFit/>
           </a:bodyPr>
           <a:lstStyle/>
@@ -20332,7 +20292,7 @@
           </a:fontRef>
         </p:style>
         <p:txBody>
-          <a:bodyPr rtlCol="0" anchor="ctr" lIns="54864" rIns="54864" tIns="9144" bIns="9144"/>
+          <a:bodyPr lIns="54864" tIns="9144" rIns="54864" bIns="9144" rtlCol="0" anchor="ctr"/>
           <a:lstStyle/>
           <a:p>
             <a:pPr algn="ctr"/>
@@ -20365,7 +20325,7 @@
           <a:noFill/>
         </p:spPr>
         <p:txBody>
-          <a:bodyPr wrap="square" lIns="36576" rIns="36576" tIns="36576" bIns="36576" anchor="t">
+          <a:bodyPr wrap="square" lIns="36576" tIns="36576" rIns="36576" bIns="36576" anchor="t">
             <a:spAutoFit/>
           </a:bodyPr>
           <a:lstStyle/>
@@ -20407,7 +20367,7 @@
           <a:noFill/>
         </p:spPr>
         <p:txBody>
-          <a:bodyPr wrap="square" lIns="36576" rIns="36576" tIns="36576" bIns="36576" anchor="t">
+          <a:bodyPr wrap="square" lIns="36576" tIns="36576" rIns="36576" bIns="36576" anchor="t">
             <a:spAutoFit/>
           </a:bodyPr>
           <a:lstStyle/>
@@ -20484,7 +20444,7 @@
           <a:noFill/>
         </p:spPr>
         <p:txBody>
-          <a:bodyPr wrap="square" lIns="36576" rIns="36576" tIns="36576" bIns="36576" anchor="t">
+          <a:bodyPr wrap="square" lIns="36576" tIns="36576" rIns="36576" bIns="36576" anchor="t">
             <a:spAutoFit/>
           </a:bodyPr>
           <a:lstStyle/>
@@ -20518,7 +20478,7 @@
 </file>
 
 <file path=ppt/slides/slide18.xml><?xml version="1.0" encoding="utf-8"?>
-<p:sld xmlns:a="http://schemas.openxmlformats.org/drawingml/2006/main" xmlns:p="http://schemas.openxmlformats.org/presentationml/2006/main" xmlns:r="http://schemas.openxmlformats.org/officeDocument/2006/relationships">
+<p:sld xmlns:a="http://schemas.openxmlformats.org/drawingml/2006/main" xmlns:r="http://schemas.openxmlformats.org/officeDocument/2006/relationships" xmlns:p="http://schemas.openxmlformats.org/presentationml/2006/main">
   <p:cSld>
     <p:bg>
       <p:bgPr>
@@ -20534,7 +20494,14 @@
         <p:cNvGrpSpPr/>
         <p:nvPr/>
       </p:nvGrpSpPr>
-      <p:grpSpPr/>
+      <p:grpSpPr>
+        <a:xfrm>
+          <a:off x="0" y="0"/>
+          <a:ext cx="0" cy="0"/>
+          <a:chOff x="0" y="0"/>
+          <a:chExt cx="0" cy="0"/>
+        </a:xfrm>
+      </p:grpSpPr>
       <p:sp>
         <p:nvSpPr>
           <p:cNvPr id="2" name="TextBox 1"/>
@@ -20552,7 +20519,7 @@
           <a:noFill/>
         </p:spPr>
         <p:txBody>
-          <a:bodyPr wrap="square" lIns="36576" rIns="36576" tIns="36576" bIns="36576" anchor="t">
+          <a:bodyPr wrap="square" lIns="36576" tIns="36576" rIns="36576" bIns="36576" anchor="t">
             <a:spAutoFit/>
           </a:bodyPr>
           <a:lstStyle/>
@@ -20594,7 +20561,7 @@
           <a:noFill/>
         </p:spPr>
         <p:txBody>
-          <a:bodyPr wrap="square" lIns="36576" rIns="36576" tIns="36576" bIns="36576" anchor="t">
+          <a:bodyPr wrap="square" lIns="36576" tIns="36576" rIns="36576" bIns="36576" anchor="t">
             <a:spAutoFit/>
           </a:bodyPr>
           <a:lstStyle/>
@@ -20636,7 +20603,7 @@
           <a:noFill/>
         </p:spPr>
         <p:txBody>
-          <a:bodyPr wrap="square" lIns="36576" rIns="36576" tIns="36576" bIns="36576" anchor="t">
+          <a:bodyPr wrap="square" lIns="36576" tIns="36576" rIns="36576" bIns="36576" anchor="t">
             <a:spAutoFit/>
           </a:bodyPr>
           <a:lstStyle/>
@@ -20703,6 +20670,7 @@
           <a:lstStyle/>
           <a:p>
             <a:pPr algn="ctr"/>
+            <a:endParaRPr/>
           </a:p>
         </p:txBody>
       </p:sp>
@@ -20744,7 +20712,7 @@
           </a:fontRef>
         </p:style>
         <p:txBody>
-          <a:bodyPr rtlCol="0" anchor="ctr" lIns="54864" rIns="54864" tIns="9144" bIns="9144"/>
+          <a:bodyPr lIns="54864" tIns="9144" rIns="54864" bIns="9144" rtlCol="0" anchor="ctr"/>
           <a:lstStyle/>
           <a:p>
             <a:pPr algn="ctr"/>
@@ -20777,7 +20745,7 @@
           <a:noFill/>
         </p:spPr>
         <p:txBody>
-          <a:bodyPr wrap="square" lIns="36576" rIns="36576" tIns="36576" bIns="36576" anchor="t">
+          <a:bodyPr wrap="square" lIns="36576" tIns="36576" rIns="36576" bIns="36576" anchor="t">
             <a:spAutoFit/>
           </a:bodyPr>
           <a:lstStyle/>
@@ -20875,7 +20843,7 @@
           </a:fontRef>
         </p:style>
         <p:txBody>
-          <a:bodyPr rtlCol="0" anchor="ctr" lIns="54864" rIns="54864" tIns="9144" bIns="9144"/>
+          <a:bodyPr lIns="54864" tIns="9144" rIns="54864" bIns="9144" rtlCol="0" anchor="ctr"/>
           <a:lstStyle/>
           <a:p>
             <a:pPr algn="ctr"/>
@@ -20908,7 +20876,7 @@
           <a:noFill/>
         </p:spPr>
         <p:txBody>
-          <a:bodyPr wrap="square" lIns="36576" rIns="36576" tIns="36576" bIns="36576" anchor="t">
+          <a:bodyPr wrap="square" lIns="36576" tIns="36576" rIns="36576" bIns="36576" anchor="t">
             <a:spAutoFit/>
           </a:bodyPr>
           <a:lstStyle/>
@@ -20975,6 +20943,7 @@
           <a:lstStyle/>
           <a:p>
             <a:pPr algn="ctr"/>
+            <a:endParaRPr/>
           </a:p>
         </p:txBody>
       </p:sp>
@@ -21016,7 +20985,7 @@
           </a:fontRef>
         </p:style>
         <p:txBody>
-          <a:bodyPr rtlCol="0" anchor="ctr" lIns="54864" rIns="54864" tIns="9144" bIns="9144"/>
+          <a:bodyPr lIns="54864" tIns="9144" rIns="54864" bIns="9144" rtlCol="0" anchor="ctr"/>
           <a:lstStyle/>
           <a:p>
             <a:pPr algn="ctr"/>
@@ -21049,7 +21018,7 @@
           <a:noFill/>
         </p:spPr>
         <p:txBody>
-          <a:bodyPr wrap="square" lIns="36576" rIns="36576" tIns="36576" bIns="36576" anchor="t">
+          <a:bodyPr wrap="square" lIns="36576" tIns="36576" rIns="36576" bIns="36576" anchor="t">
             <a:spAutoFit/>
           </a:bodyPr>
           <a:lstStyle/>
@@ -21147,7 +21116,7 @@
           </a:fontRef>
         </p:style>
         <p:txBody>
-          <a:bodyPr rtlCol="0" anchor="ctr" lIns="54864" rIns="54864" tIns="9144" bIns="9144"/>
+          <a:bodyPr lIns="54864" tIns="9144" rIns="54864" bIns="9144" rtlCol="0" anchor="ctr"/>
           <a:lstStyle/>
           <a:p>
             <a:pPr algn="ctr"/>
@@ -21180,7 +21149,7 @@
           <a:noFill/>
         </p:spPr>
         <p:txBody>
-          <a:bodyPr wrap="square" lIns="36576" rIns="36576" tIns="36576" bIns="36576" anchor="t">
+          <a:bodyPr wrap="square" lIns="36576" tIns="36576" rIns="36576" bIns="36576" anchor="t">
             <a:spAutoFit/>
           </a:bodyPr>
           <a:lstStyle/>
@@ -21247,6 +21216,7 @@
           <a:lstStyle/>
           <a:p>
             <a:pPr algn="ctr"/>
+            <a:endParaRPr/>
           </a:p>
         </p:txBody>
       </p:sp>
@@ -21288,7 +21258,7 @@
           </a:fontRef>
         </p:style>
         <p:txBody>
-          <a:bodyPr rtlCol="0" anchor="ctr" lIns="54864" rIns="54864" tIns="9144" bIns="9144"/>
+          <a:bodyPr lIns="54864" tIns="9144" rIns="54864" bIns="9144" rtlCol="0" anchor="ctr"/>
           <a:lstStyle/>
           <a:p>
             <a:pPr algn="ctr"/>
@@ -21321,7 +21291,7 @@
           <a:noFill/>
         </p:spPr>
         <p:txBody>
-          <a:bodyPr wrap="square" lIns="36576" rIns="36576" tIns="36576" bIns="36576" anchor="t">
+          <a:bodyPr wrap="square" lIns="36576" tIns="36576" rIns="36576" bIns="36576" anchor="t">
             <a:spAutoFit/>
           </a:bodyPr>
           <a:lstStyle/>
@@ -21419,7 +21389,7 @@
           </a:fontRef>
         </p:style>
         <p:txBody>
-          <a:bodyPr rtlCol="0" anchor="ctr" lIns="54864" rIns="54864" tIns="9144" bIns="9144"/>
+          <a:bodyPr lIns="54864" tIns="9144" rIns="54864" bIns="9144" rtlCol="0" anchor="ctr"/>
           <a:lstStyle/>
           <a:p>
             <a:pPr algn="ctr"/>
@@ -21452,7 +21422,7 @@
           <a:noFill/>
         </p:spPr>
         <p:txBody>
-          <a:bodyPr wrap="square" lIns="36576" rIns="36576" tIns="36576" bIns="36576" anchor="t">
+          <a:bodyPr wrap="square" lIns="36576" tIns="36576" rIns="36576" bIns="36576" anchor="t">
             <a:spAutoFit/>
           </a:bodyPr>
           <a:lstStyle/>
@@ -21519,6 +21489,7 @@
           <a:lstStyle/>
           <a:p>
             <a:pPr algn="ctr"/>
+            <a:endParaRPr/>
           </a:p>
         </p:txBody>
       </p:sp>
@@ -21560,7 +21531,7 @@
           </a:fontRef>
         </p:style>
         <p:txBody>
-          <a:bodyPr rtlCol="0" anchor="ctr" lIns="54864" rIns="54864" tIns="9144" bIns="9144"/>
+          <a:bodyPr lIns="54864" tIns="9144" rIns="54864" bIns="9144" rtlCol="0" anchor="ctr"/>
           <a:lstStyle/>
           <a:p>
             <a:pPr algn="ctr"/>
@@ -21593,7 +21564,7 @@
           <a:noFill/>
         </p:spPr>
         <p:txBody>
-          <a:bodyPr wrap="square" lIns="36576" rIns="36576" tIns="36576" bIns="36576" anchor="t">
+          <a:bodyPr wrap="square" lIns="36576" tIns="36576" rIns="36576" bIns="36576" anchor="t">
             <a:spAutoFit/>
           </a:bodyPr>
           <a:lstStyle/>
@@ -21691,7 +21662,7 @@
           </a:fontRef>
         </p:style>
         <p:txBody>
-          <a:bodyPr rtlCol="0" anchor="ctr" lIns="54864" rIns="54864" tIns="9144" bIns="9144"/>
+          <a:bodyPr lIns="54864" tIns="9144" rIns="54864" bIns="9144" rtlCol="0" anchor="ctr"/>
           <a:lstStyle/>
           <a:p>
             <a:pPr algn="ctr"/>
@@ -21724,7 +21695,7 @@
           <a:noFill/>
         </p:spPr>
         <p:txBody>
-          <a:bodyPr wrap="square" lIns="36576" rIns="36576" tIns="36576" bIns="36576" anchor="t">
+          <a:bodyPr wrap="square" lIns="36576" tIns="36576" rIns="36576" bIns="36576" anchor="t">
             <a:spAutoFit/>
           </a:bodyPr>
           <a:lstStyle/>
@@ -21787,7 +21758,7 @@
           </a:fontRef>
         </p:style>
         <p:txBody>
-          <a:bodyPr rtlCol="0" anchor="ctr" lIns="54864" rIns="54864" tIns="9144" bIns="9144"/>
+          <a:bodyPr lIns="54864" tIns="9144" rIns="54864" bIns="9144" rtlCol="0" anchor="ctr"/>
           <a:lstStyle/>
           <a:p>
             <a:pPr algn="ctr"/>
@@ -21855,7 +21826,7 @@
           <a:noFill/>
         </p:spPr>
         <p:txBody>
-          <a:bodyPr wrap="square" lIns="36576" rIns="36576" tIns="36576" bIns="36576" anchor="t">
+          <a:bodyPr wrap="square" lIns="36576" tIns="36576" rIns="36576" bIns="36576" anchor="t">
             <a:spAutoFit/>
           </a:bodyPr>
           <a:lstStyle/>
@@ -21889,7 +21860,7 @@
 </file>
 
 <file path=ppt/slides/slide19.xml><?xml version="1.0" encoding="utf-8"?>
-<p:sld xmlns:a="http://schemas.openxmlformats.org/drawingml/2006/main" xmlns:p="http://schemas.openxmlformats.org/presentationml/2006/main" xmlns:r="http://schemas.openxmlformats.org/officeDocument/2006/relationships">
+<p:sld xmlns:a="http://schemas.openxmlformats.org/drawingml/2006/main" xmlns:r="http://schemas.openxmlformats.org/officeDocument/2006/relationships" xmlns:p="http://schemas.openxmlformats.org/presentationml/2006/main">
   <p:cSld>
     <p:bg>
       <p:bgPr>
@@ -21905,7 +21876,14 @@
         <p:cNvGrpSpPr/>
         <p:nvPr/>
       </p:nvGrpSpPr>
-      <p:grpSpPr/>
+      <p:grpSpPr>
+        <a:xfrm>
+          <a:off x="0" y="0"/>
+          <a:ext cx="0" cy="0"/>
+          <a:chOff x="0" y="0"/>
+          <a:chExt cx="0" cy="0"/>
+        </a:xfrm>
+      </p:grpSpPr>
       <p:sp>
         <p:nvSpPr>
           <p:cNvPr id="2" name="TextBox 1"/>
@@ -21923,7 +21901,7 @@
           <a:noFill/>
         </p:spPr>
         <p:txBody>
-          <a:bodyPr wrap="square" lIns="36576" rIns="36576" tIns="36576" bIns="36576" anchor="t">
+          <a:bodyPr wrap="square" lIns="36576" tIns="36576" rIns="36576" bIns="36576" anchor="t">
             <a:spAutoFit/>
           </a:bodyPr>
           <a:lstStyle/>
@@ -21965,7 +21943,7 @@
           <a:noFill/>
         </p:spPr>
         <p:txBody>
-          <a:bodyPr wrap="square" lIns="36576" rIns="36576" tIns="36576" bIns="36576" anchor="t">
+          <a:bodyPr wrap="square" lIns="36576" tIns="36576" rIns="36576" bIns="36576" anchor="t">
             <a:spAutoFit/>
           </a:bodyPr>
           <a:lstStyle/>
@@ -22007,7 +21985,7 @@
           <a:noFill/>
         </p:spPr>
         <p:txBody>
-          <a:bodyPr wrap="square" lIns="36576" rIns="36576" tIns="36576" bIns="36576" anchor="t">
+          <a:bodyPr wrap="square" lIns="36576" tIns="36576" rIns="36576" bIns="36576" anchor="t">
             <a:spAutoFit/>
           </a:bodyPr>
           <a:lstStyle/>
@@ -22074,6 +22052,7 @@
           <a:lstStyle/>
           <a:p>
             <a:pPr algn="ctr"/>
+            <a:endParaRPr/>
           </a:p>
         </p:txBody>
       </p:sp>
@@ -22094,7 +22073,7 @@
           <a:noFill/>
         </p:spPr>
         <p:txBody>
-          <a:bodyPr wrap="square" lIns="36576" rIns="36576" tIns="36576" bIns="36576" anchor="t">
+          <a:bodyPr wrap="square" lIns="36576" tIns="36576" rIns="36576" bIns="36576" anchor="t">
             <a:spAutoFit/>
           </a:bodyPr>
           <a:lstStyle/>
@@ -22136,7 +22115,7 @@
           <a:noFill/>
         </p:spPr>
         <p:txBody>
-          <a:bodyPr wrap="square" lIns="36576" rIns="36576" tIns="36576" bIns="36576" anchor="t">
+          <a:bodyPr wrap="square" lIns="36576" tIns="36576" rIns="36576" bIns="36576" anchor="t">
             <a:spAutoFit/>
           </a:bodyPr>
           <a:lstStyle/>
@@ -22238,6 +22217,7 @@
           <a:lstStyle/>
           <a:p>
             <a:pPr algn="ctr"/>
+            <a:endParaRPr/>
           </a:p>
         </p:txBody>
       </p:sp>
@@ -22258,7 +22238,7 @@
           <a:noFill/>
         </p:spPr>
         <p:txBody>
-          <a:bodyPr wrap="square" lIns="36576" rIns="36576" tIns="36576" bIns="36576" anchor="ctr">
+          <a:bodyPr wrap="square" lIns="36576" tIns="36576" rIns="36576" bIns="36576" anchor="ctr">
             <a:spAutoFit/>
           </a:bodyPr>
           <a:lstStyle/>
@@ -22300,7 +22280,7 @@
           <a:noFill/>
         </p:spPr>
         <p:txBody>
-          <a:bodyPr wrap="square" lIns="36576" rIns="36576" tIns="36576" bIns="36576" anchor="t">
+          <a:bodyPr wrap="square" lIns="36576" tIns="36576" rIns="36576" bIns="36576" anchor="t">
             <a:spAutoFit/>
           </a:bodyPr>
           <a:lstStyle/>
@@ -22342,7 +22322,7 @@
           <a:noFill/>
         </p:spPr>
         <p:txBody>
-          <a:bodyPr wrap="square" lIns="36576" rIns="36576" tIns="36576" bIns="36576" anchor="t">
+          <a:bodyPr wrap="square" lIns="36576" tIns="36576" rIns="36576" bIns="36576" anchor="t">
             <a:spAutoFit/>
           </a:bodyPr>
           <a:lstStyle/>
@@ -22409,6 +22389,7 @@
           <a:lstStyle/>
           <a:p>
             <a:pPr algn="ctr"/>
+            <a:endParaRPr/>
           </a:p>
         </p:txBody>
       </p:sp>
@@ -22429,7 +22410,7 @@
           <a:noFill/>
         </p:spPr>
         <p:txBody>
-          <a:bodyPr wrap="square" lIns="36576" rIns="36576" tIns="36576" bIns="36576" anchor="ctr">
+          <a:bodyPr wrap="square" lIns="36576" tIns="36576" rIns="36576" bIns="36576" anchor="ctr">
             <a:spAutoFit/>
           </a:bodyPr>
           <a:lstStyle/>
@@ -22471,7 +22452,7 @@
           <a:noFill/>
         </p:spPr>
         <p:txBody>
-          <a:bodyPr wrap="square" lIns="36576" rIns="36576" tIns="36576" bIns="36576" anchor="t">
+          <a:bodyPr wrap="square" lIns="36576" tIns="36576" rIns="36576" bIns="36576" anchor="t">
             <a:spAutoFit/>
           </a:bodyPr>
           <a:lstStyle/>
@@ -22513,7 +22494,7 @@
           <a:noFill/>
         </p:spPr>
         <p:txBody>
-          <a:bodyPr wrap="square" lIns="36576" rIns="36576" tIns="36576" bIns="36576" anchor="t">
+          <a:bodyPr wrap="square" lIns="36576" tIns="36576" rIns="36576" bIns="36576" anchor="t">
             <a:spAutoFit/>
           </a:bodyPr>
           <a:lstStyle/>
@@ -22580,6 +22561,7 @@
           <a:lstStyle/>
           <a:p>
             <a:pPr algn="ctr"/>
+            <a:endParaRPr/>
           </a:p>
         </p:txBody>
       </p:sp>
@@ -22600,7 +22582,7 @@
           <a:noFill/>
         </p:spPr>
         <p:txBody>
-          <a:bodyPr wrap="square" lIns="36576" rIns="36576" tIns="36576" bIns="36576" anchor="ctr">
+          <a:bodyPr wrap="square" lIns="36576" tIns="36576" rIns="36576" bIns="36576" anchor="ctr">
             <a:spAutoFit/>
           </a:bodyPr>
           <a:lstStyle/>
@@ -22642,7 +22624,7 @@
           <a:noFill/>
         </p:spPr>
         <p:txBody>
-          <a:bodyPr wrap="square" lIns="36576" rIns="36576" tIns="36576" bIns="36576" anchor="t">
+          <a:bodyPr wrap="square" lIns="36576" tIns="36576" rIns="36576" bIns="36576" anchor="t">
             <a:spAutoFit/>
           </a:bodyPr>
           <a:lstStyle/>
@@ -22684,7 +22666,7 @@
           <a:noFill/>
         </p:spPr>
         <p:txBody>
-          <a:bodyPr wrap="square" lIns="36576" rIns="36576" tIns="36576" bIns="36576" anchor="t">
+          <a:bodyPr wrap="square" lIns="36576" tIns="36576" rIns="36576" bIns="36576" anchor="t">
             <a:spAutoFit/>
           </a:bodyPr>
           <a:lstStyle/>
@@ -22751,6 +22733,7 @@
           <a:lstStyle/>
           <a:p>
             <a:pPr algn="ctr"/>
+            <a:endParaRPr/>
           </a:p>
         </p:txBody>
       </p:sp>
@@ -22771,7 +22754,7 @@
           <a:noFill/>
         </p:spPr>
         <p:txBody>
-          <a:bodyPr wrap="square" lIns="36576" rIns="36576" tIns="36576" bIns="36576" anchor="ctr">
+          <a:bodyPr wrap="square" lIns="36576" tIns="36576" rIns="36576" bIns="36576" anchor="ctr">
             <a:spAutoFit/>
           </a:bodyPr>
           <a:lstStyle/>
@@ -22813,7 +22796,7 @@
           <a:noFill/>
         </p:spPr>
         <p:txBody>
-          <a:bodyPr wrap="square" lIns="36576" rIns="36576" tIns="36576" bIns="36576" anchor="t">
+          <a:bodyPr wrap="square" lIns="36576" tIns="36576" rIns="36576" bIns="36576" anchor="t">
             <a:spAutoFit/>
           </a:bodyPr>
           <a:lstStyle/>
@@ -22855,7 +22838,7 @@
           <a:noFill/>
         </p:spPr>
         <p:txBody>
-          <a:bodyPr wrap="square" lIns="36576" rIns="36576" tIns="36576" bIns="36576" anchor="t">
+          <a:bodyPr wrap="square" lIns="36576" tIns="36576" rIns="36576" bIns="36576" anchor="t">
             <a:spAutoFit/>
           </a:bodyPr>
           <a:lstStyle/>
@@ -22922,6 +22905,7 @@
           <a:lstStyle/>
           <a:p>
             <a:pPr algn="ctr"/>
+            <a:endParaRPr/>
           </a:p>
         </p:txBody>
       </p:sp>
@@ -22942,7 +22926,7 @@
           <a:noFill/>
         </p:spPr>
         <p:txBody>
-          <a:bodyPr wrap="square" lIns="36576" rIns="36576" tIns="36576" bIns="36576" anchor="ctr">
+          <a:bodyPr wrap="square" lIns="36576" tIns="36576" rIns="36576" bIns="36576" anchor="ctr">
             <a:spAutoFit/>
           </a:bodyPr>
           <a:lstStyle/>
@@ -22984,7 +22968,7 @@
           <a:noFill/>
         </p:spPr>
         <p:txBody>
-          <a:bodyPr wrap="square" lIns="36576" rIns="36576" tIns="36576" bIns="36576" anchor="t">
+          <a:bodyPr wrap="square" lIns="36576" tIns="36576" rIns="36576" bIns="36576" anchor="t">
             <a:spAutoFit/>
           </a:bodyPr>
           <a:lstStyle/>
@@ -23026,7 +23010,7 @@
           <a:noFill/>
         </p:spPr>
         <p:txBody>
-          <a:bodyPr wrap="square" lIns="36576" rIns="36576" tIns="36576" bIns="36576" anchor="t">
+          <a:bodyPr wrap="square" lIns="36576" tIns="36576" rIns="36576" bIns="36576" anchor="t">
             <a:spAutoFit/>
           </a:bodyPr>
           <a:lstStyle/>
@@ -23068,7 +23052,7 @@
           <a:noFill/>
         </p:spPr>
         <p:txBody>
-          <a:bodyPr wrap="square" lIns="36576" rIns="36576" tIns="36576" bIns="36576" anchor="t">
+          <a:bodyPr wrap="square" lIns="36576" tIns="36576" rIns="36576" bIns="36576" anchor="t">
             <a:spAutoFit/>
           </a:bodyPr>
           <a:lstStyle/>
@@ -23145,7 +23129,7 @@
           <a:noFill/>
         </p:spPr>
         <p:txBody>
-          <a:bodyPr wrap="square" lIns="36576" rIns="36576" tIns="36576" bIns="36576" anchor="t">
+          <a:bodyPr wrap="square" lIns="36576" tIns="36576" rIns="36576" bIns="36576" anchor="t">
             <a:spAutoFit/>
           </a:bodyPr>
           <a:lstStyle/>
@@ -23179,7 +23163,7 @@
 </file>
 
 <file path=ppt/slides/slide2.xml><?xml version="1.0" encoding="utf-8"?>
-<p:sld xmlns:a="http://schemas.openxmlformats.org/drawingml/2006/main" xmlns:p="http://schemas.openxmlformats.org/presentationml/2006/main" xmlns:r="http://schemas.openxmlformats.org/officeDocument/2006/relationships">
+<p:sld xmlns:a="http://schemas.openxmlformats.org/drawingml/2006/main" xmlns:r="http://schemas.openxmlformats.org/officeDocument/2006/relationships" xmlns:p="http://schemas.openxmlformats.org/presentationml/2006/main">
   <p:cSld>
     <p:bg>
       <p:bgPr>
@@ -23195,7 +23179,14 @@
         <p:cNvGrpSpPr/>
         <p:nvPr/>
       </p:nvGrpSpPr>
-      <p:grpSpPr/>
+      <p:grpSpPr>
+        <a:xfrm>
+          <a:off x="0" y="0"/>
+          <a:ext cx="0" cy="0"/>
+          <a:chOff x="0" y="0"/>
+          <a:chExt cx="0" cy="0"/>
+        </a:xfrm>
+      </p:grpSpPr>
       <p:sp>
         <p:nvSpPr>
           <p:cNvPr id="2" name="TextBox 1"/>
@@ -23213,7 +23204,7 @@
           <a:noFill/>
         </p:spPr>
         <p:txBody>
-          <a:bodyPr wrap="square" lIns="36576" rIns="36576" tIns="36576" bIns="36576" anchor="t">
+          <a:bodyPr wrap="square" lIns="36576" tIns="36576" rIns="36576" bIns="36576" anchor="t">
             <a:spAutoFit/>
           </a:bodyPr>
           <a:lstStyle/>
@@ -23255,7 +23246,7 @@
           <a:noFill/>
         </p:spPr>
         <p:txBody>
-          <a:bodyPr wrap="square" lIns="36576" rIns="36576" tIns="36576" bIns="36576" anchor="t">
+          <a:bodyPr wrap="square" lIns="36576" tIns="36576" rIns="36576" bIns="36576" anchor="t">
             <a:spAutoFit/>
           </a:bodyPr>
           <a:lstStyle/>
@@ -23297,7 +23288,7 @@
           <a:noFill/>
         </p:spPr>
         <p:txBody>
-          <a:bodyPr wrap="square" lIns="36576" rIns="36576" tIns="36576" bIns="36576" anchor="t">
+          <a:bodyPr wrap="square" lIns="36576" tIns="36576" rIns="36576" bIns="36576" anchor="t">
             <a:spAutoFit/>
           </a:bodyPr>
           <a:lstStyle/>
@@ -23364,6 +23355,7 @@
           <a:lstStyle/>
           <a:p>
             <a:pPr algn="ctr"/>
+            <a:endParaRPr/>
           </a:p>
         </p:txBody>
       </p:sp>
@@ -23384,7 +23376,7 @@
           <a:noFill/>
         </p:spPr>
         <p:txBody>
-          <a:bodyPr wrap="square" lIns="36576" rIns="36576" tIns="36576" bIns="36576" anchor="t">
+          <a:bodyPr wrap="square" lIns="36576" tIns="36576" rIns="36576" bIns="36576" anchor="t">
             <a:spAutoFit/>
           </a:bodyPr>
           <a:lstStyle/>
@@ -23426,7 +23418,7 @@
           <a:noFill/>
         </p:spPr>
         <p:txBody>
-          <a:bodyPr wrap="square" lIns="36576" rIns="18288" tIns="18288" bIns="18288">
+          <a:bodyPr wrap="square" lIns="36576" tIns="18288" rIns="18288" bIns="18288">
             <a:spAutoFit/>
           </a:bodyPr>
           <a:lstStyle/>
@@ -23554,7 +23546,7 @@
           </a:fontRef>
         </p:style>
         <p:txBody>
-          <a:bodyPr rtlCol="0" anchor="ctr" lIns="54864" rIns="54864" tIns="9144" bIns="9144"/>
+          <a:bodyPr lIns="54864" tIns="9144" rIns="54864" bIns="9144" rtlCol="0" anchor="ctr"/>
           <a:lstStyle/>
           <a:p>
             <a:pPr algn="ctr"/>
@@ -23587,7 +23579,7 @@
           <a:noFill/>
         </p:spPr>
         <p:txBody>
-          <a:bodyPr wrap="square" lIns="36576" rIns="36576" tIns="36576" bIns="36576" anchor="t">
+          <a:bodyPr wrap="square" lIns="36576" tIns="36576" rIns="36576" bIns="36576" anchor="t">
             <a:spAutoFit/>
           </a:bodyPr>
           <a:lstStyle/>
@@ -23629,7 +23621,7 @@
           <a:noFill/>
         </p:spPr>
         <p:txBody>
-          <a:bodyPr wrap="square" lIns="36576" rIns="36576" tIns="36576" bIns="36576" anchor="t">
+          <a:bodyPr wrap="square" lIns="36576" tIns="36576" rIns="36576" bIns="36576" anchor="t">
             <a:spAutoFit/>
           </a:bodyPr>
           <a:lstStyle/>
@@ -23696,6 +23688,7 @@
           <a:lstStyle/>
           <a:p>
             <a:pPr algn="ctr"/>
+            <a:endParaRPr/>
           </a:p>
         </p:txBody>
       </p:sp>
@@ -23741,6 +23734,7 @@
           <a:lstStyle/>
           <a:p>
             <a:pPr algn="ctr"/>
+            <a:endParaRPr/>
           </a:p>
         </p:txBody>
       </p:sp>
@@ -23786,6 +23780,7 @@
           <a:lstStyle/>
           <a:p>
             <a:pPr algn="ctr"/>
+            <a:endParaRPr/>
           </a:p>
         </p:txBody>
       </p:sp>
@@ -23831,6 +23826,7 @@
           <a:lstStyle/>
           <a:p>
             <a:pPr algn="ctr"/>
+            <a:endParaRPr/>
           </a:p>
         </p:txBody>
       </p:sp>
@@ -23876,6 +23872,7 @@
           <a:lstStyle/>
           <a:p>
             <a:pPr algn="ctr"/>
+            <a:endParaRPr/>
           </a:p>
         </p:txBody>
       </p:sp>
@@ -23921,6 +23918,7 @@
           <a:lstStyle/>
           <a:p>
             <a:pPr algn="ctr"/>
+            <a:endParaRPr/>
           </a:p>
         </p:txBody>
       </p:sp>
@@ -23966,6 +23964,7 @@
           <a:lstStyle/>
           <a:p>
             <a:pPr algn="ctr"/>
+            <a:endParaRPr/>
           </a:p>
         </p:txBody>
       </p:sp>
@@ -24011,6 +24010,7 @@
           <a:lstStyle/>
           <a:p>
             <a:pPr algn="ctr"/>
+            <a:endParaRPr/>
           </a:p>
         </p:txBody>
       </p:sp>
@@ -24056,6 +24056,7 @@
           <a:lstStyle/>
           <a:p>
             <a:pPr algn="ctr"/>
+            <a:endParaRPr/>
           </a:p>
         </p:txBody>
       </p:sp>
@@ -24206,6 +24207,7 @@
           <a:lstStyle/>
           <a:p>
             <a:pPr algn="ctr"/>
+            <a:endParaRPr/>
           </a:p>
         </p:txBody>
       </p:sp>
@@ -24251,6 +24253,7 @@
           <a:lstStyle/>
           <a:p>
             <a:pPr algn="ctr"/>
+            <a:endParaRPr/>
           </a:p>
         </p:txBody>
       </p:sp>
@@ -24296,6 +24299,7 @@
           <a:lstStyle/>
           <a:p>
             <a:pPr algn="ctr"/>
+            <a:endParaRPr/>
           </a:p>
         </p:txBody>
       </p:sp>
@@ -24341,6 +24345,7 @@
           <a:lstStyle/>
           <a:p>
             <a:pPr algn="ctr"/>
+            <a:endParaRPr/>
           </a:p>
         </p:txBody>
       </p:sp>
@@ -24382,7 +24387,7 @@
           </a:fontRef>
         </p:style>
         <p:txBody>
-          <a:bodyPr rtlCol="0" anchor="ctr" lIns="54864" rIns="54864" tIns="9144" bIns="9144"/>
+          <a:bodyPr lIns="54864" tIns="9144" rIns="54864" bIns="9144" rtlCol="0" anchor="ctr"/>
           <a:lstStyle/>
           <a:p>
             <a:pPr algn="ctr"/>
@@ -24485,7 +24490,7 @@
           <a:noFill/>
         </p:spPr>
         <p:txBody>
-          <a:bodyPr wrap="square" lIns="36576" rIns="36576" tIns="36576" bIns="36576" anchor="t">
+          <a:bodyPr wrap="square" lIns="36576" tIns="36576" rIns="36576" bIns="36576" anchor="t">
             <a:spAutoFit/>
           </a:bodyPr>
           <a:lstStyle/>
@@ -24562,7 +24567,7 @@
           <a:noFill/>
         </p:spPr>
         <p:txBody>
-          <a:bodyPr wrap="square" lIns="36576" rIns="36576" tIns="36576" bIns="36576" anchor="t">
+          <a:bodyPr wrap="square" lIns="36576" tIns="36576" rIns="36576" bIns="36576" anchor="t">
             <a:spAutoFit/>
           </a:bodyPr>
           <a:lstStyle/>
@@ -24596,7 +24601,7 @@
 </file>
 
 <file path=ppt/slides/slide20.xml><?xml version="1.0" encoding="utf-8"?>
-<p:sld xmlns:a="http://schemas.openxmlformats.org/drawingml/2006/main" xmlns:p="http://schemas.openxmlformats.org/presentationml/2006/main" xmlns:r="http://schemas.openxmlformats.org/officeDocument/2006/relationships">
+<p:sld xmlns:a="http://schemas.openxmlformats.org/drawingml/2006/main" xmlns:r="http://schemas.openxmlformats.org/officeDocument/2006/relationships" xmlns:p="http://schemas.openxmlformats.org/presentationml/2006/main">
   <p:cSld>
     <p:bg>
       <p:bgPr>
@@ -24612,7 +24617,14 @@
         <p:cNvGrpSpPr/>
         <p:nvPr/>
       </p:nvGrpSpPr>
-      <p:grpSpPr/>
+      <p:grpSpPr>
+        <a:xfrm>
+          <a:off x="0" y="0"/>
+          <a:ext cx="0" cy="0"/>
+          <a:chOff x="0" y="0"/>
+          <a:chExt cx="0" cy="0"/>
+        </a:xfrm>
+      </p:grpSpPr>
       <p:sp>
         <p:nvSpPr>
           <p:cNvPr id="2" name="Rounded Rectangle 1"/>
@@ -24651,7 +24663,7 @@
           </a:fontRef>
         </p:style>
         <p:txBody>
-          <a:bodyPr rtlCol="0" anchor="ctr" lIns="54864" rIns="54864" tIns="9144" bIns="9144"/>
+          <a:bodyPr lIns="54864" tIns="9144" rIns="54864" bIns="9144" rtlCol="0" anchor="ctr"/>
           <a:lstStyle/>
           <a:p>
             <a:pPr algn="ctr"/>
@@ -24684,7 +24696,7 @@
           <a:noFill/>
         </p:spPr>
         <p:txBody>
-          <a:bodyPr wrap="square" lIns="36576" rIns="36576" tIns="36576" bIns="36576" anchor="t">
+          <a:bodyPr wrap="square" lIns="36576" tIns="36576" rIns="36576" bIns="36576" anchor="t">
             <a:spAutoFit/>
           </a:bodyPr>
           <a:lstStyle/>
@@ -24726,7 +24738,7 @@
           <a:noFill/>
         </p:spPr>
         <p:txBody>
-          <a:bodyPr wrap="square" lIns="36576" rIns="36576" tIns="36576" bIns="36576" anchor="t">
+          <a:bodyPr wrap="square" lIns="36576" tIns="36576" rIns="36576" bIns="36576" anchor="t">
             <a:spAutoFit/>
           </a:bodyPr>
           <a:lstStyle/>
@@ -24789,7 +24801,7 @@
           </a:fontRef>
         </p:style>
         <p:txBody>
-          <a:bodyPr rtlCol="0" anchor="ctr" lIns="54864" rIns="54864" tIns="9144" bIns="9144"/>
+          <a:bodyPr lIns="54864" tIns="9144" rIns="54864" bIns="9144" rtlCol="0" anchor="ctr"/>
           <a:lstStyle/>
           <a:p>
             <a:pPr algn="ctr"/>
@@ -24822,7 +24834,7 @@
           <a:noFill/>
         </p:spPr>
         <p:txBody>
-          <a:bodyPr wrap="square" lIns="36576" rIns="36576" tIns="36576" bIns="36576" anchor="t">
+          <a:bodyPr wrap="square" lIns="36576" tIns="36576" rIns="36576" bIns="36576" anchor="t">
             <a:spAutoFit/>
           </a:bodyPr>
           <a:lstStyle/>
@@ -24885,7 +24897,7 @@
           </a:fontRef>
         </p:style>
         <p:txBody>
-          <a:bodyPr rtlCol="0" anchor="ctr" lIns="54864" rIns="54864" tIns="9144" bIns="9144"/>
+          <a:bodyPr lIns="54864" tIns="9144" rIns="54864" bIns="9144" rtlCol="0" anchor="ctr"/>
           <a:lstStyle/>
           <a:p>
             <a:pPr algn="ctr"/>
@@ -24918,7 +24930,7 @@
           <a:noFill/>
         </p:spPr>
         <p:txBody>
-          <a:bodyPr wrap="square" lIns="36576" rIns="36576" tIns="36576" bIns="36576" anchor="t">
+          <a:bodyPr wrap="square" lIns="36576" tIns="36576" rIns="36576" bIns="36576" anchor="t">
             <a:spAutoFit/>
           </a:bodyPr>
           <a:lstStyle/>
@@ -24981,7 +24993,7 @@
           </a:fontRef>
         </p:style>
         <p:txBody>
-          <a:bodyPr rtlCol="0" anchor="ctr" lIns="54864" rIns="54864" tIns="9144" bIns="9144"/>
+          <a:bodyPr lIns="54864" tIns="9144" rIns="54864" bIns="9144" rtlCol="0" anchor="ctr"/>
           <a:lstStyle/>
           <a:p>
             <a:pPr algn="ctr"/>
@@ -25014,7 +25026,7 @@
           <a:noFill/>
         </p:spPr>
         <p:txBody>
-          <a:bodyPr wrap="square" lIns="36576" rIns="36576" tIns="36576" bIns="36576" anchor="t">
+          <a:bodyPr wrap="square" lIns="36576" tIns="36576" rIns="36576" bIns="36576" anchor="t">
             <a:spAutoFit/>
           </a:bodyPr>
           <a:lstStyle/>
@@ -25081,6 +25093,7 @@
           <a:lstStyle/>
           <a:p>
             <a:pPr algn="ctr"/>
+            <a:endParaRPr/>
           </a:p>
         </p:txBody>
       </p:sp>
@@ -25101,7 +25114,7 @@
           <a:noFill/>
         </p:spPr>
         <p:txBody>
-          <a:bodyPr wrap="square" lIns="36576" rIns="36576" tIns="36576" bIns="36576" anchor="ctr">
+          <a:bodyPr wrap="square" lIns="36576" tIns="36576" rIns="36576" bIns="36576" anchor="ctr">
             <a:spAutoFit/>
           </a:bodyPr>
           <a:lstStyle/>
@@ -25143,7 +25156,7 @@
           <a:noFill/>
         </p:spPr>
         <p:txBody>
-          <a:bodyPr wrap="square" lIns="36576" rIns="36576" tIns="36576" bIns="36576" anchor="t">
+          <a:bodyPr wrap="square" lIns="36576" tIns="36576" rIns="36576" bIns="36576" anchor="t">
             <a:spAutoFit/>
           </a:bodyPr>
           <a:lstStyle/>
@@ -25185,7 +25198,7 @@
           <a:noFill/>
         </p:spPr>
         <p:txBody>
-          <a:bodyPr wrap="square" lIns="36576" rIns="36576" tIns="36576" bIns="36576" anchor="t">
+          <a:bodyPr wrap="square" lIns="36576" tIns="36576" rIns="36576" bIns="36576" anchor="t">
             <a:spAutoFit/>
           </a:bodyPr>
           <a:lstStyle/>
@@ -25262,7 +25275,7 @@
           <a:noFill/>
         </p:spPr>
         <p:txBody>
-          <a:bodyPr wrap="square" lIns="36576" rIns="36576" tIns="36576" bIns="36576" anchor="t">
+          <a:bodyPr wrap="square" lIns="36576" tIns="36576" rIns="36576" bIns="36576" anchor="t">
             <a:spAutoFit/>
           </a:bodyPr>
           <a:lstStyle/>
@@ -25296,7 +25309,7 @@
 </file>
 
 <file path=ppt/slides/slide21.xml><?xml version="1.0" encoding="utf-8"?>
-<p:sld xmlns:a="http://schemas.openxmlformats.org/drawingml/2006/main" xmlns:p="http://schemas.openxmlformats.org/presentationml/2006/main" xmlns:r="http://schemas.openxmlformats.org/officeDocument/2006/relationships">
+<p:sld xmlns:a="http://schemas.openxmlformats.org/drawingml/2006/main" xmlns:r="http://schemas.openxmlformats.org/officeDocument/2006/relationships" xmlns:p="http://schemas.openxmlformats.org/presentationml/2006/main">
   <p:cSld>
     <p:bg>
       <p:bgPr>
@@ -25312,7 +25325,14 @@
         <p:cNvGrpSpPr/>
         <p:nvPr/>
       </p:nvGrpSpPr>
-      <p:grpSpPr/>
+      <p:grpSpPr>
+        <a:xfrm>
+          <a:off x="0" y="0"/>
+          <a:ext cx="0" cy="0"/>
+          <a:chOff x="0" y="0"/>
+          <a:chExt cx="0" cy="0"/>
+        </a:xfrm>
+      </p:grpSpPr>
       <p:sp>
         <p:nvSpPr>
           <p:cNvPr id="2" name="TextBox 1"/>
@@ -25330,7 +25350,7 @@
           <a:noFill/>
         </p:spPr>
         <p:txBody>
-          <a:bodyPr wrap="square" lIns="36576" rIns="36576" tIns="36576" bIns="36576" anchor="t">
+          <a:bodyPr wrap="square" lIns="36576" tIns="36576" rIns="36576" bIns="36576" anchor="t">
             <a:spAutoFit/>
           </a:bodyPr>
           <a:lstStyle/>
@@ -25372,7 +25392,7 @@
           <a:noFill/>
         </p:spPr>
         <p:txBody>
-          <a:bodyPr wrap="square" lIns="36576" rIns="36576" tIns="36576" bIns="36576" anchor="t">
+          <a:bodyPr wrap="square" lIns="36576" tIns="36576" rIns="36576" bIns="36576" anchor="t">
             <a:spAutoFit/>
           </a:bodyPr>
           <a:lstStyle/>
@@ -25414,7 +25434,7 @@
           <a:noFill/>
         </p:spPr>
         <p:txBody>
-          <a:bodyPr wrap="square" lIns="36576" rIns="36576" tIns="36576" bIns="36576" anchor="t">
+          <a:bodyPr wrap="square" lIns="36576" tIns="36576" rIns="36576" bIns="36576" anchor="t">
             <a:spAutoFit/>
           </a:bodyPr>
           <a:lstStyle/>
@@ -25456,7 +25476,7 @@
           <a:noFill/>
         </p:spPr>
         <p:txBody>
-          <a:bodyPr wrap="square" lIns="36576" rIns="36576" tIns="36576" bIns="36576" anchor="t">
+          <a:bodyPr wrap="square" lIns="36576" tIns="36576" rIns="36576" bIns="36576" anchor="t">
             <a:spAutoFit/>
           </a:bodyPr>
           <a:lstStyle/>
@@ -25498,7 +25518,7 @@
           <a:noFill/>
         </p:spPr>
         <p:txBody>
-          <a:bodyPr wrap="square" lIns="36576" rIns="18288" tIns="18288" bIns="18288">
+          <a:bodyPr wrap="square" lIns="36576" tIns="18288" rIns="18288" bIns="18288">
             <a:spAutoFit/>
           </a:bodyPr>
           <a:lstStyle/>
@@ -25745,7 +25765,7 @@
           <a:noFill/>
         </p:spPr>
         <p:txBody>
-          <a:bodyPr wrap="square" lIns="36576" rIns="36576" tIns="36576" bIns="36576" anchor="t">
+          <a:bodyPr wrap="square" lIns="36576" tIns="36576" rIns="36576" bIns="36576" anchor="t">
             <a:spAutoFit/>
           </a:bodyPr>
           <a:lstStyle/>
@@ -25808,7 +25828,7 @@
           </a:fontRef>
         </p:style>
         <p:txBody>
-          <a:bodyPr rtlCol="0" anchor="ctr" lIns="54864" rIns="54864" tIns="9144" bIns="9144"/>
+          <a:bodyPr lIns="54864" tIns="9144" rIns="54864" bIns="9144" rtlCol="0" anchor="ctr"/>
           <a:lstStyle/>
           <a:p>
             <a:pPr algn="ctr"/>
@@ -25841,7 +25861,7 @@
           <a:noFill/>
         </p:spPr>
         <p:txBody>
-          <a:bodyPr wrap="square" lIns="36576" rIns="36576" tIns="36576" bIns="36576" anchor="t">
+          <a:bodyPr wrap="square" lIns="36576" tIns="36576" rIns="36576" bIns="36576" anchor="t">
             <a:spAutoFit/>
           </a:bodyPr>
           <a:lstStyle/>
@@ -25904,7 +25924,7 @@
           </a:fontRef>
         </p:style>
         <p:txBody>
-          <a:bodyPr rtlCol="0" anchor="ctr" lIns="54864" rIns="54864" tIns="9144" bIns="9144"/>
+          <a:bodyPr lIns="54864" tIns="9144" rIns="54864" bIns="9144" rtlCol="0" anchor="ctr"/>
           <a:lstStyle/>
           <a:p>
             <a:pPr algn="ctr"/>
@@ -25937,7 +25957,7 @@
           <a:noFill/>
         </p:spPr>
         <p:txBody>
-          <a:bodyPr wrap="square" lIns="36576" rIns="36576" tIns="36576" bIns="36576" anchor="t">
+          <a:bodyPr wrap="square" lIns="36576" tIns="36576" rIns="36576" bIns="36576" anchor="t">
             <a:spAutoFit/>
           </a:bodyPr>
           <a:lstStyle/>
@@ -26000,7 +26020,7 @@
           </a:fontRef>
         </p:style>
         <p:txBody>
-          <a:bodyPr rtlCol="0" anchor="ctr" lIns="54864" rIns="54864" tIns="9144" bIns="9144"/>
+          <a:bodyPr lIns="54864" tIns="9144" rIns="54864" bIns="9144" rtlCol="0" anchor="ctr"/>
           <a:lstStyle/>
           <a:p>
             <a:pPr algn="ctr"/>
@@ -26033,7 +26053,7 @@
           <a:noFill/>
         </p:spPr>
         <p:txBody>
-          <a:bodyPr wrap="square" lIns="36576" rIns="36576" tIns="36576" bIns="36576" anchor="t">
+          <a:bodyPr wrap="square" lIns="36576" tIns="36576" rIns="36576" bIns="36576" anchor="t">
             <a:spAutoFit/>
           </a:bodyPr>
           <a:lstStyle/>
@@ -26096,7 +26116,7 @@
           </a:fontRef>
         </p:style>
         <p:txBody>
-          <a:bodyPr rtlCol="0" anchor="ctr" lIns="54864" rIns="54864" tIns="9144" bIns="9144"/>
+          <a:bodyPr lIns="54864" tIns="9144" rIns="54864" bIns="9144" rtlCol="0" anchor="ctr"/>
           <a:lstStyle/>
           <a:p>
             <a:pPr algn="ctr"/>
@@ -26129,7 +26149,7 @@
           <a:noFill/>
         </p:spPr>
         <p:txBody>
-          <a:bodyPr wrap="square" lIns="36576" rIns="36576" tIns="36576" bIns="36576" anchor="t">
+          <a:bodyPr wrap="square" lIns="36576" tIns="36576" rIns="36576" bIns="36576" anchor="t">
             <a:spAutoFit/>
           </a:bodyPr>
           <a:lstStyle/>
@@ -26192,7 +26212,7 @@
           </a:fontRef>
         </p:style>
         <p:txBody>
-          <a:bodyPr rtlCol="0" anchor="ctr" lIns="54864" rIns="54864" tIns="9144" bIns="9144"/>
+          <a:bodyPr lIns="54864" tIns="9144" rIns="54864" bIns="9144" rtlCol="0" anchor="ctr"/>
           <a:lstStyle/>
           <a:p>
             <a:pPr algn="ctr"/>
@@ -26225,7 +26245,7 @@
           <a:noFill/>
         </p:spPr>
         <p:txBody>
-          <a:bodyPr wrap="square" lIns="36576" rIns="36576" tIns="36576" bIns="36576" anchor="t">
+          <a:bodyPr wrap="square" lIns="36576" tIns="36576" rIns="36576" bIns="36576" anchor="t">
             <a:spAutoFit/>
           </a:bodyPr>
           <a:lstStyle/>
@@ -26288,7 +26308,7 @@
           </a:fontRef>
         </p:style>
         <p:txBody>
-          <a:bodyPr rtlCol="0" anchor="ctr" lIns="54864" rIns="54864" tIns="9144" bIns="9144"/>
+          <a:bodyPr lIns="54864" tIns="9144" rIns="54864" bIns="9144" rtlCol="0" anchor="ctr"/>
           <a:lstStyle/>
           <a:p>
             <a:pPr algn="ctr"/>
@@ -26321,7 +26341,7 @@
           <a:noFill/>
         </p:spPr>
         <p:txBody>
-          <a:bodyPr wrap="square" lIns="36576" rIns="36576" tIns="36576" bIns="36576" anchor="t">
+          <a:bodyPr wrap="square" lIns="36576" tIns="36576" rIns="36576" bIns="36576" anchor="t">
             <a:spAutoFit/>
           </a:bodyPr>
           <a:lstStyle/>
@@ -26384,7 +26404,7 @@
           </a:fontRef>
         </p:style>
         <p:txBody>
-          <a:bodyPr rtlCol="0" anchor="ctr" lIns="54864" rIns="54864" tIns="9144" bIns="9144"/>
+          <a:bodyPr lIns="54864" tIns="9144" rIns="54864" bIns="9144" rtlCol="0" anchor="ctr"/>
           <a:lstStyle/>
           <a:p>
             <a:pPr algn="ctr"/>
@@ -26417,7 +26437,7 @@
           <a:noFill/>
         </p:spPr>
         <p:txBody>
-          <a:bodyPr wrap="square" lIns="36576" rIns="36576" tIns="36576" bIns="36576" anchor="t">
+          <a:bodyPr wrap="square" lIns="36576" tIns="36576" rIns="36576" bIns="36576" anchor="t">
             <a:spAutoFit/>
           </a:bodyPr>
           <a:lstStyle/>
@@ -26484,6 +26504,7 @@
           <a:lstStyle/>
           <a:p>
             <a:pPr algn="ctr"/>
+            <a:endParaRPr/>
           </a:p>
         </p:txBody>
       </p:sp>
@@ -26504,7 +26525,7 @@
           <a:noFill/>
         </p:spPr>
         <p:txBody>
-          <a:bodyPr wrap="square" lIns="36576" rIns="36576" tIns="36576" bIns="36576" anchor="t">
+          <a:bodyPr wrap="square" lIns="36576" tIns="36576" rIns="36576" bIns="36576" anchor="t">
             <a:spAutoFit/>
           </a:bodyPr>
           <a:lstStyle/>
@@ -26581,7 +26602,7 @@
           <a:noFill/>
         </p:spPr>
         <p:txBody>
-          <a:bodyPr wrap="square" lIns="36576" rIns="36576" tIns="36576" bIns="36576" anchor="t">
+          <a:bodyPr wrap="square" lIns="36576" tIns="36576" rIns="36576" bIns="36576" anchor="t">
             <a:spAutoFit/>
           </a:bodyPr>
           <a:lstStyle/>
@@ -26615,7 +26636,7 @@
 </file>
 
 <file path=ppt/slides/slide22.xml><?xml version="1.0" encoding="utf-8"?>
-<p:sld xmlns:a="http://schemas.openxmlformats.org/drawingml/2006/main" xmlns:p="http://schemas.openxmlformats.org/presentationml/2006/main" xmlns:r="http://schemas.openxmlformats.org/officeDocument/2006/relationships">
+<p:sld xmlns:a="http://schemas.openxmlformats.org/drawingml/2006/main" xmlns:r="http://schemas.openxmlformats.org/officeDocument/2006/relationships" xmlns:p="http://schemas.openxmlformats.org/presentationml/2006/main">
   <p:cSld>
     <p:bg>
       <p:bgPr>
@@ -26631,7 +26652,14 @@
         <p:cNvGrpSpPr/>
         <p:nvPr/>
       </p:nvGrpSpPr>
-      <p:grpSpPr/>
+      <p:grpSpPr>
+        <a:xfrm>
+          <a:off x="0" y="0"/>
+          <a:ext cx="0" cy="0"/>
+          <a:chOff x="0" y="0"/>
+          <a:chExt cx="0" cy="0"/>
+        </a:xfrm>
+      </p:grpSpPr>
       <p:sp>
         <p:nvSpPr>
           <p:cNvPr id="2" name="TextBox 1"/>
@@ -26649,7 +26677,7 @@
           <a:noFill/>
         </p:spPr>
         <p:txBody>
-          <a:bodyPr wrap="square" lIns="36576" rIns="36576" tIns="36576" bIns="36576" anchor="t">
+          <a:bodyPr wrap="square" lIns="36576" tIns="36576" rIns="36576" bIns="36576" anchor="t">
             <a:spAutoFit/>
           </a:bodyPr>
           <a:lstStyle/>
@@ -26691,7 +26719,7 @@
           <a:noFill/>
         </p:spPr>
         <p:txBody>
-          <a:bodyPr wrap="square" lIns="36576" rIns="36576" tIns="36576" bIns="36576" anchor="t">
+          <a:bodyPr wrap="square" lIns="36576" tIns="36576" rIns="36576" bIns="36576" anchor="t">
             <a:spAutoFit/>
           </a:bodyPr>
           <a:lstStyle/>
@@ -26733,7 +26761,7 @@
           <a:noFill/>
         </p:spPr>
         <p:txBody>
-          <a:bodyPr wrap="square" lIns="36576" rIns="36576" tIns="36576" bIns="36576" anchor="t">
+          <a:bodyPr wrap="square" lIns="36576" tIns="36576" rIns="36576" bIns="36576" anchor="t">
             <a:spAutoFit/>
           </a:bodyPr>
           <a:lstStyle/>
@@ -26775,7 +26803,7 @@
           <a:noFill/>
         </p:spPr>
         <p:txBody>
-          <a:bodyPr wrap="square" lIns="36576" rIns="36576" tIns="36576" bIns="36576" anchor="t">
+          <a:bodyPr wrap="square" lIns="36576" tIns="36576" rIns="36576" bIns="36576" anchor="t">
             <a:spAutoFit/>
           </a:bodyPr>
           <a:lstStyle/>
@@ -26842,6 +26870,7 @@
           <a:lstStyle/>
           <a:p>
             <a:pPr algn="ctr"/>
+            <a:endParaRPr/>
           </a:p>
         </p:txBody>
       </p:sp>
@@ -26883,7 +26912,7 @@
           </a:fontRef>
         </p:style>
         <p:txBody>
-          <a:bodyPr rtlCol="0" anchor="ctr" lIns="54864" rIns="54864" tIns="9144" bIns="9144"/>
+          <a:bodyPr lIns="54864" tIns="9144" rIns="54864" bIns="9144" rtlCol="0" anchor="ctr"/>
           <a:lstStyle/>
           <a:p>
             <a:pPr algn="ctr"/>
@@ -26916,7 +26945,7 @@
           <a:noFill/>
         </p:spPr>
         <p:txBody>
-          <a:bodyPr wrap="square" lIns="36576" rIns="36576" tIns="36576" bIns="36576" anchor="t">
+          <a:bodyPr wrap="square" lIns="36576" tIns="36576" rIns="36576" bIns="36576" anchor="t">
             <a:spAutoFit/>
           </a:bodyPr>
           <a:lstStyle/>
@@ -26983,6 +27012,7 @@
           <a:lstStyle/>
           <a:p>
             <a:pPr algn="ctr"/>
+            <a:endParaRPr/>
           </a:p>
         </p:txBody>
       </p:sp>
@@ -27024,7 +27054,7 @@
           </a:fontRef>
         </p:style>
         <p:txBody>
-          <a:bodyPr rtlCol="0" anchor="ctr" lIns="54864" rIns="54864" tIns="9144" bIns="9144"/>
+          <a:bodyPr lIns="54864" tIns="9144" rIns="54864" bIns="9144" rtlCol="0" anchor="ctr"/>
           <a:lstStyle/>
           <a:p>
             <a:pPr algn="ctr"/>
@@ -27057,7 +27087,7 @@
           <a:noFill/>
         </p:spPr>
         <p:txBody>
-          <a:bodyPr wrap="square" lIns="36576" rIns="36576" tIns="36576" bIns="36576" anchor="t">
+          <a:bodyPr wrap="square" lIns="36576" tIns="36576" rIns="36576" bIns="36576" anchor="t">
             <a:spAutoFit/>
           </a:bodyPr>
           <a:lstStyle/>
@@ -27124,6 +27154,7 @@
           <a:lstStyle/>
           <a:p>
             <a:pPr algn="ctr"/>
+            <a:endParaRPr/>
           </a:p>
         </p:txBody>
       </p:sp>
@@ -27165,7 +27196,7 @@
           </a:fontRef>
         </p:style>
         <p:txBody>
-          <a:bodyPr rtlCol="0" anchor="ctr" lIns="54864" rIns="54864" tIns="9144" bIns="9144"/>
+          <a:bodyPr lIns="54864" tIns="9144" rIns="54864" bIns="9144" rtlCol="0" anchor="ctr"/>
           <a:lstStyle/>
           <a:p>
             <a:pPr algn="ctr"/>
@@ -27198,7 +27229,7 @@
           <a:noFill/>
         </p:spPr>
         <p:txBody>
-          <a:bodyPr wrap="square" lIns="36576" rIns="36576" tIns="36576" bIns="36576" anchor="t">
+          <a:bodyPr wrap="square" lIns="36576" tIns="36576" rIns="36576" bIns="36576" anchor="t">
             <a:spAutoFit/>
           </a:bodyPr>
           <a:lstStyle/>
@@ -27265,6 +27296,7 @@
           <a:lstStyle/>
           <a:p>
             <a:pPr algn="ctr"/>
+            <a:endParaRPr/>
           </a:p>
         </p:txBody>
       </p:sp>
@@ -27306,7 +27338,7 @@
           </a:fontRef>
         </p:style>
         <p:txBody>
-          <a:bodyPr rtlCol="0" anchor="ctr" lIns="54864" rIns="54864" tIns="9144" bIns="9144"/>
+          <a:bodyPr lIns="54864" tIns="9144" rIns="54864" bIns="9144" rtlCol="0" anchor="ctr"/>
           <a:lstStyle/>
           <a:p>
             <a:pPr algn="ctr"/>
@@ -27339,7 +27371,7 @@
           <a:noFill/>
         </p:spPr>
         <p:txBody>
-          <a:bodyPr wrap="square" lIns="36576" rIns="36576" tIns="36576" bIns="36576" anchor="t">
+          <a:bodyPr wrap="square" lIns="36576" tIns="36576" rIns="36576" bIns="36576" anchor="t">
             <a:spAutoFit/>
           </a:bodyPr>
           <a:lstStyle/>
@@ -27406,6 +27438,7 @@
           <a:lstStyle/>
           <a:p>
             <a:pPr algn="ctr"/>
+            <a:endParaRPr/>
           </a:p>
         </p:txBody>
       </p:sp>
@@ -27447,7 +27480,7 @@
           </a:fontRef>
         </p:style>
         <p:txBody>
-          <a:bodyPr rtlCol="0" anchor="ctr" lIns="54864" rIns="54864" tIns="9144" bIns="9144"/>
+          <a:bodyPr lIns="54864" tIns="9144" rIns="54864" bIns="9144" rtlCol="0" anchor="ctr"/>
           <a:lstStyle/>
           <a:p>
             <a:pPr algn="ctr"/>
@@ -27480,7 +27513,7 @@
           <a:noFill/>
         </p:spPr>
         <p:txBody>
-          <a:bodyPr wrap="square" lIns="36576" rIns="36576" tIns="36576" bIns="36576" anchor="t">
+          <a:bodyPr wrap="square" lIns="36576" tIns="36576" rIns="36576" bIns="36576" anchor="t">
             <a:spAutoFit/>
           </a:bodyPr>
           <a:lstStyle/>
@@ -27547,6 +27580,7 @@
           <a:lstStyle/>
           <a:p>
             <a:pPr algn="ctr"/>
+            <a:endParaRPr/>
           </a:p>
         </p:txBody>
       </p:sp>
@@ -27588,7 +27622,7 @@
           </a:fontRef>
         </p:style>
         <p:txBody>
-          <a:bodyPr rtlCol="0" anchor="ctr" lIns="54864" rIns="54864" tIns="9144" bIns="9144"/>
+          <a:bodyPr lIns="54864" tIns="9144" rIns="54864" bIns="9144" rtlCol="0" anchor="ctr"/>
           <a:lstStyle/>
           <a:p>
             <a:pPr algn="ctr"/>
@@ -27621,7 +27655,7 @@
           <a:noFill/>
         </p:spPr>
         <p:txBody>
-          <a:bodyPr wrap="square" lIns="36576" rIns="36576" tIns="36576" bIns="36576" anchor="t">
+          <a:bodyPr wrap="square" lIns="36576" tIns="36576" rIns="36576" bIns="36576" anchor="t">
             <a:spAutoFit/>
           </a:bodyPr>
           <a:lstStyle/>
@@ -27688,6 +27722,7 @@
           <a:lstStyle/>
           <a:p>
             <a:pPr algn="ctr"/>
+            <a:endParaRPr/>
           </a:p>
         </p:txBody>
       </p:sp>
@@ -27729,7 +27764,7 @@
           </a:fontRef>
         </p:style>
         <p:txBody>
-          <a:bodyPr rtlCol="0" anchor="ctr" lIns="54864" rIns="54864" tIns="9144" bIns="9144"/>
+          <a:bodyPr lIns="54864" tIns="9144" rIns="54864" bIns="9144" rtlCol="0" anchor="ctr"/>
           <a:lstStyle/>
           <a:p>
             <a:pPr algn="ctr"/>
@@ -27762,7 +27797,7 @@
           <a:noFill/>
         </p:spPr>
         <p:txBody>
-          <a:bodyPr wrap="square" lIns="36576" rIns="36576" tIns="36576" bIns="36576" anchor="t">
+          <a:bodyPr wrap="square" lIns="36576" tIns="36576" rIns="36576" bIns="36576" anchor="t">
             <a:spAutoFit/>
           </a:bodyPr>
           <a:lstStyle/>
@@ -27829,6 +27864,7 @@
           <a:lstStyle/>
           <a:p>
             <a:pPr algn="ctr"/>
+            <a:endParaRPr/>
           </a:p>
         </p:txBody>
       </p:sp>
@@ -27870,7 +27906,7 @@
           </a:fontRef>
         </p:style>
         <p:txBody>
-          <a:bodyPr rtlCol="0" anchor="ctr" lIns="54864" rIns="54864" tIns="9144" bIns="9144"/>
+          <a:bodyPr lIns="54864" tIns="9144" rIns="54864" bIns="9144" rtlCol="0" anchor="ctr"/>
           <a:lstStyle/>
           <a:p>
             <a:pPr algn="ctr"/>
@@ -27903,7 +27939,7 @@
           <a:noFill/>
         </p:spPr>
         <p:txBody>
-          <a:bodyPr wrap="square" lIns="36576" rIns="36576" tIns="36576" bIns="36576" anchor="t">
+          <a:bodyPr wrap="square" lIns="36576" tIns="36576" rIns="36576" bIns="36576" anchor="t">
             <a:spAutoFit/>
           </a:bodyPr>
           <a:lstStyle/>
@@ -27970,6 +28006,7 @@
           <a:lstStyle/>
           <a:p>
             <a:pPr algn="ctr"/>
+            <a:endParaRPr/>
           </a:p>
         </p:txBody>
       </p:sp>
@@ -27990,7 +28027,7 @@
           <a:noFill/>
         </p:spPr>
         <p:txBody>
-          <a:bodyPr wrap="square" lIns="36576" rIns="36576" tIns="36576" bIns="36576" anchor="t">
+          <a:bodyPr wrap="square" lIns="36576" tIns="36576" rIns="36576" bIns="36576" anchor="t">
             <a:spAutoFit/>
           </a:bodyPr>
           <a:lstStyle/>
@@ -28067,7 +28104,7 @@
           <a:noFill/>
         </p:spPr>
         <p:txBody>
-          <a:bodyPr wrap="square" lIns="36576" rIns="36576" tIns="36576" bIns="36576" anchor="t">
+          <a:bodyPr wrap="square" lIns="36576" tIns="36576" rIns="36576" bIns="36576" anchor="t">
             <a:spAutoFit/>
           </a:bodyPr>
           <a:lstStyle/>
@@ -28101,7 +28138,7 @@
 </file>
 
 <file path=ppt/slides/slide3.xml><?xml version="1.0" encoding="utf-8"?>
-<p:sld xmlns:a="http://schemas.openxmlformats.org/drawingml/2006/main" xmlns:p="http://schemas.openxmlformats.org/presentationml/2006/main" xmlns:r="http://schemas.openxmlformats.org/officeDocument/2006/relationships">
+<p:sld xmlns:a="http://schemas.openxmlformats.org/drawingml/2006/main" xmlns:r="http://schemas.openxmlformats.org/officeDocument/2006/relationships" xmlns:p="http://schemas.openxmlformats.org/presentationml/2006/main">
   <p:cSld>
     <p:bg>
       <p:bgPr>
@@ -28117,7 +28154,14 @@
         <p:cNvGrpSpPr/>
         <p:nvPr/>
       </p:nvGrpSpPr>
-      <p:grpSpPr/>
+      <p:grpSpPr>
+        <a:xfrm>
+          <a:off x="0" y="0"/>
+          <a:ext cx="0" cy="0"/>
+          <a:chOff x="0" y="0"/>
+          <a:chExt cx="0" cy="0"/>
+        </a:xfrm>
+      </p:grpSpPr>
       <p:sp>
         <p:nvSpPr>
           <p:cNvPr id="2" name="TextBox 1"/>
@@ -28135,7 +28179,7 @@
           <a:noFill/>
         </p:spPr>
         <p:txBody>
-          <a:bodyPr wrap="square" lIns="36576" rIns="36576" tIns="36576" bIns="36576" anchor="t">
+          <a:bodyPr wrap="square" lIns="36576" tIns="36576" rIns="36576" bIns="36576" anchor="t">
             <a:spAutoFit/>
           </a:bodyPr>
           <a:lstStyle/>
@@ -28177,7 +28221,7 @@
           <a:noFill/>
         </p:spPr>
         <p:txBody>
-          <a:bodyPr wrap="square" lIns="36576" rIns="36576" tIns="36576" bIns="36576" anchor="t">
+          <a:bodyPr wrap="square" lIns="36576" tIns="36576" rIns="36576" bIns="36576" anchor="t">
             <a:spAutoFit/>
           </a:bodyPr>
           <a:lstStyle/>
@@ -28219,7 +28263,7 @@
           <a:noFill/>
         </p:spPr>
         <p:txBody>
-          <a:bodyPr wrap="square" lIns="36576" rIns="36576" tIns="36576" bIns="36576" anchor="t">
+          <a:bodyPr wrap="square" lIns="36576" tIns="36576" rIns="36576" bIns="36576" anchor="t">
             <a:spAutoFit/>
           </a:bodyPr>
           <a:lstStyle/>
@@ -28261,7 +28305,7 @@
           <a:noFill/>
         </p:spPr>
         <p:txBody>
-          <a:bodyPr wrap="square" lIns="36576" rIns="36576" tIns="36576" bIns="36576" anchor="t">
+          <a:bodyPr wrap="square" lIns="36576" tIns="36576" rIns="36576" bIns="36576" anchor="t">
             <a:spAutoFit/>
           </a:bodyPr>
           <a:lstStyle/>
@@ -28328,6 +28372,7 @@
           <a:lstStyle/>
           <a:p>
             <a:pPr algn="ctr"/>
+            <a:endParaRPr/>
           </a:p>
         </p:txBody>
       </p:sp>
@@ -28348,7 +28393,7 @@
           <a:noFill/>
         </p:spPr>
         <p:txBody>
-          <a:bodyPr wrap="square" lIns="36576" rIns="36576" tIns="36576" bIns="36576" anchor="t">
+          <a:bodyPr wrap="square" lIns="36576" tIns="36576" rIns="36576" bIns="36576" anchor="t">
             <a:spAutoFit/>
           </a:bodyPr>
           <a:lstStyle/>
@@ -28415,6 +28460,7 @@
           <a:lstStyle/>
           <a:p>
             <a:pPr algn="ctr"/>
+            <a:endParaRPr/>
           </a:p>
         </p:txBody>
       </p:sp>
@@ -28460,6 +28506,7 @@
           <a:lstStyle/>
           <a:p>
             <a:pPr algn="ctr"/>
+            <a:endParaRPr/>
           </a:p>
         </p:txBody>
       </p:sp>
@@ -28505,6 +28552,7 @@
           <a:lstStyle/>
           <a:p>
             <a:pPr algn="ctr"/>
+            <a:endParaRPr/>
           </a:p>
         </p:txBody>
       </p:sp>
@@ -28550,6 +28598,7 @@
           <a:lstStyle/>
           <a:p>
             <a:pPr algn="ctr"/>
+            <a:endParaRPr/>
           </a:p>
         </p:txBody>
       </p:sp>
@@ -28595,6 +28644,7 @@
           <a:lstStyle/>
           <a:p>
             <a:pPr algn="ctr"/>
+            <a:endParaRPr/>
           </a:p>
         </p:txBody>
       </p:sp>
@@ -28640,6 +28690,7 @@
           <a:lstStyle/>
           <a:p>
             <a:pPr algn="ctr"/>
+            <a:endParaRPr/>
           </a:p>
         </p:txBody>
       </p:sp>
@@ -28685,6 +28736,7 @@
           <a:lstStyle/>
           <a:p>
             <a:pPr algn="ctr"/>
+            <a:endParaRPr/>
           </a:p>
         </p:txBody>
       </p:sp>
@@ -28728,6 +28780,7 @@
           <a:lstStyle/>
           <a:p>
             <a:pPr algn="ctr"/>
+            <a:endParaRPr/>
           </a:p>
         </p:txBody>
       </p:sp>
@@ -28773,6 +28826,7 @@
           <a:lstStyle/>
           <a:p>
             <a:pPr algn="ctr"/>
+            <a:endParaRPr/>
           </a:p>
         </p:txBody>
       </p:sp>
@@ -28818,6 +28872,7 @@
           <a:lstStyle/>
           <a:p>
             <a:pPr algn="ctr"/>
+            <a:endParaRPr/>
           </a:p>
         </p:txBody>
       </p:sp>
@@ -28863,6 +28918,7 @@
           <a:lstStyle/>
           <a:p>
             <a:pPr algn="ctr"/>
+            <a:endParaRPr/>
           </a:p>
         </p:txBody>
       </p:sp>
@@ -28908,6 +28964,7 @@
           <a:lstStyle/>
           <a:p>
             <a:pPr algn="ctr"/>
+            <a:endParaRPr/>
           </a:p>
         </p:txBody>
       </p:sp>
@@ -28953,6 +29010,7 @@
           <a:lstStyle/>
           <a:p>
             <a:pPr algn="ctr"/>
+            <a:endParaRPr/>
           </a:p>
         </p:txBody>
       </p:sp>
@@ -28998,6 +29056,7 @@
           <a:lstStyle/>
           <a:p>
             <a:pPr algn="ctr"/>
+            <a:endParaRPr/>
           </a:p>
         </p:txBody>
       </p:sp>
@@ -29043,6 +29102,7 @@
           <a:lstStyle/>
           <a:p>
             <a:pPr algn="ctr"/>
+            <a:endParaRPr/>
           </a:p>
         </p:txBody>
       </p:sp>
@@ -29088,6 +29148,7 @@
           <a:lstStyle/>
           <a:p>
             <a:pPr algn="ctr"/>
+            <a:endParaRPr/>
           </a:p>
         </p:txBody>
       </p:sp>
@@ -29133,6 +29194,7 @@
           <a:lstStyle/>
           <a:p>
             <a:pPr algn="ctr"/>
+            <a:endParaRPr/>
           </a:p>
         </p:txBody>
       </p:sp>
@@ -29153,7 +29215,7 @@
           <a:noFill/>
         </p:spPr>
         <p:txBody>
-          <a:bodyPr wrap="square" lIns="36576" rIns="36576" tIns="36576" bIns="36576" anchor="t">
+          <a:bodyPr wrap="square" lIns="36576" tIns="36576" rIns="36576" bIns="36576" anchor="t">
             <a:spAutoFit/>
           </a:bodyPr>
           <a:lstStyle/>
@@ -29220,6 +29282,7 @@
           <a:lstStyle/>
           <a:p>
             <a:pPr algn="ctr"/>
+            <a:endParaRPr/>
           </a:p>
         </p:txBody>
       </p:sp>
@@ -29265,6 +29328,7 @@
           <a:lstStyle/>
           <a:p>
             <a:pPr algn="ctr"/>
+            <a:endParaRPr/>
           </a:p>
         </p:txBody>
       </p:sp>
@@ -29285,7 +29349,7 @@
           <a:noFill/>
         </p:spPr>
         <p:txBody>
-          <a:bodyPr wrap="square" lIns="36576" rIns="36576" tIns="36576" bIns="36576" anchor="t">
+          <a:bodyPr wrap="square" lIns="36576" tIns="36576" rIns="36576" bIns="36576" anchor="t">
             <a:spAutoFit/>
           </a:bodyPr>
           <a:lstStyle/>
@@ -29352,6 +29416,7 @@
           <a:lstStyle/>
           <a:p>
             <a:pPr algn="ctr"/>
+            <a:endParaRPr/>
           </a:p>
         </p:txBody>
       </p:sp>
@@ -29397,6 +29462,7 @@
           <a:lstStyle/>
           <a:p>
             <a:pPr algn="ctr"/>
+            <a:endParaRPr/>
           </a:p>
         </p:txBody>
       </p:sp>
@@ -29442,6 +29508,7 @@
           <a:lstStyle/>
           <a:p>
             <a:pPr algn="ctr"/>
+            <a:endParaRPr/>
           </a:p>
         </p:txBody>
       </p:sp>
@@ -29487,6 +29554,7 @@
           <a:lstStyle/>
           <a:p>
             <a:pPr algn="ctr"/>
+            <a:endParaRPr/>
           </a:p>
         </p:txBody>
       </p:sp>
@@ -29532,6 +29600,7 @@
           <a:lstStyle/>
           <a:p>
             <a:pPr algn="ctr"/>
+            <a:endParaRPr/>
           </a:p>
         </p:txBody>
       </p:sp>
@@ -29577,6 +29646,7 @@
           <a:lstStyle/>
           <a:p>
             <a:pPr algn="ctr"/>
+            <a:endParaRPr/>
           </a:p>
         </p:txBody>
       </p:sp>
@@ -29622,6 +29692,7 @@
           <a:lstStyle/>
           <a:p>
             <a:pPr algn="ctr"/>
+            <a:endParaRPr/>
           </a:p>
         </p:txBody>
       </p:sp>
@@ -29667,6 +29738,7 @@
           <a:lstStyle/>
           <a:p>
             <a:pPr algn="ctr"/>
+            <a:endParaRPr/>
           </a:p>
         </p:txBody>
       </p:sp>
@@ -29712,6 +29784,7 @@
           <a:lstStyle/>
           <a:p>
             <a:pPr algn="ctr"/>
+            <a:endParaRPr/>
           </a:p>
         </p:txBody>
       </p:sp>
@@ -29757,6 +29830,7 @@
           <a:lstStyle/>
           <a:p>
             <a:pPr algn="ctr"/>
+            <a:endParaRPr/>
           </a:p>
         </p:txBody>
       </p:sp>
@@ -30302,7 +30376,7 @@
           <a:noFill/>
         </p:spPr>
         <p:txBody>
-          <a:bodyPr wrap="square" lIns="36576" rIns="36576" tIns="36576" bIns="36576" anchor="t">
+          <a:bodyPr wrap="square" lIns="36576" tIns="36576" rIns="36576" bIns="36576" anchor="t">
             <a:spAutoFit/>
           </a:bodyPr>
           <a:lstStyle/>
@@ -30365,7 +30439,7 @@
           </a:fontRef>
         </p:style>
         <p:txBody>
-          <a:bodyPr rtlCol="0" anchor="ctr" lIns="54864" rIns="54864" tIns="9144" bIns="9144"/>
+          <a:bodyPr lIns="54864" tIns="9144" rIns="54864" bIns="9144" rtlCol="0" anchor="ctr"/>
           <a:lstStyle/>
           <a:p>
             <a:pPr algn="ctr"/>
@@ -30433,7 +30507,7 @@
           <a:noFill/>
         </p:spPr>
         <p:txBody>
-          <a:bodyPr wrap="square" lIns="36576" rIns="36576" tIns="36576" bIns="36576" anchor="t">
+          <a:bodyPr wrap="square" lIns="36576" tIns="36576" rIns="36576" bIns="36576" anchor="t">
             <a:spAutoFit/>
           </a:bodyPr>
           <a:lstStyle/>
@@ -30467,7 +30541,7 @@
 </file>
 
 <file path=ppt/slides/slide4.xml><?xml version="1.0" encoding="utf-8"?>
-<p:sld xmlns:a="http://schemas.openxmlformats.org/drawingml/2006/main" xmlns:p="http://schemas.openxmlformats.org/presentationml/2006/main" xmlns:r="http://schemas.openxmlformats.org/officeDocument/2006/relationships">
+<p:sld xmlns:a="http://schemas.openxmlformats.org/drawingml/2006/main" xmlns:r="http://schemas.openxmlformats.org/officeDocument/2006/relationships" xmlns:p="http://schemas.openxmlformats.org/presentationml/2006/main">
   <p:cSld>
     <p:bg>
       <p:bgPr>
@@ -30483,7 +30557,14 @@
         <p:cNvGrpSpPr/>
         <p:nvPr/>
       </p:nvGrpSpPr>
-      <p:grpSpPr/>
+      <p:grpSpPr>
+        <a:xfrm>
+          <a:off x="0" y="0"/>
+          <a:ext cx="0" cy="0"/>
+          <a:chOff x="0" y="0"/>
+          <a:chExt cx="0" cy="0"/>
+        </a:xfrm>
+      </p:grpSpPr>
       <p:sp>
         <p:nvSpPr>
           <p:cNvPr id="2" name="TextBox 1"/>
@@ -30501,7 +30582,7 @@
           <a:noFill/>
         </p:spPr>
         <p:txBody>
-          <a:bodyPr wrap="square" lIns="36576" rIns="36576" tIns="36576" bIns="36576" anchor="t">
+          <a:bodyPr wrap="square" lIns="36576" tIns="36576" rIns="36576" bIns="36576" anchor="t">
             <a:spAutoFit/>
           </a:bodyPr>
           <a:lstStyle/>
@@ -30543,7 +30624,7 @@
           <a:noFill/>
         </p:spPr>
         <p:txBody>
-          <a:bodyPr wrap="square" lIns="36576" rIns="36576" tIns="36576" bIns="36576" anchor="t">
+          <a:bodyPr wrap="square" lIns="36576" tIns="36576" rIns="36576" bIns="36576" anchor="t">
             <a:spAutoFit/>
           </a:bodyPr>
           <a:lstStyle/>
@@ -30585,7 +30666,7 @@
           <a:noFill/>
         </p:spPr>
         <p:txBody>
-          <a:bodyPr wrap="square" lIns="36576" rIns="36576" tIns="36576" bIns="36576" anchor="t">
+          <a:bodyPr wrap="square" lIns="36576" tIns="36576" rIns="36576" bIns="36576" anchor="t">
             <a:spAutoFit/>
           </a:bodyPr>
           <a:lstStyle/>
@@ -30627,7 +30708,7 @@
           <a:noFill/>
         </p:spPr>
         <p:txBody>
-          <a:bodyPr wrap="square" lIns="36576" rIns="36576" tIns="36576" bIns="36576" anchor="t">
+          <a:bodyPr wrap="square" lIns="36576" tIns="36576" rIns="36576" bIns="36576" anchor="t">
             <a:spAutoFit/>
           </a:bodyPr>
           <a:lstStyle/>
@@ -30694,6 +30775,7 @@
           <a:lstStyle/>
           <a:p>
             <a:pPr algn="ctr"/>
+            <a:endParaRPr/>
           </a:p>
         </p:txBody>
       </p:sp>
@@ -30739,6 +30821,7 @@
           <a:lstStyle/>
           <a:p>
             <a:pPr algn="ctr"/>
+            <a:endParaRPr/>
           </a:p>
         </p:txBody>
       </p:sp>
@@ -30759,7 +30842,7 @@
           <a:noFill/>
         </p:spPr>
         <p:txBody>
-          <a:bodyPr wrap="square" lIns="36576" rIns="36576" tIns="36576" bIns="36576" anchor="t">
+          <a:bodyPr wrap="square" lIns="36576" tIns="36576" rIns="36576" bIns="36576" anchor="t">
             <a:spAutoFit/>
           </a:bodyPr>
           <a:lstStyle/>
@@ -30826,6 +30909,7 @@
           <a:lstStyle/>
           <a:p>
             <a:pPr algn="ctr"/>
+            <a:endParaRPr/>
           </a:p>
         </p:txBody>
       </p:sp>
@@ -30871,6 +30955,7 @@
           <a:lstStyle/>
           <a:p>
             <a:pPr algn="ctr"/>
+            <a:endParaRPr/>
           </a:p>
         </p:txBody>
       </p:sp>
@@ -30916,6 +31001,7 @@
           <a:lstStyle/>
           <a:p>
             <a:pPr algn="ctr"/>
+            <a:endParaRPr/>
           </a:p>
         </p:txBody>
       </p:sp>
@@ -30936,7 +31022,7 @@
           <a:noFill/>
         </p:spPr>
         <p:txBody>
-          <a:bodyPr wrap="square" lIns="36576" rIns="36576" tIns="36576" bIns="36576" anchor="t">
+          <a:bodyPr wrap="square" lIns="36576" tIns="36576" rIns="36576" bIns="36576" anchor="t">
             <a:spAutoFit/>
           </a:bodyPr>
           <a:lstStyle/>
@@ -31003,6 +31089,7 @@
           <a:lstStyle/>
           <a:p>
             <a:pPr algn="ctr"/>
+            <a:endParaRPr/>
           </a:p>
         </p:txBody>
       </p:sp>
@@ -31048,6 +31135,7 @@
           <a:lstStyle/>
           <a:p>
             <a:pPr algn="ctr"/>
+            <a:endParaRPr/>
           </a:p>
         </p:txBody>
       </p:sp>
@@ -31068,7 +31156,7 @@
           <a:noFill/>
         </p:spPr>
         <p:txBody>
-          <a:bodyPr wrap="square" lIns="36576" rIns="36576" tIns="36576" bIns="36576" anchor="t">
+          <a:bodyPr wrap="square" lIns="36576" tIns="36576" rIns="36576" bIns="36576" anchor="t">
             <a:spAutoFit/>
           </a:bodyPr>
           <a:lstStyle/>
@@ -31135,6 +31223,7 @@
           <a:lstStyle/>
           <a:p>
             <a:pPr algn="ctr"/>
+            <a:endParaRPr/>
           </a:p>
         </p:txBody>
       </p:sp>
@@ -31180,6 +31269,7 @@
           <a:lstStyle/>
           <a:p>
             <a:pPr algn="ctr"/>
+            <a:endParaRPr/>
           </a:p>
         </p:txBody>
       </p:sp>
@@ -31225,6 +31315,7 @@
           <a:lstStyle/>
           <a:p>
             <a:pPr algn="ctr"/>
+            <a:endParaRPr/>
           </a:p>
         </p:txBody>
       </p:sp>
@@ -31245,7 +31336,7 @@
           <a:noFill/>
         </p:spPr>
         <p:txBody>
-          <a:bodyPr wrap="square" lIns="36576" rIns="36576" tIns="36576" bIns="36576" anchor="t">
+          <a:bodyPr wrap="square" lIns="36576" tIns="36576" rIns="36576" bIns="36576" anchor="t">
             <a:spAutoFit/>
           </a:bodyPr>
           <a:lstStyle/>
@@ -31312,6 +31403,7 @@
           <a:lstStyle/>
           <a:p>
             <a:pPr algn="ctr"/>
+            <a:endParaRPr/>
           </a:p>
         </p:txBody>
       </p:sp>
@@ -31357,6 +31449,7 @@
           <a:lstStyle/>
           <a:p>
             <a:pPr algn="ctr"/>
+            <a:endParaRPr/>
           </a:p>
         </p:txBody>
       </p:sp>
@@ -31377,7 +31470,7 @@
           <a:noFill/>
         </p:spPr>
         <p:txBody>
-          <a:bodyPr wrap="square" lIns="36576" rIns="36576" tIns="36576" bIns="36576" anchor="t">
+          <a:bodyPr wrap="square" lIns="36576" tIns="36576" rIns="36576" bIns="36576" anchor="t">
             <a:spAutoFit/>
           </a:bodyPr>
           <a:lstStyle/>
@@ -31444,6 +31537,7 @@
           <a:lstStyle/>
           <a:p>
             <a:pPr algn="ctr"/>
+            <a:endParaRPr/>
           </a:p>
         </p:txBody>
       </p:sp>
@@ -31489,6 +31583,7 @@
           <a:lstStyle/>
           <a:p>
             <a:pPr algn="ctr"/>
+            <a:endParaRPr/>
           </a:p>
         </p:txBody>
       </p:sp>
@@ -31534,6 +31629,7 @@
           <a:lstStyle/>
           <a:p>
             <a:pPr algn="ctr"/>
+            <a:endParaRPr/>
           </a:p>
         </p:txBody>
       </p:sp>
@@ -31554,7 +31650,7 @@
           <a:noFill/>
         </p:spPr>
         <p:txBody>
-          <a:bodyPr wrap="square" lIns="36576" rIns="36576" tIns="36576" bIns="36576" anchor="t">
+          <a:bodyPr wrap="square" lIns="36576" tIns="36576" rIns="36576" bIns="36576" anchor="t">
             <a:spAutoFit/>
           </a:bodyPr>
           <a:lstStyle/>
@@ -31596,7 +31692,7 @@
           <a:noFill/>
         </p:spPr>
         <p:txBody>
-          <a:bodyPr wrap="square" lIns="36576" rIns="36576" tIns="36576" bIns="36576" anchor="t">
+          <a:bodyPr wrap="square" lIns="36576" tIns="36576" rIns="36576" bIns="36576" anchor="t">
             <a:spAutoFit/>
           </a:bodyPr>
           <a:lstStyle/>
@@ -31638,7 +31734,7 @@
           <a:noFill/>
         </p:spPr>
         <p:txBody>
-          <a:bodyPr wrap="square" lIns="36576" rIns="36576" tIns="36576" bIns="36576" anchor="t">
+          <a:bodyPr wrap="square" lIns="36576" tIns="36576" rIns="36576" bIns="36576" anchor="t">
             <a:spAutoFit/>
           </a:bodyPr>
           <a:lstStyle/>
@@ -31705,6 +31801,7 @@
           <a:lstStyle/>
           <a:p>
             <a:pPr algn="ctr"/>
+            <a:endParaRPr/>
           </a:p>
         </p:txBody>
       </p:sp>
@@ -31750,6 +31847,7 @@
           <a:lstStyle/>
           <a:p>
             <a:pPr algn="ctr"/>
+            <a:endParaRPr/>
           </a:p>
         </p:txBody>
       </p:sp>
@@ -31795,6 +31893,7 @@
           <a:lstStyle/>
           <a:p>
             <a:pPr algn="ctr"/>
+            <a:endParaRPr/>
           </a:p>
         </p:txBody>
       </p:sp>
@@ -31840,6 +31939,7 @@
           <a:lstStyle/>
           <a:p>
             <a:pPr algn="ctr"/>
+            <a:endParaRPr/>
           </a:p>
         </p:txBody>
       </p:sp>
@@ -31885,6 +31985,7 @@
           <a:lstStyle/>
           <a:p>
             <a:pPr algn="ctr"/>
+            <a:endParaRPr/>
           </a:p>
         </p:txBody>
       </p:sp>
@@ -31930,6 +32031,7 @@
           <a:lstStyle/>
           <a:p>
             <a:pPr algn="ctr"/>
+            <a:endParaRPr/>
           </a:p>
         </p:txBody>
       </p:sp>
@@ -31975,6 +32077,7 @@
           <a:lstStyle/>
           <a:p>
             <a:pPr algn="ctr"/>
+            <a:endParaRPr/>
           </a:p>
         </p:txBody>
       </p:sp>
@@ -32020,6 +32123,7 @@
           <a:lstStyle/>
           <a:p>
             <a:pPr algn="ctr"/>
+            <a:endParaRPr/>
           </a:p>
         </p:txBody>
       </p:sp>
@@ -32065,6 +32169,7 @@
           <a:lstStyle/>
           <a:p>
             <a:pPr algn="ctr"/>
+            <a:endParaRPr/>
           </a:p>
         </p:txBody>
       </p:sp>
@@ -32110,6 +32215,7 @@
           <a:lstStyle/>
           <a:p>
             <a:pPr algn="ctr"/>
+            <a:endParaRPr/>
           </a:p>
         </p:txBody>
       </p:sp>
@@ -32130,7 +32236,7 @@
           <a:noFill/>
         </p:spPr>
         <p:txBody>
-          <a:bodyPr wrap="square" lIns="36576" rIns="36576" tIns="36576" bIns="36576" anchor="t">
+          <a:bodyPr wrap="square" lIns="36576" tIns="36576" rIns="36576" bIns="36576" anchor="t">
             <a:spAutoFit/>
           </a:bodyPr>
           <a:lstStyle/>
@@ -32197,6 +32303,7 @@
           <a:lstStyle/>
           <a:p>
             <a:pPr algn="ctr"/>
+            <a:endParaRPr/>
           </a:p>
         </p:txBody>
       </p:sp>
@@ -32238,7 +32345,7 @@
           </a:fontRef>
         </p:style>
         <p:txBody>
-          <a:bodyPr rtlCol="0" anchor="ctr" lIns="54864" rIns="54864" tIns="9144" bIns="9144"/>
+          <a:bodyPr lIns="54864" tIns="9144" rIns="54864" bIns="9144" rtlCol="0" anchor="ctr"/>
           <a:lstStyle/>
           <a:p>
             <a:pPr algn="ctr"/>
@@ -32296,6 +32403,7 @@
           <a:lstStyle/>
           <a:p>
             <a:pPr algn="ctr"/>
+            <a:endParaRPr/>
           </a:p>
         </p:txBody>
       </p:sp>
@@ -32316,7 +32424,7 @@
           <a:noFill/>
         </p:spPr>
         <p:txBody>
-          <a:bodyPr wrap="square" lIns="36576" rIns="36576" tIns="36576" bIns="36576" anchor="t">
+          <a:bodyPr wrap="square" lIns="36576" tIns="36576" rIns="36576" bIns="36576" anchor="t">
             <a:spAutoFit/>
           </a:bodyPr>
           <a:lstStyle/>
@@ -32383,6 +32491,7 @@
           <a:lstStyle/>
           <a:p>
             <a:pPr algn="ctr"/>
+            <a:endParaRPr/>
           </a:p>
         </p:txBody>
       </p:sp>
@@ -32403,7 +32512,7 @@
           <a:noFill/>
         </p:spPr>
         <p:txBody>
-          <a:bodyPr wrap="square" lIns="36576" rIns="36576" tIns="36576" bIns="36576" anchor="ctr">
+          <a:bodyPr wrap="square" lIns="36576" tIns="36576" rIns="36576" bIns="36576" anchor="ctr">
             <a:spAutoFit/>
           </a:bodyPr>
           <a:lstStyle/>
@@ -32470,6 +32579,7 @@
           <a:lstStyle/>
           <a:p>
             <a:pPr algn="ctr"/>
+            <a:endParaRPr/>
           </a:p>
         </p:txBody>
       </p:sp>
@@ -32490,7 +32600,7 @@
           <a:noFill/>
         </p:spPr>
         <p:txBody>
-          <a:bodyPr wrap="square" lIns="36576" rIns="36576" tIns="36576" bIns="36576" anchor="ctr">
+          <a:bodyPr wrap="square" lIns="36576" tIns="36576" rIns="36576" bIns="36576" anchor="ctr">
             <a:spAutoFit/>
           </a:bodyPr>
           <a:lstStyle/>
@@ -32557,6 +32667,7 @@
           <a:lstStyle/>
           <a:p>
             <a:pPr algn="ctr"/>
+            <a:endParaRPr/>
           </a:p>
         </p:txBody>
       </p:sp>
@@ -32577,7 +32688,7 @@
           <a:noFill/>
         </p:spPr>
         <p:txBody>
-          <a:bodyPr wrap="square" lIns="36576" rIns="36576" tIns="36576" bIns="36576" anchor="ctr">
+          <a:bodyPr wrap="square" lIns="36576" tIns="36576" rIns="36576" bIns="36576" anchor="ctr">
             <a:spAutoFit/>
           </a:bodyPr>
           <a:lstStyle/>
@@ -32642,6 +32753,7 @@
           <a:lstStyle/>
           <a:p>
             <a:pPr algn="ctr"/>
+            <a:endParaRPr/>
           </a:p>
         </p:txBody>
       </p:sp>
@@ -32687,6 +32799,7 @@
           <a:lstStyle/>
           <a:p>
             <a:pPr algn="ctr"/>
+            <a:endParaRPr/>
           </a:p>
         </p:txBody>
       </p:sp>
@@ -32707,7 +32820,7 @@
           <a:noFill/>
         </p:spPr>
         <p:txBody>
-          <a:bodyPr wrap="square" lIns="36576" rIns="36576" tIns="36576" bIns="36576" anchor="t">
+          <a:bodyPr wrap="square" lIns="36576" tIns="36576" rIns="36576" bIns="36576" anchor="t">
             <a:spAutoFit/>
           </a:bodyPr>
           <a:lstStyle/>
@@ -32749,7 +32862,7 @@
           <a:noFill/>
         </p:spPr>
         <p:txBody>
-          <a:bodyPr wrap="square" lIns="36576" rIns="36576" tIns="36576" bIns="36576" anchor="t">
+          <a:bodyPr wrap="square" lIns="36576" tIns="36576" rIns="36576" bIns="36576" anchor="t">
             <a:spAutoFit/>
           </a:bodyPr>
           <a:lstStyle/>
@@ -32816,6 +32929,7 @@
           <a:lstStyle/>
           <a:p>
             <a:pPr algn="ctr"/>
+            <a:endParaRPr/>
           </a:p>
         </p:txBody>
       </p:sp>
@@ -32836,7 +32950,7 @@
           <a:noFill/>
         </p:spPr>
         <p:txBody>
-          <a:bodyPr wrap="square" lIns="36576" rIns="36576" tIns="36576" bIns="36576" anchor="t">
+          <a:bodyPr wrap="square" lIns="36576" tIns="36576" rIns="36576" bIns="36576" anchor="t">
             <a:spAutoFit/>
           </a:bodyPr>
           <a:lstStyle/>
@@ -32878,7 +32992,7 @@
           <a:noFill/>
         </p:spPr>
         <p:txBody>
-          <a:bodyPr wrap="square" lIns="36576" rIns="36576" tIns="36576" bIns="36576" anchor="t">
+          <a:bodyPr wrap="square" lIns="36576" tIns="36576" rIns="36576" bIns="36576" anchor="t">
             <a:spAutoFit/>
           </a:bodyPr>
           <a:lstStyle/>
@@ -32945,6 +33059,7 @@
           <a:lstStyle/>
           <a:p>
             <a:pPr algn="ctr"/>
+            <a:endParaRPr/>
           </a:p>
         </p:txBody>
       </p:sp>
@@ -32965,7 +33080,7 @@
           <a:noFill/>
         </p:spPr>
         <p:txBody>
-          <a:bodyPr wrap="square" lIns="36576" rIns="36576" tIns="36576" bIns="36576" anchor="t">
+          <a:bodyPr wrap="square" lIns="36576" tIns="36576" rIns="36576" bIns="36576" anchor="t">
             <a:spAutoFit/>
           </a:bodyPr>
           <a:lstStyle/>
@@ -33007,7 +33122,7 @@
           <a:noFill/>
         </p:spPr>
         <p:txBody>
-          <a:bodyPr wrap="square" lIns="36576" rIns="36576" tIns="36576" bIns="36576" anchor="t">
+          <a:bodyPr wrap="square" lIns="36576" tIns="36576" rIns="36576" bIns="36576" anchor="t">
             <a:spAutoFit/>
           </a:bodyPr>
           <a:lstStyle/>
@@ -33084,7 +33199,7 @@
           <a:noFill/>
         </p:spPr>
         <p:txBody>
-          <a:bodyPr wrap="square" lIns="36576" rIns="36576" tIns="36576" bIns="36576" anchor="t">
+          <a:bodyPr wrap="square" lIns="36576" tIns="36576" rIns="36576" bIns="36576" anchor="t">
             <a:spAutoFit/>
           </a:bodyPr>
           <a:lstStyle/>
@@ -33118,7 +33233,7 @@
 </file>
 
 <file path=ppt/slides/slide5.xml><?xml version="1.0" encoding="utf-8"?>
-<p:sld xmlns:a="http://schemas.openxmlformats.org/drawingml/2006/main" xmlns:p="http://schemas.openxmlformats.org/presentationml/2006/main" xmlns:r="http://schemas.openxmlformats.org/officeDocument/2006/relationships">
+<p:sld xmlns:a="http://schemas.openxmlformats.org/drawingml/2006/main" xmlns:r="http://schemas.openxmlformats.org/officeDocument/2006/relationships" xmlns:p="http://schemas.openxmlformats.org/presentationml/2006/main">
   <p:cSld>
     <p:bg>
       <p:bgPr>
@@ -33134,7 +33249,14 @@
         <p:cNvGrpSpPr/>
         <p:nvPr/>
       </p:nvGrpSpPr>
-      <p:grpSpPr/>
+      <p:grpSpPr>
+        <a:xfrm>
+          <a:off x="0" y="0"/>
+          <a:ext cx="0" cy="0"/>
+          <a:chOff x="0" y="0"/>
+          <a:chExt cx="0" cy="0"/>
+        </a:xfrm>
+      </p:grpSpPr>
       <p:sp>
         <p:nvSpPr>
           <p:cNvPr id="2" name="TextBox 1"/>
@@ -33152,7 +33274,7 @@
           <a:noFill/>
         </p:spPr>
         <p:txBody>
-          <a:bodyPr wrap="square" lIns="36576" rIns="36576" tIns="36576" bIns="36576" anchor="t">
+          <a:bodyPr wrap="square" lIns="36576" tIns="36576" rIns="36576" bIns="36576" anchor="t">
             <a:spAutoFit/>
           </a:bodyPr>
           <a:lstStyle/>
@@ -33194,7 +33316,7 @@
           <a:noFill/>
         </p:spPr>
         <p:txBody>
-          <a:bodyPr wrap="square" lIns="36576" rIns="36576" tIns="36576" bIns="36576" anchor="t">
+          <a:bodyPr wrap="square" lIns="36576" tIns="36576" rIns="36576" bIns="36576" anchor="t">
             <a:spAutoFit/>
           </a:bodyPr>
           <a:lstStyle/>
@@ -33236,7 +33358,7 @@
           <a:noFill/>
         </p:spPr>
         <p:txBody>
-          <a:bodyPr wrap="square" lIns="36576" rIns="36576" tIns="36576" bIns="36576" anchor="t">
+          <a:bodyPr wrap="square" lIns="36576" tIns="36576" rIns="36576" bIns="36576" anchor="t">
             <a:spAutoFit/>
           </a:bodyPr>
           <a:lstStyle/>
@@ -33278,7 +33400,7 @@
           <a:noFill/>
         </p:spPr>
         <p:txBody>
-          <a:bodyPr wrap="square" lIns="36576" rIns="36576" tIns="36576" bIns="36576" anchor="t">
+          <a:bodyPr wrap="square" lIns="36576" tIns="36576" rIns="36576" bIns="36576" anchor="t">
             <a:spAutoFit/>
           </a:bodyPr>
           <a:lstStyle/>
@@ -33345,6 +33467,7 @@
           <a:lstStyle/>
           <a:p>
             <a:pPr algn="ctr"/>
+            <a:endParaRPr/>
           </a:p>
         </p:txBody>
       </p:sp>
@@ -33386,7 +33509,7 @@
           </a:fontRef>
         </p:style>
         <p:txBody>
-          <a:bodyPr rtlCol="0" anchor="ctr" lIns="54864" rIns="54864" tIns="9144" bIns="9144"/>
+          <a:bodyPr lIns="54864" tIns="9144" rIns="54864" bIns="9144" rtlCol="0" anchor="ctr"/>
           <a:lstStyle/>
           <a:p>
             <a:pPr algn="ctr"/>
@@ -33419,7 +33542,7 @@
           <a:noFill/>
         </p:spPr>
         <p:txBody>
-          <a:bodyPr wrap="square" lIns="36576" rIns="36576" tIns="36576" bIns="36576" anchor="t">
+          <a:bodyPr wrap="square" lIns="36576" tIns="36576" rIns="36576" bIns="36576" anchor="t">
             <a:spAutoFit/>
           </a:bodyPr>
           <a:lstStyle/>
@@ -33461,7 +33584,7 @@
           <a:noFill/>
         </p:spPr>
         <p:txBody>
-          <a:bodyPr wrap="square" lIns="36576" rIns="36576" tIns="36576" bIns="36576" anchor="t">
+          <a:bodyPr wrap="square" lIns="36576" tIns="36576" rIns="36576" bIns="36576" anchor="t">
             <a:spAutoFit/>
           </a:bodyPr>
           <a:lstStyle/>
@@ -33503,7 +33626,7 @@
           <a:noFill/>
         </p:spPr>
         <p:txBody>
-          <a:bodyPr wrap="square" lIns="36576" rIns="36576" tIns="36576" bIns="36576" anchor="t">
+          <a:bodyPr wrap="square" lIns="36576" tIns="36576" rIns="36576" bIns="36576" anchor="t">
             <a:spAutoFit/>
           </a:bodyPr>
           <a:lstStyle/>
@@ -33545,7 +33668,7 @@
           <a:noFill/>
         </p:spPr>
         <p:txBody>
-          <a:bodyPr wrap="square" lIns="36576" rIns="36576" tIns="36576" bIns="36576" anchor="t">
+          <a:bodyPr wrap="square" lIns="36576" tIns="36576" rIns="36576" bIns="36576" anchor="t">
             <a:spAutoFit/>
           </a:bodyPr>
           <a:lstStyle/>
@@ -33612,6 +33735,7 @@
           <a:lstStyle/>
           <a:p>
             <a:pPr algn="ctr"/>
+            <a:endParaRPr/>
           </a:p>
         </p:txBody>
       </p:sp>
@@ -33632,7 +33756,7 @@
           <a:noFill/>
         </p:spPr>
         <p:txBody>
-          <a:bodyPr wrap="square" lIns="36576" rIns="36576" tIns="36576" bIns="36576" anchor="t">
+          <a:bodyPr wrap="square" lIns="36576" tIns="36576" rIns="36576" bIns="36576" anchor="t">
             <a:spAutoFit/>
           </a:bodyPr>
           <a:lstStyle/>
@@ -33699,6 +33823,7 @@
           <a:lstStyle/>
           <a:p>
             <a:pPr algn="ctr"/>
+            <a:endParaRPr/>
           </a:p>
         </p:txBody>
       </p:sp>
@@ -33719,7 +33844,7 @@
           <a:noFill/>
         </p:spPr>
         <p:txBody>
-          <a:bodyPr wrap="square" lIns="36576" rIns="36576" tIns="36576" bIns="36576" anchor="t">
+          <a:bodyPr wrap="square" lIns="36576" tIns="36576" rIns="36576" bIns="36576" anchor="t">
             <a:spAutoFit/>
           </a:bodyPr>
           <a:lstStyle/>
@@ -33786,6 +33911,7 @@
           <a:lstStyle/>
           <a:p>
             <a:pPr algn="ctr"/>
+            <a:endParaRPr/>
           </a:p>
         </p:txBody>
       </p:sp>
@@ -33806,7 +33932,7 @@
           <a:noFill/>
         </p:spPr>
         <p:txBody>
-          <a:bodyPr wrap="square" lIns="36576" rIns="36576" tIns="36576" bIns="36576" anchor="t">
+          <a:bodyPr wrap="square" lIns="36576" tIns="36576" rIns="36576" bIns="36576" anchor="t">
             <a:spAutoFit/>
           </a:bodyPr>
           <a:lstStyle/>
@@ -33873,6 +33999,7 @@
           <a:lstStyle/>
           <a:p>
             <a:pPr algn="ctr"/>
+            <a:endParaRPr/>
           </a:p>
         </p:txBody>
       </p:sp>
@@ -33893,7 +34020,7 @@
           <a:noFill/>
         </p:spPr>
         <p:txBody>
-          <a:bodyPr wrap="square" lIns="36576" rIns="36576" tIns="36576" bIns="36576" anchor="t">
+          <a:bodyPr wrap="square" lIns="36576" tIns="36576" rIns="36576" bIns="36576" anchor="t">
             <a:spAutoFit/>
           </a:bodyPr>
           <a:lstStyle/>
@@ -33960,6 +34087,7 @@
           <a:lstStyle/>
           <a:p>
             <a:pPr algn="ctr"/>
+            <a:endParaRPr/>
           </a:p>
         </p:txBody>
       </p:sp>
@@ -33980,7 +34108,7 @@
           <a:noFill/>
         </p:spPr>
         <p:txBody>
-          <a:bodyPr wrap="square" lIns="36576" rIns="36576" tIns="36576" bIns="36576" anchor="t">
+          <a:bodyPr wrap="square" lIns="36576" tIns="36576" rIns="36576" bIns="36576" anchor="t">
             <a:spAutoFit/>
           </a:bodyPr>
           <a:lstStyle/>
@@ -34047,6 +34175,7 @@
           <a:lstStyle/>
           <a:p>
             <a:pPr algn="ctr"/>
+            <a:endParaRPr/>
           </a:p>
         </p:txBody>
       </p:sp>
@@ -34067,7 +34196,7 @@
           <a:noFill/>
         </p:spPr>
         <p:txBody>
-          <a:bodyPr wrap="square" lIns="36576" rIns="36576" tIns="36576" bIns="36576" anchor="t">
+          <a:bodyPr wrap="square" lIns="36576" tIns="36576" rIns="36576" bIns="36576" anchor="t">
             <a:spAutoFit/>
           </a:bodyPr>
           <a:lstStyle/>
@@ -34134,6 +34263,7 @@
           <a:lstStyle/>
           <a:p>
             <a:pPr algn="ctr"/>
+            <a:endParaRPr/>
           </a:p>
         </p:txBody>
       </p:sp>
@@ -34154,7 +34284,7 @@
           <a:noFill/>
         </p:spPr>
         <p:txBody>
-          <a:bodyPr wrap="square" lIns="36576" rIns="36576" tIns="36576" bIns="36576" anchor="t">
+          <a:bodyPr wrap="square" lIns="36576" tIns="36576" rIns="36576" bIns="36576" anchor="t">
             <a:spAutoFit/>
           </a:bodyPr>
           <a:lstStyle/>
@@ -34221,6 +34351,7 @@
           <a:lstStyle/>
           <a:p>
             <a:pPr algn="ctr"/>
+            <a:endParaRPr/>
           </a:p>
         </p:txBody>
       </p:sp>
@@ -34241,7 +34372,7 @@
           <a:noFill/>
         </p:spPr>
         <p:txBody>
-          <a:bodyPr wrap="square" lIns="36576" rIns="36576" tIns="36576" bIns="36576" anchor="t">
+          <a:bodyPr wrap="square" lIns="36576" tIns="36576" rIns="36576" bIns="36576" anchor="t">
             <a:spAutoFit/>
           </a:bodyPr>
           <a:lstStyle/>
@@ -34308,6 +34439,7 @@
           <a:lstStyle/>
           <a:p>
             <a:pPr algn="ctr"/>
+            <a:endParaRPr/>
           </a:p>
         </p:txBody>
       </p:sp>
@@ -34328,7 +34460,7 @@
           <a:noFill/>
         </p:spPr>
         <p:txBody>
-          <a:bodyPr wrap="square" lIns="36576" rIns="36576" tIns="36576" bIns="36576" anchor="t">
+          <a:bodyPr wrap="square" lIns="36576" tIns="36576" rIns="36576" bIns="36576" anchor="t">
             <a:spAutoFit/>
           </a:bodyPr>
           <a:lstStyle/>
@@ -34395,6 +34527,7 @@
           <a:lstStyle/>
           <a:p>
             <a:pPr algn="ctr"/>
+            <a:endParaRPr/>
           </a:p>
         </p:txBody>
       </p:sp>
@@ -34415,7 +34548,7 @@
           <a:noFill/>
         </p:spPr>
         <p:txBody>
-          <a:bodyPr wrap="square" lIns="36576" rIns="36576" tIns="36576" bIns="36576" anchor="t">
+          <a:bodyPr wrap="square" lIns="36576" tIns="36576" rIns="36576" bIns="36576" anchor="t">
             <a:spAutoFit/>
           </a:bodyPr>
           <a:lstStyle/>
@@ -34482,6 +34615,7 @@
           <a:lstStyle/>
           <a:p>
             <a:pPr algn="ctr"/>
+            <a:endParaRPr/>
           </a:p>
         </p:txBody>
       </p:sp>
@@ -34502,7 +34636,7 @@
           <a:noFill/>
         </p:spPr>
         <p:txBody>
-          <a:bodyPr wrap="square" lIns="36576" rIns="36576" tIns="36576" bIns="36576" anchor="t">
+          <a:bodyPr wrap="square" lIns="36576" tIns="36576" rIns="36576" bIns="36576" anchor="t">
             <a:spAutoFit/>
           </a:bodyPr>
           <a:lstStyle/>
@@ -34569,6 +34703,7 @@
           <a:lstStyle/>
           <a:p>
             <a:pPr algn="ctr"/>
+            <a:endParaRPr/>
           </a:p>
         </p:txBody>
       </p:sp>
@@ -34589,7 +34724,7 @@
           <a:noFill/>
         </p:spPr>
         <p:txBody>
-          <a:bodyPr wrap="square" lIns="36576" rIns="36576" tIns="36576" bIns="36576" anchor="t">
+          <a:bodyPr wrap="square" lIns="36576" tIns="36576" rIns="36576" bIns="36576" anchor="t">
             <a:spAutoFit/>
           </a:bodyPr>
           <a:lstStyle/>
@@ -34631,7 +34766,7 @@
           <a:noFill/>
         </p:spPr>
         <p:txBody>
-          <a:bodyPr wrap="square" lIns="36576" rIns="36576" tIns="36576" bIns="36576" anchor="t">
+          <a:bodyPr wrap="square" lIns="36576" tIns="36576" rIns="36576" bIns="36576" anchor="t">
             <a:spAutoFit/>
           </a:bodyPr>
           <a:lstStyle/>
@@ -34673,7 +34808,7 @@
           <a:noFill/>
         </p:spPr>
         <p:txBody>
-          <a:bodyPr wrap="square" lIns="36576" rIns="36576" tIns="36576" bIns="36576" anchor="t">
+          <a:bodyPr wrap="square" lIns="36576" tIns="36576" rIns="36576" bIns="36576" anchor="t">
             <a:spAutoFit/>
           </a:bodyPr>
           <a:lstStyle/>
@@ -34715,7 +34850,7 @@
           <a:noFill/>
         </p:spPr>
         <p:txBody>
-          <a:bodyPr wrap="square" lIns="36576" rIns="36576" tIns="36576" bIns="36576" anchor="t">
+          <a:bodyPr wrap="square" lIns="36576" tIns="36576" rIns="36576" bIns="36576" anchor="t">
             <a:spAutoFit/>
           </a:bodyPr>
           <a:lstStyle/>
@@ -34757,7 +34892,7 @@
           <a:noFill/>
         </p:spPr>
         <p:txBody>
-          <a:bodyPr wrap="square" lIns="36576" rIns="36576" tIns="36576" bIns="36576" anchor="t">
+          <a:bodyPr wrap="square" lIns="36576" tIns="36576" rIns="36576" bIns="36576" anchor="t">
             <a:spAutoFit/>
           </a:bodyPr>
           <a:lstStyle/>
@@ -34799,7 +34934,7 @@
           <a:noFill/>
         </p:spPr>
         <p:txBody>
-          <a:bodyPr wrap="square" lIns="36576" rIns="36576" tIns="36576" bIns="36576" anchor="t">
+          <a:bodyPr wrap="square" lIns="36576" tIns="36576" rIns="36576" bIns="36576" anchor="t">
             <a:spAutoFit/>
           </a:bodyPr>
           <a:lstStyle/>
@@ -34841,7 +34976,7 @@
           <a:noFill/>
         </p:spPr>
         <p:txBody>
-          <a:bodyPr wrap="square" lIns="36576" rIns="36576" tIns="36576" bIns="36576" anchor="t">
+          <a:bodyPr wrap="square" lIns="36576" tIns="36576" rIns="36576" bIns="36576" anchor="t">
             <a:spAutoFit/>
           </a:bodyPr>
           <a:lstStyle/>
@@ -34908,6 +35043,7 @@
           <a:lstStyle/>
           <a:p>
             <a:pPr algn="ctr"/>
+            <a:endParaRPr/>
           </a:p>
         </p:txBody>
       </p:sp>
@@ -34949,12 +35085,21 @@
           </a:fontRef>
         </p:style>
         <p:txBody>
-          <a:bodyPr rtlCol="0" anchor="ctr" lIns="54864" rIns="54864" tIns="9144" bIns="9144"/>
+          <a:bodyPr lIns="54864" tIns="9144" rIns="54864" bIns="9144" rtlCol="0" anchor="ctr"/>
           <a:lstStyle/>
           <a:p>
             <a:pPr algn="ctr"/>
             <a:r>
-              <a:rPr sz="950" b="1">
+              <a:rPr lang="en-US" sz="950" b="1" dirty="0">
+                <a:solidFill>
+                  <a:srgbClr val="13233B"/>
+                </a:solidFill>
+                <a:latin typeface="Aptos"/>
+              </a:rPr>
+              <a:t>One </a:t>
+            </a:r>
+            <a:r>
+              <a:rPr sz="950" b="1" dirty="0">
                 <a:solidFill>
                   <a:srgbClr val="13233B"/>
                 </a:solidFill>
@@ -34982,7 +35127,7 @@
           <a:noFill/>
         </p:spPr>
         <p:txBody>
-          <a:bodyPr wrap="square" lIns="36576" rIns="36576" tIns="36576" bIns="36576" anchor="t">
+          <a:bodyPr wrap="square" lIns="36576" tIns="36576" rIns="36576" bIns="36576" anchor="t">
             <a:spAutoFit/>
           </a:bodyPr>
           <a:lstStyle/>
@@ -35049,6 +35194,7 @@
           <a:lstStyle/>
           <a:p>
             <a:pPr algn="ctr"/>
+            <a:endParaRPr/>
           </a:p>
         </p:txBody>
       </p:sp>
@@ -35069,7 +35215,7 @@
           <a:noFill/>
         </p:spPr>
         <p:txBody>
-          <a:bodyPr wrap="square" lIns="36576" rIns="36576" tIns="36576" bIns="36576" anchor="t">
+          <a:bodyPr wrap="square" lIns="36576" tIns="36576" rIns="36576" bIns="36576" anchor="t">
             <a:spAutoFit/>
           </a:bodyPr>
           <a:lstStyle/>
@@ -35136,6 +35282,7 @@
           <a:lstStyle/>
           <a:p>
             <a:pPr algn="ctr"/>
+            <a:endParaRPr/>
           </a:p>
         </p:txBody>
       </p:sp>
@@ -35156,7 +35303,7 @@
           <a:noFill/>
         </p:spPr>
         <p:txBody>
-          <a:bodyPr wrap="square" lIns="36576" rIns="36576" tIns="36576" bIns="36576" anchor="t">
+          <a:bodyPr wrap="square" lIns="36576" tIns="36576" rIns="36576" bIns="36576" anchor="t">
             <a:spAutoFit/>
           </a:bodyPr>
           <a:lstStyle/>
@@ -35223,6 +35370,7 @@
           <a:lstStyle/>
           <a:p>
             <a:pPr algn="ctr"/>
+            <a:endParaRPr/>
           </a:p>
         </p:txBody>
       </p:sp>
@@ -35243,7 +35391,7 @@
           <a:noFill/>
         </p:spPr>
         <p:txBody>
-          <a:bodyPr wrap="square" lIns="36576" rIns="36576" tIns="36576" bIns="36576" anchor="t">
+          <a:bodyPr wrap="square" lIns="36576" tIns="36576" rIns="36576" bIns="36576" anchor="t">
             <a:spAutoFit/>
           </a:bodyPr>
           <a:lstStyle/>
@@ -35310,6 +35458,7 @@
           <a:lstStyle/>
           <a:p>
             <a:pPr algn="ctr"/>
+            <a:endParaRPr/>
           </a:p>
         </p:txBody>
       </p:sp>
@@ -35330,7 +35479,7 @@
           <a:noFill/>
         </p:spPr>
         <p:txBody>
-          <a:bodyPr wrap="square" lIns="36576" rIns="36576" tIns="36576" bIns="36576" anchor="t">
+          <a:bodyPr wrap="square" lIns="36576" tIns="36576" rIns="36576" bIns="36576" anchor="t">
             <a:spAutoFit/>
           </a:bodyPr>
           <a:lstStyle/>
@@ -35372,7 +35521,7 @@
           <a:noFill/>
         </p:spPr>
         <p:txBody>
-          <a:bodyPr wrap="square" lIns="36576" rIns="36576" tIns="36576" bIns="36576" anchor="t">
+          <a:bodyPr wrap="square" lIns="36576" tIns="36576" rIns="36576" bIns="36576" anchor="t">
             <a:spAutoFit/>
           </a:bodyPr>
           <a:lstStyle/>
@@ -35439,6 +35588,7 @@
           <a:lstStyle/>
           <a:p>
             <a:pPr algn="ctr"/>
+            <a:endParaRPr/>
           </a:p>
         </p:txBody>
       </p:sp>
@@ -35484,6 +35634,7 @@
           <a:lstStyle/>
           <a:p>
             <a:pPr algn="ctr"/>
+            <a:endParaRPr/>
           </a:p>
         </p:txBody>
       </p:sp>
@@ -35525,7 +35676,7 @@
           </a:fontRef>
         </p:style>
         <p:txBody>
-          <a:bodyPr rtlCol="0" anchor="ctr" lIns="54864" rIns="54864" tIns="9144" bIns="9144"/>
+          <a:bodyPr lIns="54864" tIns="9144" rIns="54864" bIns="9144" rtlCol="0" anchor="ctr"/>
           <a:lstStyle/>
           <a:p>
             <a:pPr algn="ctr"/>
@@ -35558,7 +35709,7 @@
           <a:noFill/>
         </p:spPr>
         <p:txBody>
-          <a:bodyPr wrap="square" lIns="36576" rIns="36576" tIns="36576" bIns="36576" anchor="t">
+          <a:bodyPr wrap="square" lIns="36576" tIns="36576" rIns="36576" bIns="36576" anchor="t">
             <a:spAutoFit/>
           </a:bodyPr>
           <a:lstStyle/>
@@ -35625,6 +35776,7 @@
           <a:lstStyle/>
           <a:p>
             <a:pPr algn="ctr"/>
+            <a:endParaRPr/>
           </a:p>
         </p:txBody>
       </p:sp>
@@ -35645,7 +35797,7 @@
           <a:noFill/>
         </p:spPr>
         <p:txBody>
-          <a:bodyPr wrap="square" lIns="36576" rIns="36576" tIns="36576" bIns="36576" anchor="ctr">
+          <a:bodyPr wrap="square" lIns="36576" tIns="36576" rIns="36576" bIns="36576" anchor="ctr">
             <a:spAutoFit/>
           </a:bodyPr>
           <a:lstStyle/>
@@ -35712,6 +35864,7 @@
           <a:lstStyle/>
           <a:p>
             <a:pPr algn="ctr"/>
+            <a:endParaRPr/>
           </a:p>
         </p:txBody>
       </p:sp>
@@ -35732,7 +35885,7 @@
           <a:noFill/>
         </p:spPr>
         <p:txBody>
-          <a:bodyPr wrap="square" lIns="36576" rIns="36576" tIns="36576" bIns="36576" anchor="ctr">
+          <a:bodyPr wrap="square" lIns="36576" tIns="36576" rIns="36576" bIns="36576" anchor="ctr">
             <a:spAutoFit/>
           </a:bodyPr>
           <a:lstStyle/>
@@ -35799,6 +35952,7 @@
           <a:lstStyle/>
           <a:p>
             <a:pPr algn="ctr"/>
+            <a:endParaRPr/>
           </a:p>
         </p:txBody>
       </p:sp>
@@ -35819,7 +35973,7 @@
           <a:noFill/>
         </p:spPr>
         <p:txBody>
-          <a:bodyPr wrap="square" lIns="36576" rIns="36576" tIns="36576" bIns="36576" anchor="ctr">
+          <a:bodyPr wrap="square" lIns="36576" tIns="36576" rIns="36576" bIns="36576" anchor="ctr">
             <a:spAutoFit/>
           </a:bodyPr>
           <a:lstStyle/>
@@ -35884,6 +36038,7 @@
           <a:lstStyle/>
           <a:p>
             <a:pPr algn="ctr"/>
+            <a:endParaRPr/>
           </a:p>
         </p:txBody>
       </p:sp>
@@ -35929,6 +36084,7 @@
           <a:lstStyle/>
           <a:p>
             <a:pPr algn="ctr"/>
+            <a:endParaRPr/>
           </a:p>
         </p:txBody>
       </p:sp>
@@ -35949,7 +36105,7 @@
           <a:noFill/>
         </p:spPr>
         <p:txBody>
-          <a:bodyPr wrap="square" lIns="36576" rIns="36576" tIns="36576" bIns="36576" anchor="t">
+          <a:bodyPr wrap="square" lIns="36576" tIns="36576" rIns="36576" bIns="36576" anchor="t">
             <a:spAutoFit/>
           </a:bodyPr>
           <a:lstStyle/>
@@ -35991,7 +36147,7 @@
           <a:noFill/>
         </p:spPr>
         <p:txBody>
-          <a:bodyPr wrap="square" lIns="36576" rIns="36576" tIns="36576" bIns="36576" anchor="t">
+          <a:bodyPr wrap="square" lIns="36576" tIns="36576" rIns="36576" bIns="36576" anchor="t">
             <a:spAutoFit/>
           </a:bodyPr>
           <a:lstStyle/>
@@ -36058,6 +36214,7 @@
           <a:lstStyle/>
           <a:p>
             <a:pPr algn="ctr"/>
+            <a:endParaRPr/>
           </a:p>
         </p:txBody>
       </p:sp>
@@ -36078,7 +36235,7 @@
           <a:noFill/>
         </p:spPr>
         <p:txBody>
-          <a:bodyPr wrap="square" lIns="36576" rIns="36576" tIns="36576" bIns="36576" anchor="t">
+          <a:bodyPr wrap="square" lIns="36576" tIns="36576" rIns="36576" bIns="36576" anchor="t">
             <a:spAutoFit/>
           </a:bodyPr>
           <a:lstStyle/>
@@ -36120,7 +36277,7 @@
           <a:noFill/>
         </p:spPr>
         <p:txBody>
-          <a:bodyPr wrap="square" lIns="36576" rIns="36576" tIns="36576" bIns="36576" anchor="t">
+          <a:bodyPr wrap="square" lIns="36576" tIns="36576" rIns="36576" bIns="36576" anchor="t">
             <a:spAutoFit/>
           </a:bodyPr>
           <a:lstStyle/>
@@ -36187,6 +36344,7 @@
           <a:lstStyle/>
           <a:p>
             <a:pPr algn="ctr"/>
+            <a:endParaRPr/>
           </a:p>
         </p:txBody>
       </p:sp>
@@ -36207,7 +36365,7 @@
           <a:noFill/>
         </p:spPr>
         <p:txBody>
-          <a:bodyPr wrap="square" lIns="36576" rIns="36576" tIns="36576" bIns="36576" anchor="t">
+          <a:bodyPr wrap="square" lIns="36576" tIns="36576" rIns="36576" bIns="36576" anchor="t">
             <a:spAutoFit/>
           </a:bodyPr>
           <a:lstStyle/>
@@ -36249,7 +36407,7 @@
           <a:noFill/>
         </p:spPr>
         <p:txBody>
-          <a:bodyPr wrap="square" lIns="36576" rIns="36576" tIns="36576" bIns="36576" anchor="t">
+          <a:bodyPr wrap="square" lIns="36576" tIns="36576" rIns="36576" bIns="36576" anchor="t">
             <a:spAutoFit/>
           </a:bodyPr>
           <a:lstStyle/>
@@ -36312,7 +36470,7 @@
           </a:fontRef>
         </p:style>
         <p:txBody>
-          <a:bodyPr rtlCol="0" anchor="ctr" lIns="54864" rIns="54864" tIns="9144" bIns="9144"/>
+          <a:bodyPr lIns="54864" tIns="9144" rIns="54864" bIns="9144" rtlCol="0" anchor="ctr"/>
           <a:lstStyle/>
           <a:p>
             <a:pPr algn="ctr"/>
@@ -36345,7 +36503,7 @@
           <a:noFill/>
         </p:spPr>
         <p:txBody>
-          <a:bodyPr wrap="square" lIns="36576" rIns="36576" tIns="36576" bIns="36576" anchor="t">
+          <a:bodyPr wrap="square" lIns="36576" tIns="36576" rIns="36576" bIns="36576" anchor="t">
             <a:spAutoFit/>
           </a:bodyPr>
           <a:lstStyle/>
@@ -36422,7 +36580,7 @@
           <a:noFill/>
         </p:spPr>
         <p:txBody>
-          <a:bodyPr wrap="square" lIns="36576" rIns="36576" tIns="36576" bIns="36576" anchor="t">
+          <a:bodyPr wrap="square" lIns="36576" tIns="36576" rIns="36576" bIns="36576" anchor="t">
             <a:spAutoFit/>
           </a:bodyPr>
           <a:lstStyle/>
@@ -36456,7 +36614,7 @@
 </file>
 
 <file path=ppt/slides/slide6.xml><?xml version="1.0" encoding="utf-8"?>
-<p:sld xmlns:a="http://schemas.openxmlformats.org/drawingml/2006/main" xmlns:p="http://schemas.openxmlformats.org/presentationml/2006/main" xmlns:r="http://schemas.openxmlformats.org/officeDocument/2006/relationships">
+<p:sld xmlns:a="http://schemas.openxmlformats.org/drawingml/2006/main" xmlns:r="http://schemas.openxmlformats.org/officeDocument/2006/relationships" xmlns:p="http://schemas.openxmlformats.org/presentationml/2006/main">
   <p:cSld>
     <p:bg>
       <p:bgPr>
@@ -36472,7 +36630,14 @@
         <p:cNvGrpSpPr/>
         <p:nvPr/>
       </p:nvGrpSpPr>
-      <p:grpSpPr/>
+      <p:grpSpPr>
+        <a:xfrm>
+          <a:off x="0" y="0"/>
+          <a:ext cx="0" cy="0"/>
+          <a:chOff x="0" y="0"/>
+          <a:chExt cx="0" cy="0"/>
+        </a:xfrm>
+      </p:grpSpPr>
       <p:sp>
         <p:nvSpPr>
           <p:cNvPr id="2" name="TextBox 1"/>
@@ -36490,7 +36655,7 @@
           <a:noFill/>
         </p:spPr>
         <p:txBody>
-          <a:bodyPr wrap="square" lIns="36576" rIns="36576" tIns="36576" bIns="36576" anchor="t">
+          <a:bodyPr wrap="square" lIns="36576" tIns="36576" rIns="36576" bIns="36576" anchor="t">
             <a:spAutoFit/>
           </a:bodyPr>
           <a:lstStyle/>
@@ -36532,7 +36697,7 @@
           <a:noFill/>
         </p:spPr>
         <p:txBody>
-          <a:bodyPr wrap="square" lIns="36576" rIns="36576" tIns="36576" bIns="36576" anchor="t">
+          <a:bodyPr wrap="square" lIns="36576" tIns="36576" rIns="36576" bIns="36576" anchor="t">
             <a:spAutoFit/>
           </a:bodyPr>
           <a:lstStyle/>
@@ -36574,7 +36739,7 @@
           <a:noFill/>
         </p:spPr>
         <p:txBody>
-          <a:bodyPr wrap="square" lIns="36576" rIns="36576" tIns="36576" bIns="36576" anchor="t">
+          <a:bodyPr wrap="square" lIns="36576" tIns="36576" rIns="36576" bIns="36576" anchor="t">
             <a:spAutoFit/>
           </a:bodyPr>
           <a:lstStyle/>
@@ -36616,7 +36781,7 @@
           <a:noFill/>
         </p:spPr>
         <p:txBody>
-          <a:bodyPr wrap="square" lIns="36576" rIns="36576" tIns="36576" bIns="36576" anchor="t">
+          <a:bodyPr wrap="square" lIns="36576" tIns="36576" rIns="36576" bIns="36576" anchor="t">
             <a:spAutoFit/>
           </a:bodyPr>
           <a:lstStyle/>
@@ -36683,6 +36848,7 @@
           <a:lstStyle/>
           <a:p>
             <a:pPr algn="ctr"/>
+            <a:endParaRPr/>
           </a:p>
         </p:txBody>
       </p:sp>
@@ -36724,7 +36890,7 @@
           </a:fontRef>
         </p:style>
         <p:txBody>
-          <a:bodyPr rtlCol="0" anchor="ctr" lIns="54864" rIns="54864" tIns="9144" bIns="9144"/>
+          <a:bodyPr lIns="54864" tIns="9144" rIns="54864" bIns="9144" rtlCol="0" anchor="ctr"/>
           <a:lstStyle/>
           <a:p>
             <a:pPr algn="ctr"/>
@@ -36757,7 +36923,7 @@
           <a:noFill/>
         </p:spPr>
         <p:txBody>
-          <a:bodyPr wrap="square" lIns="36576" rIns="36576" tIns="36576" bIns="36576" anchor="t">
+          <a:bodyPr wrap="square" lIns="36576" tIns="36576" rIns="36576" bIns="36576" anchor="t">
             <a:spAutoFit/>
           </a:bodyPr>
           <a:lstStyle/>
@@ -36824,6 +36990,7 @@
           <a:lstStyle/>
           <a:p>
             <a:pPr algn="ctr"/>
+            <a:endParaRPr/>
           </a:p>
         </p:txBody>
       </p:sp>
@@ -36844,7 +37011,7 @@
           <a:noFill/>
         </p:spPr>
         <p:txBody>
-          <a:bodyPr wrap="square" lIns="36576" rIns="36576" tIns="36576" bIns="36576" anchor="ctr">
+          <a:bodyPr wrap="square" lIns="36576" tIns="36576" rIns="36576" bIns="36576" anchor="ctr">
             <a:spAutoFit/>
           </a:bodyPr>
           <a:lstStyle/>
@@ -36886,7 +37053,7 @@
           <a:noFill/>
         </p:spPr>
         <p:txBody>
-          <a:bodyPr wrap="square" lIns="36576" rIns="36576" tIns="36576" bIns="36576" anchor="t">
+          <a:bodyPr wrap="square" lIns="36576" tIns="36576" rIns="36576" bIns="36576" anchor="t">
             <a:spAutoFit/>
           </a:bodyPr>
           <a:lstStyle/>
@@ -36963,7 +37130,7 @@
           <a:noFill/>
         </p:spPr>
         <p:txBody>
-          <a:bodyPr wrap="square" lIns="36576" rIns="36576" tIns="36576" bIns="36576" anchor="t">
+          <a:bodyPr wrap="square" lIns="36576" tIns="36576" rIns="36576" bIns="36576" anchor="t">
             <a:spAutoFit/>
           </a:bodyPr>
           <a:lstStyle/>
@@ -37005,7 +37172,7 @@
           <a:noFill/>
         </p:spPr>
         <p:txBody>
-          <a:bodyPr wrap="square" lIns="36576" rIns="36576" tIns="36576" bIns="36576" anchor="t">
+          <a:bodyPr wrap="square" lIns="36576" tIns="36576" rIns="36576" bIns="36576" anchor="t">
             <a:spAutoFit/>
           </a:bodyPr>
           <a:lstStyle/>
@@ -37047,7 +37214,7 @@
           <a:noFill/>
         </p:spPr>
         <p:txBody>
-          <a:bodyPr wrap="square" lIns="36576" rIns="36576" tIns="36576" bIns="36576" anchor="t">
+          <a:bodyPr wrap="square" lIns="36576" tIns="36576" rIns="36576" bIns="36576" anchor="t">
             <a:spAutoFit/>
           </a:bodyPr>
           <a:lstStyle/>
@@ -37089,7 +37256,7 @@
           <a:noFill/>
         </p:spPr>
         <p:txBody>
-          <a:bodyPr wrap="square" lIns="36576" rIns="36576" tIns="36576" bIns="36576" anchor="t">
+          <a:bodyPr wrap="square" lIns="36576" tIns="36576" rIns="36576" bIns="36576" anchor="t">
             <a:spAutoFit/>
           </a:bodyPr>
           <a:lstStyle/>
@@ -37156,6 +37323,7 @@
           <a:lstStyle/>
           <a:p>
             <a:pPr algn="ctr"/>
+            <a:endParaRPr/>
           </a:p>
         </p:txBody>
       </p:sp>
@@ -37197,7 +37365,7 @@
           </a:fontRef>
         </p:style>
         <p:txBody>
-          <a:bodyPr rtlCol="0" anchor="ctr" lIns="54864" rIns="54864" tIns="9144" bIns="9144"/>
+          <a:bodyPr lIns="54864" tIns="9144" rIns="54864" bIns="9144" rtlCol="0" anchor="ctr"/>
           <a:lstStyle/>
           <a:p>
             <a:pPr algn="ctr"/>
@@ -37230,7 +37398,7 @@
           <a:noFill/>
         </p:spPr>
         <p:txBody>
-          <a:bodyPr wrap="square" lIns="36576" rIns="36576" tIns="36576" bIns="36576" anchor="t">
+          <a:bodyPr wrap="square" lIns="36576" tIns="36576" rIns="36576" bIns="36576" anchor="t">
             <a:spAutoFit/>
           </a:bodyPr>
           <a:lstStyle/>
@@ -37297,6 +37465,7 @@
           <a:lstStyle/>
           <a:p>
             <a:pPr algn="ctr"/>
+            <a:endParaRPr/>
           </a:p>
         </p:txBody>
       </p:sp>
@@ -37317,7 +37486,7 @@
           <a:noFill/>
         </p:spPr>
         <p:txBody>
-          <a:bodyPr wrap="square" lIns="36576" rIns="36576" tIns="36576" bIns="36576" anchor="ctr">
+          <a:bodyPr wrap="square" lIns="36576" tIns="36576" rIns="36576" bIns="36576" anchor="ctr">
             <a:spAutoFit/>
           </a:bodyPr>
           <a:lstStyle/>
@@ -37359,7 +37528,7 @@
           <a:noFill/>
         </p:spPr>
         <p:txBody>
-          <a:bodyPr wrap="square" lIns="36576" rIns="36576" tIns="36576" bIns="36576" anchor="t">
+          <a:bodyPr wrap="square" lIns="36576" tIns="36576" rIns="36576" bIns="36576" anchor="t">
             <a:spAutoFit/>
           </a:bodyPr>
           <a:lstStyle/>
@@ -37436,7 +37605,7 @@
           <a:noFill/>
         </p:spPr>
         <p:txBody>
-          <a:bodyPr wrap="square" lIns="36576" rIns="36576" tIns="36576" bIns="36576" anchor="t">
+          <a:bodyPr wrap="square" lIns="36576" tIns="36576" rIns="36576" bIns="36576" anchor="t">
             <a:spAutoFit/>
           </a:bodyPr>
           <a:lstStyle/>
@@ -37478,7 +37647,7 @@
           <a:noFill/>
         </p:spPr>
         <p:txBody>
-          <a:bodyPr wrap="square" lIns="36576" rIns="36576" tIns="36576" bIns="36576" anchor="t">
+          <a:bodyPr wrap="square" lIns="36576" tIns="36576" rIns="36576" bIns="36576" anchor="t">
             <a:spAutoFit/>
           </a:bodyPr>
           <a:lstStyle/>
@@ -37520,7 +37689,7 @@
           <a:noFill/>
         </p:spPr>
         <p:txBody>
-          <a:bodyPr wrap="square" lIns="36576" rIns="36576" tIns="36576" bIns="36576" anchor="t">
+          <a:bodyPr wrap="square" lIns="36576" tIns="36576" rIns="36576" bIns="36576" anchor="t">
             <a:spAutoFit/>
           </a:bodyPr>
           <a:lstStyle/>
@@ -37562,7 +37731,7 @@
           <a:noFill/>
         </p:spPr>
         <p:txBody>
-          <a:bodyPr wrap="square" lIns="36576" rIns="36576" tIns="36576" bIns="36576" anchor="t">
+          <a:bodyPr wrap="square" lIns="36576" tIns="36576" rIns="36576" bIns="36576" anchor="t">
             <a:spAutoFit/>
           </a:bodyPr>
           <a:lstStyle/>
@@ -37629,6 +37798,7 @@
           <a:lstStyle/>
           <a:p>
             <a:pPr algn="ctr"/>
+            <a:endParaRPr/>
           </a:p>
         </p:txBody>
       </p:sp>
@@ -37670,7 +37840,7 @@
           </a:fontRef>
         </p:style>
         <p:txBody>
-          <a:bodyPr rtlCol="0" anchor="ctr" lIns="54864" rIns="54864" tIns="9144" bIns="9144"/>
+          <a:bodyPr lIns="54864" tIns="9144" rIns="54864" bIns="9144" rtlCol="0" anchor="ctr"/>
           <a:lstStyle/>
           <a:p>
             <a:pPr algn="ctr"/>
@@ -37703,7 +37873,7 @@
           <a:noFill/>
         </p:spPr>
         <p:txBody>
-          <a:bodyPr wrap="square" lIns="36576" rIns="36576" tIns="36576" bIns="36576" anchor="t">
+          <a:bodyPr wrap="square" lIns="36576" tIns="36576" rIns="36576" bIns="36576" anchor="t">
             <a:spAutoFit/>
           </a:bodyPr>
           <a:lstStyle/>
@@ -37770,6 +37940,7 @@
           <a:lstStyle/>
           <a:p>
             <a:pPr algn="ctr"/>
+            <a:endParaRPr/>
           </a:p>
         </p:txBody>
       </p:sp>
@@ -37790,7 +37961,7 @@
           <a:noFill/>
         </p:spPr>
         <p:txBody>
-          <a:bodyPr wrap="square" lIns="36576" rIns="36576" tIns="36576" bIns="36576" anchor="ctr">
+          <a:bodyPr wrap="square" lIns="36576" tIns="36576" rIns="36576" bIns="36576" anchor="ctr">
             <a:spAutoFit/>
           </a:bodyPr>
           <a:lstStyle/>
@@ -37832,7 +38003,7 @@
           <a:noFill/>
         </p:spPr>
         <p:txBody>
-          <a:bodyPr wrap="square" lIns="36576" rIns="36576" tIns="36576" bIns="36576" anchor="t">
+          <a:bodyPr wrap="square" lIns="36576" tIns="36576" rIns="36576" bIns="36576" anchor="t">
             <a:spAutoFit/>
           </a:bodyPr>
           <a:lstStyle/>
@@ -37909,7 +38080,7 @@
           <a:noFill/>
         </p:spPr>
         <p:txBody>
-          <a:bodyPr wrap="square" lIns="36576" rIns="36576" tIns="36576" bIns="36576" anchor="t">
+          <a:bodyPr wrap="square" lIns="36576" tIns="36576" rIns="36576" bIns="36576" anchor="t">
             <a:spAutoFit/>
           </a:bodyPr>
           <a:lstStyle/>
@@ -37951,7 +38122,7 @@
           <a:noFill/>
         </p:spPr>
         <p:txBody>
-          <a:bodyPr wrap="square" lIns="36576" rIns="36576" tIns="36576" bIns="36576" anchor="t">
+          <a:bodyPr wrap="square" lIns="36576" tIns="36576" rIns="36576" bIns="36576" anchor="t">
             <a:spAutoFit/>
           </a:bodyPr>
           <a:lstStyle/>
@@ -37993,7 +38164,7 @@
           <a:noFill/>
         </p:spPr>
         <p:txBody>
-          <a:bodyPr wrap="square" lIns="36576" rIns="36576" tIns="36576" bIns="36576" anchor="t">
+          <a:bodyPr wrap="square" lIns="36576" tIns="36576" rIns="36576" bIns="36576" anchor="t">
             <a:spAutoFit/>
           </a:bodyPr>
           <a:lstStyle/>
@@ -38035,7 +38206,7 @@
           <a:noFill/>
         </p:spPr>
         <p:txBody>
-          <a:bodyPr wrap="square" lIns="36576" rIns="36576" tIns="36576" bIns="36576" anchor="t">
+          <a:bodyPr wrap="square" lIns="36576" tIns="36576" rIns="36576" bIns="36576" anchor="t">
             <a:spAutoFit/>
           </a:bodyPr>
           <a:lstStyle/>
@@ -38112,7 +38283,7 @@
           <a:noFill/>
         </p:spPr>
         <p:txBody>
-          <a:bodyPr wrap="square" lIns="36576" rIns="36576" tIns="36576" bIns="36576" anchor="t">
+          <a:bodyPr wrap="square" lIns="36576" tIns="36576" rIns="36576" bIns="36576" anchor="t">
             <a:spAutoFit/>
           </a:bodyPr>
           <a:lstStyle/>
@@ -38146,7 +38317,7 @@
 </file>
 
 <file path=ppt/slides/slide7.xml><?xml version="1.0" encoding="utf-8"?>
-<p:sld xmlns:a="http://schemas.openxmlformats.org/drawingml/2006/main" xmlns:p="http://schemas.openxmlformats.org/presentationml/2006/main" xmlns:r="http://schemas.openxmlformats.org/officeDocument/2006/relationships">
+<p:sld xmlns:a="http://schemas.openxmlformats.org/drawingml/2006/main" xmlns:r="http://schemas.openxmlformats.org/officeDocument/2006/relationships" xmlns:p="http://schemas.openxmlformats.org/presentationml/2006/main">
   <p:cSld>
     <p:bg>
       <p:bgPr>
@@ -38162,7 +38333,14 @@
         <p:cNvGrpSpPr/>
         <p:nvPr/>
       </p:nvGrpSpPr>
-      <p:grpSpPr/>
+      <p:grpSpPr>
+        <a:xfrm>
+          <a:off x="0" y="0"/>
+          <a:ext cx="0" cy="0"/>
+          <a:chOff x="0" y="0"/>
+          <a:chExt cx="0" cy="0"/>
+        </a:xfrm>
+      </p:grpSpPr>
       <p:sp>
         <p:nvSpPr>
           <p:cNvPr id="2" name="TextBox 1"/>
@@ -38180,7 +38358,7 @@
           <a:noFill/>
         </p:spPr>
         <p:txBody>
-          <a:bodyPr wrap="square" lIns="36576" rIns="36576" tIns="36576" bIns="36576" anchor="t">
+          <a:bodyPr wrap="square" lIns="36576" tIns="36576" rIns="36576" bIns="36576" anchor="t">
             <a:spAutoFit/>
           </a:bodyPr>
           <a:lstStyle/>
@@ -38222,7 +38400,7 @@
           <a:noFill/>
         </p:spPr>
         <p:txBody>
-          <a:bodyPr wrap="square" lIns="36576" rIns="36576" tIns="36576" bIns="36576" anchor="t">
+          <a:bodyPr wrap="square" lIns="36576" tIns="36576" rIns="36576" bIns="36576" anchor="t">
             <a:spAutoFit/>
           </a:bodyPr>
           <a:lstStyle/>
@@ -38264,7 +38442,7 @@
           <a:noFill/>
         </p:spPr>
         <p:txBody>
-          <a:bodyPr wrap="square" lIns="36576" rIns="36576" tIns="36576" bIns="36576" anchor="t">
+          <a:bodyPr wrap="square" lIns="36576" tIns="36576" rIns="36576" bIns="36576" anchor="t">
             <a:spAutoFit/>
           </a:bodyPr>
           <a:lstStyle/>
@@ -38306,7 +38484,7 @@
           <a:noFill/>
         </p:spPr>
         <p:txBody>
-          <a:bodyPr wrap="square" lIns="36576" rIns="36576" tIns="36576" bIns="36576">
+          <a:bodyPr wrap="square" lIns="36576" tIns="36576" rIns="36576" bIns="36576">
             <a:spAutoFit/>
           </a:bodyPr>
           <a:lstStyle/>
@@ -38375,6 +38553,7 @@
           <a:lstStyle/>
           <a:p>
             <a:pPr algn="ctr"/>
+            <a:endParaRPr/>
           </a:p>
         </p:txBody>
       </p:sp>
@@ -38395,7 +38574,7 @@
           <a:noFill/>
         </p:spPr>
         <p:txBody>
-          <a:bodyPr wrap="square" lIns="36576" rIns="36576" tIns="36576" bIns="36576" anchor="t">
+          <a:bodyPr wrap="square" lIns="36576" tIns="36576" rIns="36576" bIns="36576" anchor="t">
             <a:spAutoFit/>
           </a:bodyPr>
           <a:lstStyle/>
@@ -38458,7 +38637,7 @@
           </a:fontRef>
         </p:style>
         <p:txBody>
-          <a:bodyPr rtlCol="0" anchor="ctr" lIns="54864" rIns="54864" tIns="9144" bIns="9144"/>
+          <a:bodyPr lIns="54864" tIns="9144" rIns="54864" bIns="9144" rtlCol="0" anchor="ctr"/>
           <a:lstStyle/>
           <a:p>
             <a:pPr algn="ctr"/>
@@ -39776,6 +39955,7 @@
           <a:lstStyle/>
           <a:p>
             <a:pPr algn="ctr"/>
+            <a:endParaRPr/>
           </a:p>
         </p:txBody>
       </p:sp>
@@ -39821,6 +40001,7 @@
           <a:lstStyle/>
           <a:p>
             <a:pPr algn="ctr"/>
+            <a:endParaRPr/>
           </a:p>
         </p:txBody>
       </p:sp>
@@ -39866,6 +40047,7 @@
           <a:lstStyle/>
           <a:p>
             <a:pPr algn="ctr"/>
+            <a:endParaRPr/>
           </a:p>
         </p:txBody>
       </p:sp>
@@ -39909,6 +40091,7 @@
           <a:lstStyle/>
           <a:p>
             <a:pPr algn="ctr"/>
+            <a:endParaRPr/>
           </a:p>
         </p:txBody>
       </p:sp>
@@ -39954,6 +40137,7 @@
           <a:lstStyle/>
           <a:p>
             <a:pPr algn="ctr"/>
+            <a:endParaRPr/>
           </a:p>
         </p:txBody>
       </p:sp>
@@ -39974,7 +40158,7 @@
           <a:noFill/>
         </p:spPr>
         <p:txBody>
-          <a:bodyPr wrap="square" lIns="36576" rIns="36576" tIns="36576" bIns="36576" anchor="t">
+          <a:bodyPr wrap="square" lIns="36576" tIns="36576" rIns="36576" bIns="36576" anchor="t">
             <a:spAutoFit/>
           </a:bodyPr>
           <a:lstStyle/>
@@ -40037,7 +40221,7 @@
           </a:fontRef>
         </p:style>
         <p:txBody>
-          <a:bodyPr rtlCol="0" anchor="ctr" lIns="54864" rIns="54864" tIns="9144" bIns="9144"/>
+          <a:bodyPr lIns="54864" tIns="9144" rIns="54864" bIns="9144" rtlCol="0" anchor="ctr"/>
           <a:lstStyle/>
           <a:p>
             <a:pPr algn="ctr"/>
@@ -41355,6 +41539,7 @@
           <a:lstStyle/>
           <a:p>
             <a:pPr algn="ctr"/>
+            <a:endParaRPr/>
           </a:p>
         </p:txBody>
       </p:sp>
@@ -41400,6 +41585,7 @@
           <a:lstStyle/>
           <a:p>
             <a:pPr algn="ctr"/>
+            <a:endParaRPr/>
           </a:p>
         </p:txBody>
       </p:sp>
@@ -41445,6 +41631,7 @@
           <a:lstStyle/>
           <a:p>
             <a:pPr algn="ctr"/>
+            <a:endParaRPr/>
           </a:p>
         </p:txBody>
       </p:sp>
@@ -41488,6 +41675,7 @@
           <a:lstStyle/>
           <a:p>
             <a:pPr algn="ctr"/>
+            <a:endParaRPr/>
           </a:p>
         </p:txBody>
       </p:sp>
@@ -41508,7 +41696,7 @@
           <a:noFill/>
         </p:spPr>
         <p:txBody>
-          <a:bodyPr wrap="square" lIns="36576" rIns="36576" tIns="36576" bIns="36576" anchor="t">
+          <a:bodyPr wrap="square" lIns="36576" tIns="36576" rIns="36576" bIns="36576" anchor="t">
             <a:spAutoFit/>
           </a:bodyPr>
           <a:lstStyle/>
@@ -41550,7 +41738,7 @@
           <a:noFill/>
         </p:spPr>
         <p:txBody>
-          <a:bodyPr wrap="square" lIns="36576" rIns="36576" tIns="36576" bIns="36576" anchor="t">
+          <a:bodyPr wrap="square" lIns="36576" tIns="36576" rIns="36576" bIns="36576" anchor="t">
             <a:spAutoFit/>
           </a:bodyPr>
           <a:lstStyle/>
@@ -41617,6 +41805,7 @@
           <a:lstStyle/>
           <a:p>
             <a:pPr algn="ctr"/>
+            <a:endParaRPr/>
           </a:p>
         </p:txBody>
       </p:sp>
@@ -41658,7 +41847,7 @@
           </a:fontRef>
         </p:style>
         <p:txBody>
-          <a:bodyPr rtlCol="0" anchor="ctr" lIns="54864" rIns="54864" tIns="9144" bIns="9144"/>
+          <a:bodyPr lIns="54864" tIns="9144" rIns="54864" bIns="9144" rtlCol="0" anchor="ctr"/>
           <a:lstStyle/>
           <a:p>
             <a:pPr algn="ctr"/>
@@ -41691,7 +41880,7 @@
           <a:noFill/>
         </p:spPr>
         <p:txBody>
-          <a:bodyPr wrap="square" lIns="36576" rIns="36576" tIns="36576" bIns="36576" anchor="t">
+          <a:bodyPr wrap="square" lIns="36576" tIns="36576" rIns="36576" bIns="36576" anchor="t">
             <a:spAutoFit/>
           </a:bodyPr>
           <a:lstStyle/>
@@ -41733,7 +41922,7 @@
           <a:noFill/>
         </p:spPr>
         <p:txBody>
-          <a:bodyPr wrap="square" lIns="36576" rIns="36576" tIns="36576" bIns="36576" anchor="t">
+          <a:bodyPr wrap="square" lIns="36576" tIns="36576" rIns="36576" bIns="36576" anchor="t">
             <a:spAutoFit/>
           </a:bodyPr>
           <a:lstStyle/>
@@ -41800,6 +41989,7 @@
           <a:lstStyle/>
           <a:p>
             <a:pPr algn="ctr"/>
+            <a:endParaRPr/>
           </a:p>
         </p:txBody>
       </p:sp>
@@ -41841,7 +42031,7 @@
           </a:fontRef>
         </p:style>
         <p:txBody>
-          <a:bodyPr rtlCol="0" anchor="ctr" lIns="54864" rIns="54864" tIns="9144" bIns="9144"/>
+          <a:bodyPr lIns="54864" tIns="9144" rIns="54864" bIns="9144" rtlCol="0" anchor="ctr"/>
           <a:lstStyle/>
           <a:p>
             <a:pPr algn="ctr"/>
@@ -41874,7 +42064,7 @@
           <a:noFill/>
         </p:spPr>
         <p:txBody>
-          <a:bodyPr wrap="square" lIns="36576" rIns="36576" tIns="36576" bIns="36576" anchor="t">
+          <a:bodyPr wrap="square" lIns="36576" tIns="36576" rIns="36576" bIns="36576" anchor="t">
             <a:spAutoFit/>
           </a:bodyPr>
           <a:lstStyle/>
@@ -41916,7 +42106,7 @@
           <a:noFill/>
         </p:spPr>
         <p:txBody>
-          <a:bodyPr wrap="square" lIns="36576" rIns="36576" tIns="36576" bIns="36576" anchor="t">
+          <a:bodyPr wrap="square" lIns="36576" tIns="36576" rIns="36576" bIns="36576" anchor="t">
             <a:spAutoFit/>
           </a:bodyPr>
           <a:lstStyle/>
@@ -41983,6 +42173,7 @@
           <a:lstStyle/>
           <a:p>
             <a:pPr algn="ctr"/>
+            <a:endParaRPr/>
           </a:p>
         </p:txBody>
       </p:sp>
@@ -42024,7 +42215,7 @@
           </a:fontRef>
         </p:style>
         <p:txBody>
-          <a:bodyPr rtlCol="0" anchor="ctr" lIns="54864" rIns="54864" tIns="9144" bIns="9144"/>
+          <a:bodyPr lIns="54864" tIns="9144" rIns="54864" bIns="9144" rtlCol="0" anchor="ctr"/>
           <a:lstStyle/>
           <a:p>
             <a:pPr algn="ctr"/>
@@ -42057,7 +42248,7 @@
           <a:noFill/>
         </p:spPr>
         <p:txBody>
-          <a:bodyPr wrap="square" lIns="36576" rIns="36576" tIns="36576" bIns="36576" anchor="t">
+          <a:bodyPr wrap="square" lIns="36576" tIns="36576" rIns="36576" bIns="36576" anchor="t">
             <a:spAutoFit/>
           </a:bodyPr>
           <a:lstStyle/>
@@ -42099,7 +42290,7 @@
           <a:noFill/>
         </p:spPr>
         <p:txBody>
-          <a:bodyPr wrap="square" lIns="36576" rIns="36576" tIns="36576" bIns="36576" anchor="t">
+          <a:bodyPr wrap="square" lIns="36576" tIns="36576" rIns="36576" bIns="36576" anchor="t">
             <a:spAutoFit/>
           </a:bodyPr>
           <a:lstStyle/>
@@ -42176,7 +42367,7 @@
           <a:noFill/>
         </p:spPr>
         <p:txBody>
-          <a:bodyPr wrap="square" lIns="36576" rIns="36576" tIns="36576" bIns="36576" anchor="t">
+          <a:bodyPr wrap="square" lIns="36576" tIns="36576" rIns="36576" bIns="36576" anchor="t">
             <a:spAutoFit/>
           </a:bodyPr>
           <a:lstStyle/>
@@ -42210,7 +42401,7 @@
 </file>
 
 <file path=ppt/slides/slide8.xml><?xml version="1.0" encoding="utf-8"?>
-<p:sld xmlns:a="http://schemas.openxmlformats.org/drawingml/2006/main" xmlns:p="http://schemas.openxmlformats.org/presentationml/2006/main" xmlns:r="http://schemas.openxmlformats.org/officeDocument/2006/relationships">
+<p:sld xmlns:a="http://schemas.openxmlformats.org/drawingml/2006/main" xmlns:r="http://schemas.openxmlformats.org/officeDocument/2006/relationships" xmlns:p="http://schemas.openxmlformats.org/presentationml/2006/main">
   <p:cSld>
     <p:bg>
       <p:bgPr>
@@ -42226,7 +42417,14 @@
         <p:cNvGrpSpPr/>
         <p:nvPr/>
       </p:nvGrpSpPr>
-      <p:grpSpPr/>
+      <p:grpSpPr>
+        <a:xfrm>
+          <a:off x="0" y="0"/>
+          <a:ext cx="0" cy="0"/>
+          <a:chOff x="0" y="0"/>
+          <a:chExt cx="0" cy="0"/>
+        </a:xfrm>
+      </p:grpSpPr>
       <p:sp>
         <p:nvSpPr>
           <p:cNvPr id="2" name="TextBox 1"/>
@@ -42244,7 +42442,7 @@
           <a:noFill/>
         </p:spPr>
         <p:txBody>
-          <a:bodyPr wrap="square" lIns="36576" rIns="36576" tIns="36576" bIns="36576" anchor="t">
+          <a:bodyPr wrap="square" lIns="36576" tIns="36576" rIns="36576" bIns="36576" anchor="t">
             <a:spAutoFit/>
           </a:bodyPr>
           <a:lstStyle/>
@@ -42286,7 +42484,7 @@
           <a:noFill/>
         </p:spPr>
         <p:txBody>
-          <a:bodyPr wrap="square" lIns="36576" rIns="36576" tIns="36576" bIns="36576" anchor="t">
+          <a:bodyPr wrap="square" lIns="36576" tIns="36576" rIns="36576" bIns="36576" anchor="t">
             <a:spAutoFit/>
           </a:bodyPr>
           <a:lstStyle/>
@@ -42328,7 +42526,7 @@
           <a:noFill/>
         </p:spPr>
         <p:txBody>
-          <a:bodyPr wrap="square" lIns="36576" rIns="36576" tIns="36576" bIns="36576" anchor="t">
+          <a:bodyPr wrap="square" lIns="36576" tIns="36576" rIns="36576" bIns="36576" anchor="t">
             <a:spAutoFit/>
           </a:bodyPr>
           <a:lstStyle/>
@@ -42370,7 +42568,7 @@
           <a:noFill/>
         </p:spPr>
         <p:txBody>
-          <a:bodyPr wrap="square" lIns="36576" rIns="36576" tIns="36576" bIns="36576" anchor="t">
+          <a:bodyPr wrap="square" lIns="36576" tIns="36576" rIns="36576" bIns="36576" anchor="t">
             <a:spAutoFit/>
           </a:bodyPr>
           <a:lstStyle/>
@@ -42437,6 +42635,7 @@
           <a:lstStyle/>
           <a:p>
             <a:pPr algn="ctr"/>
+            <a:endParaRPr/>
           </a:p>
         </p:txBody>
       </p:sp>
@@ -42478,7 +42677,7 @@
           </a:fontRef>
         </p:style>
         <p:txBody>
-          <a:bodyPr rtlCol="0" anchor="ctr" lIns="54864" rIns="54864" tIns="9144" bIns="9144"/>
+          <a:bodyPr lIns="54864" tIns="9144" rIns="54864" bIns="9144" rtlCol="0" anchor="ctr"/>
           <a:lstStyle/>
           <a:p>
             <a:pPr algn="ctr"/>
@@ -42536,6 +42735,7 @@
           <a:lstStyle/>
           <a:p>
             <a:pPr algn="ctr"/>
+            <a:endParaRPr/>
           </a:p>
         </p:txBody>
       </p:sp>
@@ -42556,7 +42756,7 @@
           <a:noFill/>
         </p:spPr>
         <p:txBody>
-          <a:bodyPr wrap="square" lIns="36576" rIns="36576" tIns="36576" bIns="36576" anchor="ctr">
+          <a:bodyPr wrap="square" lIns="36576" tIns="36576" rIns="36576" bIns="36576" anchor="ctr">
             <a:spAutoFit/>
           </a:bodyPr>
           <a:lstStyle/>
@@ -42598,7 +42798,7 @@
           <a:noFill/>
         </p:spPr>
         <p:txBody>
-          <a:bodyPr wrap="square" lIns="36576" rIns="36576" tIns="36576" bIns="36576" anchor="t">
+          <a:bodyPr wrap="square" lIns="36576" tIns="36576" rIns="36576" bIns="36576" anchor="t">
             <a:spAutoFit/>
           </a:bodyPr>
           <a:lstStyle/>
@@ -42640,7 +42840,7 @@
           <a:noFill/>
         </p:spPr>
         <p:txBody>
-          <a:bodyPr wrap="square" lIns="36576" rIns="36576" tIns="36576" bIns="36576" anchor="t">
+          <a:bodyPr wrap="square" lIns="36576" tIns="36576" rIns="36576" bIns="36576" anchor="t">
             <a:spAutoFit/>
           </a:bodyPr>
           <a:lstStyle/>
@@ -42707,6 +42907,7 @@
           <a:lstStyle/>
           <a:p>
             <a:pPr algn="ctr"/>
+            <a:endParaRPr/>
           </a:p>
         </p:txBody>
       </p:sp>
@@ -42752,6 +42953,7 @@
           <a:lstStyle/>
           <a:p>
             <a:pPr algn="ctr"/>
+            <a:endParaRPr/>
           </a:p>
         </p:txBody>
       </p:sp>
@@ -42772,7 +42974,7 @@
           <a:noFill/>
         </p:spPr>
         <p:txBody>
-          <a:bodyPr wrap="square" lIns="36576" rIns="36576" tIns="36576" bIns="36576" anchor="ctr">
+          <a:bodyPr wrap="square" lIns="36576" tIns="36576" rIns="36576" bIns="36576" anchor="ctr">
             <a:spAutoFit/>
           </a:bodyPr>
           <a:lstStyle/>
@@ -42814,7 +43016,7 @@
           <a:noFill/>
         </p:spPr>
         <p:txBody>
-          <a:bodyPr wrap="square" lIns="36576" rIns="36576" tIns="36576" bIns="36576" anchor="t">
+          <a:bodyPr wrap="square" lIns="36576" tIns="36576" rIns="36576" bIns="36576" anchor="t">
             <a:spAutoFit/>
           </a:bodyPr>
           <a:lstStyle/>
@@ -42856,7 +43058,7 @@
           <a:noFill/>
         </p:spPr>
         <p:txBody>
-          <a:bodyPr wrap="square" lIns="36576" rIns="36576" tIns="36576" bIns="36576" anchor="t">
+          <a:bodyPr wrap="square" lIns="36576" tIns="36576" rIns="36576" bIns="36576" anchor="t">
             <a:spAutoFit/>
           </a:bodyPr>
           <a:lstStyle/>
@@ -42923,6 +43125,7 @@
           <a:lstStyle/>
           <a:p>
             <a:pPr algn="ctr"/>
+            <a:endParaRPr/>
           </a:p>
         </p:txBody>
       </p:sp>
@@ -42968,6 +43171,7 @@
           <a:lstStyle/>
           <a:p>
             <a:pPr algn="ctr"/>
+            <a:endParaRPr/>
           </a:p>
         </p:txBody>
       </p:sp>
@@ -42988,7 +43192,7 @@
           <a:noFill/>
         </p:spPr>
         <p:txBody>
-          <a:bodyPr wrap="square" lIns="36576" rIns="36576" tIns="36576" bIns="36576" anchor="ctr">
+          <a:bodyPr wrap="square" lIns="36576" tIns="36576" rIns="36576" bIns="36576" anchor="ctr">
             <a:spAutoFit/>
           </a:bodyPr>
           <a:lstStyle/>
@@ -43030,7 +43234,7 @@
           <a:noFill/>
         </p:spPr>
         <p:txBody>
-          <a:bodyPr wrap="square" lIns="36576" rIns="36576" tIns="36576" bIns="36576" anchor="t">
+          <a:bodyPr wrap="square" lIns="36576" tIns="36576" rIns="36576" bIns="36576" anchor="t">
             <a:spAutoFit/>
           </a:bodyPr>
           <a:lstStyle/>
@@ -43072,7 +43276,7 @@
           <a:noFill/>
         </p:spPr>
         <p:txBody>
-          <a:bodyPr wrap="square" lIns="36576" rIns="36576" tIns="36576" bIns="36576" anchor="t">
+          <a:bodyPr wrap="square" lIns="36576" tIns="36576" rIns="36576" bIns="36576" anchor="t">
             <a:spAutoFit/>
           </a:bodyPr>
           <a:lstStyle/>
@@ -43114,7 +43318,7 @@
           <a:noFill/>
         </p:spPr>
         <p:txBody>
-          <a:bodyPr wrap="square" lIns="36576" rIns="36576" tIns="36576" bIns="36576" anchor="t">
+          <a:bodyPr wrap="square" lIns="36576" tIns="36576" rIns="36576" bIns="36576" anchor="t">
             <a:spAutoFit/>
           </a:bodyPr>
           <a:lstStyle/>
@@ -43181,6 +43385,7 @@
           <a:lstStyle/>
           <a:p>
             <a:pPr algn="ctr"/>
+            <a:endParaRPr/>
           </a:p>
         </p:txBody>
       </p:sp>
@@ -43201,7 +43406,7 @@
           <a:noFill/>
         </p:spPr>
         <p:txBody>
-          <a:bodyPr wrap="square" lIns="36576" rIns="36576" tIns="36576" bIns="36576" anchor="t">
+          <a:bodyPr wrap="square" lIns="36576" tIns="36576" rIns="36576" bIns="36576" anchor="t">
             <a:spAutoFit/>
           </a:bodyPr>
           <a:lstStyle/>
@@ -43268,6 +43473,7 @@
           <a:lstStyle/>
           <a:p>
             <a:pPr algn="ctr"/>
+            <a:endParaRPr/>
           </a:p>
         </p:txBody>
       </p:sp>
@@ -43309,7 +43515,7 @@
           </a:fontRef>
         </p:style>
         <p:txBody>
-          <a:bodyPr rtlCol="0" anchor="ctr" lIns="54864" rIns="54864" tIns="9144" bIns="9144"/>
+          <a:bodyPr lIns="54864" tIns="9144" rIns="54864" bIns="9144" rtlCol="0" anchor="ctr"/>
           <a:lstStyle/>
           <a:p>
             <a:pPr algn="ctr"/>
@@ -43342,7 +43548,7 @@
           <a:noFill/>
         </p:spPr>
         <p:txBody>
-          <a:bodyPr wrap="square" lIns="36576" rIns="36576" tIns="36576" bIns="36576" anchor="t">
+          <a:bodyPr wrap="square" lIns="36576" tIns="36576" rIns="36576" bIns="36576" anchor="t">
             <a:spAutoFit/>
           </a:bodyPr>
           <a:lstStyle/>
@@ -43405,7 +43611,7 @@
           </a:fontRef>
         </p:style>
         <p:txBody>
-          <a:bodyPr rtlCol="0" anchor="ctr" lIns="54864" rIns="54864" tIns="9144" bIns="9144"/>
+          <a:bodyPr lIns="54864" tIns="9144" rIns="54864" bIns="9144" rtlCol="0" anchor="ctr"/>
           <a:lstStyle/>
           <a:p>
             <a:pPr algn="ctr"/>
@@ -43438,7 +43644,7 @@
           <a:noFill/>
         </p:spPr>
         <p:txBody>
-          <a:bodyPr wrap="square" lIns="36576" rIns="36576" tIns="36576" bIns="36576" anchor="t">
+          <a:bodyPr wrap="square" lIns="36576" tIns="36576" rIns="36576" bIns="36576" anchor="t">
             <a:spAutoFit/>
           </a:bodyPr>
           <a:lstStyle/>
@@ -43501,7 +43707,7 @@
           </a:fontRef>
         </p:style>
         <p:txBody>
-          <a:bodyPr rtlCol="0" anchor="ctr" lIns="54864" rIns="54864" tIns="9144" bIns="9144"/>
+          <a:bodyPr lIns="54864" tIns="9144" rIns="54864" bIns="9144" rtlCol="0" anchor="ctr"/>
           <a:lstStyle/>
           <a:p>
             <a:pPr algn="ctr"/>
@@ -43534,7 +43740,7 @@
           <a:noFill/>
         </p:spPr>
         <p:txBody>
-          <a:bodyPr wrap="square" lIns="36576" rIns="36576" tIns="36576" bIns="36576" anchor="t">
+          <a:bodyPr wrap="square" lIns="36576" tIns="36576" rIns="36576" bIns="36576" anchor="t">
             <a:spAutoFit/>
           </a:bodyPr>
           <a:lstStyle/>
@@ -43597,7 +43803,7 @@
           </a:fontRef>
         </p:style>
         <p:txBody>
-          <a:bodyPr rtlCol="0" anchor="ctr" lIns="54864" rIns="54864" tIns="9144" bIns="9144"/>
+          <a:bodyPr lIns="54864" tIns="9144" rIns="54864" bIns="9144" rtlCol="0" anchor="ctr"/>
           <a:lstStyle/>
           <a:p>
             <a:pPr algn="ctr"/>
@@ -43630,7 +43836,7 @@
           <a:noFill/>
         </p:spPr>
         <p:txBody>
-          <a:bodyPr wrap="square" lIns="36576" rIns="36576" tIns="36576" bIns="36576" anchor="t">
+          <a:bodyPr wrap="square" lIns="36576" tIns="36576" rIns="36576" bIns="36576" anchor="t">
             <a:spAutoFit/>
           </a:bodyPr>
           <a:lstStyle/>
@@ -43672,7 +43878,7 @@
           <a:noFill/>
         </p:spPr>
         <p:txBody>
-          <a:bodyPr wrap="square" lIns="36576" rIns="36576" tIns="36576" bIns="36576" anchor="t">
+          <a:bodyPr wrap="square" lIns="36576" tIns="36576" rIns="36576" bIns="36576" anchor="t">
             <a:spAutoFit/>
           </a:bodyPr>
           <a:lstStyle/>
@@ -43749,7 +43955,7 @@
           <a:noFill/>
         </p:spPr>
         <p:txBody>
-          <a:bodyPr wrap="square" lIns="36576" rIns="36576" tIns="36576" bIns="36576" anchor="t">
+          <a:bodyPr wrap="square" lIns="36576" tIns="36576" rIns="36576" bIns="36576" anchor="t">
             <a:spAutoFit/>
           </a:bodyPr>
           <a:lstStyle/>
@@ -43783,7 +43989,7 @@
 </file>
 
 <file path=ppt/slides/slide9.xml><?xml version="1.0" encoding="utf-8"?>
-<p:sld xmlns:a="http://schemas.openxmlformats.org/drawingml/2006/main" xmlns:p="http://schemas.openxmlformats.org/presentationml/2006/main" xmlns:r="http://schemas.openxmlformats.org/officeDocument/2006/relationships">
+<p:sld xmlns:a="http://schemas.openxmlformats.org/drawingml/2006/main" xmlns:r="http://schemas.openxmlformats.org/officeDocument/2006/relationships" xmlns:p="http://schemas.openxmlformats.org/presentationml/2006/main">
   <p:cSld>
     <p:bg>
       <p:bgPr>
@@ -43799,7 +44005,14 @@
         <p:cNvGrpSpPr/>
         <p:nvPr/>
       </p:nvGrpSpPr>
-      <p:grpSpPr/>
+      <p:grpSpPr>
+        <a:xfrm>
+          <a:off x="0" y="0"/>
+          <a:ext cx="0" cy="0"/>
+          <a:chOff x="0" y="0"/>
+          <a:chExt cx="0" cy="0"/>
+        </a:xfrm>
+      </p:grpSpPr>
       <p:sp>
         <p:nvSpPr>
           <p:cNvPr id="2" name="TextBox 1"/>
@@ -43817,7 +44030,7 @@
           <a:noFill/>
         </p:spPr>
         <p:txBody>
-          <a:bodyPr wrap="square" lIns="36576" rIns="36576" tIns="36576" bIns="36576" anchor="t">
+          <a:bodyPr wrap="square" lIns="36576" tIns="36576" rIns="36576" bIns="36576" anchor="t">
             <a:spAutoFit/>
           </a:bodyPr>
           <a:lstStyle/>
@@ -43859,7 +44072,7 @@
           <a:noFill/>
         </p:spPr>
         <p:txBody>
-          <a:bodyPr wrap="square" lIns="36576" rIns="36576" tIns="36576" bIns="36576" anchor="t">
+          <a:bodyPr wrap="square" lIns="36576" tIns="36576" rIns="36576" bIns="36576" anchor="t">
             <a:spAutoFit/>
           </a:bodyPr>
           <a:lstStyle/>
@@ -43901,7 +44114,7 @@
           <a:noFill/>
         </p:spPr>
         <p:txBody>
-          <a:bodyPr wrap="square" lIns="36576" rIns="36576" tIns="36576" bIns="36576" anchor="t">
+          <a:bodyPr wrap="square" lIns="36576" tIns="36576" rIns="36576" bIns="36576" anchor="t">
             <a:spAutoFit/>
           </a:bodyPr>
           <a:lstStyle/>
@@ -43943,7 +44156,7 @@
           <a:noFill/>
         </p:spPr>
         <p:txBody>
-          <a:bodyPr wrap="square" lIns="36576" rIns="36576" tIns="36576" bIns="36576" anchor="t">
+          <a:bodyPr wrap="square" lIns="36576" tIns="36576" rIns="36576" bIns="36576" anchor="t">
             <a:spAutoFit/>
           </a:bodyPr>
           <a:lstStyle/>
@@ -44010,6 +44223,7 @@
           <a:lstStyle/>
           <a:p>
             <a:pPr algn="ctr"/>
+            <a:endParaRPr/>
           </a:p>
         </p:txBody>
       </p:sp>
@@ -44051,7 +44265,7 @@
           </a:fontRef>
         </p:style>
         <p:txBody>
-          <a:bodyPr rtlCol="0" anchor="ctr" lIns="54864" rIns="54864" tIns="9144" bIns="9144"/>
+          <a:bodyPr lIns="54864" tIns="9144" rIns="54864" bIns="9144" rtlCol="0" anchor="ctr"/>
           <a:lstStyle/>
           <a:p>
             <a:pPr algn="ctr"/>
@@ -44076,7 +44290,7 @@
         <p:spPr>
           <a:xfrm>
             <a:off x="2157984" y="1810512"/>
-            <a:ext cx="822960" cy="475488"/>
+            <a:ext cx="1051560" cy="520142"/>
           </a:xfrm>
           <a:prstGeom prst="rect">
             <a:avLst/>
@@ -44084,7 +44298,7 @@
           <a:noFill/>
         </p:spPr>
         <p:txBody>
-          <a:bodyPr wrap="square" lIns="36576" rIns="36576" tIns="36576" bIns="36576" anchor="t">
+          <a:bodyPr wrap="square" lIns="36576" tIns="36576" rIns="36576" bIns="36576" anchor="t">
             <a:spAutoFit/>
           </a:bodyPr>
           <a:lstStyle/>
@@ -44098,13 +44312,31 @@
               </a:spcAft>
             </a:pPr>
             <a:r>
-              <a:rPr sz="2900" b="1" i="0">
+              <a:rPr sz="2900" b="1" i="0" dirty="0">
                 <a:solidFill>
                   <a:srgbClr val="13233B"/>
                 </a:solidFill>
                 <a:latin typeface="Aptos"/>
               </a:rPr>
-              <a:t>z[s,c]</a:t>
+              <a:t>z[</a:t>
+            </a:r>
+            <a:r>
+              <a:rPr sz="2900" b="1" i="0" dirty="0" err="1">
+                <a:solidFill>
+                  <a:srgbClr val="13233B"/>
+                </a:solidFill>
+                <a:latin typeface="Aptos"/>
+              </a:rPr>
+              <a:t>s,c</a:t>
+            </a:r>
+            <a:r>
+              <a:rPr sz="2900" b="1" i="0" dirty="0">
+                <a:solidFill>
+                  <a:srgbClr val="13233B"/>
+                </a:solidFill>
+                <a:latin typeface="Aptos"/>
+              </a:rPr>
+              <a:t>]</a:t>
             </a:r>
           </a:p>
         </p:txBody>
@@ -44126,7 +44358,7 @@
           <a:noFill/>
         </p:spPr>
         <p:txBody>
-          <a:bodyPr wrap="square" lIns="36576" rIns="36576" tIns="36576" bIns="36576" anchor="t">
+          <a:bodyPr wrap="square" lIns="36576" tIns="36576" rIns="36576" bIns="36576" anchor="t">
             <a:spAutoFit/>
           </a:bodyPr>
           <a:lstStyle/>
@@ -44140,7 +44372,7 @@
               </a:spcAft>
             </a:pPr>
             <a:r>
-              <a:rPr sz="1400" b="0" i="0">
+              <a:rPr sz="1400" b="0" i="0" dirty="0">
                 <a:solidFill>
                   <a:srgbClr val="213047"/>
                 </a:solidFill>
@@ -44193,6 +44425,7 @@
           <a:lstStyle/>
           <a:p>
             <a:pPr algn="ctr"/>
+            <a:endParaRPr/>
           </a:p>
         </p:txBody>
       </p:sp>
@@ -44234,7 +44467,7 @@
           </a:fontRef>
         </p:style>
         <p:txBody>
-          <a:bodyPr rtlCol="0" anchor="ctr" lIns="54864" rIns="54864" tIns="9144" bIns="9144"/>
+          <a:bodyPr lIns="54864" tIns="9144" rIns="54864" bIns="9144" rtlCol="0" anchor="ctr"/>
           <a:lstStyle/>
           <a:p>
             <a:pPr algn="ctr"/>
@@ -44259,7 +44492,7 @@
         <p:spPr>
           <a:xfrm>
             <a:off x="2139696" y="3557016"/>
-            <a:ext cx="877824" cy="402336"/>
+            <a:ext cx="1069848" cy="458587"/>
           </a:xfrm>
           <a:prstGeom prst="rect">
             <a:avLst/>
@@ -44267,7 +44500,7 @@
           <a:noFill/>
         </p:spPr>
         <p:txBody>
-          <a:bodyPr wrap="square" lIns="36576" rIns="36576" tIns="36576" bIns="36576" anchor="t">
+          <a:bodyPr wrap="square" lIns="36576" tIns="36576" rIns="36576" bIns="36576" anchor="t">
             <a:spAutoFit/>
           </a:bodyPr>
           <a:lstStyle/>
@@ -44281,13 +44514,31 @@
               </a:spcAft>
             </a:pPr>
             <a:r>
-              <a:rPr sz="2500" b="1" i="0">
+              <a:rPr sz="2500" b="1" i="0" dirty="0">
                 <a:solidFill>
                   <a:srgbClr val="13233B"/>
                 </a:solidFill>
                 <a:latin typeface="Aptos"/>
               </a:rPr>
-              <a:t>A[c,p]</a:t>
+              <a:t>A[</a:t>
+            </a:r>
+            <a:r>
+              <a:rPr sz="2500" b="1" i="0" dirty="0" err="1">
+                <a:solidFill>
+                  <a:srgbClr val="13233B"/>
+                </a:solidFill>
+                <a:latin typeface="Aptos"/>
+              </a:rPr>
+              <a:t>c,p</a:t>
+            </a:r>
+            <a:r>
+              <a:rPr sz="2500" b="1" i="0" dirty="0">
+                <a:solidFill>
+                  <a:srgbClr val="13233B"/>
+                </a:solidFill>
+                <a:latin typeface="Aptos"/>
+              </a:rPr>
+              <a:t>]</a:t>
             </a:r>
           </a:p>
         </p:txBody>
@@ -44309,7 +44560,7 @@
           <a:noFill/>
         </p:spPr>
         <p:txBody>
-          <a:bodyPr wrap="square" lIns="36576" rIns="36576" tIns="36576" bIns="36576" anchor="t">
+          <a:bodyPr wrap="square" lIns="36576" tIns="36576" rIns="36576" bIns="36576" anchor="t">
             <a:spAutoFit/>
           </a:bodyPr>
           <a:lstStyle/>
@@ -44376,6 +44627,7 @@
           <a:lstStyle/>
           <a:p>
             <a:pPr algn="ctr"/>
+            <a:endParaRPr/>
           </a:p>
         </p:txBody>
       </p:sp>
@@ -44417,7 +44669,7 @@
           </a:fontRef>
         </p:style>
         <p:txBody>
-          <a:bodyPr rtlCol="0" anchor="ctr" lIns="54864" rIns="54864" tIns="9144" bIns="9144"/>
+          <a:bodyPr lIns="54864" tIns="9144" rIns="54864" bIns="9144" rtlCol="0" anchor="ctr"/>
           <a:lstStyle/>
           <a:p>
             <a:pPr algn="ctr"/>
@@ -44441,8 +44693,8 @@
         </p:nvSpPr>
         <p:spPr>
           <a:xfrm>
-            <a:off x="2048256" y="4992624"/>
-            <a:ext cx="1069848" cy="402336"/>
+            <a:off x="2048255" y="4992624"/>
+            <a:ext cx="1286615" cy="458587"/>
           </a:xfrm>
           <a:prstGeom prst="rect">
             <a:avLst/>
@@ -44450,7 +44702,7 @@
           <a:noFill/>
         </p:spPr>
         <p:txBody>
-          <a:bodyPr wrap="square" lIns="36576" rIns="36576" tIns="36576" bIns="36576" anchor="t">
+          <a:bodyPr wrap="square" lIns="36576" tIns="36576" rIns="36576" bIns="36576" anchor="t">
             <a:spAutoFit/>
           </a:bodyPr>
           <a:lstStyle/>
@@ -44464,13 +44716,40 @@
               </a:spcAft>
             </a:pPr>
             <a:r>
-              <a:rPr sz="2500" b="1" i="0">
+              <a:rPr sz="2500" b="1" i="0" dirty="0" err="1">
                 <a:solidFill>
                   <a:srgbClr val="13233B"/>
                 </a:solidFill>
                 <a:latin typeface="Aptos"/>
               </a:rPr>
-              <a:t>ω[c,p,b]</a:t>
+              <a:t>ω</a:t>
+            </a:r>
+            <a:r>
+              <a:rPr sz="2500" b="1" i="0" dirty="0">
+                <a:solidFill>
+                  <a:srgbClr val="13233B"/>
+                </a:solidFill>
+                <a:latin typeface="Aptos"/>
+              </a:rPr>
+              <a:t>[</a:t>
+            </a:r>
+            <a:r>
+              <a:rPr sz="2500" b="1" i="0" dirty="0" err="1">
+                <a:solidFill>
+                  <a:srgbClr val="13233B"/>
+                </a:solidFill>
+                <a:latin typeface="Aptos"/>
+              </a:rPr>
+              <a:t>c,p,b</a:t>
+            </a:r>
+            <a:r>
+              <a:rPr sz="2500" b="1" i="0" dirty="0">
+                <a:solidFill>
+                  <a:srgbClr val="13233B"/>
+                </a:solidFill>
+                <a:latin typeface="Aptos"/>
+              </a:rPr>
+              <a:t>]</a:t>
             </a:r>
           </a:p>
         </p:txBody>
@@ -44492,7 +44771,7 @@
           <a:noFill/>
         </p:spPr>
         <p:txBody>
-          <a:bodyPr wrap="square" lIns="36576" rIns="36576" tIns="36576" bIns="36576" anchor="t">
+          <a:bodyPr wrap="square" lIns="36576" tIns="36576" rIns="36576" bIns="36576" anchor="t">
             <a:spAutoFit/>
           </a:bodyPr>
           <a:lstStyle/>
@@ -44559,6 +44838,7 @@
           <a:lstStyle/>
           <a:p>
             <a:pPr algn="ctr"/>
+            <a:endParaRPr/>
           </a:p>
         </p:txBody>
       </p:sp>
@@ -44604,6 +44884,7 @@
           <a:lstStyle/>
           <a:p>
             <a:pPr algn="ctr"/>
+            <a:endParaRPr/>
           </a:p>
         </p:txBody>
       </p:sp>
@@ -44645,7 +44926,7 @@
           </a:fontRef>
         </p:style>
         <p:txBody>
-          <a:bodyPr rtlCol="0" anchor="ctr" lIns="54864" rIns="54864" tIns="9144" bIns="9144"/>
+          <a:bodyPr lIns="54864" tIns="9144" rIns="54864" bIns="9144" rtlCol="0" anchor="ctr"/>
           <a:lstStyle/>
           <a:p>
             <a:pPr algn="ctr"/>
@@ -44678,7 +44959,7 @@
           <a:noFill/>
         </p:spPr>
         <p:txBody>
-          <a:bodyPr wrap="square" lIns="36576" rIns="36576" tIns="36576" bIns="36576" anchor="t">
+          <a:bodyPr wrap="square" lIns="36576" tIns="36576" rIns="36576" bIns="36576" anchor="t">
             <a:spAutoFit/>
           </a:bodyPr>
           <a:lstStyle/>
@@ -44692,13 +44973,94 @@
               </a:spcAft>
             </a:pPr>
             <a:r>
-              <a:rPr sz="2200" b="1" i="0">
+              <a:rPr sz="2200" b="1" i="0" dirty="0" err="1">
                 <a:solidFill>
                   <a:srgbClr val="13233B"/>
                 </a:solidFill>
                 <a:latin typeface="Aptos"/>
               </a:rPr>
-              <a:t>μ[s,p] = Σ over c  z[s,c] A[c,p]</a:t>
+              <a:t>μ</a:t>
+            </a:r>
+            <a:r>
+              <a:rPr sz="2200" b="1" i="0" dirty="0">
+                <a:solidFill>
+                  <a:srgbClr val="13233B"/>
+                </a:solidFill>
+                <a:latin typeface="Aptos"/>
+              </a:rPr>
+              <a:t>[</a:t>
+            </a:r>
+            <a:r>
+              <a:rPr sz="2200" b="1" i="0" dirty="0" err="1">
+                <a:solidFill>
+                  <a:srgbClr val="13233B"/>
+                </a:solidFill>
+                <a:latin typeface="Aptos"/>
+              </a:rPr>
+              <a:t>s,p</a:t>
+            </a:r>
+            <a:r>
+              <a:rPr sz="2200" b="1" i="0" dirty="0">
+                <a:solidFill>
+                  <a:srgbClr val="13233B"/>
+                </a:solidFill>
+                <a:latin typeface="Aptos"/>
+              </a:rPr>
+              <a:t>] = </a:t>
+            </a:r>
+            <a:r>
+              <a:rPr sz="2200" b="1" i="0" dirty="0" err="1">
+                <a:solidFill>
+                  <a:srgbClr val="13233B"/>
+                </a:solidFill>
+                <a:latin typeface="Aptos"/>
+              </a:rPr>
+              <a:t>Σ</a:t>
+            </a:r>
+            <a:r>
+              <a:rPr sz="2200" b="1" i="0" dirty="0">
+                <a:solidFill>
+                  <a:srgbClr val="13233B"/>
+                </a:solidFill>
+                <a:latin typeface="Aptos"/>
+              </a:rPr>
+              <a:t> over c  z[</a:t>
+            </a:r>
+            <a:r>
+              <a:rPr sz="2200" b="1" i="0" dirty="0" err="1">
+                <a:solidFill>
+                  <a:srgbClr val="13233B"/>
+                </a:solidFill>
+                <a:latin typeface="Aptos"/>
+              </a:rPr>
+              <a:t>s,c</a:t>
+            </a:r>
+            <a:r>
+              <a:rPr sz="2200" b="1" i="0" dirty="0">
+                <a:solidFill>
+                  <a:srgbClr val="13233B"/>
+                </a:solidFill>
+                <a:latin typeface="Aptos"/>
+              </a:rPr>
+              <a:t>] A[</a:t>
+            </a:r>
+            <a:r>
+              <a:rPr sz="2200" b="1" i="0" dirty="0" err="1">
+                <a:solidFill>
+                  <a:srgbClr val="13233B"/>
+                </a:solidFill>
+                <a:latin typeface="Aptos"/>
+              </a:rPr>
+              <a:t>c,p</a:t>
+            </a:r>
+            <a:r>
+              <a:rPr sz="2200" b="1" i="0" dirty="0">
+                <a:solidFill>
+                  <a:srgbClr val="13233B"/>
+                </a:solidFill>
+                <a:latin typeface="Aptos"/>
+              </a:rPr>
+              <a:t>]</a:t>
             </a:r>
           </a:p>
         </p:txBody>
@@ -44720,7 +45082,7 @@
           <a:noFill/>
         </p:spPr>
         <p:txBody>
-          <a:bodyPr wrap="square" lIns="36576" rIns="36576" tIns="36576" bIns="36576" anchor="t">
+          <a:bodyPr wrap="square" lIns="36576" tIns="36576" rIns="36576" bIns="36576" anchor="t">
             <a:spAutoFit/>
           </a:bodyPr>
           <a:lstStyle/>
@@ -44787,6 +45149,7 @@
           <a:lstStyle/>
           <a:p>
             <a:pPr algn="ctr"/>
+            <a:endParaRPr/>
           </a:p>
         </p:txBody>
       </p:sp>
@@ -44828,7 +45191,7 @@
           </a:fontRef>
         </p:style>
         <p:txBody>
-          <a:bodyPr rtlCol="0" anchor="ctr" lIns="54864" rIns="54864" tIns="9144" bIns="9144"/>
+          <a:bodyPr lIns="54864" tIns="9144" rIns="54864" bIns="9144" rtlCol="0" anchor="ctr"/>
           <a:lstStyle/>
           <a:p>
             <a:pPr algn="ctr"/>
@@ -44861,7 +45224,7 @@
           <a:noFill/>
         </p:spPr>
         <p:txBody>
-          <a:bodyPr wrap="square" lIns="36576" rIns="36576" tIns="36576" bIns="36576" anchor="t">
+          <a:bodyPr wrap="square" lIns="36576" tIns="36576" rIns="36576" bIns="36576" anchor="t">
             <a:spAutoFit/>
           </a:bodyPr>
           <a:lstStyle/>
@@ -44903,7 +45266,7 @@
           <a:noFill/>
         </p:spPr>
         <p:txBody>
-          <a:bodyPr wrap="square" lIns="36576" rIns="36576" tIns="36576" bIns="36576" anchor="t">
+          <a:bodyPr wrap="square" lIns="36576" tIns="36576" rIns="36576" bIns="36576" anchor="t">
             <a:spAutoFit/>
           </a:bodyPr>
           <a:lstStyle/>
@@ -44970,6 +45333,7 @@
           <a:lstStyle/>
           <a:p>
             <a:pPr algn="ctr"/>
+            <a:endParaRPr/>
           </a:p>
         </p:txBody>
       </p:sp>
@@ -45015,6 +45379,7 @@
           <a:lstStyle/>
           <a:p>
             <a:pPr algn="ctr"/>
+            <a:endParaRPr/>
           </a:p>
         </p:txBody>
       </p:sp>
@@ -45056,7 +45421,7 @@
           </a:fontRef>
         </p:style>
         <p:txBody>
-          <a:bodyPr rtlCol="0" anchor="ctr" lIns="54864" rIns="54864" tIns="9144" bIns="9144"/>
+          <a:bodyPr lIns="54864" tIns="9144" rIns="54864" bIns="9144" rtlCol="0" anchor="ctr"/>
           <a:lstStyle/>
           <a:p>
             <a:pPr algn="ctr"/>
@@ -45114,6 +45479,7 @@
           <a:lstStyle/>
           <a:p>
             <a:pPr algn="ctr"/>
+            <a:endParaRPr/>
           </a:p>
         </p:txBody>
       </p:sp>
@@ -45134,7 +45500,7 @@
           <a:noFill/>
         </p:spPr>
         <p:txBody>
-          <a:bodyPr wrap="square" lIns="36576" rIns="36576" tIns="36576" bIns="36576" anchor="t">
+          <a:bodyPr wrap="square" lIns="36576" tIns="36576" rIns="36576" bIns="36576" anchor="t">
             <a:spAutoFit/>
           </a:bodyPr>
           <a:lstStyle/>
@@ -45176,7 +45542,7 @@
           <a:noFill/>
         </p:spPr>
         <p:txBody>
-          <a:bodyPr wrap="square" lIns="36576" rIns="36576" tIns="36576" bIns="36576" anchor="t">
+          <a:bodyPr wrap="square" lIns="36576" tIns="36576" rIns="36576" bIns="36576" anchor="t">
             <a:spAutoFit/>
           </a:bodyPr>
           <a:lstStyle/>
@@ -45243,6 +45609,7 @@
           <a:lstStyle/>
           <a:p>
             <a:pPr algn="ctr"/>
+            <a:endParaRPr/>
           </a:p>
         </p:txBody>
       </p:sp>
@@ -45263,7 +45630,7 @@
           <a:noFill/>
         </p:spPr>
         <p:txBody>
-          <a:bodyPr wrap="square" lIns="36576" rIns="36576" tIns="36576" bIns="36576" anchor="t">
+          <a:bodyPr wrap="square" lIns="36576" tIns="36576" rIns="36576" bIns="36576" anchor="t">
             <a:spAutoFit/>
           </a:bodyPr>
           <a:lstStyle/>
@@ -45305,7 +45672,7 @@
           <a:noFill/>
         </p:spPr>
         <p:txBody>
-          <a:bodyPr wrap="square" lIns="36576" rIns="36576" tIns="36576" bIns="36576" anchor="t">
+          <a:bodyPr wrap="square" lIns="36576" tIns="36576" rIns="36576" bIns="36576" anchor="t">
             <a:spAutoFit/>
           </a:bodyPr>
           <a:lstStyle/>
@@ -45372,6 +45739,7 @@
           <a:lstStyle/>
           <a:p>
             <a:pPr algn="ctr"/>
+            <a:endParaRPr/>
           </a:p>
         </p:txBody>
       </p:sp>
@@ -45392,7 +45760,7 @@
           <a:noFill/>
         </p:spPr>
         <p:txBody>
-          <a:bodyPr wrap="square" lIns="36576" rIns="36576" tIns="36576" bIns="36576" anchor="t">
+          <a:bodyPr wrap="square" lIns="36576" tIns="36576" rIns="36576" bIns="36576" anchor="t">
             <a:spAutoFit/>
           </a:bodyPr>
           <a:lstStyle/>
@@ -45434,7 +45802,7 @@
           <a:noFill/>
         </p:spPr>
         <p:txBody>
-          <a:bodyPr wrap="square" lIns="36576" rIns="36576" tIns="36576" bIns="36576" anchor="t">
+          <a:bodyPr wrap="square" lIns="36576" tIns="36576" rIns="36576" bIns="36576" anchor="t">
             <a:spAutoFit/>
           </a:bodyPr>
           <a:lstStyle/>
@@ -45511,7 +45879,7 @@
           <a:noFill/>
         </p:spPr>
         <p:txBody>
-          <a:bodyPr wrap="square" lIns="36576" rIns="36576" tIns="36576" bIns="36576" anchor="t">
+          <a:bodyPr wrap="square" lIns="36576" tIns="36576" rIns="36576" bIns="36576" anchor="t">
             <a:spAutoFit/>
           </a:bodyPr>
           <a:lstStyle/>
@@ -45588,7 +45956,7 @@
           <a:noFill/>
         </p:spPr>
         <p:txBody>
-          <a:bodyPr wrap="square" lIns="36576" rIns="36576" tIns="36576" bIns="36576" anchor="t">
+          <a:bodyPr wrap="square" lIns="36576" tIns="36576" rIns="36576" bIns="36576" anchor="t">
             <a:spAutoFit/>
           </a:bodyPr>
           <a:lstStyle/>
@@ -45952,44 +46320,44 @@
         <a:sysClr val="window" lastClr="FFFFFF"/>
       </a:lt1>
       <a:dk2>
-        <a:srgbClr val="1F497D"/>
+        <a:srgbClr val="0E2841"/>
       </a:dk2>
       <a:lt2>
-        <a:srgbClr val="EEECE1"/>
+        <a:srgbClr val="E8E8E8"/>
       </a:lt2>
       <a:accent1>
-        <a:srgbClr val="4F81BD"/>
+        <a:srgbClr val="156082"/>
       </a:accent1>
       <a:accent2>
-        <a:srgbClr val="C0504D"/>
+        <a:srgbClr val="E97132"/>
       </a:accent2>
       <a:accent3>
-        <a:srgbClr val="9BBB59"/>
+        <a:srgbClr val="196B24"/>
       </a:accent3>
       <a:accent4>
-        <a:srgbClr val="8064A2"/>
+        <a:srgbClr val="0F9ED5"/>
       </a:accent4>
       <a:accent5>
-        <a:srgbClr val="4BACC6"/>
+        <a:srgbClr val="A02B93"/>
       </a:accent5>
       <a:accent6>
-        <a:srgbClr val="F79646"/>
+        <a:srgbClr val="4EA72E"/>
       </a:accent6>
       <a:hlink>
-        <a:srgbClr val="0000FF"/>
+        <a:srgbClr val="467886"/>
       </a:hlink>
       <a:folHlink>
-        <a:srgbClr val="800080"/>
+        <a:srgbClr val="96607D"/>
       </a:folHlink>
     </a:clrScheme>
     <a:fontScheme name="Office">
       <a:majorFont>
-        <a:latin typeface="Calibri"/>
+        <a:latin typeface="Aptos Display" panose="02110004020202020204"/>
         <a:ea typeface=""/>
         <a:cs typeface=""/>
-        <a:font script="Jpan" typeface="ＭＳ Ｐゴシック"/>
+        <a:font script="Jpan" typeface="游ゴシック Light"/>
         <a:font script="Hang" typeface="맑은 고딕"/>
-        <a:font script="Hans" typeface="宋体"/>
+        <a:font script="Hans" typeface="等线 Light"/>
         <a:font script="Hant" typeface="新細明體"/>
         <a:font script="Arab" typeface="Times New Roman"/>
         <a:font script="Hebr" typeface="Times New Roman"/>
@@ -46017,14 +46385,31 @@
         <a:font script="Viet" typeface="Times New Roman"/>
         <a:font script="Uigh" typeface="Microsoft Uighur"/>
         <a:font script="Geor" typeface="Sylfaen"/>
+        <a:font script="Armn" typeface="Arial"/>
+        <a:font script="Bugi" typeface="Leelawadee UI"/>
+        <a:font script="Bopo" typeface="Microsoft JhengHei"/>
+        <a:font script="Java" typeface="Javanese Text"/>
+        <a:font script="Lisu" typeface="Segoe UI"/>
+        <a:font script="Mymr" typeface="Myanmar Text"/>
+        <a:font script="Nkoo" typeface="Ebrima"/>
+        <a:font script="Olck" typeface="Nirmala UI"/>
+        <a:font script="Osma" typeface="Ebrima"/>
+        <a:font script="Phag" typeface="Phagspa"/>
+        <a:font script="Syrn" typeface="Estrangelo Edessa"/>
+        <a:font script="Syrj" typeface="Estrangelo Edessa"/>
+        <a:font script="Syre" typeface="Estrangelo Edessa"/>
+        <a:font script="Sora" typeface="Nirmala UI"/>
+        <a:font script="Tale" typeface="Microsoft Tai Le"/>
+        <a:font script="Talu" typeface="Microsoft New Tai Lue"/>
+        <a:font script="Tfng" typeface="Ebrima"/>
       </a:majorFont>
       <a:minorFont>
-        <a:latin typeface="Calibri"/>
+        <a:latin typeface="Aptos" panose="02110004020202020204"/>
         <a:ea typeface=""/>
         <a:cs typeface=""/>
-        <a:font script="Jpan" typeface="ＭＳ Ｐゴシック"/>
+        <a:font script="Jpan" typeface="游ゴシック"/>
         <a:font script="Hang" typeface="맑은 고딕"/>
-        <a:font script="Hans" typeface="宋体"/>
+        <a:font script="Hans" typeface="等线"/>
         <a:font script="Hant" typeface="新細明體"/>
         <a:font script="Arab" typeface="Arial"/>
         <a:font script="Hebr" typeface="Arial"/>
@@ -46052,6 +46437,23 @@
         <a:font script="Viet" typeface="Arial"/>
         <a:font script="Uigh" typeface="Microsoft Uighur"/>
         <a:font script="Geor" typeface="Sylfaen"/>
+        <a:font script="Armn" typeface="Arial"/>
+        <a:font script="Bugi" typeface="Leelawadee UI"/>
+        <a:font script="Bopo" typeface="Microsoft JhengHei"/>
+        <a:font script="Java" typeface="Javanese Text"/>
+        <a:font script="Lisu" typeface="Segoe UI"/>
+        <a:font script="Mymr" typeface="Myanmar Text"/>
+        <a:font script="Nkoo" typeface="Ebrima"/>
+        <a:font script="Olck" typeface="Nirmala UI"/>
+        <a:font script="Osma" typeface="Ebrima"/>
+        <a:font script="Phag" typeface="Phagspa"/>
+        <a:font script="Syrn" typeface="Estrangelo Edessa"/>
+        <a:font script="Syrj" typeface="Estrangelo Edessa"/>
+        <a:font script="Syre" typeface="Estrangelo Edessa"/>
+        <a:font script="Sora" typeface="Nirmala UI"/>
+        <a:font script="Tale" typeface="Microsoft Tai Le"/>
+        <a:font script="Talu" typeface="Microsoft New Tai Lue"/>
+        <a:font script="Tfng" typeface="Ebrima"/>
       </a:minorFont>
     </a:fontScheme>
     <a:fmtScheme name="Office">
@@ -46063,180 +46465,136 @@
           <a:gsLst>
             <a:gs pos="0">
               <a:schemeClr val="phClr">
-                <a:tint val="50000"/>
-                <a:satMod val="300000"/>
+                <a:lumMod val="110000"/>
+                <a:satMod val="105000"/>
+                <a:tint val="67000"/>
               </a:schemeClr>
             </a:gs>
-            <a:gs pos="35000">
+            <a:gs pos="50000">
               <a:schemeClr val="phClr">
-                <a:tint val="37000"/>
-                <a:satMod val="300000"/>
+                <a:lumMod val="105000"/>
+                <a:satMod val="103000"/>
+                <a:tint val="73000"/>
               </a:schemeClr>
             </a:gs>
             <a:gs pos="100000">
               <a:schemeClr val="phClr">
-                <a:tint val="15000"/>
-                <a:satMod val="350000"/>
+                <a:lumMod val="105000"/>
+                <a:satMod val="109000"/>
+                <a:tint val="81000"/>
               </a:schemeClr>
             </a:gs>
           </a:gsLst>
-          <a:lin ang="16200000" scaled="1"/>
+          <a:lin ang="5400000" scaled="0"/>
         </a:gradFill>
         <a:gradFill rotWithShape="1">
           <a:gsLst>
             <a:gs pos="0">
               <a:schemeClr val="phClr">
-                <a:tint val="100000"/>
+                <a:satMod val="103000"/>
+                <a:lumMod val="102000"/>
+                <a:tint val="94000"/>
+              </a:schemeClr>
+            </a:gs>
+            <a:gs pos="50000">
+              <a:schemeClr val="phClr">
+                <a:satMod val="110000"/>
+                <a:lumMod val="100000"/>
                 <a:shade val="100000"/>
-                <a:satMod val="130000"/>
               </a:schemeClr>
             </a:gs>
             <a:gs pos="100000">
               <a:schemeClr val="phClr">
-                <a:tint val="50000"/>
-                <a:shade val="100000"/>
-                <a:satMod val="350000"/>
+                <a:lumMod val="99000"/>
+                <a:satMod val="120000"/>
+                <a:shade val="78000"/>
               </a:schemeClr>
             </a:gs>
           </a:gsLst>
-          <a:lin ang="16200000" scaled="0"/>
+          <a:lin ang="5400000" scaled="0"/>
         </a:gradFill>
       </a:fillStyleLst>
       <a:lnStyleLst>
-        <a:ln w="9525" cap="flat" cmpd="sng" algn="ctr">
+        <a:ln w="12700" cap="flat" cmpd="sng" algn="ctr">
           <a:solidFill>
-            <a:schemeClr val="phClr">
-              <a:shade val="95000"/>
-              <a:satMod val="105000"/>
-            </a:schemeClr>
+            <a:schemeClr val="phClr"/>
           </a:solidFill>
           <a:prstDash val="solid"/>
+          <a:miter lim="800000"/>
+        </a:ln>
+        <a:ln w="19050" cap="flat" cmpd="sng" algn="ctr">
+          <a:solidFill>
+            <a:schemeClr val="phClr"/>
+          </a:solidFill>
+          <a:prstDash val="solid"/>
+          <a:miter lim="800000"/>
         </a:ln>
         <a:ln w="25400" cap="flat" cmpd="sng" algn="ctr">
           <a:solidFill>
             <a:schemeClr val="phClr"/>
           </a:solidFill>
           <a:prstDash val="solid"/>
-        </a:ln>
-        <a:ln w="38100" cap="flat" cmpd="sng" algn="ctr">
-          <a:solidFill>
-            <a:schemeClr val="phClr"/>
-          </a:solidFill>
-          <a:prstDash val="solid"/>
+          <a:miter lim="800000"/>
         </a:ln>
       </a:lnStyleLst>
       <a:effectStyleLst>
         <a:effectStyle>
+          <a:effectLst/>
+        </a:effectStyle>
+        <a:effectStyle>
+          <a:effectLst/>
+        </a:effectStyle>
+        <a:effectStyle>
           <a:effectLst>
-            <a:outerShdw blurRad="40000" dist="20000" dir="5400000" rotWithShape="0">
+            <a:outerShdw blurRad="57150" dist="19050" dir="5400000" algn="ctr" rotWithShape="0">
               <a:srgbClr val="000000">
-                <a:alpha val="38000"/>
+                <a:alpha val="63000"/>
               </a:srgbClr>
             </a:outerShdw>
           </a:effectLst>
-        </a:effectStyle>
-        <a:effectStyle>
-          <a:effectLst>
-            <a:outerShdw blurRad="40000" dist="23000" dir="5400000" rotWithShape="0">
-              <a:srgbClr val="000000">
-                <a:alpha val="35000"/>
-              </a:srgbClr>
-            </a:outerShdw>
-          </a:effectLst>
-        </a:effectStyle>
-        <a:effectStyle>
-          <a:effectLst>
-            <a:outerShdw blurRad="40000" dist="23000" dir="5400000" rotWithShape="0">
-              <a:srgbClr val="000000">
-                <a:alpha val="35000"/>
-              </a:srgbClr>
-            </a:outerShdw>
-          </a:effectLst>
-          <a:scene3d>
-            <a:camera prst="orthographicFront">
-              <a:rot lat="0" lon="0" rev="0"/>
-            </a:camera>
-            <a:lightRig rig="threePt" dir="t">
-              <a:rot lat="0" lon="0" rev="1200000"/>
-            </a:lightRig>
-          </a:scene3d>
-          <a:sp3d>
-            <a:bevelT w="63500" h="25400"/>
-          </a:sp3d>
         </a:effectStyle>
       </a:effectStyleLst>
       <a:bgFillStyleLst>
         <a:solidFill>
           <a:schemeClr val="phClr"/>
         </a:solidFill>
+        <a:solidFill>
+          <a:schemeClr val="phClr">
+            <a:tint val="95000"/>
+            <a:satMod val="170000"/>
+          </a:schemeClr>
+        </a:solidFill>
         <a:gradFill rotWithShape="1">
           <a:gsLst>
             <a:gs pos="0">
               <a:schemeClr val="phClr">
-                <a:tint val="40000"/>
-                <a:satMod val="350000"/>
+                <a:tint val="93000"/>
+                <a:satMod val="150000"/>
+                <a:shade val="98000"/>
+                <a:lumMod val="102000"/>
               </a:schemeClr>
             </a:gs>
-            <a:gs pos="40000">
+            <a:gs pos="50000">
               <a:schemeClr val="phClr">
-                <a:tint val="45000"/>
-                <a:shade val="99000"/>
-                <a:satMod val="350000"/>
+                <a:tint val="98000"/>
+                <a:satMod val="130000"/>
+                <a:shade val="90000"/>
+                <a:lumMod val="103000"/>
               </a:schemeClr>
             </a:gs>
             <a:gs pos="100000">
               <a:schemeClr val="phClr">
-                <a:shade val="20000"/>
-                <a:satMod val="255000"/>
+                <a:shade val="63000"/>
+                <a:satMod val="120000"/>
               </a:schemeClr>
             </a:gs>
           </a:gsLst>
-          <a:path path="circle">
-            <a:fillToRect l="50000" t="-80000" r="50000" b="180000"/>
-          </a:path>
-        </a:gradFill>
-        <a:gradFill rotWithShape="1">
-          <a:gsLst>
-            <a:gs pos="0">
-              <a:schemeClr val="phClr">
-                <a:tint val="80000"/>
-                <a:satMod val="300000"/>
-              </a:schemeClr>
-            </a:gs>
-            <a:gs pos="100000">
-              <a:schemeClr val="phClr">
-                <a:shade val="30000"/>
-                <a:satMod val="200000"/>
-              </a:schemeClr>
-            </a:gs>
-          </a:gsLst>
-          <a:path path="circle">
-            <a:fillToRect l="50000" t="50000" r="50000" b="50000"/>
-          </a:path>
+          <a:lin ang="5400000" scaled="0"/>
         </a:gradFill>
       </a:bgFillStyleLst>
     </a:fmtScheme>
   </a:themeElements>
   <a:objectDefaults>
-    <a:spDef>
-      <a:spPr/>
-      <a:bodyPr/>
-      <a:lstStyle/>
-      <a:style>
-        <a:lnRef idx="1">
-          <a:schemeClr val="accent1"/>
-        </a:lnRef>
-        <a:fillRef idx="3">
-          <a:schemeClr val="accent1"/>
-        </a:fillRef>
-        <a:effectRef idx="2">
-          <a:schemeClr val="accent1"/>
-        </a:effectRef>
-        <a:fontRef idx="minor">
-          <a:schemeClr val="lt1"/>
-        </a:fontRef>
-      </a:style>
-    </a:spDef>
     <a:lnDef>
       <a:spPr/>
       <a:bodyPr/>
@@ -46258,5 +46616,10 @@
     </a:lnDef>
   </a:objectDefaults>
   <a:extraClrSchemeLst/>
+  <a:extLst>
+    <a:ext uri="{05A4C25C-085E-4340-85A3-A5531E510DB2}">
+      <thm15:themeFamily xmlns:thm15="http://schemas.microsoft.com/office/thememl/2012/main" name="Office Theme" id="{2E142A2C-CD16-42D6-873A-C26D2A0506FA}" vid="{1BDDFF52-6CD6-40A5-AB3C-68EB2F1E4D0A}"/>
+    </a:ext>
+  </a:extLst>
 </a:theme>
 </file>